--- a/proposal/chuangzhihui-6600-proposal.pptx
+++ b/proposal/chuangzhihui-6600-proposal.pptx
@@ -47,6 +47,8 @@
     <p:sldId id="295" r:id="rId46"/>
     <p:sldId id="296" r:id="rId47"/>
     <p:sldId id="297" r:id="rId48"/>
+    <p:sldId id="298" r:id="rId49"/>
+    <p:sldId id="299" r:id="rId50"/>
   </p:sldIdLst>
   <p:sldSz cx="12191695" cy="6858000" type="screen4x3"/>
   <p:notesSz cx="6858000" cy="9144000"/>
@@ -4376,7 +4378,7 @@
                 </a:solidFill>
                 <a:latin typeface="Arial"/>
               </a:rPr>
-              <a:t> / 42</a:t>
+              <a:t> / 44</a:t>
             </a:r>
           </a:p>
         </p:txBody>
@@ -6118,7 +6120,7 @@
                 </a:solidFill>
                 <a:latin typeface="Arial"/>
               </a:rPr>
-              <a:t> / 42</a:t>
+              <a:t> / 44</a:t>
             </a:r>
           </a:p>
         </p:txBody>
@@ -8156,7 +8158,7 @@
                 </a:solidFill>
                 <a:latin typeface="Arial"/>
               </a:rPr>
-              <a:t> / 42</a:t>
+              <a:t> / 44</a:t>
             </a:r>
           </a:p>
         </p:txBody>
@@ -8583,7 +8585,7 @@
                 </a:solidFill>
                 <a:latin typeface="Arial"/>
               </a:rPr>
-              <a:t> / 42</a:t>
+              <a:t> / 44</a:t>
             </a:r>
           </a:p>
         </p:txBody>
@@ -10231,7 +10233,7 @@
                 </a:solidFill>
                 <a:latin typeface="Arial"/>
               </a:rPr>
-              <a:t> / 42</a:t>
+              <a:t> / 44</a:t>
             </a:r>
           </a:p>
         </p:txBody>
@@ -10658,7 +10660,7 @@
                 </a:solidFill>
                 <a:latin typeface="Arial"/>
               </a:rPr>
-              <a:t> / 42</a:t>
+              <a:t> / 44</a:t>
             </a:r>
           </a:p>
         </p:txBody>
@@ -12134,7 +12136,7 @@
                 </a:solidFill>
                 <a:latin typeface="Arial"/>
               </a:rPr>
-              <a:t> / 42</a:t>
+              <a:t> / 44</a:t>
             </a:r>
           </a:p>
         </p:txBody>
@@ -13978,7 +13980,7 @@
                 </a:solidFill>
                 <a:latin typeface="Arial"/>
               </a:rPr>
-              <a:t> / 42</a:t>
+              <a:t> / 44</a:t>
             </a:r>
           </a:p>
         </p:txBody>
@@ -16026,7 +16028,7 @@
                 </a:solidFill>
                 <a:latin typeface="Arial"/>
               </a:rPr>
-              <a:t> / 42</a:t>
+              <a:t> / 44</a:t>
             </a:r>
           </a:p>
         </p:txBody>
@@ -17392,7 +17394,7 @@
                 </a:solidFill>
                 <a:latin typeface="Arial"/>
               </a:rPr>
-              <a:t> / 42</a:t>
+              <a:t> / 44</a:t>
             </a:r>
           </a:p>
         </p:txBody>
@@ -18744,7 +18746,7 @@
                 </a:solidFill>
                 <a:latin typeface="Arial"/>
               </a:rPr>
-              <a:t> / 42</a:t>
+              <a:t> / 44</a:t>
             </a:r>
           </a:p>
         </p:txBody>
@@ -21536,7 +21538,7 @@
                 </a:solidFill>
                 <a:latin typeface="Arial"/>
               </a:rPr>
-              <a:t> / 42</a:t>
+              <a:t> / 44</a:t>
             </a:r>
           </a:p>
         </p:txBody>
@@ -23479,7 +23481,7 @@
                 </a:solidFill>
                 <a:latin typeface="Arial"/>
               </a:rPr>
-              <a:t> / 42</a:t>
+              <a:t> / 44</a:t>
             </a:r>
           </a:p>
         </p:txBody>
@@ -25362,7 +25364,7 @@
                 </a:solidFill>
                 <a:latin typeface="Arial"/>
               </a:rPr>
-              <a:t> / 42</a:t>
+              <a:t> / 44</a:t>
             </a:r>
           </a:p>
         </p:txBody>
@@ -25789,7 +25791,7 @@
                 </a:solidFill>
                 <a:latin typeface="Arial"/>
               </a:rPr>
-              <a:t> / 42</a:t>
+              <a:t> / 44</a:t>
             </a:r>
           </a:p>
         </p:txBody>
@@ -28486,7 +28488,7 @@
                 </a:solidFill>
                 <a:latin typeface="Arial"/>
               </a:rPr>
-              <a:t> / 42</a:t>
+              <a:t> / 44</a:t>
             </a:r>
           </a:p>
         </p:txBody>
@@ -30302,7 +30304,7 @@
                 </a:solidFill>
                 <a:latin typeface="Arial"/>
               </a:rPr>
-              <a:t> / 42</a:t>
+              <a:t> / 44</a:t>
             </a:r>
           </a:p>
         </p:txBody>
@@ -31756,7 +31758,7 @@
                 </a:solidFill>
                 <a:latin typeface="Arial"/>
               </a:rPr>
-              <a:t> / 42</a:t>
+              <a:t> / 44</a:t>
             </a:r>
           </a:p>
         </p:txBody>
@@ -33913,7 +33915,7 @@
                 </a:solidFill>
                 <a:latin typeface="Arial"/>
               </a:rPr>
-              <a:t> / 42</a:t>
+              <a:t> / 44</a:t>
             </a:r>
           </a:p>
         </p:txBody>
@@ -34340,7 +34342,7 @@
                 </a:solidFill>
                 <a:latin typeface="Arial"/>
               </a:rPr>
-              <a:t> / 42</a:t>
+              <a:t> / 44</a:t>
             </a:r>
           </a:p>
         </p:txBody>
@@ -35776,7 +35778,7 @@
                 </a:solidFill>
                 <a:latin typeface="Arial"/>
               </a:rPr>
-              <a:t> / 42</a:t>
+              <a:t> / 44</a:t>
             </a:r>
           </a:p>
         </p:txBody>
@@ -36203,7 +36205,7 @@
                 </a:solidFill>
                 <a:latin typeface="Arial"/>
               </a:rPr>
-              <a:t> / 42</a:t>
+              <a:t> / 44</a:t>
             </a:r>
           </a:p>
         </p:txBody>
@@ -37491,7 +37493,7 @@
                 </a:solidFill>
                 <a:latin typeface="Arial"/>
               </a:rPr>
-              <a:t> / 42</a:t>
+              <a:t> / 44</a:t>
             </a:r>
           </a:p>
         </p:txBody>
@@ -39315,7 +39317,7 @@
                 </a:solidFill>
                 <a:latin typeface="Arial"/>
               </a:rPr>
-              <a:t> / 42</a:t>
+              <a:t> / 44</a:t>
             </a:r>
           </a:p>
         </p:txBody>
@@ -41814,7 +41816,7 @@
                 </a:solidFill>
                 <a:latin typeface="Arial"/>
               </a:rPr>
-              <a:t> / 42</a:t>
+              <a:t> / 44</a:t>
             </a:r>
           </a:p>
         </p:txBody>
@@ -43555,7 +43557,7 @@
                 </a:solidFill>
                 <a:latin typeface="Arial"/>
               </a:rPr>
-              <a:t> / 42</a:t>
+              <a:t> / 44</a:t>
             </a:r>
           </a:p>
         </p:txBody>
@@ -45550,7 +45552,7 @@
                 </a:solidFill>
                 <a:latin typeface="Arial"/>
               </a:rPr>
-              <a:t> / 42</a:t>
+              <a:t> / 44</a:t>
             </a:r>
           </a:p>
         </p:txBody>
@@ -47781,7 +47783,7 @@
                 </a:solidFill>
                 <a:latin typeface="Arial"/>
               </a:rPr>
-              <a:t> / 42</a:t>
+              <a:t> / 44</a:t>
             </a:r>
           </a:p>
         </p:txBody>
@@ -48208,7 +48210,7 @@
                 </a:solidFill>
                 <a:latin typeface="Arial"/>
               </a:rPr>
-              <a:t> / 42</a:t>
+              <a:t> / 44</a:t>
             </a:r>
           </a:p>
         </p:txBody>
@@ -49564,7 +49566,7 @@
                 </a:solidFill>
                 <a:latin typeface="Arial"/>
               </a:rPr>
-              <a:t> / 42</a:t>
+              <a:t> / 44</a:t>
             </a:r>
           </a:p>
         </p:txBody>
@@ -50971,6 +50973,6381 @@
 </file>
 
 <file path=ppt/slides/slide38.xml><?xml version="1.0" encoding="utf-8"?>
+<p:sld xmlns:a="http://schemas.openxmlformats.org/drawingml/2006/main" xmlns:p="http://schemas.openxmlformats.org/presentationml/2006/main" xmlns:r="http://schemas.openxmlformats.org/officeDocument/2006/relationships">
+  <p:cSld>
+    <p:spTree>
+      <p:nvGrpSpPr>
+        <p:cNvPr id="1" name=""/>
+        <p:cNvGrpSpPr/>
+        <p:nvPr/>
+      </p:nvGrpSpPr>
+      <p:grpSpPr/>
+      <p:sp>
+        <p:nvSpPr>
+          <p:cNvPr id="2" name="Rectangle 1"/>
+          <p:cNvSpPr/>
+          <p:nvPr/>
+        </p:nvSpPr>
+        <p:spPr>
+          <a:xfrm>
+            <a:off x="0" y="0"/>
+            <a:ext cx="12191695" cy="6858000"/>
+          </a:xfrm>
+          <a:prstGeom prst="rect">
+            <a:avLst/>
+          </a:prstGeom>
+          <a:gradFill>
+            <a:gsLst>
+              <a:gs pos="0">
+                <a:srgbClr val="1A1140"/>
+              </a:gs>
+              <a:gs pos="55000">
+                <a:srgbClr val="3A206E"/>
+              </a:gs>
+              <a:gs pos="100000">
+                <a:srgbClr val="1A1140"/>
+              </a:gs>
+            </a:gsLst>
+            <a:lin ang="7200000" scaled="1"/>
+          </a:gradFill>
+          <a:ln>
+            <a:noFill/>
+          </a:ln>
+          <a:effectLst/>
+        </p:spPr>
+        <p:style>
+          <a:lnRef idx="1">
+            <a:schemeClr val="accent1"/>
+          </a:lnRef>
+          <a:fillRef idx="3">
+            <a:schemeClr val="accent1"/>
+          </a:fillRef>
+          <a:effectRef idx="2">
+            <a:schemeClr val="accent1"/>
+          </a:effectRef>
+          <a:fontRef idx="minor">
+            <a:schemeClr val="lt1"/>
+          </a:fontRef>
+        </p:style>
+        <p:txBody>
+          <a:bodyPr rtlCol="0" anchor="ctr"/>
+          <a:lstStyle/>
+          <a:p>
+            <a:pPr algn="ctr"/>
+          </a:p>
+        </p:txBody>
+      </p:sp>
+      <p:sp>
+        <p:nvSpPr>
+          <p:cNvPr id="3" name="Rectangle 2"/>
+          <p:cNvSpPr/>
+          <p:nvPr/>
+        </p:nvSpPr>
+        <p:spPr>
+          <a:xfrm>
+            <a:off x="777240" y="566928"/>
+            <a:ext cx="54864" cy="786384"/>
+          </a:xfrm>
+          <a:prstGeom prst="rect">
+            <a:avLst/>
+          </a:prstGeom>
+          <a:solidFill>
+            <a:srgbClr val="E9C27C"/>
+          </a:solidFill>
+          <a:ln>
+            <a:noFill/>
+          </a:ln>
+          <a:effectLst/>
+        </p:spPr>
+        <p:style>
+          <a:lnRef idx="1">
+            <a:schemeClr val="accent1"/>
+          </a:lnRef>
+          <a:fillRef idx="3">
+            <a:schemeClr val="accent1"/>
+          </a:fillRef>
+          <a:effectRef idx="2">
+            <a:schemeClr val="accent1"/>
+          </a:effectRef>
+          <a:fontRef idx="minor">
+            <a:schemeClr val="lt1"/>
+          </a:fontRef>
+        </p:style>
+        <p:txBody>
+          <a:bodyPr rtlCol="0" anchor="ctr"/>
+          <a:lstStyle/>
+          <a:p>
+            <a:pPr algn="ctr"/>
+          </a:p>
+        </p:txBody>
+      </p:sp>
+      <p:sp>
+        <p:nvSpPr>
+          <p:cNvPr id="4" name="TextBox 3"/>
+          <p:cNvSpPr txBox="1"/>
+          <p:nvPr/>
+        </p:nvSpPr>
+        <p:spPr>
+          <a:xfrm>
+            <a:off x="978408" y="548640"/>
+            <a:ext cx="8229600" cy="310896"/>
+          </a:xfrm>
+          <a:prstGeom prst="rect">
+            <a:avLst/>
+          </a:prstGeom>
+          <a:noFill/>
+        </p:spPr>
+        <p:txBody>
+          <a:bodyPr wrap="square" anchor="t" lIns="25400" rIns="25400" tIns="12700" bIns="12700">
+            <a:spAutoFit/>
+          </a:bodyPr>
+          <a:lstStyle/>
+          <a:p>
+            <a:pPr algn="l">
+              <a:lnSpc>
+                <a:spcPct val="100000"/>
+              </a:lnSpc>
+            </a:pPr>
+            <a:r>
+              <a:rPr sz="1250" b="1" spc="200">
+                <a:solidFill>
+                  <a:srgbClr val="E9C27C"/>
+                </a:solidFill>
+                <a:latin typeface="Arial"/>
+              </a:rPr>
+              <a:t>GO-GLOBAL FULL CHAIN</a:t>
+            </a:r>
+          </a:p>
+        </p:txBody>
+      </p:sp>
+      <p:sp>
+        <p:nvSpPr>
+          <p:cNvPr id="5" name="TextBox 4"/>
+          <p:cNvSpPr txBox="1"/>
+          <p:nvPr/>
+        </p:nvSpPr>
+        <p:spPr>
+          <a:xfrm>
+            <a:off x="978408" y="841248"/>
+            <a:ext cx="9509760" cy="603504"/>
+          </a:xfrm>
+          <a:prstGeom prst="rect">
+            <a:avLst/>
+          </a:prstGeom>
+          <a:noFill/>
+        </p:spPr>
+        <p:txBody>
+          <a:bodyPr wrap="square" anchor="t" lIns="25400" rIns="25400" tIns="12700" bIns="12700">
+            <a:spAutoFit/>
+          </a:bodyPr>
+          <a:lstStyle/>
+          <a:p>
+            <a:pPr algn="l">
+              <a:lnSpc>
+                <a:spcPct val="100000"/>
+              </a:lnSpc>
+            </a:pPr>
+            <a:r>
+              <a:rPr sz="2600" b="1">
+                <a:solidFill>
+                  <a:srgbClr val="F5F1FF"/>
+                </a:solidFill>
+                <a:latin typeface="Microsoft YaHei"/>
+              </a:rPr>
+              <a:t>出海全链条 · 流程与服务（运营框架）</a:t>
+            </a:r>
+          </a:p>
+        </p:txBody>
+      </p:sp>
+      <p:sp>
+        <p:nvSpPr>
+          <p:cNvPr id="6" name="TextBox 5"/>
+          <p:cNvSpPr txBox="1"/>
+          <p:nvPr/>
+        </p:nvSpPr>
+        <p:spPr>
+          <a:xfrm>
+            <a:off x="10332720" y="457200"/>
+            <a:ext cx="1417320" cy="822960"/>
+          </a:xfrm>
+          <a:prstGeom prst="rect">
+            <a:avLst/>
+          </a:prstGeom>
+          <a:noFill/>
+        </p:spPr>
+        <p:txBody>
+          <a:bodyPr wrap="square" anchor="t" lIns="25400" rIns="25400" tIns="12700" bIns="12700">
+            <a:spAutoFit/>
+          </a:bodyPr>
+          <a:lstStyle/>
+          <a:p>
+            <a:pPr algn="r">
+              <a:lnSpc>
+                <a:spcPct val="100000"/>
+              </a:lnSpc>
+            </a:pPr>
+            <a:r>
+              <a:rPr sz="4000" b="1">
+                <a:solidFill>
+                  <a:srgbClr val="E9C27C"/>
+                </a:solidFill>
+                <a:latin typeface="Arial"/>
+              </a:rPr>
+              <a:t>08</a:t>
+            </a:r>
+          </a:p>
+        </p:txBody>
+      </p:sp>
+      <p:sp>
+        <p:nvSpPr>
+          <p:cNvPr id="7" name="Rectangle 6"/>
+          <p:cNvSpPr/>
+          <p:nvPr/>
+        </p:nvSpPr>
+        <p:spPr>
+          <a:xfrm>
+            <a:off x="10561320" y="1207008"/>
+            <a:ext cx="1170432" cy="25400"/>
+          </a:xfrm>
+          <a:prstGeom prst="rect">
+            <a:avLst/>
+          </a:prstGeom>
+          <a:solidFill>
+            <a:srgbClr val="4A3C7C"/>
+          </a:solidFill>
+          <a:ln>
+            <a:noFill/>
+          </a:ln>
+          <a:effectLst/>
+        </p:spPr>
+        <p:style>
+          <a:lnRef idx="1">
+            <a:schemeClr val="accent1"/>
+          </a:lnRef>
+          <a:fillRef idx="3">
+            <a:schemeClr val="accent1"/>
+          </a:fillRef>
+          <a:effectRef idx="2">
+            <a:schemeClr val="accent1"/>
+          </a:effectRef>
+          <a:fontRef idx="minor">
+            <a:schemeClr val="lt1"/>
+          </a:fontRef>
+        </p:style>
+        <p:txBody>
+          <a:bodyPr rtlCol="0" anchor="ctr"/>
+          <a:lstStyle/>
+          <a:p>
+            <a:pPr algn="ctr"/>
+          </a:p>
+        </p:txBody>
+      </p:sp>
+      <p:sp>
+        <p:nvSpPr>
+          <p:cNvPr id="8" name="Rectangle 7"/>
+          <p:cNvSpPr/>
+          <p:nvPr/>
+        </p:nvSpPr>
+        <p:spPr>
+          <a:xfrm>
+            <a:off x="777240" y="6327648"/>
+            <a:ext cx="10634472" cy="12700"/>
+          </a:xfrm>
+          <a:prstGeom prst="rect">
+            <a:avLst/>
+          </a:prstGeom>
+          <a:solidFill>
+            <a:srgbClr val="4A3C7C"/>
+          </a:solidFill>
+          <a:ln>
+            <a:noFill/>
+          </a:ln>
+          <a:effectLst/>
+        </p:spPr>
+        <p:style>
+          <a:lnRef idx="1">
+            <a:schemeClr val="accent1"/>
+          </a:lnRef>
+          <a:fillRef idx="3">
+            <a:schemeClr val="accent1"/>
+          </a:fillRef>
+          <a:effectRef idx="2">
+            <a:schemeClr val="accent1"/>
+          </a:effectRef>
+          <a:fontRef idx="minor">
+            <a:schemeClr val="lt1"/>
+          </a:fontRef>
+        </p:style>
+        <p:txBody>
+          <a:bodyPr rtlCol="0" anchor="ctr"/>
+          <a:lstStyle/>
+          <a:p>
+            <a:pPr algn="ctr"/>
+          </a:p>
+        </p:txBody>
+      </p:sp>
+      <p:sp>
+        <p:nvSpPr>
+          <p:cNvPr id="9" name="TextBox 8"/>
+          <p:cNvSpPr txBox="1"/>
+          <p:nvPr/>
+        </p:nvSpPr>
+        <p:spPr>
+          <a:xfrm>
+            <a:off x="777240" y="6400800"/>
+            <a:ext cx="8229600" cy="292608"/>
+          </a:xfrm>
+          <a:prstGeom prst="rect">
+            <a:avLst/>
+          </a:prstGeom>
+          <a:noFill/>
+        </p:spPr>
+        <p:txBody>
+          <a:bodyPr wrap="square" anchor="t" lIns="25400" rIns="25400" tIns="12700" bIns="12700">
+            <a:spAutoFit/>
+          </a:bodyPr>
+          <a:lstStyle/>
+          <a:p>
+            <a:pPr algn="l">
+              <a:lnSpc>
+                <a:spcPct val="100000"/>
+              </a:lnSpc>
+            </a:pPr>
+            <a:r>
+              <a:rPr sz="950" b="0">
+                <a:solidFill>
+                  <a:srgbClr val="9486C4"/>
+                </a:solidFill>
+                <a:latin typeface="Microsoft YaHei"/>
+              </a:rPr>
+              <a:t>上海创智汇 </a:t>
+            </a:r>
+            <a:r>
+              <a:rPr sz="950" b="0">
+                <a:solidFill>
+                  <a:srgbClr val="9486C4"/>
+                </a:solidFill>
+                <a:latin typeface="Arial"/>
+              </a:rPr>
+              <a:t>CHUANGZHIHUI</a:t>
+            </a:r>
+            <a:r>
+              <a:rPr sz="950" b="0">
+                <a:solidFill>
+                  <a:srgbClr val="9486C4"/>
+                </a:solidFill>
+                <a:latin typeface="Microsoft YaHei"/>
+              </a:rPr>
+              <a:t>  ·  AI+数字内容无界共创港 · 6600㎡ 谈判集中汇报</a:t>
+            </a:r>
+          </a:p>
+        </p:txBody>
+      </p:sp>
+      <p:sp>
+        <p:nvSpPr>
+          <p:cNvPr id="10" name="TextBox 9"/>
+          <p:cNvSpPr txBox="1"/>
+          <p:nvPr/>
+        </p:nvSpPr>
+        <p:spPr>
+          <a:xfrm>
+            <a:off x="10241280" y="6400800"/>
+            <a:ext cx="1490472" cy="292608"/>
+          </a:xfrm>
+          <a:prstGeom prst="rect">
+            <a:avLst/>
+          </a:prstGeom>
+          <a:noFill/>
+        </p:spPr>
+        <p:txBody>
+          <a:bodyPr wrap="square" anchor="t" lIns="25400" rIns="25400" tIns="12700" bIns="12700">
+            <a:spAutoFit/>
+          </a:bodyPr>
+          <a:lstStyle/>
+          <a:p>
+            <a:pPr algn="r">
+              <a:lnSpc>
+                <a:spcPct val="100000"/>
+              </a:lnSpc>
+            </a:pPr>
+            <a:r>
+              <a:rPr sz="1050" b="1">
+                <a:solidFill>
+                  <a:srgbClr val="E9C27C"/>
+                </a:solidFill>
+                <a:latin typeface="Arial"/>
+              </a:rPr>
+              <a:t>38</a:t>
+            </a:r>
+            <a:r>
+              <a:rPr sz="1050" b="0">
+                <a:solidFill>
+                  <a:srgbClr val="9486C4"/>
+                </a:solidFill>
+                <a:latin typeface="Arial"/>
+              </a:rPr>
+              <a:t> / 44</a:t>
+            </a:r>
+          </a:p>
+        </p:txBody>
+      </p:sp>
+      <p:sp>
+        <p:nvSpPr>
+          <p:cNvPr id="11" name="Rounded Rectangle 10"/>
+          <p:cNvSpPr/>
+          <p:nvPr/>
+        </p:nvSpPr>
+        <p:spPr>
+          <a:xfrm>
+            <a:off x="777240" y="1600200"/>
+            <a:ext cx="1700784" cy="1828800"/>
+          </a:xfrm>
+          <a:prstGeom prst="roundRect">
+            <a:avLst/>
+          </a:prstGeom>
+          <a:ln w="12700">
+            <a:solidFill>
+              <a:srgbClr val="4A3C7C"/>
+            </a:solidFill>
+          </a:ln>
+          <a:effectLst/>
+          <a:gradFill>
+            <a:gsLst>
+              <a:gs pos="0">
+                <a:srgbClr val="2A1E55"/>
+              </a:gs>
+              <a:gs pos="100000">
+                <a:srgbClr val="1E1542"/>
+              </a:gs>
+            </a:gsLst>
+            <a:lin ang="7200000" scaled="1"/>
+          </a:gradFill>
+        </p:spPr>
+        <p:style>
+          <a:lnRef idx="1">
+            <a:schemeClr val="accent1"/>
+          </a:lnRef>
+          <a:fillRef idx="3">
+            <a:schemeClr val="accent1"/>
+          </a:fillRef>
+          <a:effectRef idx="2">
+            <a:schemeClr val="accent1"/>
+          </a:effectRef>
+          <a:fontRef idx="minor">
+            <a:schemeClr val="lt1"/>
+          </a:fontRef>
+        </p:style>
+        <p:txBody>
+          <a:bodyPr rtlCol="0" anchor="ctr"/>
+          <a:lstStyle/>
+          <a:p>
+            <a:pPr algn="ctr"/>
+          </a:p>
+        </p:txBody>
+      </p:sp>
+      <p:sp>
+        <p:nvSpPr>
+          <p:cNvPr id="12" name="Rectangle 11"/>
+          <p:cNvSpPr/>
+          <p:nvPr/>
+        </p:nvSpPr>
+        <p:spPr>
+          <a:xfrm>
+            <a:off x="777240" y="1600200"/>
+            <a:ext cx="64008" cy="1828800"/>
+          </a:xfrm>
+          <a:prstGeom prst="rect">
+            <a:avLst/>
+          </a:prstGeom>
+          <a:solidFill>
+            <a:srgbClr val="E9C27C"/>
+          </a:solidFill>
+          <a:ln>
+            <a:noFill/>
+          </a:ln>
+          <a:effectLst/>
+        </p:spPr>
+        <p:style>
+          <a:lnRef idx="1">
+            <a:schemeClr val="accent1"/>
+          </a:lnRef>
+          <a:fillRef idx="3">
+            <a:schemeClr val="accent1"/>
+          </a:fillRef>
+          <a:effectRef idx="2">
+            <a:schemeClr val="accent1"/>
+          </a:effectRef>
+          <a:fontRef idx="minor">
+            <a:schemeClr val="lt1"/>
+          </a:fontRef>
+        </p:style>
+        <p:txBody>
+          <a:bodyPr rtlCol="0" anchor="ctr"/>
+          <a:lstStyle/>
+          <a:p>
+            <a:pPr algn="ctr"/>
+          </a:p>
+        </p:txBody>
+      </p:sp>
+      <p:sp>
+        <p:nvSpPr>
+          <p:cNvPr id="13" name="TextBox 12"/>
+          <p:cNvSpPr txBox="1"/>
+          <p:nvPr/>
+        </p:nvSpPr>
+        <p:spPr>
+          <a:xfrm>
+            <a:off x="978408" y="1737360"/>
+            <a:ext cx="1097280" cy="457200"/>
+          </a:xfrm>
+          <a:prstGeom prst="rect">
+            <a:avLst/>
+          </a:prstGeom>
+          <a:noFill/>
+        </p:spPr>
+        <p:txBody>
+          <a:bodyPr wrap="square" anchor="t" lIns="25400" rIns="25400" tIns="12700" bIns="12700">
+            <a:spAutoFit/>
+          </a:bodyPr>
+          <a:lstStyle/>
+          <a:p>
+            <a:pPr algn="l">
+              <a:lnSpc>
+                <a:spcPct val="100000"/>
+              </a:lnSpc>
+            </a:pPr>
+            <a:r>
+              <a:rPr sz="2000" b="1">
+                <a:solidFill>
+                  <a:srgbClr val="E9C27C"/>
+                </a:solidFill>
+                <a:latin typeface="Arial"/>
+              </a:rPr>
+              <a:t>01</a:t>
+            </a:r>
+          </a:p>
+        </p:txBody>
+      </p:sp>
+      <p:sp>
+        <p:nvSpPr>
+          <p:cNvPr id="14" name="TextBox 13"/>
+          <p:cNvSpPr txBox="1"/>
+          <p:nvPr/>
+        </p:nvSpPr>
+        <p:spPr>
+          <a:xfrm>
+            <a:off x="978408" y="2176272"/>
+            <a:ext cx="1380744" cy="365760"/>
+          </a:xfrm>
+          <a:prstGeom prst="rect">
+            <a:avLst/>
+          </a:prstGeom>
+          <a:noFill/>
+        </p:spPr>
+        <p:txBody>
+          <a:bodyPr wrap="square" anchor="t" lIns="25400" rIns="25400" tIns="12700" bIns="12700">
+            <a:spAutoFit/>
+          </a:bodyPr>
+          <a:lstStyle/>
+          <a:p>
+            <a:pPr algn="l">
+              <a:lnSpc>
+                <a:spcPct val="100000"/>
+              </a:lnSpc>
+            </a:pPr>
+            <a:r>
+              <a:rPr sz="1250" b="1">
+                <a:solidFill>
+                  <a:srgbClr val="F5F1FF"/>
+                </a:solidFill>
+                <a:latin typeface="Microsoft YaHei"/>
+              </a:rPr>
+              <a:t>集聚入驻</a:t>
+            </a:r>
+          </a:p>
+        </p:txBody>
+      </p:sp>
+      <p:sp>
+        <p:nvSpPr>
+          <p:cNvPr id="15" name="TextBox 14"/>
+          <p:cNvSpPr txBox="1"/>
+          <p:nvPr/>
+        </p:nvSpPr>
+        <p:spPr>
+          <a:xfrm>
+            <a:off x="978408" y="2542032"/>
+            <a:ext cx="1380744" cy="822960"/>
+          </a:xfrm>
+          <a:prstGeom prst="rect">
+            <a:avLst/>
+          </a:prstGeom>
+          <a:noFill/>
+        </p:spPr>
+        <p:txBody>
+          <a:bodyPr wrap="square" anchor="t" lIns="25400" rIns="25400" tIns="12700" bIns="12700">
+            <a:spAutoFit/>
+          </a:bodyPr>
+          <a:lstStyle/>
+          <a:p>
+            <a:pPr algn="l">
+              <a:lnSpc>
+                <a:spcPct val="115000"/>
+              </a:lnSpc>
+            </a:pPr>
+            <a:r>
+              <a:rPr sz="950" b="0">
+                <a:solidFill>
+                  <a:srgbClr val="C6BAEA"/>
+                </a:solidFill>
+                <a:latin typeface="Microsoft YaHei"/>
+              </a:rPr>
+              <a:t>3F 孵化办公
+5F 展贸集群</a:t>
+            </a:r>
+          </a:p>
+        </p:txBody>
+      </p:sp>
+      <p:sp>
+        <p:nvSpPr>
+          <p:cNvPr id="16" name="Rounded Rectangle 15"/>
+          <p:cNvSpPr/>
+          <p:nvPr/>
+        </p:nvSpPr>
+        <p:spPr>
+          <a:xfrm>
+            <a:off x="2569464" y="1600200"/>
+            <a:ext cx="1700784" cy="1828800"/>
+          </a:xfrm>
+          <a:prstGeom prst="roundRect">
+            <a:avLst/>
+          </a:prstGeom>
+          <a:ln w="12700">
+            <a:solidFill>
+              <a:srgbClr val="4A3C7C"/>
+            </a:solidFill>
+          </a:ln>
+          <a:effectLst/>
+          <a:gradFill>
+            <a:gsLst>
+              <a:gs pos="0">
+                <a:srgbClr val="2A1E55"/>
+              </a:gs>
+              <a:gs pos="100000">
+                <a:srgbClr val="1E1542"/>
+              </a:gs>
+            </a:gsLst>
+            <a:lin ang="7200000" scaled="1"/>
+          </a:gradFill>
+        </p:spPr>
+        <p:style>
+          <a:lnRef idx="1">
+            <a:schemeClr val="accent1"/>
+          </a:lnRef>
+          <a:fillRef idx="3">
+            <a:schemeClr val="accent1"/>
+          </a:fillRef>
+          <a:effectRef idx="2">
+            <a:schemeClr val="accent1"/>
+          </a:effectRef>
+          <a:fontRef idx="minor">
+            <a:schemeClr val="lt1"/>
+          </a:fontRef>
+        </p:style>
+        <p:txBody>
+          <a:bodyPr rtlCol="0" anchor="ctr"/>
+          <a:lstStyle/>
+          <a:p>
+            <a:pPr algn="ctr"/>
+          </a:p>
+        </p:txBody>
+      </p:sp>
+      <p:sp>
+        <p:nvSpPr>
+          <p:cNvPr id="17" name="Rectangle 16"/>
+          <p:cNvSpPr/>
+          <p:nvPr/>
+        </p:nvSpPr>
+        <p:spPr>
+          <a:xfrm>
+            <a:off x="2569464" y="1600200"/>
+            <a:ext cx="64008" cy="1828800"/>
+          </a:xfrm>
+          <a:prstGeom prst="rect">
+            <a:avLst/>
+          </a:prstGeom>
+          <a:solidFill>
+            <a:srgbClr val="8B7BFF"/>
+          </a:solidFill>
+          <a:ln>
+            <a:noFill/>
+          </a:ln>
+          <a:effectLst/>
+        </p:spPr>
+        <p:style>
+          <a:lnRef idx="1">
+            <a:schemeClr val="accent1"/>
+          </a:lnRef>
+          <a:fillRef idx="3">
+            <a:schemeClr val="accent1"/>
+          </a:fillRef>
+          <a:effectRef idx="2">
+            <a:schemeClr val="accent1"/>
+          </a:effectRef>
+          <a:fontRef idx="minor">
+            <a:schemeClr val="lt1"/>
+          </a:fontRef>
+        </p:style>
+        <p:txBody>
+          <a:bodyPr rtlCol="0" anchor="ctr"/>
+          <a:lstStyle/>
+          <a:p>
+            <a:pPr algn="ctr"/>
+          </a:p>
+        </p:txBody>
+      </p:sp>
+      <p:sp>
+        <p:nvSpPr>
+          <p:cNvPr id="18" name="TextBox 17"/>
+          <p:cNvSpPr txBox="1"/>
+          <p:nvPr/>
+        </p:nvSpPr>
+        <p:spPr>
+          <a:xfrm>
+            <a:off x="2770632" y="1737360"/>
+            <a:ext cx="1097280" cy="457200"/>
+          </a:xfrm>
+          <a:prstGeom prst="rect">
+            <a:avLst/>
+          </a:prstGeom>
+          <a:noFill/>
+        </p:spPr>
+        <p:txBody>
+          <a:bodyPr wrap="square" anchor="t" lIns="25400" rIns="25400" tIns="12700" bIns="12700">
+            <a:spAutoFit/>
+          </a:bodyPr>
+          <a:lstStyle/>
+          <a:p>
+            <a:pPr algn="l">
+              <a:lnSpc>
+                <a:spcPct val="100000"/>
+              </a:lnSpc>
+            </a:pPr>
+            <a:r>
+              <a:rPr sz="2000" b="1">
+                <a:solidFill>
+                  <a:srgbClr val="8B7BFF"/>
+                </a:solidFill>
+                <a:latin typeface="Arial"/>
+              </a:rPr>
+              <a:t>02</a:t>
+            </a:r>
+          </a:p>
+        </p:txBody>
+      </p:sp>
+      <p:sp>
+        <p:nvSpPr>
+          <p:cNvPr id="19" name="TextBox 18"/>
+          <p:cNvSpPr txBox="1"/>
+          <p:nvPr/>
+        </p:nvSpPr>
+        <p:spPr>
+          <a:xfrm>
+            <a:off x="2770632" y="2176272"/>
+            <a:ext cx="1380744" cy="365760"/>
+          </a:xfrm>
+          <a:prstGeom prst="rect">
+            <a:avLst/>
+          </a:prstGeom>
+          <a:noFill/>
+        </p:spPr>
+        <p:txBody>
+          <a:bodyPr wrap="square" anchor="t" lIns="25400" rIns="25400" tIns="12700" bIns="12700">
+            <a:spAutoFit/>
+          </a:bodyPr>
+          <a:lstStyle/>
+          <a:p>
+            <a:pPr algn="l">
+              <a:lnSpc>
+                <a:spcPct val="100000"/>
+              </a:lnSpc>
+            </a:pPr>
+            <a:r>
+              <a:rPr sz="1250" b="1">
+                <a:solidFill>
+                  <a:srgbClr val="F5F1FF"/>
+                </a:solidFill>
+                <a:latin typeface="Microsoft YaHei"/>
+              </a:rPr>
+              <a:t>内容与产品</a:t>
+            </a:r>
+          </a:p>
+        </p:txBody>
+      </p:sp>
+      <p:sp>
+        <p:nvSpPr>
+          <p:cNvPr id="20" name="TextBox 19"/>
+          <p:cNvSpPr txBox="1"/>
+          <p:nvPr/>
+        </p:nvSpPr>
+        <p:spPr>
+          <a:xfrm>
+            <a:off x="2770632" y="2542032"/>
+            <a:ext cx="1380744" cy="822960"/>
+          </a:xfrm>
+          <a:prstGeom prst="rect">
+            <a:avLst/>
+          </a:prstGeom>
+          <a:noFill/>
+        </p:spPr>
+        <p:txBody>
+          <a:bodyPr wrap="square" anchor="t" lIns="25400" rIns="25400" tIns="12700" bIns="12700">
+            <a:spAutoFit/>
+          </a:bodyPr>
+          <a:lstStyle/>
+          <a:p>
+            <a:pPr algn="l">
+              <a:lnSpc>
+                <a:spcPct val="115000"/>
+              </a:lnSpc>
+            </a:pPr>
+            <a:r>
+              <a:rPr sz="950" b="0">
+                <a:solidFill>
+                  <a:srgbClr val="C6BAEA"/>
+                </a:solidFill>
+                <a:latin typeface="Microsoft YaHei"/>
+              </a:rPr>
+              <a:t>AIGC/AI 短剧制作
+IP 授权 · 选品打样</a:t>
+            </a:r>
+          </a:p>
+        </p:txBody>
+      </p:sp>
+      <p:sp>
+        <p:nvSpPr>
+          <p:cNvPr id="21" name="Rounded Rectangle 20"/>
+          <p:cNvSpPr/>
+          <p:nvPr/>
+        </p:nvSpPr>
+        <p:spPr>
+          <a:xfrm>
+            <a:off x="4361688" y="1600200"/>
+            <a:ext cx="1700784" cy="1828800"/>
+          </a:xfrm>
+          <a:prstGeom prst="roundRect">
+            <a:avLst/>
+          </a:prstGeom>
+          <a:ln w="12700">
+            <a:solidFill>
+              <a:srgbClr val="4A3C7C"/>
+            </a:solidFill>
+          </a:ln>
+          <a:effectLst/>
+          <a:gradFill>
+            <a:gsLst>
+              <a:gs pos="0">
+                <a:srgbClr val="2A1E55"/>
+              </a:gs>
+              <a:gs pos="100000">
+                <a:srgbClr val="1E1542"/>
+              </a:gs>
+            </a:gsLst>
+            <a:lin ang="7200000" scaled="1"/>
+          </a:gradFill>
+        </p:spPr>
+        <p:style>
+          <a:lnRef idx="1">
+            <a:schemeClr val="accent1"/>
+          </a:lnRef>
+          <a:fillRef idx="3">
+            <a:schemeClr val="accent1"/>
+          </a:fillRef>
+          <a:effectRef idx="2">
+            <a:schemeClr val="accent1"/>
+          </a:effectRef>
+          <a:fontRef idx="minor">
+            <a:schemeClr val="lt1"/>
+          </a:fontRef>
+        </p:style>
+        <p:txBody>
+          <a:bodyPr rtlCol="0" anchor="ctr"/>
+          <a:lstStyle/>
+          <a:p>
+            <a:pPr algn="ctr"/>
+          </a:p>
+        </p:txBody>
+      </p:sp>
+      <p:sp>
+        <p:nvSpPr>
+          <p:cNvPr id="22" name="Rectangle 21"/>
+          <p:cNvSpPr/>
+          <p:nvPr/>
+        </p:nvSpPr>
+        <p:spPr>
+          <a:xfrm>
+            <a:off x="4361688" y="1600200"/>
+            <a:ext cx="64008" cy="1828800"/>
+          </a:xfrm>
+          <a:prstGeom prst="rect">
+            <a:avLst/>
+          </a:prstGeom>
+          <a:solidFill>
+            <a:srgbClr val="C77DFF"/>
+          </a:solidFill>
+          <a:ln>
+            <a:noFill/>
+          </a:ln>
+          <a:effectLst/>
+        </p:spPr>
+        <p:style>
+          <a:lnRef idx="1">
+            <a:schemeClr val="accent1"/>
+          </a:lnRef>
+          <a:fillRef idx="3">
+            <a:schemeClr val="accent1"/>
+          </a:fillRef>
+          <a:effectRef idx="2">
+            <a:schemeClr val="accent1"/>
+          </a:effectRef>
+          <a:fontRef idx="minor">
+            <a:schemeClr val="lt1"/>
+          </a:fontRef>
+        </p:style>
+        <p:txBody>
+          <a:bodyPr rtlCol="0" anchor="ctr"/>
+          <a:lstStyle/>
+          <a:p>
+            <a:pPr algn="ctr"/>
+          </a:p>
+        </p:txBody>
+      </p:sp>
+      <p:sp>
+        <p:nvSpPr>
+          <p:cNvPr id="23" name="TextBox 22"/>
+          <p:cNvSpPr txBox="1"/>
+          <p:nvPr/>
+        </p:nvSpPr>
+        <p:spPr>
+          <a:xfrm>
+            <a:off x="4562856" y="1737360"/>
+            <a:ext cx="1097280" cy="457200"/>
+          </a:xfrm>
+          <a:prstGeom prst="rect">
+            <a:avLst/>
+          </a:prstGeom>
+          <a:noFill/>
+        </p:spPr>
+        <p:txBody>
+          <a:bodyPr wrap="square" anchor="t" lIns="25400" rIns="25400" tIns="12700" bIns="12700">
+            <a:spAutoFit/>
+          </a:bodyPr>
+          <a:lstStyle/>
+          <a:p>
+            <a:pPr algn="l">
+              <a:lnSpc>
+                <a:spcPct val="100000"/>
+              </a:lnSpc>
+            </a:pPr>
+            <a:r>
+              <a:rPr sz="2000" b="1">
+                <a:solidFill>
+                  <a:srgbClr val="C77DFF"/>
+                </a:solidFill>
+                <a:latin typeface="Arial"/>
+              </a:rPr>
+              <a:t>03</a:t>
+            </a:r>
+          </a:p>
+        </p:txBody>
+      </p:sp>
+      <p:sp>
+        <p:nvSpPr>
+          <p:cNvPr id="24" name="TextBox 23"/>
+          <p:cNvSpPr txBox="1"/>
+          <p:nvPr/>
+        </p:nvSpPr>
+        <p:spPr>
+          <a:xfrm>
+            <a:off x="4562856" y="2176272"/>
+            <a:ext cx="1380744" cy="365760"/>
+          </a:xfrm>
+          <a:prstGeom prst="rect">
+            <a:avLst/>
+          </a:prstGeom>
+          <a:noFill/>
+        </p:spPr>
+        <p:txBody>
+          <a:bodyPr wrap="square" anchor="t" lIns="25400" rIns="25400" tIns="12700" bIns="12700">
+            <a:spAutoFit/>
+          </a:bodyPr>
+          <a:lstStyle/>
+          <a:p>
+            <a:pPr algn="l">
+              <a:lnSpc>
+                <a:spcPct val="100000"/>
+              </a:lnSpc>
+            </a:pPr>
+            <a:r>
+              <a:rPr sz="1250" b="1">
+                <a:solidFill>
+                  <a:srgbClr val="F5F1FF"/>
+                </a:solidFill>
+                <a:latin typeface="Microsoft YaHei"/>
+              </a:rPr>
+              <a:t>海外通路</a:t>
+            </a:r>
+          </a:p>
+        </p:txBody>
+      </p:sp>
+      <p:sp>
+        <p:nvSpPr>
+          <p:cNvPr id="25" name="TextBox 24"/>
+          <p:cNvSpPr txBox="1"/>
+          <p:nvPr/>
+        </p:nvSpPr>
+        <p:spPr>
+          <a:xfrm>
+            <a:off x="4562856" y="2542032"/>
+            <a:ext cx="1380744" cy="822960"/>
+          </a:xfrm>
+          <a:prstGeom prst="rect">
+            <a:avLst/>
+          </a:prstGeom>
+          <a:noFill/>
+        </p:spPr>
+        <p:txBody>
+          <a:bodyPr wrap="square" anchor="t" lIns="25400" rIns="25400" tIns="12700" bIns="12700">
+            <a:spAutoFit/>
+          </a:bodyPr>
+          <a:lstStyle/>
+          <a:p>
+            <a:pPr algn="l">
+              <a:lnSpc>
+                <a:spcPct val="115000"/>
+              </a:lnSpc>
+            </a:pPr>
+            <a:r>
+              <a:rPr sz="950" b="0">
+                <a:solidFill>
+                  <a:srgbClr val="C6BAEA"/>
+                </a:solidFill>
+                <a:latin typeface="Microsoft YaHei"/>
+              </a:rPr>
+              <a:t>TikTok/短剧出海
+跨境电商 · 展销</a:t>
+            </a:r>
+          </a:p>
+        </p:txBody>
+      </p:sp>
+      <p:sp>
+        <p:nvSpPr>
+          <p:cNvPr id="26" name="Rounded Rectangle 25"/>
+          <p:cNvSpPr/>
+          <p:nvPr/>
+        </p:nvSpPr>
+        <p:spPr>
+          <a:xfrm>
+            <a:off x="6153912" y="1600200"/>
+            <a:ext cx="1700784" cy="1828800"/>
+          </a:xfrm>
+          <a:prstGeom prst="roundRect">
+            <a:avLst/>
+          </a:prstGeom>
+          <a:ln w="12700">
+            <a:solidFill>
+              <a:srgbClr val="4A3C7C"/>
+            </a:solidFill>
+          </a:ln>
+          <a:effectLst/>
+          <a:gradFill>
+            <a:gsLst>
+              <a:gs pos="0">
+                <a:srgbClr val="2A1E55"/>
+              </a:gs>
+              <a:gs pos="100000">
+                <a:srgbClr val="1E1542"/>
+              </a:gs>
+            </a:gsLst>
+            <a:lin ang="7200000" scaled="1"/>
+          </a:gradFill>
+        </p:spPr>
+        <p:style>
+          <a:lnRef idx="1">
+            <a:schemeClr val="accent1"/>
+          </a:lnRef>
+          <a:fillRef idx="3">
+            <a:schemeClr val="accent1"/>
+          </a:fillRef>
+          <a:effectRef idx="2">
+            <a:schemeClr val="accent1"/>
+          </a:effectRef>
+          <a:fontRef idx="minor">
+            <a:schemeClr val="lt1"/>
+          </a:fontRef>
+        </p:style>
+        <p:txBody>
+          <a:bodyPr rtlCol="0" anchor="ctr"/>
+          <a:lstStyle/>
+          <a:p>
+            <a:pPr algn="ctr"/>
+          </a:p>
+        </p:txBody>
+      </p:sp>
+      <p:sp>
+        <p:nvSpPr>
+          <p:cNvPr id="27" name="Rectangle 26"/>
+          <p:cNvSpPr/>
+          <p:nvPr/>
+        </p:nvSpPr>
+        <p:spPr>
+          <a:xfrm>
+            <a:off x="6153912" y="1600200"/>
+            <a:ext cx="64008" cy="1828800"/>
+          </a:xfrm>
+          <a:prstGeom prst="rect">
+            <a:avLst/>
+          </a:prstGeom>
+          <a:solidFill>
+            <a:srgbClr val="56D6B6"/>
+          </a:solidFill>
+          <a:ln>
+            <a:noFill/>
+          </a:ln>
+          <a:effectLst/>
+        </p:spPr>
+        <p:style>
+          <a:lnRef idx="1">
+            <a:schemeClr val="accent1"/>
+          </a:lnRef>
+          <a:fillRef idx="3">
+            <a:schemeClr val="accent1"/>
+          </a:fillRef>
+          <a:effectRef idx="2">
+            <a:schemeClr val="accent1"/>
+          </a:effectRef>
+          <a:fontRef idx="minor">
+            <a:schemeClr val="lt1"/>
+          </a:fontRef>
+        </p:style>
+        <p:txBody>
+          <a:bodyPr rtlCol="0" anchor="ctr"/>
+          <a:lstStyle/>
+          <a:p>
+            <a:pPr algn="ctr"/>
+          </a:p>
+        </p:txBody>
+      </p:sp>
+      <p:sp>
+        <p:nvSpPr>
+          <p:cNvPr id="28" name="TextBox 27"/>
+          <p:cNvSpPr txBox="1"/>
+          <p:nvPr/>
+        </p:nvSpPr>
+        <p:spPr>
+          <a:xfrm>
+            <a:off x="6355080" y="1737360"/>
+            <a:ext cx="1097280" cy="457200"/>
+          </a:xfrm>
+          <a:prstGeom prst="rect">
+            <a:avLst/>
+          </a:prstGeom>
+          <a:noFill/>
+        </p:spPr>
+        <p:txBody>
+          <a:bodyPr wrap="square" anchor="t" lIns="25400" rIns="25400" tIns="12700" bIns="12700">
+            <a:spAutoFit/>
+          </a:bodyPr>
+          <a:lstStyle/>
+          <a:p>
+            <a:pPr algn="l">
+              <a:lnSpc>
+                <a:spcPct val="100000"/>
+              </a:lnSpc>
+            </a:pPr>
+            <a:r>
+              <a:rPr sz="2000" b="1">
+                <a:solidFill>
+                  <a:srgbClr val="56D6B6"/>
+                </a:solidFill>
+                <a:latin typeface="Arial"/>
+              </a:rPr>
+              <a:t>04</a:t>
+            </a:r>
+          </a:p>
+        </p:txBody>
+      </p:sp>
+      <p:sp>
+        <p:nvSpPr>
+          <p:cNvPr id="29" name="TextBox 28"/>
+          <p:cNvSpPr txBox="1"/>
+          <p:nvPr/>
+        </p:nvSpPr>
+        <p:spPr>
+          <a:xfrm>
+            <a:off x="6355080" y="2176272"/>
+            <a:ext cx="1380744" cy="365760"/>
+          </a:xfrm>
+          <a:prstGeom prst="rect">
+            <a:avLst/>
+          </a:prstGeom>
+          <a:noFill/>
+        </p:spPr>
+        <p:txBody>
+          <a:bodyPr wrap="square" anchor="t" lIns="25400" rIns="25400" tIns="12700" bIns="12700">
+            <a:spAutoFit/>
+          </a:bodyPr>
+          <a:lstStyle/>
+          <a:p>
+            <a:pPr algn="l">
+              <a:lnSpc>
+                <a:spcPct val="100000"/>
+              </a:lnSpc>
+            </a:pPr>
+            <a:r>
+              <a:rPr sz="1250" b="1">
+                <a:solidFill>
+                  <a:srgbClr val="F5F1FF"/>
+                </a:solidFill>
+                <a:latin typeface="Microsoft YaHei"/>
+              </a:rPr>
+              <a:t>订单撮合</a:t>
+            </a:r>
+          </a:p>
+        </p:txBody>
+      </p:sp>
+      <p:sp>
+        <p:nvSpPr>
+          <p:cNvPr id="30" name="TextBox 29"/>
+          <p:cNvSpPr txBox="1"/>
+          <p:nvPr/>
+        </p:nvSpPr>
+        <p:spPr>
+          <a:xfrm>
+            <a:off x="6355080" y="2542032"/>
+            <a:ext cx="1380744" cy="822960"/>
+          </a:xfrm>
+          <a:prstGeom prst="rect">
+            <a:avLst/>
+          </a:prstGeom>
+          <a:noFill/>
+        </p:spPr>
+        <p:txBody>
+          <a:bodyPr wrap="square" anchor="t" lIns="25400" rIns="25400" tIns="12700" bIns="12700">
+            <a:spAutoFit/>
+          </a:bodyPr>
+          <a:lstStyle/>
+          <a:p>
+            <a:pPr algn="l">
+              <a:lnSpc>
+                <a:spcPct val="115000"/>
+              </a:lnSpc>
+            </a:pPr>
+            <a:r>
+              <a:rPr sz="950" b="0">
+                <a:solidFill>
+                  <a:srgbClr val="C6BAEA"/>
+                </a:solidFill>
+                <a:latin typeface="Microsoft YaHei"/>
+              </a:rPr>
+              <a:t>5F 展厅接单
+领事/商务对接</a:t>
+            </a:r>
+          </a:p>
+        </p:txBody>
+      </p:sp>
+      <p:sp>
+        <p:nvSpPr>
+          <p:cNvPr id="31" name="Rounded Rectangle 30"/>
+          <p:cNvSpPr/>
+          <p:nvPr/>
+        </p:nvSpPr>
+        <p:spPr>
+          <a:xfrm>
+            <a:off x="7946136" y="1600200"/>
+            <a:ext cx="1700784" cy="1828800"/>
+          </a:xfrm>
+          <a:prstGeom prst="roundRect">
+            <a:avLst/>
+          </a:prstGeom>
+          <a:ln w="12700">
+            <a:solidFill>
+              <a:srgbClr val="4A3C7C"/>
+            </a:solidFill>
+          </a:ln>
+          <a:effectLst/>
+          <a:gradFill>
+            <a:gsLst>
+              <a:gs pos="0">
+                <a:srgbClr val="2A1E55"/>
+              </a:gs>
+              <a:gs pos="100000">
+                <a:srgbClr val="1E1542"/>
+              </a:gs>
+            </a:gsLst>
+            <a:lin ang="7200000" scaled="1"/>
+          </a:gradFill>
+        </p:spPr>
+        <p:style>
+          <a:lnRef idx="1">
+            <a:schemeClr val="accent1"/>
+          </a:lnRef>
+          <a:fillRef idx="3">
+            <a:schemeClr val="accent1"/>
+          </a:fillRef>
+          <a:effectRef idx="2">
+            <a:schemeClr val="accent1"/>
+          </a:effectRef>
+          <a:fontRef idx="minor">
+            <a:schemeClr val="lt1"/>
+          </a:fontRef>
+        </p:style>
+        <p:txBody>
+          <a:bodyPr rtlCol="0" anchor="ctr"/>
+          <a:lstStyle/>
+          <a:p>
+            <a:pPr algn="ctr"/>
+          </a:p>
+        </p:txBody>
+      </p:sp>
+      <p:sp>
+        <p:nvSpPr>
+          <p:cNvPr id="32" name="Rectangle 31"/>
+          <p:cNvSpPr/>
+          <p:nvPr/>
+        </p:nvSpPr>
+        <p:spPr>
+          <a:xfrm>
+            <a:off x="7946136" y="1600200"/>
+            <a:ext cx="64008" cy="1828800"/>
+          </a:xfrm>
+          <a:prstGeom prst="rect">
+            <a:avLst/>
+          </a:prstGeom>
+          <a:solidFill>
+            <a:srgbClr val="F58BB8"/>
+          </a:solidFill>
+          <a:ln>
+            <a:noFill/>
+          </a:ln>
+          <a:effectLst/>
+        </p:spPr>
+        <p:style>
+          <a:lnRef idx="1">
+            <a:schemeClr val="accent1"/>
+          </a:lnRef>
+          <a:fillRef idx="3">
+            <a:schemeClr val="accent1"/>
+          </a:fillRef>
+          <a:effectRef idx="2">
+            <a:schemeClr val="accent1"/>
+          </a:effectRef>
+          <a:fontRef idx="minor">
+            <a:schemeClr val="lt1"/>
+          </a:fontRef>
+        </p:style>
+        <p:txBody>
+          <a:bodyPr rtlCol="0" anchor="ctr"/>
+          <a:lstStyle/>
+          <a:p>
+            <a:pPr algn="ctr"/>
+          </a:p>
+        </p:txBody>
+      </p:sp>
+      <p:sp>
+        <p:nvSpPr>
+          <p:cNvPr id="33" name="TextBox 32"/>
+          <p:cNvSpPr txBox="1"/>
+          <p:nvPr/>
+        </p:nvSpPr>
+        <p:spPr>
+          <a:xfrm>
+            <a:off x="8147304" y="1737360"/>
+            <a:ext cx="1097280" cy="457200"/>
+          </a:xfrm>
+          <a:prstGeom prst="rect">
+            <a:avLst/>
+          </a:prstGeom>
+          <a:noFill/>
+        </p:spPr>
+        <p:txBody>
+          <a:bodyPr wrap="square" anchor="t" lIns="25400" rIns="25400" tIns="12700" bIns="12700">
+            <a:spAutoFit/>
+          </a:bodyPr>
+          <a:lstStyle/>
+          <a:p>
+            <a:pPr algn="l">
+              <a:lnSpc>
+                <a:spcPct val="100000"/>
+              </a:lnSpc>
+            </a:pPr>
+            <a:r>
+              <a:rPr sz="2000" b="1">
+                <a:solidFill>
+                  <a:srgbClr val="F58BB8"/>
+                </a:solidFill>
+                <a:latin typeface="Arial"/>
+              </a:rPr>
+              <a:t>05</a:t>
+            </a:r>
+          </a:p>
+        </p:txBody>
+      </p:sp>
+      <p:sp>
+        <p:nvSpPr>
+          <p:cNvPr id="34" name="TextBox 33"/>
+          <p:cNvSpPr txBox="1"/>
+          <p:nvPr/>
+        </p:nvSpPr>
+        <p:spPr>
+          <a:xfrm>
+            <a:off x="8147304" y="2176272"/>
+            <a:ext cx="1380744" cy="365760"/>
+          </a:xfrm>
+          <a:prstGeom prst="rect">
+            <a:avLst/>
+          </a:prstGeom>
+          <a:noFill/>
+        </p:spPr>
+        <p:txBody>
+          <a:bodyPr wrap="square" anchor="t" lIns="25400" rIns="25400" tIns="12700" bIns="12700">
+            <a:spAutoFit/>
+          </a:bodyPr>
+          <a:lstStyle/>
+          <a:p>
+            <a:pPr algn="l">
+              <a:lnSpc>
+                <a:spcPct val="100000"/>
+              </a:lnSpc>
+            </a:pPr>
+            <a:r>
+              <a:rPr sz="1250" b="1">
+                <a:solidFill>
+                  <a:srgbClr val="F5F1FF"/>
+                </a:solidFill>
+                <a:latin typeface="Microsoft YaHei"/>
+              </a:rPr>
+              <a:t>履约交付</a:t>
+            </a:r>
+          </a:p>
+        </p:txBody>
+      </p:sp>
+      <p:sp>
+        <p:nvSpPr>
+          <p:cNvPr id="35" name="TextBox 34"/>
+          <p:cNvSpPr txBox="1"/>
+          <p:nvPr/>
+        </p:nvSpPr>
+        <p:spPr>
+          <a:xfrm>
+            <a:off x="8147304" y="2542032"/>
+            <a:ext cx="1380744" cy="822960"/>
+          </a:xfrm>
+          <a:prstGeom prst="rect">
+            <a:avLst/>
+          </a:prstGeom>
+          <a:noFill/>
+        </p:spPr>
+        <p:txBody>
+          <a:bodyPr wrap="square" anchor="t" lIns="25400" rIns="25400" tIns="12700" bIns="12700">
+            <a:spAutoFit/>
+          </a:bodyPr>
+          <a:lstStyle/>
+          <a:p>
+            <a:pPr algn="l">
+              <a:lnSpc>
+                <a:spcPct val="115000"/>
+              </a:lnSpc>
+            </a:pPr>
+            <a:r>
+              <a:rPr sz="950" b="0">
+                <a:solidFill>
+                  <a:srgbClr val="C6BAEA"/>
+                </a:solidFill>
+                <a:latin typeface="Microsoft YaHei"/>
+              </a:rPr>
+              <a:t>报关物流 · 结汇
+财税合规</a:t>
+            </a:r>
+          </a:p>
+        </p:txBody>
+      </p:sp>
+      <p:sp>
+        <p:nvSpPr>
+          <p:cNvPr id="36" name="Rounded Rectangle 35"/>
+          <p:cNvSpPr/>
+          <p:nvPr/>
+        </p:nvSpPr>
+        <p:spPr>
+          <a:xfrm>
+            <a:off x="9738360" y="1600200"/>
+            <a:ext cx="1700784" cy="1828800"/>
+          </a:xfrm>
+          <a:prstGeom prst="roundRect">
+            <a:avLst/>
+          </a:prstGeom>
+          <a:ln w="12700">
+            <a:solidFill>
+              <a:srgbClr val="4A3C7C"/>
+            </a:solidFill>
+          </a:ln>
+          <a:effectLst/>
+          <a:gradFill>
+            <a:gsLst>
+              <a:gs pos="0">
+                <a:srgbClr val="2A1E55"/>
+              </a:gs>
+              <a:gs pos="100000">
+                <a:srgbClr val="1E1542"/>
+              </a:gs>
+            </a:gsLst>
+            <a:lin ang="7200000" scaled="1"/>
+          </a:gradFill>
+        </p:spPr>
+        <p:style>
+          <a:lnRef idx="1">
+            <a:schemeClr val="accent1"/>
+          </a:lnRef>
+          <a:fillRef idx="3">
+            <a:schemeClr val="accent1"/>
+          </a:fillRef>
+          <a:effectRef idx="2">
+            <a:schemeClr val="accent1"/>
+          </a:effectRef>
+          <a:fontRef idx="minor">
+            <a:schemeClr val="lt1"/>
+          </a:fontRef>
+        </p:style>
+        <p:txBody>
+          <a:bodyPr rtlCol="0" anchor="ctr"/>
+          <a:lstStyle/>
+          <a:p>
+            <a:pPr algn="ctr"/>
+          </a:p>
+        </p:txBody>
+      </p:sp>
+      <p:sp>
+        <p:nvSpPr>
+          <p:cNvPr id="37" name="Rectangle 36"/>
+          <p:cNvSpPr/>
+          <p:nvPr/>
+        </p:nvSpPr>
+        <p:spPr>
+          <a:xfrm>
+            <a:off x="9738360" y="1600200"/>
+            <a:ext cx="64008" cy="1828800"/>
+          </a:xfrm>
+          <a:prstGeom prst="rect">
+            <a:avLst/>
+          </a:prstGeom>
+          <a:solidFill>
+            <a:srgbClr val="E9C27C"/>
+          </a:solidFill>
+          <a:ln>
+            <a:noFill/>
+          </a:ln>
+          <a:effectLst/>
+        </p:spPr>
+        <p:style>
+          <a:lnRef idx="1">
+            <a:schemeClr val="accent1"/>
+          </a:lnRef>
+          <a:fillRef idx="3">
+            <a:schemeClr val="accent1"/>
+          </a:fillRef>
+          <a:effectRef idx="2">
+            <a:schemeClr val="accent1"/>
+          </a:effectRef>
+          <a:fontRef idx="minor">
+            <a:schemeClr val="lt1"/>
+          </a:fontRef>
+        </p:style>
+        <p:txBody>
+          <a:bodyPr rtlCol="0" anchor="ctr"/>
+          <a:lstStyle/>
+          <a:p>
+            <a:pPr algn="ctr"/>
+          </a:p>
+        </p:txBody>
+      </p:sp>
+      <p:sp>
+        <p:nvSpPr>
+          <p:cNvPr id="38" name="TextBox 37"/>
+          <p:cNvSpPr txBox="1"/>
+          <p:nvPr/>
+        </p:nvSpPr>
+        <p:spPr>
+          <a:xfrm>
+            <a:off x="9939528" y="1737360"/>
+            <a:ext cx="1097280" cy="457200"/>
+          </a:xfrm>
+          <a:prstGeom prst="rect">
+            <a:avLst/>
+          </a:prstGeom>
+          <a:noFill/>
+        </p:spPr>
+        <p:txBody>
+          <a:bodyPr wrap="square" anchor="t" lIns="25400" rIns="25400" tIns="12700" bIns="12700">
+            <a:spAutoFit/>
+          </a:bodyPr>
+          <a:lstStyle/>
+          <a:p>
+            <a:pPr algn="l">
+              <a:lnSpc>
+                <a:spcPct val="100000"/>
+              </a:lnSpc>
+            </a:pPr>
+            <a:r>
+              <a:rPr sz="2000" b="1">
+                <a:solidFill>
+                  <a:srgbClr val="E9C27C"/>
+                </a:solidFill>
+                <a:latin typeface="Arial"/>
+              </a:rPr>
+              <a:t>06</a:t>
+            </a:r>
+          </a:p>
+        </p:txBody>
+      </p:sp>
+      <p:sp>
+        <p:nvSpPr>
+          <p:cNvPr id="39" name="TextBox 38"/>
+          <p:cNvSpPr txBox="1"/>
+          <p:nvPr/>
+        </p:nvSpPr>
+        <p:spPr>
+          <a:xfrm>
+            <a:off x="9939528" y="2176272"/>
+            <a:ext cx="1380744" cy="365760"/>
+          </a:xfrm>
+          <a:prstGeom prst="rect">
+            <a:avLst/>
+          </a:prstGeom>
+          <a:noFill/>
+        </p:spPr>
+        <p:txBody>
+          <a:bodyPr wrap="square" anchor="t" lIns="25400" rIns="25400" tIns="12700" bIns="12700">
+            <a:spAutoFit/>
+          </a:bodyPr>
+          <a:lstStyle/>
+          <a:p>
+            <a:pPr algn="l">
+              <a:lnSpc>
+                <a:spcPct val="100000"/>
+              </a:lnSpc>
+            </a:pPr>
+            <a:r>
+              <a:rPr sz="1250" b="1">
+                <a:solidFill>
+                  <a:srgbClr val="F5F1FF"/>
+                </a:solidFill>
+                <a:latin typeface="Microsoft YaHei"/>
+              </a:rPr>
+              <a:t>增长复购</a:t>
+            </a:r>
+          </a:p>
+        </p:txBody>
+      </p:sp>
+      <p:sp>
+        <p:nvSpPr>
+          <p:cNvPr id="40" name="TextBox 39"/>
+          <p:cNvSpPr txBox="1"/>
+          <p:nvPr/>
+        </p:nvSpPr>
+        <p:spPr>
+          <a:xfrm>
+            <a:off x="9939528" y="2542032"/>
+            <a:ext cx="1380744" cy="822960"/>
+          </a:xfrm>
+          <a:prstGeom prst="rect">
+            <a:avLst/>
+          </a:prstGeom>
+          <a:noFill/>
+        </p:spPr>
+        <p:txBody>
+          <a:bodyPr wrap="square" anchor="t" lIns="25400" rIns="25400" tIns="12700" bIns="12700">
+            <a:spAutoFit/>
+          </a:bodyPr>
+          <a:lstStyle/>
+          <a:p>
+            <a:pPr algn="l">
+              <a:lnSpc>
+                <a:spcPct val="115000"/>
+              </a:lnSpc>
+            </a:pPr>
+            <a:r>
+              <a:rPr sz="950" b="0">
+                <a:solidFill>
+                  <a:srgbClr val="C6BAEA"/>
+                </a:solidFill>
+                <a:latin typeface="Microsoft YaHei"/>
+              </a:rPr>
+              <a:t>品牌沉淀 · 复投
+反哺租金/合资收益</a:t>
+            </a:r>
+          </a:p>
+        </p:txBody>
+      </p:sp>
+      <p:sp>
+        <p:nvSpPr>
+          <p:cNvPr id="41" name="Rounded Rectangle 40"/>
+          <p:cNvSpPr/>
+          <p:nvPr/>
+        </p:nvSpPr>
+        <p:spPr>
+          <a:xfrm>
+            <a:off x="777240" y="3657600"/>
+            <a:ext cx="5230368" cy="2148840"/>
+          </a:xfrm>
+          <a:prstGeom prst="roundRect">
+            <a:avLst/>
+          </a:prstGeom>
+          <a:ln w="12700">
+            <a:solidFill>
+              <a:srgbClr val="4A3C7C"/>
+            </a:solidFill>
+          </a:ln>
+          <a:effectLst/>
+          <a:gradFill>
+            <a:gsLst>
+              <a:gs pos="0">
+                <a:srgbClr val="2A1E55"/>
+              </a:gs>
+              <a:gs pos="100000">
+                <a:srgbClr val="1E1542"/>
+              </a:gs>
+            </a:gsLst>
+            <a:lin ang="7200000" scaled="1"/>
+          </a:gradFill>
+        </p:spPr>
+        <p:style>
+          <a:lnRef idx="1">
+            <a:schemeClr val="accent1"/>
+          </a:lnRef>
+          <a:fillRef idx="3">
+            <a:schemeClr val="accent1"/>
+          </a:fillRef>
+          <a:effectRef idx="2">
+            <a:schemeClr val="accent1"/>
+          </a:effectRef>
+          <a:fontRef idx="minor">
+            <a:schemeClr val="lt1"/>
+          </a:fontRef>
+        </p:style>
+        <p:txBody>
+          <a:bodyPr rtlCol="0" anchor="ctr"/>
+          <a:lstStyle/>
+          <a:p>
+            <a:pPr algn="ctr"/>
+          </a:p>
+        </p:txBody>
+      </p:sp>
+      <p:sp>
+        <p:nvSpPr>
+          <p:cNvPr id="42" name="Rectangle 41"/>
+          <p:cNvSpPr/>
+          <p:nvPr/>
+        </p:nvSpPr>
+        <p:spPr>
+          <a:xfrm>
+            <a:off x="777240" y="3657600"/>
+            <a:ext cx="64008" cy="2148840"/>
+          </a:xfrm>
+          <a:prstGeom prst="rect">
+            <a:avLst/>
+          </a:prstGeom>
+          <a:solidFill>
+            <a:srgbClr val="8B7BFF"/>
+          </a:solidFill>
+          <a:ln>
+            <a:noFill/>
+          </a:ln>
+          <a:effectLst/>
+        </p:spPr>
+        <p:style>
+          <a:lnRef idx="1">
+            <a:schemeClr val="accent1"/>
+          </a:lnRef>
+          <a:fillRef idx="3">
+            <a:schemeClr val="accent1"/>
+          </a:fillRef>
+          <a:effectRef idx="2">
+            <a:schemeClr val="accent1"/>
+          </a:effectRef>
+          <a:fontRef idx="minor">
+            <a:schemeClr val="lt1"/>
+          </a:fontRef>
+        </p:style>
+        <p:txBody>
+          <a:bodyPr rtlCol="0" anchor="ctr"/>
+          <a:lstStyle/>
+          <a:p>
+            <a:pPr algn="ctr"/>
+          </a:p>
+        </p:txBody>
+      </p:sp>
+      <p:sp>
+        <p:nvSpPr>
+          <p:cNvPr id="43" name="TextBox 42"/>
+          <p:cNvSpPr txBox="1"/>
+          <p:nvPr/>
+        </p:nvSpPr>
+        <p:spPr>
+          <a:xfrm>
+            <a:off x="1088136" y="3840480"/>
+            <a:ext cx="4736592" cy="457200"/>
+          </a:xfrm>
+          <a:prstGeom prst="rect">
+            <a:avLst/>
+          </a:prstGeom>
+          <a:noFill/>
+        </p:spPr>
+        <p:txBody>
+          <a:bodyPr wrap="square" anchor="t" lIns="25400" rIns="25400" tIns="12700" bIns="12700">
+            <a:spAutoFit/>
+          </a:bodyPr>
+          <a:lstStyle/>
+          <a:p>
+            <a:pPr algn="l">
+              <a:lnSpc>
+                <a:spcPct val="100000"/>
+              </a:lnSpc>
+            </a:pPr>
+            <a:r>
+              <a:rPr sz="1550" b="1">
+                <a:solidFill>
+                  <a:srgbClr val="F5F1FF"/>
+                </a:solidFill>
+                <a:latin typeface="Microsoft YaHei"/>
+              </a:rPr>
+              <a:t>内容出海服务链</a:t>
+            </a:r>
+          </a:p>
+        </p:txBody>
+      </p:sp>
+      <p:sp>
+        <p:nvSpPr>
+          <p:cNvPr id="44" name="TextBox 43"/>
+          <p:cNvSpPr txBox="1"/>
+          <p:nvPr/>
+        </p:nvSpPr>
+        <p:spPr>
+          <a:xfrm>
+            <a:off x="1088136" y="4224528"/>
+            <a:ext cx="4681728" cy="1490472"/>
+          </a:xfrm>
+          <a:prstGeom prst="rect">
+            <a:avLst/>
+          </a:prstGeom>
+          <a:noFill/>
+        </p:spPr>
+        <p:txBody>
+          <a:bodyPr wrap="square" lIns="25400" tIns="25400">
+            <a:spAutoFit/>
+          </a:bodyPr>
+          <a:lstStyle/>
+          <a:p>
+            <a:pPr>
+              <a:lnSpc>
+                <a:spcPct val="118000"/>
+              </a:lnSpc>
+              <a:spcAft>
+                <a:spcPts val="800"/>
+              </a:spcAft>
+            </a:pPr>
+            <a:r>
+              <a:rPr sz="1100">
+                <a:solidFill>
+                  <a:srgbClr val="8B7BFF"/>
+                </a:solidFill>
+                <a:latin typeface="Microsoft YaHei"/>
+              </a:rPr>
+              <a:t>▪  </a:t>
+            </a:r>
+            <a:r>
+              <a:rPr sz="1100">
+                <a:solidFill>
+                  <a:srgbClr val="C6BAEA"/>
+                </a:solidFill>
+                <a:latin typeface="Microsoft YaHei"/>
+              </a:rPr>
+              <a:t>AI 短剧：剧本→AIGC 制作→翻译配音→TikTok/海外短剧平台分发→广告/付费分成</a:t>
+            </a:r>
+          </a:p>
+          <a:p>
+            <a:pPr>
+              <a:lnSpc>
+                <a:spcPct val="118000"/>
+              </a:lnSpc>
+              <a:spcAft>
+                <a:spcPts val="800"/>
+              </a:spcAft>
+            </a:pPr>
+            <a:r>
+              <a:rPr sz="1100">
+                <a:solidFill>
+                  <a:srgbClr val="8B7BFF"/>
+                </a:solidFill>
+                <a:latin typeface="Microsoft YaHei"/>
+              </a:rPr>
+              <a:t>▪  </a:t>
+            </a:r>
+            <a:r>
+              <a:rPr sz="1100">
+                <a:solidFill>
+                  <a:srgbClr val="C6BAEA"/>
+                </a:solidFill>
+                <a:latin typeface="Microsoft YaHei"/>
+              </a:rPr>
+              <a:t>数字 IP：国漫 IP 海外独家授权 → 海外手办/玩具开发 → 跨境渠道销售</a:t>
+            </a:r>
+          </a:p>
+          <a:p>
+            <a:pPr>
+              <a:lnSpc>
+                <a:spcPct val="118000"/>
+              </a:lnSpc>
+              <a:spcAft>
+                <a:spcPts val="800"/>
+              </a:spcAft>
+            </a:pPr>
+            <a:r>
+              <a:rPr sz="1100">
+                <a:solidFill>
+                  <a:srgbClr val="8B7BFF"/>
+                </a:solidFill>
+                <a:latin typeface="Microsoft YaHei"/>
+              </a:rPr>
+              <a:t>▪  </a:t>
+            </a:r>
+            <a:r>
+              <a:rPr sz="1100">
+                <a:solidFill>
+                  <a:srgbClr val="C6BAEA"/>
+                </a:solidFill>
+                <a:latin typeface="Microsoft YaHei"/>
+              </a:rPr>
+              <a:t>智能营销：海外社媒代运营 / 达人分发 / 信息流投放</a:t>
+            </a:r>
+          </a:p>
+        </p:txBody>
+      </p:sp>
+      <p:sp>
+        <p:nvSpPr>
+          <p:cNvPr id="45" name="Rounded Rectangle 44"/>
+          <p:cNvSpPr/>
+          <p:nvPr/>
+        </p:nvSpPr>
+        <p:spPr>
+          <a:xfrm>
+            <a:off x="6190488" y="3657600"/>
+            <a:ext cx="5230368" cy="2148840"/>
+          </a:xfrm>
+          <a:prstGeom prst="roundRect">
+            <a:avLst/>
+          </a:prstGeom>
+          <a:ln w="12700">
+            <a:solidFill>
+              <a:srgbClr val="4A3C7C"/>
+            </a:solidFill>
+          </a:ln>
+          <a:effectLst/>
+          <a:gradFill>
+            <a:gsLst>
+              <a:gs pos="0">
+                <a:srgbClr val="2A1E55"/>
+              </a:gs>
+              <a:gs pos="100000">
+                <a:srgbClr val="1E1542"/>
+              </a:gs>
+            </a:gsLst>
+            <a:lin ang="7200000" scaled="1"/>
+          </a:gradFill>
+        </p:spPr>
+        <p:style>
+          <a:lnRef idx="1">
+            <a:schemeClr val="accent1"/>
+          </a:lnRef>
+          <a:fillRef idx="3">
+            <a:schemeClr val="accent1"/>
+          </a:fillRef>
+          <a:effectRef idx="2">
+            <a:schemeClr val="accent1"/>
+          </a:effectRef>
+          <a:fontRef idx="minor">
+            <a:schemeClr val="lt1"/>
+          </a:fontRef>
+        </p:style>
+        <p:txBody>
+          <a:bodyPr rtlCol="0" anchor="ctr"/>
+          <a:lstStyle/>
+          <a:p>
+            <a:pPr algn="ctr"/>
+          </a:p>
+        </p:txBody>
+      </p:sp>
+      <p:sp>
+        <p:nvSpPr>
+          <p:cNvPr id="46" name="Rectangle 45"/>
+          <p:cNvSpPr/>
+          <p:nvPr/>
+        </p:nvSpPr>
+        <p:spPr>
+          <a:xfrm>
+            <a:off x="6190488" y="3657600"/>
+            <a:ext cx="64008" cy="2148840"/>
+          </a:xfrm>
+          <a:prstGeom prst="rect">
+            <a:avLst/>
+          </a:prstGeom>
+          <a:solidFill>
+            <a:srgbClr val="E9C27C"/>
+          </a:solidFill>
+          <a:ln>
+            <a:noFill/>
+          </a:ln>
+          <a:effectLst/>
+        </p:spPr>
+        <p:style>
+          <a:lnRef idx="1">
+            <a:schemeClr val="accent1"/>
+          </a:lnRef>
+          <a:fillRef idx="3">
+            <a:schemeClr val="accent1"/>
+          </a:fillRef>
+          <a:effectRef idx="2">
+            <a:schemeClr val="accent1"/>
+          </a:effectRef>
+          <a:fontRef idx="minor">
+            <a:schemeClr val="lt1"/>
+          </a:fontRef>
+        </p:style>
+        <p:txBody>
+          <a:bodyPr rtlCol="0" anchor="ctr"/>
+          <a:lstStyle/>
+          <a:p>
+            <a:pPr algn="ctr"/>
+          </a:p>
+        </p:txBody>
+      </p:sp>
+      <p:sp>
+        <p:nvSpPr>
+          <p:cNvPr id="47" name="TextBox 46"/>
+          <p:cNvSpPr txBox="1"/>
+          <p:nvPr/>
+        </p:nvSpPr>
+        <p:spPr>
+          <a:xfrm>
+            <a:off x="6501384" y="3840480"/>
+            <a:ext cx="4736592" cy="457200"/>
+          </a:xfrm>
+          <a:prstGeom prst="rect">
+            <a:avLst/>
+          </a:prstGeom>
+          <a:noFill/>
+        </p:spPr>
+        <p:txBody>
+          <a:bodyPr wrap="square" anchor="t" lIns="25400" rIns="25400" tIns="12700" bIns="12700">
+            <a:spAutoFit/>
+          </a:bodyPr>
+          <a:lstStyle/>
+          <a:p>
+            <a:pPr algn="l">
+              <a:lnSpc>
+                <a:spcPct val="100000"/>
+              </a:lnSpc>
+            </a:pPr>
+            <a:r>
+              <a:rPr sz="1550" b="1">
+                <a:solidFill>
+                  <a:srgbClr val="F5F1FF"/>
+                </a:solidFill>
+                <a:latin typeface="Microsoft YaHei"/>
+              </a:rPr>
+              <a:t>货品出海服务链</a:t>
+            </a:r>
+          </a:p>
+        </p:txBody>
+      </p:sp>
+      <p:sp>
+        <p:nvSpPr>
+          <p:cNvPr id="48" name="TextBox 47"/>
+          <p:cNvSpPr txBox="1"/>
+          <p:nvPr/>
+        </p:nvSpPr>
+        <p:spPr>
+          <a:xfrm>
+            <a:off x="6501384" y="4224528"/>
+            <a:ext cx="4681728" cy="1490472"/>
+          </a:xfrm>
+          <a:prstGeom prst="rect">
+            <a:avLst/>
+          </a:prstGeom>
+          <a:noFill/>
+        </p:spPr>
+        <p:txBody>
+          <a:bodyPr wrap="square" lIns="25400" tIns="25400">
+            <a:spAutoFit/>
+          </a:bodyPr>
+          <a:lstStyle/>
+          <a:p>
+            <a:pPr>
+              <a:lnSpc>
+                <a:spcPct val="118000"/>
+              </a:lnSpc>
+              <a:spcAft>
+                <a:spcPts val="800"/>
+              </a:spcAft>
+            </a:pPr>
+            <a:r>
+              <a:rPr sz="1100">
+                <a:solidFill>
+                  <a:srgbClr val="E9C27C"/>
+                </a:solidFill>
+                <a:latin typeface="Microsoft YaHei"/>
+              </a:rPr>
+              <a:t>▪  </a:t>
+            </a:r>
+            <a:r>
+              <a:rPr sz="1100">
+                <a:solidFill>
+                  <a:srgbClr val="C6BAEA"/>
+                </a:solidFill>
+                <a:latin typeface="Microsoft YaHei"/>
+              </a:rPr>
+              <a:t>供应链：玩具/毛绒/潮玩 OEM → 设计赋能 → 品牌化 → 海外订单</a:t>
+            </a:r>
+          </a:p>
+          <a:p>
+            <a:pPr>
+              <a:lnSpc>
+                <a:spcPct val="118000"/>
+              </a:lnSpc>
+              <a:spcAft>
+                <a:spcPts val="800"/>
+              </a:spcAft>
+            </a:pPr>
+            <a:r>
+              <a:rPr sz="1100">
+                <a:solidFill>
+                  <a:srgbClr val="E9C27C"/>
+                </a:solidFill>
+                <a:latin typeface="Microsoft YaHei"/>
+              </a:rPr>
+              <a:t>▪  </a:t>
+            </a:r>
+            <a:r>
+              <a:rPr sz="1100">
+                <a:solidFill>
+                  <a:srgbClr val="C6BAEA"/>
+                </a:solidFill>
+                <a:latin typeface="Microsoft YaHei"/>
+              </a:rPr>
+              <a:t>通路：跨境电商（亚马逊/TikTok Shop）+ 海外展销 + 自贸港出口</a:t>
+            </a:r>
+          </a:p>
+          <a:p>
+            <a:pPr>
+              <a:lnSpc>
+                <a:spcPct val="118000"/>
+              </a:lnSpc>
+              <a:spcAft>
+                <a:spcPts val="800"/>
+              </a:spcAft>
+            </a:pPr>
+            <a:r>
+              <a:rPr sz="1100">
+                <a:solidFill>
+                  <a:srgbClr val="E9C27C"/>
+                </a:solidFill>
+                <a:latin typeface="Microsoft YaHei"/>
+              </a:rPr>
+              <a:t>▪  </a:t>
+            </a:r>
+            <a:r>
+              <a:rPr sz="1100">
+                <a:solidFill>
+                  <a:srgbClr val="C6BAEA"/>
+                </a:solidFill>
+                <a:latin typeface="Microsoft YaHei"/>
+              </a:rPr>
+              <a:t>配套：报关物流 · 出口退税 · 结汇 · 财税法务（联合公司承接）</a:t>
+            </a:r>
+          </a:p>
+        </p:txBody>
+      </p:sp>
+      <p:sp>
+        <p:nvSpPr>
+          <p:cNvPr id="49" name="TextBox 48"/>
+          <p:cNvSpPr txBox="1"/>
+          <p:nvPr/>
+        </p:nvSpPr>
+        <p:spPr>
+          <a:xfrm>
+            <a:off x="777240" y="5943600"/>
+            <a:ext cx="10607040" cy="274320"/>
+          </a:xfrm>
+          <a:prstGeom prst="rect">
+            <a:avLst/>
+          </a:prstGeom>
+          <a:noFill/>
+        </p:spPr>
+        <p:txBody>
+          <a:bodyPr wrap="square" anchor="t" lIns="25400" rIns="25400" tIns="12700" bIns="12700">
+            <a:spAutoFit/>
+          </a:bodyPr>
+          <a:lstStyle/>
+          <a:p>
+            <a:pPr algn="l">
+              <a:lnSpc>
+                <a:spcPct val="100000"/>
+              </a:lnSpc>
+            </a:pPr>
+            <a:r>
+              <a:rPr sz="950" b="0">
+                <a:solidFill>
+                  <a:srgbClr val="9486C4"/>
+                </a:solidFill>
+                <a:latin typeface="Microsoft YaHei"/>
+              </a:rPr>
+              <a:t>＊全链条服务由运营平台 + 联合公司 + 出海合作资源共同交付；收益按撮合佣金/分成计入合资公司。</a:t>
+            </a:r>
+          </a:p>
+        </p:txBody>
+      </p:sp>
+    </p:spTree>
+  </p:cSld>
+  <p:clrMapOvr>
+    <a:masterClrMapping/>
+  </p:clrMapOvr>
+</p:sld>
+</file>
+
+<file path=ppt/slides/slide39.xml><?xml version="1.0" encoding="utf-8"?>
+<p:sld xmlns:a="http://schemas.openxmlformats.org/drawingml/2006/main" xmlns:p="http://schemas.openxmlformats.org/presentationml/2006/main" xmlns:r="http://schemas.openxmlformats.org/officeDocument/2006/relationships">
+  <p:cSld>
+    <p:spTree>
+      <p:nvGrpSpPr>
+        <p:cNvPr id="1" name=""/>
+        <p:cNvGrpSpPr/>
+        <p:nvPr/>
+      </p:nvGrpSpPr>
+      <p:grpSpPr/>
+      <p:sp>
+        <p:nvSpPr>
+          <p:cNvPr id="2" name="Rectangle 1"/>
+          <p:cNvSpPr/>
+          <p:nvPr/>
+        </p:nvSpPr>
+        <p:spPr>
+          <a:xfrm>
+            <a:off x="0" y="0"/>
+            <a:ext cx="12191695" cy="6858000"/>
+          </a:xfrm>
+          <a:prstGeom prst="rect">
+            <a:avLst/>
+          </a:prstGeom>
+          <a:gradFill>
+            <a:gsLst>
+              <a:gs pos="0">
+                <a:srgbClr val="1A1140"/>
+              </a:gs>
+              <a:gs pos="55000">
+                <a:srgbClr val="3A206E"/>
+              </a:gs>
+              <a:gs pos="100000">
+                <a:srgbClr val="1A1140"/>
+              </a:gs>
+            </a:gsLst>
+            <a:lin ang="7200000" scaled="1"/>
+          </a:gradFill>
+          <a:ln>
+            <a:noFill/>
+          </a:ln>
+          <a:effectLst/>
+        </p:spPr>
+        <p:style>
+          <a:lnRef idx="1">
+            <a:schemeClr val="accent1"/>
+          </a:lnRef>
+          <a:fillRef idx="3">
+            <a:schemeClr val="accent1"/>
+          </a:fillRef>
+          <a:effectRef idx="2">
+            <a:schemeClr val="accent1"/>
+          </a:effectRef>
+          <a:fontRef idx="minor">
+            <a:schemeClr val="lt1"/>
+          </a:fontRef>
+        </p:style>
+        <p:txBody>
+          <a:bodyPr rtlCol="0" anchor="ctr"/>
+          <a:lstStyle/>
+          <a:p>
+            <a:pPr algn="ctr"/>
+          </a:p>
+        </p:txBody>
+      </p:sp>
+      <p:sp>
+        <p:nvSpPr>
+          <p:cNvPr id="3" name="Rectangle 2"/>
+          <p:cNvSpPr/>
+          <p:nvPr/>
+        </p:nvSpPr>
+        <p:spPr>
+          <a:xfrm>
+            <a:off x="777240" y="566928"/>
+            <a:ext cx="54864" cy="786384"/>
+          </a:xfrm>
+          <a:prstGeom prst="rect">
+            <a:avLst/>
+          </a:prstGeom>
+          <a:solidFill>
+            <a:srgbClr val="E9C27C"/>
+          </a:solidFill>
+          <a:ln>
+            <a:noFill/>
+          </a:ln>
+          <a:effectLst/>
+        </p:spPr>
+        <p:style>
+          <a:lnRef idx="1">
+            <a:schemeClr val="accent1"/>
+          </a:lnRef>
+          <a:fillRef idx="3">
+            <a:schemeClr val="accent1"/>
+          </a:fillRef>
+          <a:effectRef idx="2">
+            <a:schemeClr val="accent1"/>
+          </a:effectRef>
+          <a:fontRef idx="minor">
+            <a:schemeClr val="lt1"/>
+          </a:fontRef>
+        </p:style>
+        <p:txBody>
+          <a:bodyPr rtlCol="0" anchor="ctr"/>
+          <a:lstStyle/>
+          <a:p>
+            <a:pPr algn="ctr"/>
+          </a:p>
+        </p:txBody>
+      </p:sp>
+      <p:sp>
+        <p:nvSpPr>
+          <p:cNvPr id="4" name="TextBox 3"/>
+          <p:cNvSpPr txBox="1"/>
+          <p:nvPr/>
+        </p:nvSpPr>
+        <p:spPr>
+          <a:xfrm>
+            <a:off x="978408" y="548640"/>
+            <a:ext cx="8229600" cy="310896"/>
+          </a:xfrm>
+          <a:prstGeom prst="rect">
+            <a:avLst/>
+          </a:prstGeom>
+          <a:noFill/>
+        </p:spPr>
+        <p:txBody>
+          <a:bodyPr wrap="square" anchor="t" lIns="25400" rIns="25400" tIns="12700" bIns="12700">
+            <a:spAutoFit/>
+          </a:bodyPr>
+          <a:lstStyle/>
+          <a:p>
+            <a:pPr algn="l">
+              <a:lnSpc>
+                <a:spcPct val="100000"/>
+              </a:lnSpc>
+            </a:pPr>
+            <a:r>
+              <a:rPr sz="1250" b="1" spc="200">
+                <a:solidFill>
+                  <a:srgbClr val="E9C27C"/>
+                </a:solidFill>
+                <a:latin typeface="Arial"/>
+              </a:rPr>
+              <a:t>CONSULATE PATH</a:t>
+            </a:r>
+          </a:p>
+        </p:txBody>
+      </p:sp>
+      <p:sp>
+        <p:nvSpPr>
+          <p:cNvPr id="5" name="TextBox 4"/>
+          <p:cNvSpPr txBox="1"/>
+          <p:nvPr/>
+        </p:nvSpPr>
+        <p:spPr>
+          <a:xfrm>
+            <a:off x="978408" y="841248"/>
+            <a:ext cx="9509760" cy="603504"/>
+          </a:xfrm>
+          <a:prstGeom prst="rect">
+            <a:avLst/>
+          </a:prstGeom>
+          <a:noFill/>
+        </p:spPr>
+        <p:txBody>
+          <a:bodyPr wrap="square" anchor="t" lIns="25400" rIns="25400" tIns="12700" bIns="12700">
+            <a:spAutoFit/>
+          </a:bodyPr>
+          <a:lstStyle/>
+          <a:p>
+            <a:pPr algn="l">
+              <a:lnSpc>
+                <a:spcPct val="100000"/>
+              </a:lnSpc>
+            </a:pPr>
+            <a:r>
+              <a:rPr sz="2600" b="1">
+                <a:solidFill>
+                  <a:srgbClr val="F5F1FF"/>
+                </a:solidFill>
+                <a:latin typeface="Microsoft YaHei"/>
+              </a:rPr>
+              <a:t>领事馆路径 · 产业集聚 → 海外订单达成逻辑</a:t>
+            </a:r>
+          </a:p>
+        </p:txBody>
+      </p:sp>
+      <p:sp>
+        <p:nvSpPr>
+          <p:cNvPr id="6" name="TextBox 5"/>
+          <p:cNvSpPr txBox="1"/>
+          <p:nvPr/>
+        </p:nvSpPr>
+        <p:spPr>
+          <a:xfrm>
+            <a:off x="10332720" y="457200"/>
+            <a:ext cx="1417320" cy="822960"/>
+          </a:xfrm>
+          <a:prstGeom prst="rect">
+            <a:avLst/>
+          </a:prstGeom>
+          <a:noFill/>
+        </p:spPr>
+        <p:txBody>
+          <a:bodyPr wrap="square" anchor="t" lIns="25400" rIns="25400" tIns="12700" bIns="12700">
+            <a:spAutoFit/>
+          </a:bodyPr>
+          <a:lstStyle/>
+          <a:p>
+            <a:pPr algn="r">
+              <a:lnSpc>
+                <a:spcPct val="100000"/>
+              </a:lnSpc>
+            </a:pPr>
+            <a:r>
+              <a:rPr sz="4000" b="1">
+                <a:solidFill>
+                  <a:srgbClr val="E9C27C"/>
+                </a:solidFill>
+                <a:latin typeface="Arial"/>
+              </a:rPr>
+              <a:t>08</a:t>
+            </a:r>
+          </a:p>
+        </p:txBody>
+      </p:sp>
+      <p:sp>
+        <p:nvSpPr>
+          <p:cNvPr id="7" name="Rectangle 6"/>
+          <p:cNvSpPr/>
+          <p:nvPr/>
+        </p:nvSpPr>
+        <p:spPr>
+          <a:xfrm>
+            <a:off x="10561320" y="1207008"/>
+            <a:ext cx="1170432" cy="25400"/>
+          </a:xfrm>
+          <a:prstGeom prst="rect">
+            <a:avLst/>
+          </a:prstGeom>
+          <a:solidFill>
+            <a:srgbClr val="4A3C7C"/>
+          </a:solidFill>
+          <a:ln>
+            <a:noFill/>
+          </a:ln>
+          <a:effectLst/>
+        </p:spPr>
+        <p:style>
+          <a:lnRef idx="1">
+            <a:schemeClr val="accent1"/>
+          </a:lnRef>
+          <a:fillRef idx="3">
+            <a:schemeClr val="accent1"/>
+          </a:fillRef>
+          <a:effectRef idx="2">
+            <a:schemeClr val="accent1"/>
+          </a:effectRef>
+          <a:fontRef idx="minor">
+            <a:schemeClr val="lt1"/>
+          </a:fontRef>
+        </p:style>
+        <p:txBody>
+          <a:bodyPr rtlCol="0" anchor="ctr"/>
+          <a:lstStyle/>
+          <a:p>
+            <a:pPr algn="ctr"/>
+          </a:p>
+        </p:txBody>
+      </p:sp>
+      <p:sp>
+        <p:nvSpPr>
+          <p:cNvPr id="8" name="Rectangle 7"/>
+          <p:cNvSpPr/>
+          <p:nvPr/>
+        </p:nvSpPr>
+        <p:spPr>
+          <a:xfrm>
+            <a:off x="777240" y="6327648"/>
+            <a:ext cx="10634472" cy="12700"/>
+          </a:xfrm>
+          <a:prstGeom prst="rect">
+            <a:avLst/>
+          </a:prstGeom>
+          <a:solidFill>
+            <a:srgbClr val="4A3C7C"/>
+          </a:solidFill>
+          <a:ln>
+            <a:noFill/>
+          </a:ln>
+          <a:effectLst/>
+        </p:spPr>
+        <p:style>
+          <a:lnRef idx="1">
+            <a:schemeClr val="accent1"/>
+          </a:lnRef>
+          <a:fillRef idx="3">
+            <a:schemeClr val="accent1"/>
+          </a:fillRef>
+          <a:effectRef idx="2">
+            <a:schemeClr val="accent1"/>
+          </a:effectRef>
+          <a:fontRef idx="minor">
+            <a:schemeClr val="lt1"/>
+          </a:fontRef>
+        </p:style>
+        <p:txBody>
+          <a:bodyPr rtlCol="0" anchor="ctr"/>
+          <a:lstStyle/>
+          <a:p>
+            <a:pPr algn="ctr"/>
+          </a:p>
+        </p:txBody>
+      </p:sp>
+      <p:sp>
+        <p:nvSpPr>
+          <p:cNvPr id="9" name="TextBox 8"/>
+          <p:cNvSpPr txBox="1"/>
+          <p:nvPr/>
+        </p:nvSpPr>
+        <p:spPr>
+          <a:xfrm>
+            <a:off x="777240" y="6400800"/>
+            <a:ext cx="8229600" cy="292608"/>
+          </a:xfrm>
+          <a:prstGeom prst="rect">
+            <a:avLst/>
+          </a:prstGeom>
+          <a:noFill/>
+        </p:spPr>
+        <p:txBody>
+          <a:bodyPr wrap="square" anchor="t" lIns="25400" rIns="25400" tIns="12700" bIns="12700">
+            <a:spAutoFit/>
+          </a:bodyPr>
+          <a:lstStyle/>
+          <a:p>
+            <a:pPr algn="l">
+              <a:lnSpc>
+                <a:spcPct val="100000"/>
+              </a:lnSpc>
+            </a:pPr>
+            <a:r>
+              <a:rPr sz="950" b="0">
+                <a:solidFill>
+                  <a:srgbClr val="9486C4"/>
+                </a:solidFill>
+                <a:latin typeface="Microsoft YaHei"/>
+              </a:rPr>
+              <a:t>上海创智汇 </a:t>
+            </a:r>
+            <a:r>
+              <a:rPr sz="950" b="0">
+                <a:solidFill>
+                  <a:srgbClr val="9486C4"/>
+                </a:solidFill>
+                <a:latin typeface="Arial"/>
+              </a:rPr>
+              <a:t>CHUANGZHIHUI</a:t>
+            </a:r>
+            <a:r>
+              <a:rPr sz="950" b="0">
+                <a:solidFill>
+                  <a:srgbClr val="9486C4"/>
+                </a:solidFill>
+                <a:latin typeface="Microsoft YaHei"/>
+              </a:rPr>
+              <a:t>  ·  AI+数字内容无界共创港 · 6600㎡ 谈判集中汇报</a:t>
+            </a:r>
+          </a:p>
+        </p:txBody>
+      </p:sp>
+      <p:sp>
+        <p:nvSpPr>
+          <p:cNvPr id="10" name="TextBox 9"/>
+          <p:cNvSpPr txBox="1"/>
+          <p:nvPr/>
+        </p:nvSpPr>
+        <p:spPr>
+          <a:xfrm>
+            <a:off x="10241280" y="6400800"/>
+            <a:ext cx="1490472" cy="292608"/>
+          </a:xfrm>
+          <a:prstGeom prst="rect">
+            <a:avLst/>
+          </a:prstGeom>
+          <a:noFill/>
+        </p:spPr>
+        <p:txBody>
+          <a:bodyPr wrap="square" anchor="t" lIns="25400" rIns="25400" tIns="12700" bIns="12700">
+            <a:spAutoFit/>
+          </a:bodyPr>
+          <a:lstStyle/>
+          <a:p>
+            <a:pPr algn="r">
+              <a:lnSpc>
+                <a:spcPct val="100000"/>
+              </a:lnSpc>
+            </a:pPr>
+            <a:r>
+              <a:rPr sz="1050" b="1">
+                <a:solidFill>
+                  <a:srgbClr val="E9C27C"/>
+                </a:solidFill>
+                <a:latin typeface="Arial"/>
+              </a:rPr>
+              <a:t>39</a:t>
+            </a:r>
+            <a:r>
+              <a:rPr sz="1050" b="0">
+                <a:solidFill>
+                  <a:srgbClr val="9486C4"/>
+                </a:solidFill>
+                <a:latin typeface="Arial"/>
+              </a:rPr>
+              <a:t> / 44</a:t>
+            </a:r>
+          </a:p>
+        </p:txBody>
+      </p:sp>
+      <p:sp>
+        <p:nvSpPr>
+          <p:cNvPr id="11" name="Rounded Rectangle 10"/>
+          <p:cNvSpPr/>
+          <p:nvPr/>
+        </p:nvSpPr>
+        <p:spPr>
+          <a:xfrm>
+            <a:off x="777240" y="1600200"/>
+            <a:ext cx="2048256" cy="2377440"/>
+          </a:xfrm>
+          <a:prstGeom prst="roundRect">
+            <a:avLst/>
+          </a:prstGeom>
+          <a:ln w="12700">
+            <a:solidFill>
+              <a:srgbClr val="4A3C7C"/>
+            </a:solidFill>
+          </a:ln>
+          <a:effectLst/>
+          <a:gradFill>
+            <a:gsLst>
+              <a:gs pos="0">
+                <a:srgbClr val="2A1E55"/>
+              </a:gs>
+              <a:gs pos="100000">
+                <a:srgbClr val="1E1542"/>
+              </a:gs>
+            </a:gsLst>
+            <a:lin ang="7200000" scaled="1"/>
+          </a:gradFill>
+        </p:spPr>
+        <p:style>
+          <a:lnRef idx="1">
+            <a:schemeClr val="accent1"/>
+          </a:lnRef>
+          <a:fillRef idx="3">
+            <a:schemeClr val="accent1"/>
+          </a:fillRef>
+          <a:effectRef idx="2">
+            <a:schemeClr val="accent1"/>
+          </a:effectRef>
+          <a:fontRef idx="minor">
+            <a:schemeClr val="lt1"/>
+          </a:fontRef>
+        </p:style>
+        <p:txBody>
+          <a:bodyPr rtlCol="0" anchor="ctr"/>
+          <a:lstStyle/>
+          <a:p>
+            <a:pPr algn="ctr"/>
+          </a:p>
+        </p:txBody>
+      </p:sp>
+      <p:sp>
+        <p:nvSpPr>
+          <p:cNvPr id="12" name="Rectangle 11"/>
+          <p:cNvSpPr/>
+          <p:nvPr/>
+        </p:nvSpPr>
+        <p:spPr>
+          <a:xfrm>
+            <a:off x="777240" y="1600200"/>
+            <a:ext cx="64008" cy="2377440"/>
+          </a:xfrm>
+          <a:prstGeom prst="rect">
+            <a:avLst/>
+          </a:prstGeom>
+          <a:solidFill>
+            <a:srgbClr val="E9C27C"/>
+          </a:solidFill>
+          <a:ln>
+            <a:noFill/>
+          </a:ln>
+          <a:effectLst/>
+        </p:spPr>
+        <p:style>
+          <a:lnRef idx="1">
+            <a:schemeClr val="accent1"/>
+          </a:lnRef>
+          <a:fillRef idx="3">
+            <a:schemeClr val="accent1"/>
+          </a:fillRef>
+          <a:effectRef idx="2">
+            <a:schemeClr val="accent1"/>
+          </a:effectRef>
+          <a:fontRef idx="minor">
+            <a:schemeClr val="lt1"/>
+          </a:fontRef>
+        </p:style>
+        <p:txBody>
+          <a:bodyPr rtlCol="0" anchor="ctr"/>
+          <a:lstStyle/>
+          <a:p>
+            <a:pPr algn="ctr"/>
+          </a:p>
+        </p:txBody>
+      </p:sp>
+      <p:sp>
+        <p:nvSpPr>
+          <p:cNvPr id="13" name="TextBox 12"/>
+          <p:cNvSpPr txBox="1"/>
+          <p:nvPr/>
+        </p:nvSpPr>
+        <p:spPr>
+          <a:xfrm>
+            <a:off x="996696" y="1737360"/>
+            <a:ext cx="1463040" cy="365760"/>
+          </a:xfrm>
+          <a:prstGeom prst="rect">
+            <a:avLst/>
+          </a:prstGeom>
+          <a:noFill/>
+        </p:spPr>
+        <p:txBody>
+          <a:bodyPr wrap="square" anchor="t" lIns="25400" rIns="25400" tIns="12700" bIns="12700">
+            <a:spAutoFit/>
+          </a:bodyPr>
+          <a:lstStyle/>
+          <a:p>
+            <a:pPr algn="l">
+              <a:lnSpc>
+                <a:spcPct val="100000"/>
+              </a:lnSpc>
+            </a:pPr>
+            <a:r>
+              <a:rPr sz="1300" b="1">
+                <a:solidFill>
+                  <a:srgbClr val="E9C27C"/>
+                </a:solidFill>
+                <a:latin typeface="Arial"/>
+              </a:rPr>
+              <a:t>STEP 1</a:t>
+            </a:r>
+          </a:p>
+        </p:txBody>
+      </p:sp>
+      <p:sp>
+        <p:nvSpPr>
+          <p:cNvPr id="14" name="TextBox 13"/>
+          <p:cNvSpPr txBox="1"/>
+          <p:nvPr/>
+        </p:nvSpPr>
+        <p:spPr>
+          <a:xfrm>
+            <a:off x="996696" y="2084831"/>
+            <a:ext cx="1682496" cy="365760"/>
+          </a:xfrm>
+          <a:prstGeom prst="rect">
+            <a:avLst/>
+          </a:prstGeom>
+          <a:noFill/>
+        </p:spPr>
+        <p:txBody>
+          <a:bodyPr wrap="square" anchor="t" lIns="25400" rIns="25400" tIns="12700" bIns="12700">
+            <a:spAutoFit/>
+          </a:bodyPr>
+          <a:lstStyle/>
+          <a:p>
+            <a:pPr algn="l">
+              <a:lnSpc>
+                <a:spcPct val="100000"/>
+              </a:lnSpc>
+            </a:pPr>
+            <a:r>
+              <a:rPr sz="1400" b="1">
+                <a:solidFill>
+                  <a:srgbClr val="F5F1FF"/>
+                </a:solidFill>
+                <a:latin typeface="Microsoft YaHei"/>
+              </a:rPr>
+              <a:t>产业集聚</a:t>
+            </a:r>
+          </a:p>
+        </p:txBody>
+      </p:sp>
+      <p:sp>
+        <p:nvSpPr>
+          <p:cNvPr id="15" name="TextBox 14"/>
+          <p:cNvSpPr txBox="1"/>
+          <p:nvPr/>
+        </p:nvSpPr>
+        <p:spPr>
+          <a:xfrm>
+            <a:off x="996696" y="2487168"/>
+            <a:ext cx="1682496" cy="1371600"/>
+          </a:xfrm>
+          <a:prstGeom prst="rect">
+            <a:avLst/>
+          </a:prstGeom>
+          <a:noFill/>
+        </p:spPr>
+        <p:txBody>
+          <a:bodyPr wrap="square" anchor="t" lIns="25400" rIns="25400" tIns="12700" bIns="12700">
+            <a:spAutoFit/>
+          </a:bodyPr>
+          <a:lstStyle/>
+          <a:p>
+            <a:pPr algn="l">
+              <a:lnSpc>
+                <a:spcPct val="118000"/>
+              </a:lnSpc>
+            </a:pPr>
+            <a:r>
+              <a:rPr sz="980" b="0">
+                <a:solidFill>
+                  <a:srgbClr val="C6BAEA"/>
+                </a:solidFill>
+                <a:latin typeface="Microsoft YaHei"/>
+              </a:rPr>
+              <a:t>各类产业企业集聚平台：
+供应链 / IP 内容 / AI 应用
+形成可展示的产品池</a:t>
+            </a:r>
+          </a:p>
+        </p:txBody>
+      </p:sp>
+      <p:sp>
+        <p:nvSpPr>
+          <p:cNvPr id="16" name="TextBox 15"/>
+          <p:cNvSpPr txBox="1"/>
+          <p:nvPr/>
+        </p:nvSpPr>
+        <p:spPr>
+          <a:xfrm>
+            <a:off x="2825496" y="2468880"/>
+            <a:ext cx="457200" cy="548640"/>
+          </a:xfrm>
+          <a:prstGeom prst="rect">
+            <a:avLst/>
+          </a:prstGeom>
+          <a:noFill/>
+        </p:spPr>
+        <p:txBody>
+          <a:bodyPr wrap="square" anchor="ctr" lIns="25400" rIns="25400" tIns="12700" bIns="12700">
+            <a:spAutoFit/>
+          </a:bodyPr>
+          <a:lstStyle/>
+          <a:p>
+            <a:pPr algn="ctr">
+              <a:lnSpc>
+                <a:spcPct val="100000"/>
+              </a:lnSpc>
+            </a:pPr>
+            <a:r>
+              <a:rPr sz="1800" b="1">
+                <a:solidFill>
+                  <a:srgbClr val="E9C27C"/>
+                </a:solidFill>
+                <a:latin typeface="Microsoft YaHei"/>
+              </a:rPr>
+              <a:t>▶</a:t>
+            </a:r>
+          </a:p>
+        </p:txBody>
+      </p:sp>
+      <p:sp>
+        <p:nvSpPr>
+          <p:cNvPr id="17" name="Rounded Rectangle 16"/>
+          <p:cNvSpPr/>
+          <p:nvPr/>
+        </p:nvSpPr>
+        <p:spPr>
+          <a:xfrm>
+            <a:off x="2926080" y="1600200"/>
+            <a:ext cx="2048256" cy="2377440"/>
+          </a:xfrm>
+          <a:prstGeom prst="roundRect">
+            <a:avLst/>
+          </a:prstGeom>
+          <a:ln w="12700">
+            <a:solidFill>
+              <a:srgbClr val="4A3C7C"/>
+            </a:solidFill>
+          </a:ln>
+          <a:effectLst/>
+          <a:gradFill>
+            <a:gsLst>
+              <a:gs pos="0">
+                <a:srgbClr val="2A1E55"/>
+              </a:gs>
+              <a:gs pos="100000">
+                <a:srgbClr val="1E1542"/>
+              </a:gs>
+            </a:gsLst>
+            <a:lin ang="7200000" scaled="1"/>
+          </a:gradFill>
+        </p:spPr>
+        <p:style>
+          <a:lnRef idx="1">
+            <a:schemeClr val="accent1"/>
+          </a:lnRef>
+          <a:fillRef idx="3">
+            <a:schemeClr val="accent1"/>
+          </a:fillRef>
+          <a:effectRef idx="2">
+            <a:schemeClr val="accent1"/>
+          </a:effectRef>
+          <a:fontRef idx="minor">
+            <a:schemeClr val="lt1"/>
+          </a:fontRef>
+        </p:style>
+        <p:txBody>
+          <a:bodyPr rtlCol="0" anchor="ctr"/>
+          <a:lstStyle/>
+          <a:p>
+            <a:pPr algn="ctr"/>
+          </a:p>
+        </p:txBody>
+      </p:sp>
+      <p:sp>
+        <p:nvSpPr>
+          <p:cNvPr id="18" name="Rectangle 17"/>
+          <p:cNvSpPr/>
+          <p:nvPr/>
+        </p:nvSpPr>
+        <p:spPr>
+          <a:xfrm>
+            <a:off x="2926080" y="1600200"/>
+            <a:ext cx="64008" cy="2377440"/>
+          </a:xfrm>
+          <a:prstGeom prst="rect">
+            <a:avLst/>
+          </a:prstGeom>
+          <a:solidFill>
+            <a:srgbClr val="8B7BFF"/>
+          </a:solidFill>
+          <a:ln>
+            <a:noFill/>
+          </a:ln>
+          <a:effectLst/>
+        </p:spPr>
+        <p:style>
+          <a:lnRef idx="1">
+            <a:schemeClr val="accent1"/>
+          </a:lnRef>
+          <a:fillRef idx="3">
+            <a:schemeClr val="accent1"/>
+          </a:fillRef>
+          <a:effectRef idx="2">
+            <a:schemeClr val="accent1"/>
+          </a:effectRef>
+          <a:fontRef idx="minor">
+            <a:schemeClr val="lt1"/>
+          </a:fontRef>
+        </p:style>
+        <p:txBody>
+          <a:bodyPr rtlCol="0" anchor="ctr"/>
+          <a:lstStyle/>
+          <a:p>
+            <a:pPr algn="ctr"/>
+          </a:p>
+        </p:txBody>
+      </p:sp>
+      <p:sp>
+        <p:nvSpPr>
+          <p:cNvPr id="19" name="TextBox 18"/>
+          <p:cNvSpPr txBox="1"/>
+          <p:nvPr/>
+        </p:nvSpPr>
+        <p:spPr>
+          <a:xfrm>
+            <a:off x="3145536" y="1737360"/>
+            <a:ext cx="1463040" cy="365760"/>
+          </a:xfrm>
+          <a:prstGeom prst="rect">
+            <a:avLst/>
+          </a:prstGeom>
+          <a:noFill/>
+        </p:spPr>
+        <p:txBody>
+          <a:bodyPr wrap="square" anchor="t" lIns="25400" rIns="25400" tIns="12700" bIns="12700">
+            <a:spAutoFit/>
+          </a:bodyPr>
+          <a:lstStyle/>
+          <a:p>
+            <a:pPr algn="l">
+              <a:lnSpc>
+                <a:spcPct val="100000"/>
+              </a:lnSpc>
+            </a:pPr>
+            <a:r>
+              <a:rPr sz="1300" b="1">
+                <a:solidFill>
+                  <a:srgbClr val="8B7BFF"/>
+                </a:solidFill>
+                <a:latin typeface="Arial"/>
+              </a:rPr>
+              <a:t>STEP 2</a:t>
+            </a:r>
+          </a:p>
+        </p:txBody>
+      </p:sp>
+      <p:sp>
+        <p:nvSpPr>
+          <p:cNvPr id="20" name="TextBox 19"/>
+          <p:cNvSpPr txBox="1"/>
+          <p:nvPr/>
+        </p:nvSpPr>
+        <p:spPr>
+          <a:xfrm>
+            <a:off x="3145536" y="2084831"/>
+            <a:ext cx="1682496" cy="365760"/>
+          </a:xfrm>
+          <a:prstGeom prst="rect">
+            <a:avLst/>
+          </a:prstGeom>
+          <a:noFill/>
+        </p:spPr>
+        <p:txBody>
+          <a:bodyPr wrap="square" anchor="t" lIns="25400" rIns="25400" tIns="12700" bIns="12700">
+            <a:spAutoFit/>
+          </a:bodyPr>
+          <a:lstStyle/>
+          <a:p>
+            <a:pPr algn="l">
+              <a:lnSpc>
+                <a:spcPct val="100000"/>
+              </a:lnSpc>
+            </a:pPr>
+            <a:r>
+              <a:rPr sz="1400" b="1">
+                <a:solidFill>
+                  <a:srgbClr val="F5F1FF"/>
+                </a:solidFill>
+                <a:latin typeface="Microsoft YaHei"/>
+              </a:rPr>
+              <a:t>需求画像</a:t>
+            </a:r>
+          </a:p>
+        </p:txBody>
+      </p:sp>
+      <p:sp>
+        <p:nvSpPr>
+          <p:cNvPr id="21" name="TextBox 20"/>
+          <p:cNvSpPr txBox="1"/>
+          <p:nvPr/>
+        </p:nvSpPr>
+        <p:spPr>
+          <a:xfrm>
+            <a:off x="3145536" y="2487168"/>
+            <a:ext cx="1682496" cy="1371600"/>
+          </a:xfrm>
+          <a:prstGeom prst="rect">
+            <a:avLst/>
+          </a:prstGeom>
+          <a:noFill/>
+        </p:spPr>
+        <p:txBody>
+          <a:bodyPr wrap="square" anchor="t" lIns="25400" rIns="25400" tIns="12700" bIns="12700">
+            <a:spAutoFit/>
+          </a:bodyPr>
+          <a:lstStyle/>
+          <a:p>
+            <a:pPr algn="l">
+              <a:lnSpc>
+                <a:spcPct val="118000"/>
+              </a:lnSpc>
+            </a:pPr>
+            <a:r>
+              <a:rPr sz="980" b="0">
+                <a:solidFill>
+                  <a:srgbClr val="C6BAEA"/>
+                </a:solidFill>
+                <a:latin typeface="Microsoft YaHei"/>
+              </a:rPr>
+              <a:t>按国别梳理供需清单：
+企业出海意向 × 国别
+市场准入与政策研判</a:t>
+            </a:r>
+          </a:p>
+        </p:txBody>
+      </p:sp>
+      <p:sp>
+        <p:nvSpPr>
+          <p:cNvPr id="22" name="TextBox 21"/>
+          <p:cNvSpPr txBox="1"/>
+          <p:nvPr/>
+        </p:nvSpPr>
+        <p:spPr>
+          <a:xfrm>
+            <a:off x="4974336" y="2468880"/>
+            <a:ext cx="457200" cy="548640"/>
+          </a:xfrm>
+          <a:prstGeom prst="rect">
+            <a:avLst/>
+          </a:prstGeom>
+          <a:noFill/>
+        </p:spPr>
+        <p:txBody>
+          <a:bodyPr wrap="square" anchor="ctr" lIns="25400" rIns="25400" tIns="12700" bIns="12700">
+            <a:spAutoFit/>
+          </a:bodyPr>
+          <a:lstStyle/>
+          <a:p>
+            <a:pPr algn="ctr">
+              <a:lnSpc>
+                <a:spcPct val="100000"/>
+              </a:lnSpc>
+            </a:pPr>
+            <a:r>
+              <a:rPr sz="1800" b="1">
+                <a:solidFill>
+                  <a:srgbClr val="E9C27C"/>
+                </a:solidFill>
+                <a:latin typeface="Microsoft YaHei"/>
+              </a:rPr>
+              <a:t>▶</a:t>
+            </a:r>
+          </a:p>
+        </p:txBody>
+      </p:sp>
+      <p:sp>
+        <p:nvSpPr>
+          <p:cNvPr id="23" name="Rounded Rectangle 22"/>
+          <p:cNvSpPr/>
+          <p:nvPr/>
+        </p:nvSpPr>
+        <p:spPr>
+          <a:xfrm>
+            <a:off x="5074920" y="1600200"/>
+            <a:ext cx="2048256" cy="2377440"/>
+          </a:xfrm>
+          <a:prstGeom prst="roundRect">
+            <a:avLst/>
+          </a:prstGeom>
+          <a:ln w="12700">
+            <a:solidFill>
+              <a:srgbClr val="4A3C7C"/>
+            </a:solidFill>
+          </a:ln>
+          <a:effectLst/>
+          <a:gradFill>
+            <a:gsLst>
+              <a:gs pos="0">
+                <a:srgbClr val="2A1E55"/>
+              </a:gs>
+              <a:gs pos="100000">
+                <a:srgbClr val="1E1542"/>
+              </a:gs>
+            </a:gsLst>
+            <a:lin ang="7200000" scaled="1"/>
+          </a:gradFill>
+        </p:spPr>
+        <p:style>
+          <a:lnRef idx="1">
+            <a:schemeClr val="accent1"/>
+          </a:lnRef>
+          <a:fillRef idx="3">
+            <a:schemeClr val="accent1"/>
+          </a:fillRef>
+          <a:effectRef idx="2">
+            <a:schemeClr val="accent1"/>
+          </a:effectRef>
+          <a:fontRef idx="minor">
+            <a:schemeClr val="lt1"/>
+          </a:fontRef>
+        </p:style>
+        <p:txBody>
+          <a:bodyPr rtlCol="0" anchor="ctr"/>
+          <a:lstStyle/>
+          <a:p>
+            <a:pPr algn="ctr"/>
+          </a:p>
+        </p:txBody>
+      </p:sp>
+      <p:sp>
+        <p:nvSpPr>
+          <p:cNvPr id="24" name="Rectangle 23"/>
+          <p:cNvSpPr/>
+          <p:nvPr/>
+        </p:nvSpPr>
+        <p:spPr>
+          <a:xfrm>
+            <a:off x="5074920" y="1600200"/>
+            <a:ext cx="64008" cy="2377440"/>
+          </a:xfrm>
+          <a:prstGeom prst="rect">
+            <a:avLst/>
+          </a:prstGeom>
+          <a:solidFill>
+            <a:srgbClr val="C77DFF"/>
+          </a:solidFill>
+          <a:ln>
+            <a:noFill/>
+          </a:ln>
+          <a:effectLst/>
+        </p:spPr>
+        <p:style>
+          <a:lnRef idx="1">
+            <a:schemeClr val="accent1"/>
+          </a:lnRef>
+          <a:fillRef idx="3">
+            <a:schemeClr val="accent1"/>
+          </a:fillRef>
+          <a:effectRef idx="2">
+            <a:schemeClr val="accent1"/>
+          </a:effectRef>
+          <a:fontRef idx="minor">
+            <a:schemeClr val="lt1"/>
+          </a:fontRef>
+        </p:style>
+        <p:txBody>
+          <a:bodyPr rtlCol="0" anchor="ctr"/>
+          <a:lstStyle/>
+          <a:p>
+            <a:pPr algn="ctr"/>
+          </a:p>
+        </p:txBody>
+      </p:sp>
+      <p:sp>
+        <p:nvSpPr>
+          <p:cNvPr id="25" name="TextBox 24"/>
+          <p:cNvSpPr txBox="1"/>
+          <p:nvPr/>
+        </p:nvSpPr>
+        <p:spPr>
+          <a:xfrm>
+            <a:off x="5294376" y="1737360"/>
+            <a:ext cx="1463040" cy="365760"/>
+          </a:xfrm>
+          <a:prstGeom prst="rect">
+            <a:avLst/>
+          </a:prstGeom>
+          <a:noFill/>
+        </p:spPr>
+        <p:txBody>
+          <a:bodyPr wrap="square" anchor="t" lIns="25400" rIns="25400" tIns="12700" bIns="12700">
+            <a:spAutoFit/>
+          </a:bodyPr>
+          <a:lstStyle/>
+          <a:p>
+            <a:pPr algn="l">
+              <a:lnSpc>
+                <a:spcPct val="100000"/>
+              </a:lnSpc>
+            </a:pPr>
+            <a:r>
+              <a:rPr sz="1300" b="1">
+                <a:solidFill>
+                  <a:srgbClr val="C77DFF"/>
+                </a:solidFill>
+                <a:latin typeface="Arial"/>
+              </a:rPr>
+              <a:t>STEP 3</a:t>
+            </a:r>
+          </a:p>
+        </p:txBody>
+      </p:sp>
+      <p:sp>
+        <p:nvSpPr>
+          <p:cNvPr id="26" name="TextBox 25"/>
+          <p:cNvSpPr txBox="1"/>
+          <p:nvPr/>
+        </p:nvSpPr>
+        <p:spPr>
+          <a:xfrm>
+            <a:off x="5294376" y="2084831"/>
+            <a:ext cx="1682496" cy="365760"/>
+          </a:xfrm>
+          <a:prstGeom prst="rect">
+            <a:avLst/>
+          </a:prstGeom>
+          <a:noFill/>
+        </p:spPr>
+        <p:txBody>
+          <a:bodyPr wrap="square" anchor="t" lIns="25400" rIns="25400" tIns="12700" bIns="12700">
+            <a:spAutoFit/>
+          </a:bodyPr>
+          <a:lstStyle/>
+          <a:p>
+            <a:pPr algn="l">
+              <a:lnSpc>
+                <a:spcPct val="100000"/>
+              </a:lnSpc>
+            </a:pPr>
+            <a:r>
+              <a:rPr sz="1400" b="1">
+                <a:solidFill>
+                  <a:srgbClr val="F5F1FF"/>
+                </a:solidFill>
+                <a:latin typeface="Microsoft YaHei"/>
+              </a:rPr>
+              <a:t>领事撮合</a:t>
+            </a:r>
+          </a:p>
+        </p:txBody>
+      </p:sp>
+      <p:sp>
+        <p:nvSpPr>
+          <p:cNvPr id="27" name="TextBox 26"/>
+          <p:cNvSpPr txBox="1"/>
+          <p:nvPr/>
+        </p:nvSpPr>
+        <p:spPr>
+          <a:xfrm>
+            <a:off x="5294376" y="2487168"/>
+            <a:ext cx="1682496" cy="1371600"/>
+          </a:xfrm>
+          <a:prstGeom prst="rect">
+            <a:avLst/>
+          </a:prstGeom>
+          <a:noFill/>
+        </p:spPr>
+        <p:txBody>
+          <a:bodyPr wrap="square" anchor="t" lIns="25400" rIns="25400" tIns="12700" bIns="12700">
+            <a:spAutoFit/>
+          </a:bodyPr>
+          <a:lstStyle/>
+          <a:p>
+            <a:pPr algn="l">
+              <a:lnSpc>
+                <a:spcPct val="118000"/>
+              </a:lnSpc>
+            </a:pPr>
+            <a:r>
+              <a:rPr sz="980" b="0">
+                <a:solidFill>
+                  <a:srgbClr val="C6BAEA"/>
+                </a:solidFill>
+                <a:latin typeface="Microsoft YaHei"/>
+              </a:rPr>
+              <a:t>国家会客厅 / 领事专题活动：
+连领事 → 对接所在国
+商务部 / 部长级洽谈</a:t>
+            </a:r>
+          </a:p>
+        </p:txBody>
+      </p:sp>
+      <p:sp>
+        <p:nvSpPr>
+          <p:cNvPr id="28" name="TextBox 27"/>
+          <p:cNvSpPr txBox="1"/>
+          <p:nvPr/>
+        </p:nvSpPr>
+        <p:spPr>
+          <a:xfrm>
+            <a:off x="7123176" y="2468880"/>
+            <a:ext cx="457200" cy="548640"/>
+          </a:xfrm>
+          <a:prstGeom prst="rect">
+            <a:avLst/>
+          </a:prstGeom>
+          <a:noFill/>
+        </p:spPr>
+        <p:txBody>
+          <a:bodyPr wrap="square" anchor="ctr" lIns="25400" rIns="25400" tIns="12700" bIns="12700">
+            <a:spAutoFit/>
+          </a:bodyPr>
+          <a:lstStyle/>
+          <a:p>
+            <a:pPr algn="ctr">
+              <a:lnSpc>
+                <a:spcPct val="100000"/>
+              </a:lnSpc>
+            </a:pPr>
+            <a:r>
+              <a:rPr sz="1800" b="1">
+                <a:solidFill>
+                  <a:srgbClr val="E9C27C"/>
+                </a:solidFill>
+                <a:latin typeface="Microsoft YaHei"/>
+              </a:rPr>
+              <a:t>▶</a:t>
+            </a:r>
+          </a:p>
+        </p:txBody>
+      </p:sp>
+      <p:sp>
+        <p:nvSpPr>
+          <p:cNvPr id="29" name="Rounded Rectangle 28"/>
+          <p:cNvSpPr/>
+          <p:nvPr/>
+        </p:nvSpPr>
+        <p:spPr>
+          <a:xfrm>
+            <a:off x="7223760" y="1600200"/>
+            <a:ext cx="2048256" cy="2377440"/>
+          </a:xfrm>
+          <a:prstGeom prst="roundRect">
+            <a:avLst/>
+          </a:prstGeom>
+          <a:ln w="12700">
+            <a:solidFill>
+              <a:srgbClr val="4A3C7C"/>
+            </a:solidFill>
+          </a:ln>
+          <a:effectLst/>
+          <a:gradFill>
+            <a:gsLst>
+              <a:gs pos="0">
+                <a:srgbClr val="2A1E55"/>
+              </a:gs>
+              <a:gs pos="100000">
+                <a:srgbClr val="1E1542"/>
+              </a:gs>
+            </a:gsLst>
+            <a:lin ang="7200000" scaled="1"/>
+          </a:gradFill>
+        </p:spPr>
+        <p:style>
+          <a:lnRef idx="1">
+            <a:schemeClr val="accent1"/>
+          </a:lnRef>
+          <a:fillRef idx="3">
+            <a:schemeClr val="accent1"/>
+          </a:fillRef>
+          <a:effectRef idx="2">
+            <a:schemeClr val="accent1"/>
+          </a:effectRef>
+          <a:fontRef idx="minor">
+            <a:schemeClr val="lt1"/>
+          </a:fontRef>
+        </p:style>
+        <p:txBody>
+          <a:bodyPr rtlCol="0" anchor="ctr"/>
+          <a:lstStyle/>
+          <a:p>
+            <a:pPr algn="ctr"/>
+          </a:p>
+        </p:txBody>
+      </p:sp>
+      <p:sp>
+        <p:nvSpPr>
+          <p:cNvPr id="30" name="Rectangle 29"/>
+          <p:cNvSpPr/>
+          <p:nvPr/>
+        </p:nvSpPr>
+        <p:spPr>
+          <a:xfrm>
+            <a:off x="7223760" y="1600200"/>
+            <a:ext cx="64008" cy="2377440"/>
+          </a:xfrm>
+          <a:prstGeom prst="rect">
+            <a:avLst/>
+          </a:prstGeom>
+          <a:solidFill>
+            <a:srgbClr val="56D6B6"/>
+          </a:solidFill>
+          <a:ln>
+            <a:noFill/>
+          </a:ln>
+          <a:effectLst/>
+        </p:spPr>
+        <p:style>
+          <a:lnRef idx="1">
+            <a:schemeClr val="accent1"/>
+          </a:lnRef>
+          <a:fillRef idx="3">
+            <a:schemeClr val="accent1"/>
+          </a:fillRef>
+          <a:effectRef idx="2">
+            <a:schemeClr val="accent1"/>
+          </a:effectRef>
+          <a:fontRef idx="minor">
+            <a:schemeClr val="lt1"/>
+          </a:fontRef>
+        </p:style>
+        <p:txBody>
+          <a:bodyPr rtlCol="0" anchor="ctr"/>
+          <a:lstStyle/>
+          <a:p>
+            <a:pPr algn="ctr"/>
+          </a:p>
+        </p:txBody>
+      </p:sp>
+      <p:sp>
+        <p:nvSpPr>
+          <p:cNvPr id="31" name="TextBox 30"/>
+          <p:cNvSpPr txBox="1"/>
+          <p:nvPr/>
+        </p:nvSpPr>
+        <p:spPr>
+          <a:xfrm>
+            <a:off x="7443216" y="1737360"/>
+            <a:ext cx="1463040" cy="365760"/>
+          </a:xfrm>
+          <a:prstGeom prst="rect">
+            <a:avLst/>
+          </a:prstGeom>
+          <a:noFill/>
+        </p:spPr>
+        <p:txBody>
+          <a:bodyPr wrap="square" anchor="t" lIns="25400" rIns="25400" tIns="12700" bIns="12700">
+            <a:spAutoFit/>
+          </a:bodyPr>
+          <a:lstStyle/>
+          <a:p>
+            <a:pPr algn="l">
+              <a:lnSpc>
+                <a:spcPct val="100000"/>
+              </a:lnSpc>
+            </a:pPr>
+            <a:r>
+              <a:rPr sz="1300" b="1">
+                <a:solidFill>
+                  <a:srgbClr val="56D6B6"/>
+                </a:solidFill>
+                <a:latin typeface="Arial"/>
+              </a:rPr>
+              <a:t>STEP 4</a:t>
+            </a:r>
+          </a:p>
+        </p:txBody>
+      </p:sp>
+      <p:sp>
+        <p:nvSpPr>
+          <p:cNvPr id="32" name="TextBox 31"/>
+          <p:cNvSpPr txBox="1"/>
+          <p:nvPr/>
+        </p:nvSpPr>
+        <p:spPr>
+          <a:xfrm>
+            <a:off x="7443216" y="2084831"/>
+            <a:ext cx="1682496" cy="365760"/>
+          </a:xfrm>
+          <a:prstGeom prst="rect">
+            <a:avLst/>
+          </a:prstGeom>
+          <a:noFill/>
+        </p:spPr>
+        <p:txBody>
+          <a:bodyPr wrap="square" anchor="t" lIns="25400" rIns="25400" tIns="12700" bIns="12700">
+            <a:spAutoFit/>
+          </a:bodyPr>
+          <a:lstStyle/>
+          <a:p>
+            <a:pPr algn="l">
+              <a:lnSpc>
+                <a:spcPct val="100000"/>
+              </a:lnSpc>
+            </a:pPr>
+            <a:r>
+              <a:rPr sz="1400" b="1">
+                <a:solidFill>
+                  <a:srgbClr val="F5F1FF"/>
+                </a:solidFill>
+                <a:latin typeface="Microsoft YaHei"/>
+              </a:rPr>
+              <a:t>商务对接</a:t>
+            </a:r>
+          </a:p>
+        </p:txBody>
+      </p:sp>
+      <p:sp>
+        <p:nvSpPr>
+          <p:cNvPr id="33" name="TextBox 32"/>
+          <p:cNvSpPr txBox="1"/>
+          <p:nvPr/>
+        </p:nvSpPr>
+        <p:spPr>
+          <a:xfrm>
+            <a:off x="7443216" y="2487168"/>
+            <a:ext cx="1682496" cy="1371600"/>
+          </a:xfrm>
+          <a:prstGeom prst="rect">
+            <a:avLst/>
+          </a:prstGeom>
+          <a:noFill/>
+        </p:spPr>
+        <p:txBody>
+          <a:bodyPr wrap="square" anchor="t" lIns="25400" rIns="25400" tIns="12700" bIns="12700">
+            <a:spAutoFit/>
+          </a:bodyPr>
+          <a:lstStyle/>
+          <a:p>
+            <a:pPr algn="l">
+              <a:lnSpc>
+                <a:spcPct val="118000"/>
+              </a:lnSpc>
+            </a:pPr>
+            <a:r>
+              <a:rPr sz="980" b="0">
+                <a:solidFill>
+                  <a:srgbClr val="C6BAEA"/>
+                </a:solidFill>
+                <a:latin typeface="Microsoft YaHei"/>
+              </a:rPr>
+              <a:t>国别推介会 / 买家团来访 /
+出海考察团（B2B 配对）
+展厅选品 · 样品确认</a:t>
+            </a:r>
+          </a:p>
+        </p:txBody>
+      </p:sp>
+      <p:sp>
+        <p:nvSpPr>
+          <p:cNvPr id="34" name="TextBox 33"/>
+          <p:cNvSpPr txBox="1"/>
+          <p:nvPr/>
+        </p:nvSpPr>
+        <p:spPr>
+          <a:xfrm>
+            <a:off x="9272016" y="2468880"/>
+            <a:ext cx="457200" cy="548640"/>
+          </a:xfrm>
+          <a:prstGeom prst="rect">
+            <a:avLst/>
+          </a:prstGeom>
+          <a:noFill/>
+        </p:spPr>
+        <p:txBody>
+          <a:bodyPr wrap="square" anchor="ctr" lIns="25400" rIns="25400" tIns="12700" bIns="12700">
+            <a:spAutoFit/>
+          </a:bodyPr>
+          <a:lstStyle/>
+          <a:p>
+            <a:pPr algn="ctr">
+              <a:lnSpc>
+                <a:spcPct val="100000"/>
+              </a:lnSpc>
+            </a:pPr>
+            <a:r>
+              <a:rPr sz="1800" b="1">
+                <a:solidFill>
+                  <a:srgbClr val="E9C27C"/>
+                </a:solidFill>
+                <a:latin typeface="Microsoft YaHei"/>
+              </a:rPr>
+              <a:t>▶</a:t>
+            </a:r>
+          </a:p>
+        </p:txBody>
+      </p:sp>
+      <p:sp>
+        <p:nvSpPr>
+          <p:cNvPr id="35" name="Rounded Rectangle 34"/>
+          <p:cNvSpPr/>
+          <p:nvPr/>
+        </p:nvSpPr>
+        <p:spPr>
+          <a:xfrm>
+            <a:off x="9372600" y="1600200"/>
+            <a:ext cx="2048256" cy="2377440"/>
+          </a:xfrm>
+          <a:prstGeom prst="roundRect">
+            <a:avLst/>
+          </a:prstGeom>
+          <a:ln w="12700">
+            <a:solidFill>
+              <a:srgbClr val="4A3C7C"/>
+            </a:solidFill>
+          </a:ln>
+          <a:effectLst/>
+          <a:gradFill>
+            <a:gsLst>
+              <a:gs pos="0">
+                <a:srgbClr val="2A1E55"/>
+              </a:gs>
+              <a:gs pos="100000">
+                <a:srgbClr val="1E1542"/>
+              </a:gs>
+            </a:gsLst>
+            <a:lin ang="7200000" scaled="1"/>
+          </a:gradFill>
+        </p:spPr>
+        <p:style>
+          <a:lnRef idx="1">
+            <a:schemeClr val="accent1"/>
+          </a:lnRef>
+          <a:fillRef idx="3">
+            <a:schemeClr val="accent1"/>
+          </a:fillRef>
+          <a:effectRef idx="2">
+            <a:schemeClr val="accent1"/>
+          </a:effectRef>
+          <a:fontRef idx="minor">
+            <a:schemeClr val="lt1"/>
+          </a:fontRef>
+        </p:style>
+        <p:txBody>
+          <a:bodyPr rtlCol="0" anchor="ctr"/>
+          <a:lstStyle/>
+          <a:p>
+            <a:pPr algn="ctr"/>
+          </a:p>
+        </p:txBody>
+      </p:sp>
+      <p:sp>
+        <p:nvSpPr>
+          <p:cNvPr id="36" name="Rectangle 35"/>
+          <p:cNvSpPr/>
+          <p:nvPr/>
+        </p:nvSpPr>
+        <p:spPr>
+          <a:xfrm>
+            <a:off x="9372600" y="1600200"/>
+            <a:ext cx="64008" cy="2377440"/>
+          </a:xfrm>
+          <a:prstGeom prst="rect">
+            <a:avLst/>
+          </a:prstGeom>
+          <a:solidFill>
+            <a:srgbClr val="F58BB8"/>
+          </a:solidFill>
+          <a:ln>
+            <a:noFill/>
+          </a:ln>
+          <a:effectLst/>
+        </p:spPr>
+        <p:style>
+          <a:lnRef idx="1">
+            <a:schemeClr val="accent1"/>
+          </a:lnRef>
+          <a:fillRef idx="3">
+            <a:schemeClr val="accent1"/>
+          </a:fillRef>
+          <a:effectRef idx="2">
+            <a:schemeClr val="accent1"/>
+          </a:effectRef>
+          <a:fontRef idx="minor">
+            <a:schemeClr val="lt1"/>
+          </a:fontRef>
+        </p:style>
+        <p:txBody>
+          <a:bodyPr rtlCol="0" anchor="ctr"/>
+          <a:lstStyle/>
+          <a:p>
+            <a:pPr algn="ctr"/>
+          </a:p>
+        </p:txBody>
+      </p:sp>
+      <p:sp>
+        <p:nvSpPr>
+          <p:cNvPr id="37" name="TextBox 36"/>
+          <p:cNvSpPr txBox="1"/>
+          <p:nvPr/>
+        </p:nvSpPr>
+        <p:spPr>
+          <a:xfrm>
+            <a:off x="9592056" y="1737360"/>
+            <a:ext cx="1463040" cy="365760"/>
+          </a:xfrm>
+          <a:prstGeom prst="rect">
+            <a:avLst/>
+          </a:prstGeom>
+          <a:noFill/>
+        </p:spPr>
+        <p:txBody>
+          <a:bodyPr wrap="square" anchor="t" lIns="25400" rIns="25400" tIns="12700" bIns="12700">
+            <a:spAutoFit/>
+          </a:bodyPr>
+          <a:lstStyle/>
+          <a:p>
+            <a:pPr algn="l">
+              <a:lnSpc>
+                <a:spcPct val="100000"/>
+              </a:lnSpc>
+            </a:pPr>
+            <a:r>
+              <a:rPr sz="1300" b="1">
+                <a:solidFill>
+                  <a:srgbClr val="F58BB8"/>
+                </a:solidFill>
+                <a:latin typeface="Arial"/>
+              </a:rPr>
+              <a:t>STEP 5</a:t>
+            </a:r>
+          </a:p>
+        </p:txBody>
+      </p:sp>
+      <p:sp>
+        <p:nvSpPr>
+          <p:cNvPr id="38" name="TextBox 37"/>
+          <p:cNvSpPr txBox="1"/>
+          <p:nvPr/>
+        </p:nvSpPr>
+        <p:spPr>
+          <a:xfrm>
+            <a:off x="9592056" y="2084831"/>
+            <a:ext cx="1682496" cy="365760"/>
+          </a:xfrm>
+          <a:prstGeom prst="rect">
+            <a:avLst/>
+          </a:prstGeom>
+          <a:noFill/>
+        </p:spPr>
+        <p:txBody>
+          <a:bodyPr wrap="square" anchor="t" lIns="25400" rIns="25400" tIns="12700" bIns="12700">
+            <a:spAutoFit/>
+          </a:bodyPr>
+          <a:lstStyle/>
+          <a:p>
+            <a:pPr algn="l">
+              <a:lnSpc>
+                <a:spcPct val="100000"/>
+              </a:lnSpc>
+            </a:pPr>
+            <a:r>
+              <a:rPr sz="1400" b="1">
+                <a:solidFill>
+                  <a:srgbClr val="F5F1FF"/>
+                </a:solidFill>
+                <a:latin typeface="Microsoft YaHei"/>
+              </a:rPr>
+              <a:t>订单落地</a:t>
+            </a:r>
+          </a:p>
+        </p:txBody>
+      </p:sp>
+      <p:sp>
+        <p:nvSpPr>
+          <p:cNvPr id="39" name="TextBox 38"/>
+          <p:cNvSpPr txBox="1"/>
+          <p:nvPr/>
+        </p:nvSpPr>
+        <p:spPr>
+          <a:xfrm>
+            <a:off x="9592056" y="2487168"/>
+            <a:ext cx="1682496" cy="1371600"/>
+          </a:xfrm>
+          <a:prstGeom prst="rect">
+            <a:avLst/>
+          </a:prstGeom>
+          <a:noFill/>
+        </p:spPr>
+        <p:txBody>
+          <a:bodyPr wrap="square" anchor="t" lIns="25400" rIns="25400" tIns="12700" bIns="12700">
+            <a:spAutoFit/>
+          </a:bodyPr>
+          <a:lstStyle/>
+          <a:p>
+            <a:pPr algn="l">
+              <a:lnSpc>
+                <a:spcPct val="118000"/>
+              </a:lnSpc>
+            </a:pPr>
+            <a:r>
+              <a:rPr sz="980" b="0">
+                <a:solidFill>
+                  <a:srgbClr val="C6BAEA"/>
+                </a:solidFill>
+                <a:latin typeface="Microsoft YaHei"/>
+              </a:rPr>
+              <a:t>签约 → 履约交付 → 结算
+订单扣点反哺租金
+超额进合资公司分配</a:t>
+            </a:r>
+          </a:p>
+        </p:txBody>
+      </p:sp>
+      <p:sp>
+        <p:nvSpPr>
+          <p:cNvPr id="40" name="Rounded Rectangle 39"/>
+          <p:cNvSpPr/>
+          <p:nvPr/>
+        </p:nvSpPr>
+        <p:spPr>
+          <a:xfrm>
+            <a:off x="777240" y="4206240"/>
+            <a:ext cx="10634472" cy="1691640"/>
+          </a:xfrm>
+          <a:prstGeom prst="roundRect">
+            <a:avLst/>
+          </a:prstGeom>
+          <a:ln w="15875">
+            <a:solidFill>
+              <a:srgbClr val="E9C27C"/>
+            </a:solidFill>
+          </a:ln>
+          <a:effectLst/>
+          <a:gradFill>
+            <a:gsLst>
+              <a:gs pos="0">
+                <a:srgbClr val="3A2878"/>
+              </a:gs>
+              <a:gs pos="100000">
+                <a:srgbClr val="2A1E55"/>
+              </a:gs>
+            </a:gsLst>
+            <a:lin ang="0" scaled="1"/>
+          </a:gradFill>
+        </p:spPr>
+        <p:style>
+          <a:lnRef idx="1">
+            <a:schemeClr val="accent1"/>
+          </a:lnRef>
+          <a:fillRef idx="3">
+            <a:schemeClr val="accent1"/>
+          </a:fillRef>
+          <a:effectRef idx="2">
+            <a:schemeClr val="accent1"/>
+          </a:effectRef>
+          <a:fontRef idx="minor">
+            <a:schemeClr val="lt1"/>
+          </a:fontRef>
+        </p:style>
+        <p:txBody>
+          <a:bodyPr rtlCol="0" anchor="ctr"/>
+          <a:lstStyle/>
+          <a:p>
+            <a:pPr algn="ctr"/>
+          </a:p>
+        </p:txBody>
+      </p:sp>
+      <p:sp>
+        <p:nvSpPr>
+          <p:cNvPr id="41" name="TextBox 40"/>
+          <p:cNvSpPr txBox="1"/>
+          <p:nvPr/>
+        </p:nvSpPr>
+        <p:spPr>
+          <a:xfrm>
+            <a:off x="1005840" y="4315968"/>
+            <a:ext cx="10241280" cy="365760"/>
+          </a:xfrm>
+          <a:prstGeom prst="rect">
+            <a:avLst/>
+          </a:prstGeom>
+          <a:noFill/>
+        </p:spPr>
+        <p:txBody>
+          <a:bodyPr wrap="square" anchor="t" lIns="25400" rIns="25400" tIns="12700" bIns="12700">
+            <a:spAutoFit/>
+          </a:bodyPr>
+          <a:lstStyle/>
+          <a:p>
+            <a:pPr algn="l">
+              <a:lnSpc>
+                <a:spcPct val="100000"/>
+              </a:lnSpc>
+            </a:pPr>
+            <a:r>
+              <a:rPr sz="1300" b="1">
+                <a:solidFill>
+                  <a:srgbClr val="E9C27C"/>
+                </a:solidFill>
+                <a:latin typeface="Microsoft YaHei"/>
+              </a:rPr>
+              <a:t>双向撮合方法　</a:t>
+            </a:r>
+            <a:r>
+              <a:rPr sz="1300" b="0">
+                <a:solidFill>
+                  <a:srgbClr val="F5F1FF"/>
+                </a:solidFill>
+                <a:latin typeface="Microsoft YaHei"/>
+              </a:rPr>
+              <a:t>「走出去」与「引进来」同一套领事通路，双向取酬。</a:t>
+            </a:r>
+          </a:p>
+        </p:txBody>
+      </p:sp>
+      <p:sp>
+        <p:nvSpPr>
+          <p:cNvPr id="42" name="TextBox 41"/>
+          <p:cNvSpPr txBox="1"/>
+          <p:nvPr/>
+        </p:nvSpPr>
+        <p:spPr>
+          <a:xfrm>
+            <a:off x="1005840" y="4709160"/>
+            <a:ext cx="5120640" cy="1097280"/>
+          </a:xfrm>
+          <a:prstGeom prst="rect">
+            <a:avLst/>
+          </a:prstGeom>
+          <a:noFill/>
+        </p:spPr>
+        <p:txBody>
+          <a:bodyPr wrap="square" lIns="25400" tIns="25400">
+            <a:spAutoFit/>
+          </a:bodyPr>
+          <a:lstStyle/>
+          <a:p>
+            <a:pPr>
+              <a:lnSpc>
+                <a:spcPct val="118000"/>
+              </a:lnSpc>
+              <a:spcAft>
+                <a:spcPts val="500"/>
+              </a:spcAft>
+            </a:pPr>
+            <a:r>
+              <a:rPr sz="1100">
+                <a:solidFill>
+                  <a:srgbClr val="E9C27C"/>
+                </a:solidFill>
+                <a:latin typeface="Microsoft YaHei"/>
+              </a:rPr>
+              <a:t>▪  </a:t>
+            </a:r>
+            <a:r>
+              <a:rPr sz="1100">
+                <a:solidFill>
+                  <a:srgbClr val="C6BAEA"/>
+                </a:solidFill>
+                <a:latin typeface="Microsoft YaHei"/>
+              </a:rPr>
+              <a:t>走出去：企业产品池 → 国别推介 → 海外买家 → 订单出口</a:t>
+            </a:r>
+          </a:p>
+          <a:p>
+            <a:pPr>
+              <a:lnSpc>
+                <a:spcPct val="118000"/>
+              </a:lnSpc>
+              <a:spcAft>
+                <a:spcPts val="500"/>
+              </a:spcAft>
+            </a:pPr>
+            <a:r>
+              <a:rPr sz="1100">
+                <a:solidFill>
+                  <a:srgbClr val="E9C27C"/>
+                </a:solidFill>
+                <a:latin typeface="Microsoft YaHei"/>
+              </a:rPr>
+              <a:t>▪  </a:t>
+            </a:r>
+            <a:r>
+              <a:rPr sz="1100">
+                <a:solidFill>
+                  <a:srgbClr val="C6BAEA"/>
+                </a:solidFill>
+                <a:latin typeface="Microsoft YaHei"/>
+              </a:rPr>
+              <a:t>引进来：领事引荐海外品牌/买家 → 5F 展厅落地 → 采购中国供应链</a:t>
+            </a:r>
+          </a:p>
+        </p:txBody>
+      </p:sp>
+      <p:sp>
+        <p:nvSpPr>
+          <p:cNvPr id="43" name="TextBox 42"/>
+          <p:cNvSpPr txBox="1"/>
+          <p:nvPr/>
+        </p:nvSpPr>
+        <p:spPr>
+          <a:xfrm>
+            <a:off x="6309360" y="4709160"/>
+            <a:ext cx="5029200" cy="1097280"/>
+          </a:xfrm>
+          <a:prstGeom prst="rect">
+            <a:avLst/>
+          </a:prstGeom>
+          <a:noFill/>
+        </p:spPr>
+        <p:txBody>
+          <a:bodyPr wrap="square" lIns="25400" tIns="25400">
+            <a:spAutoFit/>
+          </a:bodyPr>
+          <a:lstStyle/>
+          <a:p>
+            <a:pPr>
+              <a:lnSpc>
+                <a:spcPct val="118000"/>
+              </a:lnSpc>
+              <a:spcAft>
+                <a:spcPts val="500"/>
+              </a:spcAft>
+            </a:pPr>
+            <a:r>
+              <a:rPr sz="1100">
+                <a:solidFill>
+                  <a:srgbClr val="E9C27C"/>
+                </a:solidFill>
+                <a:latin typeface="Microsoft YaHei"/>
+              </a:rPr>
+              <a:t>▪  </a:t>
+            </a:r>
+            <a:r>
+              <a:rPr sz="1100">
+                <a:solidFill>
+                  <a:srgbClr val="C6BAEA"/>
+                </a:solidFill>
+                <a:latin typeface="Microsoft YaHei"/>
+              </a:rPr>
+              <a:t>高频活动养通路：领事午餐会/国别论坛/买家团（纳入年度 30 场）</a:t>
+            </a:r>
+          </a:p>
+          <a:p>
+            <a:pPr>
+              <a:lnSpc>
+                <a:spcPct val="118000"/>
+              </a:lnSpc>
+              <a:spcAft>
+                <a:spcPts val="500"/>
+              </a:spcAft>
+            </a:pPr>
+            <a:r>
+              <a:rPr sz="1100">
+                <a:solidFill>
+                  <a:srgbClr val="E9C27C"/>
+                </a:solidFill>
+                <a:latin typeface="Microsoft YaHei"/>
+              </a:rPr>
+              <a:t>▪  </a:t>
+            </a:r>
+            <a:r>
+              <a:rPr sz="1100">
+                <a:solidFill>
+                  <a:srgbClr val="C6BAEA"/>
+                </a:solidFill>
+                <a:latin typeface="Microsoft YaHei"/>
+              </a:rPr>
+              <a:t>取酬：撮合佣金 1%–3% + 单国服务包 + 会籍 + 订单扣点反哺租金</a:t>
+            </a:r>
+          </a:p>
+        </p:txBody>
+      </p:sp>
+    </p:spTree>
+  </p:cSld>
+  <p:clrMapOvr>
+    <a:masterClrMapping/>
+  </p:clrMapOvr>
+</p:sld>
+</file>
+
+<file path=ppt/slides/slide4.xml><?xml version="1.0" encoding="utf-8"?>
+<p:sld xmlns:a="http://schemas.openxmlformats.org/drawingml/2006/main" xmlns:p="http://schemas.openxmlformats.org/presentationml/2006/main" xmlns:r="http://schemas.openxmlformats.org/officeDocument/2006/relationships">
+  <p:cSld>
+    <p:spTree>
+      <p:nvGrpSpPr>
+        <p:cNvPr id="1" name=""/>
+        <p:cNvGrpSpPr/>
+        <p:nvPr/>
+      </p:nvGrpSpPr>
+      <p:grpSpPr/>
+      <p:sp>
+        <p:nvSpPr>
+          <p:cNvPr id="2" name="Rectangle 1"/>
+          <p:cNvSpPr/>
+          <p:nvPr/>
+        </p:nvSpPr>
+        <p:spPr>
+          <a:xfrm>
+            <a:off x="0" y="0"/>
+            <a:ext cx="12191695" cy="6858000"/>
+          </a:xfrm>
+          <a:prstGeom prst="rect">
+            <a:avLst/>
+          </a:prstGeom>
+          <a:gradFill>
+            <a:gsLst>
+              <a:gs pos="0">
+                <a:srgbClr val="1A1140"/>
+              </a:gs>
+              <a:gs pos="55000">
+                <a:srgbClr val="3A206E"/>
+              </a:gs>
+              <a:gs pos="100000">
+                <a:srgbClr val="1A1140"/>
+              </a:gs>
+            </a:gsLst>
+            <a:lin ang="7200000" scaled="1"/>
+          </a:gradFill>
+          <a:ln>
+            <a:noFill/>
+          </a:ln>
+          <a:effectLst/>
+        </p:spPr>
+        <p:style>
+          <a:lnRef idx="1">
+            <a:schemeClr val="accent1"/>
+          </a:lnRef>
+          <a:fillRef idx="3">
+            <a:schemeClr val="accent1"/>
+          </a:fillRef>
+          <a:effectRef idx="2">
+            <a:schemeClr val="accent1"/>
+          </a:effectRef>
+          <a:fontRef idx="minor">
+            <a:schemeClr val="lt1"/>
+          </a:fontRef>
+        </p:style>
+        <p:txBody>
+          <a:bodyPr rtlCol="0" anchor="ctr"/>
+          <a:lstStyle/>
+          <a:p>
+            <a:pPr algn="ctr"/>
+          </a:p>
+        </p:txBody>
+      </p:sp>
+      <p:sp>
+        <p:nvSpPr>
+          <p:cNvPr id="3" name="Rectangle 2"/>
+          <p:cNvSpPr/>
+          <p:nvPr/>
+        </p:nvSpPr>
+        <p:spPr>
+          <a:xfrm>
+            <a:off x="777240" y="566928"/>
+            <a:ext cx="54864" cy="786384"/>
+          </a:xfrm>
+          <a:prstGeom prst="rect">
+            <a:avLst/>
+          </a:prstGeom>
+          <a:solidFill>
+            <a:srgbClr val="E9C27C"/>
+          </a:solidFill>
+          <a:ln>
+            <a:noFill/>
+          </a:ln>
+          <a:effectLst/>
+        </p:spPr>
+        <p:style>
+          <a:lnRef idx="1">
+            <a:schemeClr val="accent1"/>
+          </a:lnRef>
+          <a:fillRef idx="3">
+            <a:schemeClr val="accent1"/>
+          </a:fillRef>
+          <a:effectRef idx="2">
+            <a:schemeClr val="accent1"/>
+          </a:effectRef>
+          <a:fontRef idx="minor">
+            <a:schemeClr val="lt1"/>
+          </a:fontRef>
+        </p:style>
+        <p:txBody>
+          <a:bodyPr rtlCol="0" anchor="ctr"/>
+          <a:lstStyle/>
+          <a:p>
+            <a:pPr algn="ctr"/>
+          </a:p>
+        </p:txBody>
+      </p:sp>
+      <p:sp>
+        <p:nvSpPr>
+          <p:cNvPr id="4" name="TextBox 3"/>
+          <p:cNvSpPr txBox="1"/>
+          <p:nvPr/>
+        </p:nvSpPr>
+        <p:spPr>
+          <a:xfrm>
+            <a:off x="978408" y="548640"/>
+            <a:ext cx="8229600" cy="310896"/>
+          </a:xfrm>
+          <a:prstGeom prst="rect">
+            <a:avLst/>
+          </a:prstGeom>
+          <a:noFill/>
+        </p:spPr>
+        <p:txBody>
+          <a:bodyPr wrap="square" anchor="t" lIns="25400" rIns="25400" tIns="12700" bIns="12700">
+            <a:spAutoFit/>
+          </a:bodyPr>
+          <a:lstStyle/>
+          <a:p>
+            <a:pPr algn="l">
+              <a:lnSpc>
+                <a:spcPct val="100000"/>
+              </a:lnSpc>
+            </a:pPr>
+            <a:r>
+              <a:rPr sz="1250" b="1" spc="200">
+                <a:solidFill>
+                  <a:srgbClr val="E9C27C"/>
+                </a:solidFill>
+                <a:latin typeface="Arial"/>
+              </a:rPr>
+              <a:t>FACT SHEET</a:t>
+            </a:r>
+          </a:p>
+        </p:txBody>
+      </p:sp>
+      <p:sp>
+        <p:nvSpPr>
+          <p:cNvPr id="5" name="TextBox 4"/>
+          <p:cNvSpPr txBox="1"/>
+          <p:nvPr/>
+        </p:nvSpPr>
+        <p:spPr>
+          <a:xfrm>
+            <a:off x="978408" y="841248"/>
+            <a:ext cx="9509760" cy="603504"/>
+          </a:xfrm>
+          <a:prstGeom prst="rect">
+            <a:avLst/>
+          </a:prstGeom>
+          <a:noFill/>
+        </p:spPr>
+        <p:txBody>
+          <a:bodyPr wrap="square" anchor="t" lIns="25400" rIns="25400" tIns="12700" bIns="12700">
+            <a:spAutoFit/>
+          </a:bodyPr>
+          <a:lstStyle/>
+          <a:p>
+            <a:pPr algn="l">
+              <a:lnSpc>
+                <a:spcPct val="100000"/>
+              </a:lnSpc>
+            </a:pPr>
+            <a:r>
+              <a:rPr sz="2600" b="1">
+                <a:solidFill>
+                  <a:srgbClr val="F5F1FF"/>
+                </a:solidFill>
+                <a:latin typeface="Microsoft YaHei"/>
+              </a:rPr>
+              <a:t>关键信息提取 · 项目基本盘</a:t>
+            </a:r>
+          </a:p>
+        </p:txBody>
+      </p:sp>
+      <p:sp>
+        <p:nvSpPr>
+          <p:cNvPr id="6" name="TextBox 5"/>
+          <p:cNvSpPr txBox="1"/>
+          <p:nvPr/>
+        </p:nvSpPr>
+        <p:spPr>
+          <a:xfrm>
+            <a:off x="10332720" y="457200"/>
+            <a:ext cx="1417320" cy="822960"/>
+          </a:xfrm>
+          <a:prstGeom prst="rect">
+            <a:avLst/>
+          </a:prstGeom>
+          <a:noFill/>
+        </p:spPr>
+        <p:txBody>
+          <a:bodyPr wrap="square" anchor="t" lIns="25400" rIns="25400" tIns="12700" bIns="12700">
+            <a:spAutoFit/>
+          </a:bodyPr>
+          <a:lstStyle/>
+          <a:p>
+            <a:pPr algn="r">
+              <a:lnSpc>
+                <a:spcPct val="100000"/>
+              </a:lnSpc>
+            </a:pPr>
+            <a:r>
+              <a:rPr sz="4000" b="1">
+                <a:solidFill>
+                  <a:srgbClr val="E9C27C"/>
+                </a:solidFill>
+                <a:latin typeface="Arial"/>
+              </a:rPr>
+              <a:t>00</a:t>
+            </a:r>
+          </a:p>
+        </p:txBody>
+      </p:sp>
+      <p:sp>
+        <p:nvSpPr>
+          <p:cNvPr id="7" name="Rectangle 6"/>
+          <p:cNvSpPr/>
+          <p:nvPr/>
+        </p:nvSpPr>
+        <p:spPr>
+          <a:xfrm>
+            <a:off x="10561320" y="1207008"/>
+            <a:ext cx="1170432" cy="25400"/>
+          </a:xfrm>
+          <a:prstGeom prst="rect">
+            <a:avLst/>
+          </a:prstGeom>
+          <a:solidFill>
+            <a:srgbClr val="4A3C7C"/>
+          </a:solidFill>
+          <a:ln>
+            <a:noFill/>
+          </a:ln>
+          <a:effectLst/>
+        </p:spPr>
+        <p:style>
+          <a:lnRef idx="1">
+            <a:schemeClr val="accent1"/>
+          </a:lnRef>
+          <a:fillRef idx="3">
+            <a:schemeClr val="accent1"/>
+          </a:fillRef>
+          <a:effectRef idx="2">
+            <a:schemeClr val="accent1"/>
+          </a:effectRef>
+          <a:fontRef idx="minor">
+            <a:schemeClr val="lt1"/>
+          </a:fontRef>
+        </p:style>
+        <p:txBody>
+          <a:bodyPr rtlCol="0" anchor="ctr"/>
+          <a:lstStyle/>
+          <a:p>
+            <a:pPr algn="ctr"/>
+          </a:p>
+        </p:txBody>
+      </p:sp>
+      <p:sp>
+        <p:nvSpPr>
+          <p:cNvPr id="8" name="Rectangle 7"/>
+          <p:cNvSpPr/>
+          <p:nvPr/>
+        </p:nvSpPr>
+        <p:spPr>
+          <a:xfrm>
+            <a:off x="777240" y="6327648"/>
+            <a:ext cx="10634472" cy="12700"/>
+          </a:xfrm>
+          <a:prstGeom prst="rect">
+            <a:avLst/>
+          </a:prstGeom>
+          <a:solidFill>
+            <a:srgbClr val="4A3C7C"/>
+          </a:solidFill>
+          <a:ln>
+            <a:noFill/>
+          </a:ln>
+          <a:effectLst/>
+        </p:spPr>
+        <p:style>
+          <a:lnRef idx="1">
+            <a:schemeClr val="accent1"/>
+          </a:lnRef>
+          <a:fillRef idx="3">
+            <a:schemeClr val="accent1"/>
+          </a:fillRef>
+          <a:effectRef idx="2">
+            <a:schemeClr val="accent1"/>
+          </a:effectRef>
+          <a:fontRef idx="minor">
+            <a:schemeClr val="lt1"/>
+          </a:fontRef>
+        </p:style>
+        <p:txBody>
+          <a:bodyPr rtlCol="0" anchor="ctr"/>
+          <a:lstStyle/>
+          <a:p>
+            <a:pPr algn="ctr"/>
+          </a:p>
+        </p:txBody>
+      </p:sp>
+      <p:sp>
+        <p:nvSpPr>
+          <p:cNvPr id="9" name="TextBox 8"/>
+          <p:cNvSpPr txBox="1"/>
+          <p:nvPr/>
+        </p:nvSpPr>
+        <p:spPr>
+          <a:xfrm>
+            <a:off x="777240" y="6400800"/>
+            <a:ext cx="8229600" cy="292608"/>
+          </a:xfrm>
+          <a:prstGeom prst="rect">
+            <a:avLst/>
+          </a:prstGeom>
+          <a:noFill/>
+        </p:spPr>
+        <p:txBody>
+          <a:bodyPr wrap="square" anchor="t" lIns="25400" rIns="25400" tIns="12700" bIns="12700">
+            <a:spAutoFit/>
+          </a:bodyPr>
+          <a:lstStyle/>
+          <a:p>
+            <a:pPr algn="l">
+              <a:lnSpc>
+                <a:spcPct val="100000"/>
+              </a:lnSpc>
+            </a:pPr>
+            <a:r>
+              <a:rPr sz="950" b="0">
+                <a:solidFill>
+                  <a:srgbClr val="9486C4"/>
+                </a:solidFill>
+                <a:latin typeface="Microsoft YaHei"/>
+              </a:rPr>
+              <a:t>上海创智汇 </a:t>
+            </a:r>
+            <a:r>
+              <a:rPr sz="950" b="0">
+                <a:solidFill>
+                  <a:srgbClr val="9486C4"/>
+                </a:solidFill>
+                <a:latin typeface="Arial"/>
+              </a:rPr>
+              <a:t>CHUANGZHIHUI</a:t>
+            </a:r>
+            <a:r>
+              <a:rPr sz="950" b="0">
+                <a:solidFill>
+                  <a:srgbClr val="9486C4"/>
+                </a:solidFill>
+                <a:latin typeface="Microsoft YaHei"/>
+              </a:rPr>
+              <a:t>  ·  AI+数字内容无界共创港 · 6600㎡ 谈判集中汇报</a:t>
+            </a:r>
+          </a:p>
+        </p:txBody>
+      </p:sp>
+      <p:sp>
+        <p:nvSpPr>
+          <p:cNvPr id="10" name="TextBox 9"/>
+          <p:cNvSpPr txBox="1"/>
+          <p:nvPr/>
+        </p:nvSpPr>
+        <p:spPr>
+          <a:xfrm>
+            <a:off x="10241280" y="6400800"/>
+            <a:ext cx="1490472" cy="292608"/>
+          </a:xfrm>
+          <a:prstGeom prst="rect">
+            <a:avLst/>
+          </a:prstGeom>
+          <a:noFill/>
+        </p:spPr>
+        <p:txBody>
+          <a:bodyPr wrap="square" anchor="t" lIns="25400" rIns="25400" tIns="12700" bIns="12700">
+            <a:spAutoFit/>
+          </a:bodyPr>
+          <a:lstStyle/>
+          <a:p>
+            <a:pPr algn="r">
+              <a:lnSpc>
+                <a:spcPct val="100000"/>
+              </a:lnSpc>
+            </a:pPr>
+            <a:r>
+              <a:rPr sz="1050" b="1">
+                <a:solidFill>
+                  <a:srgbClr val="E9C27C"/>
+                </a:solidFill>
+                <a:latin typeface="Arial"/>
+              </a:rPr>
+              <a:t>04</a:t>
+            </a:r>
+            <a:r>
+              <a:rPr sz="1050" b="0">
+                <a:solidFill>
+                  <a:srgbClr val="9486C4"/>
+                </a:solidFill>
+                <a:latin typeface="Arial"/>
+              </a:rPr>
+              <a:t> / 44</a:t>
+            </a:r>
+          </a:p>
+        </p:txBody>
+      </p:sp>
+      <p:sp>
+        <p:nvSpPr>
+          <p:cNvPr id="11" name="Rounded Rectangle 10"/>
+          <p:cNvSpPr/>
+          <p:nvPr/>
+        </p:nvSpPr>
+        <p:spPr>
+          <a:xfrm>
+            <a:off x="777240" y="1627632"/>
+            <a:ext cx="5532120" cy="2788920"/>
+          </a:xfrm>
+          <a:prstGeom prst="roundRect">
+            <a:avLst/>
+          </a:prstGeom>
+          <a:ln w="12700">
+            <a:solidFill>
+              <a:srgbClr val="4A3C7C"/>
+            </a:solidFill>
+          </a:ln>
+          <a:effectLst/>
+          <a:gradFill>
+            <a:gsLst>
+              <a:gs pos="0">
+                <a:srgbClr val="2A1E55"/>
+              </a:gs>
+              <a:gs pos="100000">
+                <a:srgbClr val="1E1542"/>
+              </a:gs>
+            </a:gsLst>
+            <a:lin ang="7200000" scaled="1"/>
+          </a:gradFill>
+        </p:spPr>
+        <p:style>
+          <a:lnRef idx="1">
+            <a:schemeClr val="accent1"/>
+          </a:lnRef>
+          <a:fillRef idx="3">
+            <a:schemeClr val="accent1"/>
+          </a:fillRef>
+          <a:effectRef idx="2">
+            <a:schemeClr val="accent1"/>
+          </a:effectRef>
+          <a:fontRef idx="minor">
+            <a:schemeClr val="lt1"/>
+          </a:fontRef>
+        </p:style>
+        <p:txBody>
+          <a:bodyPr rtlCol="0" anchor="ctr"/>
+          <a:lstStyle/>
+          <a:p>
+            <a:pPr algn="ctr"/>
+          </a:p>
+        </p:txBody>
+      </p:sp>
+      <p:sp>
+        <p:nvSpPr>
+          <p:cNvPr id="12" name="Rectangle 11"/>
+          <p:cNvSpPr/>
+          <p:nvPr/>
+        </p:nvSpPr>
+        <p:spPr>
+          <a:xfrm>
+            <a:off x="941832" y="1810512"/>
+            <a:ext cx="5212080" cy="402336"/>
+          </a:xfrm>
+          <a:prstGeom prst="rect">
+            <a:avLst/>
+          </a:prstGeom>
+          <a:ln>
+            <a:noFill/>
+          </a:ln>
+          <a:effectLst/>
+          <a:gradFill>
+            <a:gsLst>
+              <a:gs pos="0">
+                <a:srgbClr val="36276C"/>
+              </a:gs>
+              <a:gs pos="100000">
+                <a:srgbClr val="2A1E55"/>
+              </a:gs>
+            </a:gsLst>
+            <a:lin ang="0" scaled="1"/>
+          </a:gradFill>
+        </p:spPr>
+        <p:style>
+          <a:lnRef idx="1">
+            <a:schemeClr val="accent1"/>
+          </a:lnRef>
+          <a:fillRef idx="3">
+            <a:schemeClr val="accent1"/>
+          </a:fillRef>
+          <a:effectRef idx="2">
+            <a:schemeClr val="accent1"/>
+          </a:effectRef>
+          <a:fontRef idx="minor">
+            <a:schemeClr val="lt1"/>
+          </a:fontRef>
+        </p:style>
+        <p:txBody>
+          <a:bodyPr rtlCol="0" anchor="ctr"/>
+          <a:lstStyle/>
+          <a:p>
+            <a:pPr algn="ctr"/>
+          </a:p>
+        </p:txBody>
+      </p:sp>
+      <p:sp>
+        <p:nvSpPr>
+          <p:cNvPr id="13" name="TextBox 12"/>
+          <p:cNvSpPr txBox="1"/>
+          <p:nvPr/>
+        </p:nvSpPr>
+        <p:spPr>
+          <a:xfrm>
+            <a:off x="941832" y="1810512"/>
+            <a:ext cx="1563624" cy="402336"/>
+          </a:xfrm>
+          <a:prstGeom prst="rect">
+            <a:avLst/>
+          </a:prstGeom>
+          <a:noFill/>
+        </p:spPr>
+        <p:txBody>
+          <a:bodyPr wrap="square" anchor="ctr" lIns="127000" rIns="76200" tIns="25400" bIns="25400">
+            <a:spAutoFit/>
+          </a:bodyPr>
+          <a:lstStyle/>
+          <a:p>
+            <a:pPr>
+              <a:lnSpc>
+                <a:spcPct val="104000"/>
+              </a:lnSpc>
+            </a:pPr>
+            <a:r>
+              <a:rPr sz="1250" b="1">
+                <a:solidFill>
+                  <a:srgbClr val="E9C27C"/>
+                </a:solidFill>
+                <a:latin typeface="Microsoft YaHei"/>
+              </a:rPr>
+              <a:t>项目</a:t>
+            </a:r>
+          </a:p>
+        </p:txBody>
+      </p:sp>
+      <p:sp>
+        <p:nvSpPr>
+          <p:cNvPr id="14" name="TextBox 13"/>
+          <p:cNvSpPr txBox="1"/>
+          <p:nvPr/>
+        </p:nvSpPr>
+        <p:spPr>
+          <a:xfrm>
+            <a:off x="2505456" y="1810512"/>
+            <a:ext cx="3648456" cy="402336"/>
+          </a:xfrm>
+          <a:prstGeom prst="rect">
+            <a:avLst/>
+          </a:prstGeom>
+          <a:noFill/>
+        </p:spPr>
+        <p:txBody>
+          <a:bodyPr wrap="square" anchor="ctr" lIns="127000" rIns="76200" tIns="25400" bIns="25400">
+            <a:spAutoFit/>
+          </a:bodyPr>
+          <a:lstStyle/>
+          <a:p>
+            <a:pPr>
+              <a:lnSpc>
+                <a:spcPct val="104000"/>
+              </a:lnSpc>
+            </a:pPr>
+            <a:r>
+              <a:rPr sz="1250" b="1">
+                <a:solidFill>
+                  <a:srgbClr val="E9C27C"/>
+                </a:solidFill>
+                <a:latin typeface="Microsoft YaHei"/>
+              </a:rPr>
+              <a:t>内容</a:t>
+            </a:r>
+          </a:p>
+        </p:txBody>
+      </p:sp>
+      <p:sp>
+        <p:nvSpPr>
+          <p:cNvPr id="15" name="Rectangle 14"/>
+          <p:cNvSpPr/>
+          <p:nvPr/>
+        </p:nvSpPr>
+        <p:spPr>
+          <a:xfrm>
+            <a:off x="941832" y="2203323"/>
+            <a:ext cx="5212080" cy="9525"/>
+          </a:xfrm>
+          <a:prstGeom prst="rect">
+            <a:avLst/>
+          </a:prstGeom>
+          <a:solidFill>
+            <a:srgbClr val="4A3C7C"/>
+          </a:solidFill>
+          <a:ln>
+            <a:noFill/>
+          </a:ln>
+          <a:effectLst/>
+        </p:spPr>
+        <p:style>
+          <a:lnRef idx="1">
+            <a:schemeClr val="accent1"/>
+          </a:lnRef>
+          <a:fillRef idx="3">
+            <a:schemeClr val="accent1"/>
+          </a:fillRef>
+          <a:effectRef idx="2">
+            <a:schemeClr val="accent1"/>
+          </a:effectRef>
+          <a:fontRef idx="minor">
+            <a:schemeClr val="lt1"/>
+          </a:fontRef>
+        </p:style>
+        <p:txBody>
+          <a:bodyPr rtlCol="0" anchor="ctr"/>
+          <a:lstStyle/>
+          <a:p>
+            <a:pPr algn="ctr"/>
+          </a:p>
+        </p:txBody>
+      </p:sp>
+      <p:sp>
+        <p:nvSpPr>
+          <p:cNvPr id="16" name="TextBox 15"/>
+          <p:cNvSpPr txBox="1"/>
+          <p:nvPr/>
+        </p:nvSpPr>
+        <p:spPr>
+          <a:xfrm>
+            <a:off x="941832" y="2212848"/>
+            <a:ext cx="1563624" cy="420624"/>
+          </a:xfrm>
+          <a:prstGeom prst="rect">
+            <a:avLst/>
+          </a:prstGeom>
+          <a:noFill/>
+        </p:spPr>
+        <p:txBody>
+          <a:bodyPr wrap="square" anchor="ctr" lIns="127000" rIns="76200" tIns="25400" bIns="25400">
+            <a:spAutoFit/>
+          </a:bodyPr>
+          <a:lstStyle/>
+          <a:p>
+            <a:pPr>
+              <a:lnSpc>
+                <a:spcPct val="104000"/>
+              </a:lnSpc>
+            </a:pPr>
+            <a:r>
+              <a:rPr sz="1200" b="1">
+                <a:solidFill>
+                  <a:srgbClr val="E9C27C"/>
+                </a:solidFill>
+                <a:latin typeface="Microsoft YaHei"/>
+              </a:rPr>
+              <a:t>位置</a:t>
+            </a:r>
+          </a:p>
+        </p:txBody>
+      </p:sp>
+      <p:sp>
+        <p:nvSpPr>
+          <p:cNvPr id="17" name="TextBox 16"/>
+          <p:cNvSpPr txBox="1"/>
+          <p:nvPr/>
+        </p:nvSpPr>
+        <p:spPr>
+          <a:xfrm>
+            <a:off x="2505456" y="2212848"/>
+            <a:ext cx="3648456" cy="420624"/>
+          </a:xfrm>
+          <a:prstGeom prst="rect">
+            <a:avLst/>
+          </a:prstGeom>
+          <a:noFill/>
+        </p:spPr>
+        <p:txBody>
+          <a:bodyPr wrap="square" anchor="ctr" lIns="127000" rIns="76200" tIns="25400" bIns="25400">
+            <a:spAutoFit/>
+          </a:bodyPr>
+          <a:lstStyle/>
+          <a:p>
+            <a:pPr>
+              <a:lnSpc>
+                <a:spcPct val="104000"/>
+              </a:lnSpc>
+            </a:pPr>
+            <a:r>
+              <a:rPr sz="1200" b="0">
+                <a:solidFill>
+                  <a:srgbClr val="C6BAEA"/>
+                </a:solidFill>
+                <a:latin typeface="Microsoft YaHei"/>
+              </a:rPr>
+              <a:t>上海杨浦五角场 · 创智汇（创智天地）</a:t>
+            </a:r>
+          </a:p>
+        </p:txBody>
+      </p:sp>
+      <p:sp>
+        <p:nvSpPr>
+          <p:cNvPr id="18" name="Rectangle 17"/>
+          <p:cNvSpPr/>
+          <p:nvPr/>
+        </p:nvSpPr>
+        <p:spPr>
+          <a:xfrm>
+            <a:off x="941832" y="2623947"/>
+            <a:ext cx="5212080" cy="9525"/>
+          </a:xfrm>
+          <a:prstGeom prst="rect">
+            <a:avLst/>
+          </a:prstGeom>
+          <a:solidFill>
+            <a:srgbClr val="4A3C7C"/>
+          </a:solidFill>
+          <a:ln>
+            <a:noFill/>
+          </a:ln>
+          <a:effectLst/>
+        </p:spPr>
+        <p:style>
+          <a:lnRef idx="1">
+            <a:schemeClr val="accent1"/>
+          </a:lnRef>
+          <a:fillRef idx="3">
+            <a:schemeClr val="accent1"/>
+          </a:fillRef>
+          <a:effectRef idx="2">
+            <a:schemeClr val="accent1"/>
+          </a:effectRef>
+          <a:fontRef idx="minor">
+            <a:schemeClr val="lt1"/>
+          </a:fontRef>
+        </p:style>
+        <p:txBody>
+          <a:bodyPr rtlCol="0" anchor="ctr"/>
+          <a:lstStyle/>
+          <a:p>
+            <a:pPr algn="ctr"/>
+          </a:p>
+        </p:txBody>
+      </p:sp>
+      <p:sp>
+        <p:nvSpPr>
+          <p:cNvPr id="19" name="Rectangle 18"/>
+          <p:cNvSpPr/>
+          <p:nvPr/>
+        </p:nvSpPr>
+        <p:spPr>
+          <a:xfrm>
+            <a:off x="941832" y="2633472"/>
+            <a:ext cx="5212080" cy="420624"/>
+          </a:xfrm>
+          <a:prstGeom prst="rect">
+            <a:avLst/>
+          </a:prstGeom>
+          <a:solidFill>
+            <a:srgbClr val="221844"/>
+          </a:solidFill>
+          <a:ln>
+            <a:noFill/>
+          </a:ln>
+          <a:effectLst/>
+        </p:spPr>
+        <p:style>
+          <a:lnRef idx="1">
+            <a:schemeClr val="accent1"/>
+          </a:lnRef>
+          <a:fillRef idx="3">
+            <a:schemeClr val="accent1"/>
+          </a:fillRef>
+          <a:effectRef idx="2">
+            <a:schemeClr val="accent1"/>
+          </a:effectRef>
+          <a:fontRef idx="minor">
+            <a:schemeClr val="lt1"/>
+          </a:fontRef>
+        </p:style>
+        <p:txBody>
+          <a:bodyPr rtlCol="0" anchor="ctr"/>
+          <a:lstStyle/>
+          <a:p>
+            <a:pPr algn="ctr"/>
+          </a:p>
+        </p:txBody>
+      </p:sp>
+      <p:sp>
+        <p:nvSpPr>
+          <p:cNvPr id="20" name="TextBox 19"/>
+          <p:cNvSpPr txBox="1"/>
+          <p:nvPr/>
+        </p:nvSpPr>
+        <p:spPr>
+          <a:xfrm>
+            <a:off x="941832" y="2633472"/>
+            <a:ext cx="1563624" cy="420624"/>
+          </a:xfrm>
+          <a:prstGeom prst="rect">
+            <a:avLst/>
+          </a:prstGeom>
+          <a:noFill/>
+        </p:spPr>
+        <p:txBody>
+          <a:bodyPr wrap="square" anchor="ctr" lIns="127000" rIns="76200" tIns="25400" bIns="25400">
+            <a:spAutoFit/>
+          </a:bodyPr>
+          <a:lstStyle/>
+          <a:p>
+            <a:pPr>
+              <a:lnSpc>
+                <a:spcPct val="104000"/>
+              </a:lnSpc>
+            </a:pPr>
+            <a:r>
+              <a:rPr sz="1200" b="1">
+                <a:solidFill>
+                  <a:srgbClr val="E9C27C"/>
+                </a:solidFill>
+                <a:latin typeface="Microsoft YaHei"/>
+              </a:rPr>
+              <a:t>合作面积</a:t>
+            </a:r>
+          </a:p>
+        </p:txBody>
+      </p:sp>
+      <p:sp>
+        <p:nvSpPr>
+          <p:cNvPr id="21" name="TextBox 20"/>
+          <p:cNvSpPr txBox="1"/>
+          <p:nvPr/>
+        </p:nvSpPr>
+        <p:spPr>
+          <a:xfrm>
+            <a:off x="2505456" y="2633472"/>
+            <a:ext cx="3648456" cy="420624"/>
+          </a:xfrm>
+          <a:prstGeom prst="rect">
+            <a:avLst/>
+          </a:prstGeom>
+          <a:noFill/>
+        </p:spPr>
+        <p:txBody>
+          <a:bodyPr wrap="square" anchor="ctr" lIns="127000" rIns="76200" tIns="25400" bIns="25400">
+            <a:spAutoFit/>
+          </a:bodyPr>
+          <a:lstStyle/>
+          <a:p>
+            <a:pPr>
+              <a:lnSpc>
+                <a:spcPct val="104000"/>
+              </a:lnSpc>
+            </a:pPr>
+            <a:r>
+              <a:rPr sz="1200" b="0">
+                <a:solidFill>
+                  <a:srgbClr val="C6BAEA"/>
+                </a:solidFill>
+                <a:latin typeface="Microsoft YaHei"/>
+              </a:rPr>
+              <a:t>约 6600㎡</a:t>
+            </a:r>
+          </a:p>
+        </p:txBody>
+      </p:sp>
+      <p:sp>
+        <p:nvSpPr>
+          <p:cNvPr id="22" name="Rectangle 21"/>
+          <p:cNvSpPr/>
+          <p:nvPr/>
+        </p:nvSpPr>
+        <p:spPr>
+          <a:xfrm>
+            <a:off x="941832" y="3044571"/>
+            <a:ext cx="5212080" cy="9525"/>
+          </a:xfrm>
+          <a:prstGeom prst="rect">
+            <a:avLst/>
+          </a:prstGeom>
+          <a:solidFill>
+            <a:srgbClr val="4A3C7C"/>
+          </a:solidFill>
+          <a:ln>
+            <a:noFill/>
+          </a:ln>
+          <a:effectLst/>
+        </p:spPr>
+        <p:style>
+          <a:lnRef idx="1">
+            <a:schemeClr val="accent1"/>
+          </a:lnRef>
+          <a:fillRef idx="3">
+            <a:schemeClr val="accent1"/>
+          </a:fillRef>
+          <a:effectRef idx="2">
+            <a:schemeClr val="accent1"/>
+          </a:effectRef>
+          <a:fontRef idx="minor">
+            <a:schemeClr val="lt1"/>
+          </a:fontRef>
+        </p:style>
+        <p:txBody>
+          <a:bodyPr rtlCol="0" anchor="ctr"/>
+          <a:lstStyle/>
+          <a:p>
+            <a:pPr algn="ctr"/>
+          </a:p>
+        </p:txBody>
+      </p:sp>
+      <p:sp>
+        <p:nvSpPr>
+          <p:cNvPr id="23" name="TextBox 22"/>
+          <p:cNvSpPr txBox="1"/>
+          <p:nvPr/>
+        </p:nvSpPr>
+        <p:spPr>
+          <a:xfrm>
+            <a:off x="941832" y="3054096"/>
+            <a:ext cx="1563624" cy="420624"/>
+          </a:xfrm>
+          <a:prstGeom prst="rect">
+            <a:avLst/>
+          </a:prstGeom>
+          <a:noFill/>
+        </p:spPr>
+        <p:txBody>
+          <a:bodyPr wrap="square" anchor="ctr" lIns="127000" rIns="76200" tIns="25400" bIns="25400">
+            <a:spAutoFit/>
+          </a:bodyPr>
+          <a:lstStyle/>
+          <a:p>
+            <a:pPr>
+              <a:lnSpc>
+                <a:spcPct val="104000"/>
+              </a:lnSpc>
+            </a:pPr>
+            <a:r>
+              <a:rPr sz="1200" b="1">
+                <a:solidFill>
+                  <a:srgbClr val="E9C27C"/>
+                </a:solidFill>
+                <a:latin typeface="Microsoft YaHei"/>
+              </a:rPr>
+              <a:t>3 楼 ≈2850㎡</a:t>
+            </a:r>
+          </a:p>
+        </p:txBody>
+      </p:sp>
+      <p:sp>
+        <p:nvSpPr>
+          <p:cNvPr id="24" name="TextBox 23"/>
+          <p:cNvSpPr txBox="1"/>
+          <p:nvPr/>
+        </p:nvSpPr>
+        <p:spPr>
+          <a:xfrm>
+            <a:off x="2505456" y="3054096"/>
+            <a:ext cx="3648456" cy="420624"/>
+          </a:xfrm>
+          <a:prstGeom prst="rect">
+            <a:avLst/>
+          </a:prstGeom>
+          <a:noFill/>
+        </p:spPr>
+        <p:txBody>
+          <a:bodyPr wrap="square" anchor="ctr" lIns="127000" rIns="76200" tIns="25400" bIns="25400">
+            <a:spAutoFit/>
+          </a:bodyPr>
+          <a:lstStyle/>
+          <a:p>
+            <a:pPr>
+              <a:lnSpc>
+                <a:spcPct val="104000"/>
+              </a:lnSpc>
+            </a:pPr>
+            <a:r>
+              <a:rPr sz="1200" b="0">
+                <a:solidFill>
+                  <a:srgbClr val="C6BAEA"/>
+                </a:solidFill>
+                <a:latin typeface="Microsoft YaHei"/>
+              </a:rPr>
+              <a:t>孵化器 + 办公（AI / OPC 主轴）</a:t>
+            </a:r>
+          </a:p>
+        </p:txBody>
+      </p:sp>
+      <p:sp>
+        <p:nvSpPr>
+          <p:cNvPr id="25" name="Rectangle 24"/>
+          <p:cNvSpPr/>
+          <p:nvPr/>
+        </p:nvSpPr>
+        <p:spPr>
+          <a:xfrm>
+            <a:off x="941832" y="3465195"/>
+            <a:ext cx="5212080" cy="9525"/>
+          </a:xfrm>
+          <a:prstGeom prst="rect">
+            <a:avLst/>
+          </a:prstGeom>
+          <a:solidFill>
+            <a:srgbClr val="4A3C7C"/>
+          </a:solidFill>
+          <a:ln>
+            <a:noFill/>
+          </a:ln>
+          <a:effectLst/>
+        </p:spPr>
+        <p:style>
+          <a:lnRef idx="1">
+            <a:schemeClr val="accent1"/>
+          </a:lnRef>
+          <a:fillRef idx="3">
+            <a:schemeClr val="accent1"/>
+          </a:fillRef>
+          <a:effectRef idx="2">
+            <a:schemeClr val="accent1"/>
+          </a:effectRef>
+          <a:fontRef idx="minor">
+            <a:schemeClr val="lt1"/>
+          </a:fontRef>
+        </p:style>
+        <p:txBody>
+          <a:bodyPr rtlCol="0" anchor="ctr"/>
+          <a:lstStyle/>
+          <a:p>
+            <a:pPr algn="ctr"/>
+          </a:p>
+        </p:txBody>
+      </p:sp>
+      <p:sp>
+        <p:nvSpPr>
+          <p:cNvPr id="26" name="Rectangle 25"/>
+          <p:cNvSpPr/>
+          <p:nvPr/>
+        </p:nvSpPr>
+        <p:spPr>
+          <a:xfrm>
+            <a:off x="941832" y="3474720"/>
+            <a:ext cx="5212080" cy="420624"/>
+          </a:xfrm>
+          <a:prstGeom prst="rect">
+            <a:avLst/>
+          </a:prstGeom>
+          <a:solidFill>
+            <a:srgbClr val="221844"/>
+          </a:solidFill>
+          <a:ln>
+            <a:noFill/>
+          </a:ln>
+          <a:effectLst/>
+        </p:spPr>
+        <p:style>
+          <a:lnRef idx="1">
+            <a:schemeClr val="accent1"/>
+          </a:lnRef>
+          <a:fillRef idx="3">
+            <a:schemeClr val="accent1"/>
+          </a:fillRef>
+          <a:effectRef idx="2">
+            <a:schemeClr val="accent1"/>
+          </a:effectRef>
+          <a:fontRef idx="minor">
+            <a:schemeClr val="lt1"/>
+          </a:fontRef>
+        </p:style>
+        <p:txBody>
+          <a:bodyPr rtlCol="0" anchor="ctr"/>
+          <a:lstStyle/>
+          <a:p>
+            <a:pPr algn="ctr"/>
+          </a:p>
+        </p:txBody>
+      </p:sp>
+      <p:sp>
+        <p:nvSpPr>
+          <p:cNvPr id="27" name="TextBox 26"/>
+          <p:cNvSpPr txBox="1"/>
+          <p:nvPr/>
+        </p:nvSpPr>
+        <p:spPr>
+          <a:xfrm>
+            <a:off x="941832" y="3474720"/>
+            <a:ext cx="1563624" cy="420624"/>
+          </a:xfrm>
+          <a:prstGeom prst="rect">
+            <a:avLst/>
+          </a:prstGeom>
+          <a:noFill/>
+        </p:spPr>
+        <p:txBody>
+          <a:bodyPr wrap="square" anchor="ctr" lIns="127000" rIns="76200" tIns="25400" bIns="25400">
+            <a:spAutoFit/>
+          </a:bodyPr>
+          <a:lstStyle/>
+          <a:p>
+            <a:pPr>
+              <a:lnSpc>
+                <a:spcPct val="104000"/>
+              </a:lnSpc>
+            </a:pPr>
+            <a:r>
+              <a:rPr sz="1200" b="1">
+                <a:solidFill>
+                  <a:srgbClr val="E9C27C"/>
+                </a:solidFill>
+                <a:latin typeface="Microsoft YaHei"/>
+              </a:rPr>
+              <a:t>5 楼 ≈3670㎡</a:t>
+            </a:r>
+          </a:p>
+        </p:txBody>
+      </p:sp>
+      <p:sp>
+        <p:nvSpPr>
+          <p:cNvPr id="28" name="TextBox 27"/>
+          <p:cNvSpPr txBox="1"/>
+          <p:nvPr/>
+        </p:nvSpPr>
+        <p:spPr>
+          <a:xfrm>
+            <a:off x="2505456" y="3474720"/>
+            <a:ext cx="3648456" cy="420624"/>
+          </a:xfrm>
+          <a:prstGeom prst="rect">
+            <a:avLst/>
+          </a:prstGeom>
+          <a:noFill/>
+        </p:spPr>
+        <p:txBody>
+          <a:bodyPr wrap="square" anchor="ctr" lIns="127000" rIns="76200" tIns="25400" bIns="25400">
+            <a:spAutoFit/>
+          </a:bodyPr>
+          <a:lstStyle/>
+          <a:p>
+            <a:pPr>
+              <a:lnSpc>
+                <a:spcPct val="104000"/>
+              </a:lnSpc>
+            </a:pPr>
+            <a:r>
+              <a:rPr sz="1200" b="0">
+                <a:solidFill>
+                  <a:srgbClr val="C6BAEA"/>
+                </a:solidFill>
+                <a:latin typeface="Microsoft YaHei"/>
+              </a:rPr>
+              <a:t>展厅 + 贸易（IP 内容主轴）</a:t>
+            </a:r>
+          </a:p>
+        </p:txBody>
+      </p:sp>
+      <p:sp>
+        <p:nvSpPr>
+          <p:cNvPr id="29" name="Rectangle 28"/>
+          <p:cNvSpPr/>
+          <p:nvPr/>
+        </p:nvSpPr>
+        <p:spPr>
+          <a:xfrm>
+            <a:off x="941832" y="3885819"/>
+            <a:ext cx="5212080" cy="9525"/>
+          </a:xfrm>
+          <a:prstGeom prst="rect">
+            <a:avLst/>
+          </a:prstGeom>
+          <a:solidFill>
+            <a:srgbClr val="4A3C7C"/>
+          </a:solidFill>
+          <a:ln>
+            <a:noFill/>
+          </a:ln>
+          <a:effectLst/>
+        </p:spPr>
+        <p:style>
+          <a:lnRef idx="1">
+            <a:schemeClr val="accent1"/>
+          </a:lnRef>
+          <a:fillRef idx="3">
+            <a:schemeClr val="accent1"/>
+          </a:fillRef>
+          <a:effectRef idx="2">
+            <a:schemeClr val="accent1"/>
+          </a:effectRef>
+          <a:fontRef idx="minor">
+            <a:schemeClr val="lt1"/>
+          </a:fontRef>
+        </p:style>
+        <p:txBody>
+          <a:bodyPr rtlCol="0" anchor="ctr"/>
+          <a:lstStyle/>
+          <a:p>
+            <a:pPr algn="ctr"/>
+          </a:p>
+        </p:txBody>
+      </p:sp>
+      <p:sp>
+        <p:nvSpPr>
+          <p:cNvPr id="30" name="TextBox 29"/>
+          <p:cNvSpPr txBox="1"/>
+          <p:nvPr/>
+        </p:nvSpPr>
+        <p:spPr>
+          <a:xfrm>
+            <a:off x="941832" y="3895344"/>
+            <a:ext cx="1563624" cy="420624"/>
+          </a:xfrm>
+          <a:prstGeom prst="rect">
+            <a:avLst/>
+          </a:prstGeom>
+          <a:noFill/>
+        </p:spPr>
+        <p:txBody>
+          <a:bodyPr wrap="square" anchor="ctr" lIns="127000" rIns="76200" tIns="25400" bIns="25400">
+            <a:spAutoFit/>
+          </a:bodyPr>
+          <a:lstStyle/>
+          <a:p>
+            <a:pPr>
+              <a:lnSpc>
+                <a:spcPct val="104000"/>
+              </a:lnSpc>
+            </a:pPr>
+            <a:r>
+              <a:rPr sz="1200" b="1">
+                <a:solidFill>
+                  <a:srgbClr val="E9C27C"/>
+                </a:solidFill>
+                <a:latin typeface="Microsoft YaHei"/>
+              </a:rPr>
+              <a:t>合作周期</a:t>
+            </a:r>
+          </a:p>
+        </p:txBody>
+      </p:sp>
+      <p:sp>
+        <p:nvSpPr>
+          <p:cNvPr id="31" name="TextBox 30"/>
+          <p:cNvSpPr txBox="1"/>
+          <p:nvPr/>
+        </p:nvSpPr>
+        <p:spPr>
+          <a:xfrm>
+            <a:off x="2505456" y="3895344"/>
+            <a:ext cx="3648456" cy="420624"/>
+          </a:xfrm>
+          <a:prstGeom prst="rect">
+            <a:avLst/>
+          </a:prstGeom>
+          <a:noFill/>
+        </p:spPr>
+        <p:txBody>
+          <a:bodyPr wrap="square" anchor="ctr" lIns="127000" rIns="76200" tIns="25400" bIns="25400">
+            <a:spAutoFit/>
+          </a:bodyPr>
+          <a:lstStyle/>
+          <a:p>
+            <a:pPr>
+              <a:lnSpc>
+                <a:spcPct val="104000"/>
+              </a:lnSpc>
+            </a:pPr>
+            <a:r>
+              <a:rPr sz="1200" b="0">
+                <a:solidFill>
+                  <a:srgbClr val="C6BAEA"/>
+                </a:solidFill>
+                <a:latin typeface="Microsoft YaHei"/>
+              </a:rPr>
+              <a:t>3 年 · 可复制 · 协同周边 ≤2 项目</a:t>
+            </a:r>
+          </a:p>
+        </p:txBody>
+      </p:sp>
+      <p:sp>
+        <p:nvSpPr>
+          <p:cNvPr id="32" name="Rectangle 31"/>
+          <p:cNvSpPr/>
+          <p:nvPr/>
+        </p:nvSpPr>
+        <p:spPr>
+          <a:xfrm>
+            <a:off x="941832" y="4306443"/>
+            <a:ext cx="5212080" cy="9525"/>
+          </a:xfrm>
+          <a:prstGeom prst="rect">
+            <a:avLst/>
+          </a:prstGeom>
+          <a:solidFill>
+            <a:srgbClr val="4A3C7C"/>
+          </a:solidFill>
+          <a:ln>
+            <a:noFill/>
+          </a:ln>
+          <a:effectLst/>
+        </p:spPr>
+        <p:style>
+          <a:lnRef idx="1">
+            <a:schemeClr val="accent1"/>
+          </a:lnRef>
+          <a:fillRef idx="3">
+            <a:schemeClr val="accent1"/>
+          </a:fillRef>
+          <a:effectRef idx="2">
+            <a:schemeClr val="accent1"/>
+          </a:effectRef>
+          <a:fontRef idx="minor">
+            <a:schemeClr val="lt1"/>
+          </a:fontRef>
+        </p:style>
+        <p:txBody>
+          <a:bodyPr rtlCol="0" anchor="ctr"/>
+          <a:lstStyle/>
+          <a:p>
+            <a:pPr algn="ctr"/>
+          </a:p>
+        </p:txBody>
+      </p:sp>
+      <p:sp>
+        <p:nvSpPr>
+          <p:cNvPr id="33" name="Rectangle 32"/>
+          <p:cNvSpPr/>
+          <p:nvPr/>
+        </p:nvSpPr>
+        <p:spPr>
+          <a:xfrm>
+            <a:off x="941832" y="1810512"/>
+            <a:ext cx="31750" cy="2505456"/>
+          </a:xfrm>
+          <a:prstGeom prst="rect">
+            <a:avLst/>
+          </a:prstGeom>
+          <a:solidFill>
+            <a:srgbClr val="E9C27C"/>
+          </a:solidFill>
+          <a:ln>
+            <a:noFill/>
+          </a:ln>
+          <a:effectLst/>
+        </p:spPr>
+        <p:style>
+          <a:lnRef idx="1">
+            <a:schemeClr val="accent1"/>
+          </a:lnRef>
+          <a:fillRef idx="3">
+            <a:schemeClr val="accent1"/>
+          </a:fillRef>
+          <a:effectRef idx="2">
+            <a:schemeClr val="accent1"/>
+          </a:effectRef>
+          <a:fontRef idx="minor">
+            <a:schemeClr val="lt1"/>
+          </a:fontRef>
+        </p:style>
+        <p:txBody>
+          <a:bodyPr rtlCol="0" anchor="ctr"/>
+          <a:lstStyle/>
+          <a:p>
+            <a:pPr algn="ctr"/>
+          </a:p>
+        </p:txBody>
+      </p:sp>
+      <p:sp>
+        <p:nvSpPr>
+          <p:cNvPr id="34" name="Rounded Rectangle 33"/>
+          <p:cNvSpPr/>
+          <p:nvPr/>
+        </p:nvSpPr>
+        <p:spPr>
+          <a:xfrm>
+            <a:off x="6537960" y="1627632"/>
+            <a:ext cx="4873752" cy="2788920"/>
+          </a:xfrm>
+          <a:prstGeom prst="roundRect">
+            <a:avLst/>
+          </a:prstGeom>
+          <a:ln w="12700">
+            <a:solidFill>
+              <a:srgbClr val="4A3C7C"/>
+            </a:solidFill>
+          </a:ln>
+          <a:effectLst/>
+          <a:gradFill>
+            <a:gsLst>
+              <a:gs pos="0">
+                <a:srgbClr val="2A1E55"/>
+              </a:gs>
+              <a:gs pos="100000">
+                <a:srgbClr val="1E1542"/>
+              </a:gs>
+            </a:gsLst>
+            <a:lin ang="7200000" scaled="1"/>
+          </a:gradFill>
+        </p:spPr>
+        <p:style>
+          <a:lnRef idx="1">
+            <a:schemeClr val="accent1"/>
+          </a:lnRef>
+          <a:fillRef idx="3">
+            <a:schemeClr val="accent1"/>
+          </a:fillRef>
+          <a:effectRef idx="2">
+            <a:schemeClr val="accent1"/>
+          </a:effectRef>
+          <a:fontRef idx="minor">
+            <a:schemeClr val="lt1"/>
+          </a:fontRef>
+        </p:style>
+        <p:txBody>
+          <a:bodyPr rtlCol="0" anchor="ctr"/>
+          <a:lstStyle/>
+          <a:p>
+            <a:pPr algn="ctr"/>
+          </a:p>
+        </p:txBody>
+      </p:sp>
+      <p:sp>
+        <p:nvSpPr>
+          <p:cNvPr id="35" name="Rectangle 34"/>
+          <p:cNvSpPr/>
+          <p:nvPr/>
+        </p:nvSpPr>
+        <p:spPr>
+          <a:xfrm>
+            <a:off x="6537960" y="1627632"/>
+            <a:ext cx="64008" cy="2788920"/>
+          </a:xfrm>
+          <a:prstGeom prst="rect">
+            <a:avLst/>
+          </a:prstGeom>
+          <a:solidFill>
+            <a:srgbClr val="E9C27C"/>
+          </a:solidFill>
+          <a:ln>
+            <a:noFill/>
+          </a:ln>
+          <a:effectLst/>
+        </p:spPr>
+        <p:style>
+          <a:lnRef idx="1">
+            <a:schemeClr val="accent1"/>
+          </a:lnRef>
+          <a:fillRef idx="3">
+            <a:schemeClr val="accent1"/>
+          </a:fillRef>
+          <a:effectRef idx="2">
+            <a:schemeClr val="accent1"/>
+          </a:effectRef>
+          <a:fontRef idx="minor">
+            <a:schemeClr val="lt1"/>
+          </a:fontRef>
+        </p:style>
+        <p:txBody>
+          <a:bodyPr rtlCol="0" anchor="ctr"/>
+          <a:lstStyle/>
+          <a:p>
+            <a:pPr algn="ctr"/>
+          </a:p>
+        </p:txBody>
+      </p:sp>
+      <p:sp>
+        <p:nvSpPr>
+          <p:cNvPr id="36" name="TextBox 35"/>
+          <p:cNvSpPr txBox="1"/>
+          <p:nvPr/>
+        </p:nvSpPr>
+        <p:spPr>
+          <a:xfrm>
+            <a:off x="6848856" y="1810512"/>
+            <a:ext cx="4379976" cy="457200"/>
+          </a:xfrm>
+          <a:prstGeom prst="rect">
+            <a:avLst/>
+          </a:prstGeom>
+          <a:noFill/>
+        </p:spPr>
+        <p:txBody>
+          <a:bodyPr wrap="square" anchor="t" lIns="25400" rIns="25400" tIns="12700" bIns="12700">
+            <a:spAutoFit/>
+          </a:bodyPr>
+          <a:lstStyle/>
+          <a:p>
+            <a:pPr algn="l">
+              <a:lnSpc>
+                <a:spcPct val="100000"/>
+              </a:lnSpc>
+            </a:pPr>
+            <a:r>
+              <a:rPr sz="1550" b="1">
+                <a:solidFill>
+                  <a:srgbClr val="F5F1FF"/>
+                </a:solidFill>
+                <a:latin typeface="Microsoft YaHei"/>
+              </a:rPr>
+              <a:t>区位与政策腹地</a:t>
+            </a:r>
+          </a:p>
+        </p:txBody>
+      </p:sp>
+      <p:sp>
+        <p:nvSpPr>
+          <p:cNvPr id="37" name="TextBox 36"/>
+          <p:cNvSpPr txBox="1"/>
+          <p:nvPr/>
+        </p:nvSpPr>
+        <p:spPr>
+          <a:xfrm>
+            <a:off x="6848856" y="2194560"/>
+            <a:ext cx="4325112" cy="2130552"/>
+          </a:xfrm>
+          <a:prstGeom prst="rect">
+            <a:avLst/>
+          </a:prstGeom>
+          <a:noFill/>
+        </p:spPr>
+        <p:txBody>
+          <a:bodyPr wrap="square" lIns="25400" tIns="25400">
+            <a:spAutoFit/>
+          </a:bodyPr>
+          <a:lstStyle/>
+          <a:p>
+            <a:pPr>
+              <a:lnSpc>
+                <a:spcPct val="118000"/>
+              </a:lnSpc>
+              <a:spcAft>
+                <a:spcPts val="800"/>
+              </a:spcAft>
+            </a:pPr>
+            <a:r>
+              <a:rPr sz="1250">
+                <a:solidFill>
+                  <a:srgbClr val="E9C27C"/>
+                </a:solidFill>
+                <a:latin typeface="Microsoft YaHei"/>
+              </a:rPr>
+              <a:t>▪  </a:t>
+            </a:r>
+            <a:r>
+              <a:rPr sz="1250">
+                <a:solidFill>
+                  <a:srgbClr val="C6BAEA"/>
+                </a:solidFill>
+                <a:latin typeface="Microsoft YaHei"/>
+              </a:rPr>
+              <a:t>环同济：复旦 / 同济 / 财大 / 上理工高校群</a:t>
+            </a:r>
+          </a:p>
+          <a:p>
+            <a:pPr>
+              <a:lnSpc>
+                <a:spcPct val="118000"/>
+              </a:lnSpc>
+              <a:spcAft>
+                <a:spcPts val="800"/>
+              </a:spcAft>
+            </a:pPr>
+            <a:r>
+              <a:rPr sz="1250">
+                <a:solidFill>
+                  <a:srgbClr val="E9C27C"/>
+                </a:solidFill>
+                <a:latin typeface="Microsoft YaHei"/>
+              </a:rPr>
+              <a:t>▪  </a:t>
+            </a:r>
+            <a:r>
+              <a:rPr sz="1250">
+                <a:solidFill>
+                  <a:srgbClr val="C6BAEA"/>
+                </a:solidFill>
+                <a:latin typeface="Microsoft YaHei"/>
+              </a:rPr>
+              <a:t>正处杨浦「YOUNG立方」内容集聚区核心圈</a:t>
+            </a:r>
+          </a:p>
+          <a:p>
+            <a:pPr>
+              <a:lnSpc>
+                <a:spcPct val="118000"/>
+              </a:lnSpc>
+              <a:spcAft>
+                <a:spcPts val="800"/>
+              </a:spcAft>
+            </a:pPr>
+            <a:r>
+              <a:rPr sz="1250">
+                <a:solidFill>
+                  <a:srgbClr val="E9C27C"/>
+                </a:solidFill>
+                <a:latin typeface="Microsoft YaHei"/>
+              </a:rPr>
+              <a:t>▪  </a:t>
+            </a:r>
+            <a:r>
+              <a:rPr sz="1250">
+                <a:solidFill>
+                  <a:srgbClr val="C6BAEA"/>
+                </a:solidFill>
+                <a:latin typeface="Microsoft YaHei"/>
+              </a:rPr>
+              <a:t>紧邻 V聚场(6号楼) · 大学路 · B站新世代产业园</a:t>
+            </a:r>
+          </a:p>
+          <a:p>
+            <a:pPr>
+              <a:lnSpc>
+                <a:spcPct val="118000"/>
+              </a:lnSpc>
+              <a:spcAft>
+                <a:spcPts val="800"/>
+              </a:spcAft>
+            </a:pPr>
+            <a:r>
+              <a:rPr sz="1250">
+                <a:solidFill>
+                  <a:srgbClr val="E9C27C"/>
+                </a:solidFill>
+                <a:latin typeface="Microsoft YaHei"/>
+              </a:rPr>
+              <a:t>▪  </a:t>
+            </a:r>
+            <a:r>
+              <a:rPr sz="1250">
+                <a:solidFill>
+                  <a:srgbClr val="C6BAEA"/>
+                </a:solidFill>
+                <a:latin typeface="Microsoft YaHei"/>
+              </a:rPr>
+              <a:t>离我方极近（20–30min）→ 轻驻场 · 高频次</a:t>
+            </a:r>
+          </a:p>
+        </p:txBody>
+      </p:sp>
+      <p:sp>
+        <p:nvSpPr>
+          <p:cNvPr id="38" name="Rounded Rectangle 37"/>
+          <p:cNvSpPr/>
+          <p:nvPr/>
+        </p:nvSpPr>
+        <p:spPr>
+          <a:xfrm>
+            <a:off x="777240" y="4617720"/>
+            <a:ext cx="3401568" cy="1572768"/>
+          </a:xfrm>
+          <a:prstGeom prst="roundRect">
+            <a:avLst/>
+          </a:prstGeom>
+          <a:ln w="12700">
+            <a:solidFill>
+              <a:srgbClr val="4A3C7C"/>
+            </a:solidFill>
+          </a:ln>
+          <a:effectLst/>
+          <a:gradFill>
+            <a:gsLst>
+              <a:gs pos="0">
+                <a:srgbClr val="2A1E55"/>
+              </a:gs>
+              <a:gs pos="100000">
+                <a:srgbClr val="1E1542"/>
+              </a:gs>
+            </a:gsLst>
+            <a:lin ang="7200000" scaled="1"/>
+          </a:gradFill>
+        </p:spPr>
+        <p:style>
+          <a:lnRef idx="1">
+            <a:schemeClr val="accent1"/>
+          </a:lnRef>
+          <a:fillRef idx="3">
+            <a:schemeClr val="accent1"/>
+          </a:fillRef>
+          <a:effectRef idx="2">
+            <a:schemeClr val="accent1"/>
+          </a:effectRef>
+          <a:fontRef idx="minor">
+            <a:schemeClr val="lt1"/>
+          </a:fontRef>
+        </p:style>
+        <p:txBody>
+          <a:bodyPr rtlCol="0" anchor="ctr"/>
+          <a:lstStyle/>
+          <a:p>
+            <a:pPr algn="ctr"/>
+          </a:p>
+        </p:txBody>
+      </p:sp>
+      <p:sp>
+        <p:nvSpPr>
+          <p:cNvPr id="39" name="Rectangle 38"/>
+          <p:cNvSpPr/>
+          <p:nvPr/>
+        </p:nvSpPr>
+        <p:spPr>
+          <a:xfrm>
+            <a:off x="777240" y="4617720"/>
+            <a:ext cx="64008" cy="1572768"/>
+          </a:xfrm>
+          <a:prstGeom prst="rect">
+            <a:avLst/>
+          </a:prstGeom>
+          <a:solidFill>
+            <a:srgbClr val="8B7BFF"/>
+          </a:solidFill>
+          <a:ln>
+            <a:noFill/>
+          </a:ln>
+          <a:effectLst/>
+        </p:spPr>
+        <p:style>
+          <a:lnRef idx="1">
+            <a:schemeClr val="accent1"/>
+          </a:lnRef>
+          <a:fillRef idx="3">
+            <a:schemeClr val="accent1"/>
+          </a:fillRef>
+          <a:effectRef idx="2">
+            <a:schemeClr val="accent1"/>
+          </a:effectRef>
+          <a:fontRef idx="minor">
+            <a:schemeClr val="lt1"/>
+          </a:fontRef>
+        </p:style>
+        <p:txBody>
+          <a:bodyPr rtlCol="0" anchor="ctr"/>
+          <a:lstStyle/>
+          <a:p>
+            <a:pPr algn="ctr"/>
+          </a:p>
+        </p:txBody>
+      </p:sp>
+      <p:sp>
+        <p:nvSpPr>
+          <p:cNvPr id="40" name="TextBox 39"/>
+          <p:cNvSpPr txBox="1"/>
+          <p:nvPr/>
+        </p:nvSpPr>
+        <p:spPr>
+          <a:xfrm>
+            <a:off x="1088136" y="4800600"/>
+            <a:ext cx="2907792" cy="457200"/>
+          </a:xfrm>
+          <a:prstGeom prst="rect">
+            <a:avLst/>
+          </a:prstGeom>
+          <a:noFill/>
+        </p:spPr>
+        <p:txBody>
+          <a:bodyPr wrap="square" anchor="t" lIns="25400" rIns="25400" tIns="12700" bIns="12700">
+            <a:spAutoFit/>
+          </a:bodyPr>
+          <a:lstStyle/>
+          <a:p>
+            <a:pPr algn="l">
+              <a:lnSpc>
+                <a:spcPct val="100000"/>
+              </a:lnSpc>
+            </a:pPr>
+            <a:r>
+              <a:rPr sz="1550" b="1">
+                <a:solidFill>
+                  <a:srgbClr val="F5F1FF"/>
+                </a:solidFill>
+                <a:latin typeface="Microsoft YaHei"/>
+              </a:rPr>
+              <a:t>定位主线</a:t>
+            </a:r>
+          </a:p>
+        </p:txBody>
+      </p:sp>
+      <p:sp>
+        <p:nvSpPr>
+          <p:cNvPr id="41" name="TextBox 40"/>
+          <p:cNvSpPr txBox="1"/>
+          <p:nvPr/>
+        </p:nvSpPr>
+        <p:spPr>
+          <a:xfrm>
+            <a:off x="1088136" y="5221224"/>
+            <a:ext cx="2852928" cy="859536"/>
+          </a:xfrm>
+          <a:prstGeom prst="rect">
+            <a:avLst/>
+          </a:prstGeom>
+          <a:noFill/>
+        </p:spPr>
+        <p:txBody>
+          <a:bodyPr wrap="square" anchor="t" lIns="25400" rIns="25400" tIns="12700" bIns="12700">
+            <a:spAutoFit/>
+          </a:bodyPr>
+          <a:lstStyle/>
+          <a:p>
+            <a:pPr algn="l">
+              <a:lnSpc>
+                <a:spcPct val="116000"/>
+              </a:lnSpc>
+            </a:pPr>
+            <a:r>
+              <a:rPr sz="1250" b="0">
+                <a:solidFill>
+                  <a:srgbClr val="C6BAEA"/>
+                </a:solidFill>
+                <a:latin typeface="Microsoft YaHei"/>
+              </a:rPr>
+              <a:t>超级链接器：IP 为内容、AI 为工具、空间为载体；产业筋骨 · 文化灵魂 · 商业血脉。</a:t>
+            </a:r>
+          </a:p>
+        </p:txBody>
+      </p:sp>
+      <p:sp>
+        <p:nvSpPr>
+          <p:cNvPr id="42" name="Rounded Rectangle 41"/>
+          <p:cNvSpPr/>
+          <p:nvPr/>
+        </p:nvSpPr>
+        <p:spPr>
+          <a:xfrm>
+            <a:off x="4370832" y="4617720"/>
+            <a:ext cx="3401568" cy="1572768"/>
+          </a:xfrm>
+          <a:prstGeom prst="roundRect">
+            <a:avLst/>
+          </a:prstGeom>
+          <a:ln w="12700">
+            <a:solidFill>
+              <a:srgbClr val="4A3C7C"/>
+            </a:solidFill>
+          </a:ln>
+          <a:effectLst/>
+          <a:gradFill>
+            <a:gsLst>
+              <a:gs pos="0">
+                <a:srgbClr val="2A1E55"/>
+              </a:gs>
+              <a:gs pos="100000">
+                <a:srgbClr val="1E1542"/>
+              </a:gs>
+            </a:gsLst>
+            <a:lin ang="7200000" scaled="1"/>
+          </a:gradFill>
+        </p:spPr>
+        <p:style>
+          <a:lnRef idx="1">
+            <a:schemeClr val="accent1"/>
+          </a:lnRef>
+          <a:fillRef idx="3">
+            <a:schemeClr val="accent1"/>
+          </a:fillRef>
+          <a:effectRef idx="2">
+            <a:schemeClr val="accent1"/>
+          </a:effectRef>
+          <a:fontRef idx="minor">
+            <a:schemeClr val="lt1"/>
+          </a:fontRef>
+        </p:style>
+        <p:txBody>
+          <a:bodyPr rtlCol="0" anchor="ctr"/>
+          <a:lstStyle/>
+          <a:p>
+            <a:pPr algn="ctr"/>
+          </a:p>
+        </p:txBody>
+      </p:sp>
+      <p:sp>
+        <p:nvSpPr>
+          <p:cNvPr id="43" name="Rectangle 42"/>
+          <p:cNvSpPr/>
+          <p:nvPr/>
+        </p:nvSpPr>
+        <p:spPr>
+          <a:xfrm>
+            <a:off x="4370832" y="4617720"/>
+            <a:ext cx="64008" cy="1572768"/>
+          </a:xfrm>
+          <a:prstGeom prst="rect">
+            <a:avLst/>
+          </a:prstGeom>
+          <a:solidFill>
+            <a:srgbClr val="56D6B6"/>
+          </a:solidFill>
+          <a:ln>
+            <a:noFill/>
+          </a:ln>
+          <a:effectLst/>
+        </p:spPr>
+        <p:style>
+          <a:lnRef idx="1">
+            <a:schemeClr val="accent1"/>
+          </a:lnRef>
+          <a:fillRef idx="3">
+            <a:schemeClr val="accent1"/>
+          </a:fillRef>
+          <a:effectRef idx="2">
+            <a:schemeClr val="accent1"/>
+          </a:effectRef>
+          <a:fontRef idx="minor">
+            <a:schemeClr val="lt1"/>
+          </a:fontRef>
+        </p:style>
+        <p:txBody>
+          <a:bodyPr rtlCol="0" anchor="ctr"/>
+          <a:lstStyle/>
+          <a:p>
+            <a:pPr algn="ctr"/>
+          </a:p>
+        </p:txBody>
+      </p:sp>
+      <p:sp>
+        <p:nvSpPr>
+          <p:cNvPr id="44" name="TextBox 43"/>
+          <p:cNvSpPr txBox="1"/>
+          <p:nvPr/>
+        </p:nvSpPr>
+        <p:spPr>
+          <a:xfrm>
+            <a:off x="4681728" y="4800600"/>
+            <a:ext cx="2907792" cy="457200"/>
+          </a:xfrm>
+          <a:prstGeom prst="rect">
+            <a:avLst/>
+          </a:prstGeom>
+          <a:noFill/>
+        </p:spPr>
+        <p:txBody>
+          <a:bodyPr wrap="square" anchor="t" lIns="25400" rIns="25400" tIns="12700" bIns="12700">
+            <a:spAutoFit/>
+          </a:bodyPr>
+          <a:lstStyle/>
+          <a:p>
+            <a:pPr algn="l">
+              <a:lnSpc>
+                <a:spcPct val="100000"/>
+              </a:lnSpc>
+            </a:pPr>
+            <a:r>
+              <a:rPr sz="1550" b="1">
+                <a:solidFill>
+                  <a:srgbClr val="F5F1FF"/>
+                </a:solidFill>
+                <a:latin typeface="Microsoft YaHei"/>
+              </a:rPr>
+              <a:t>三大集群</a:t>
+            </a:r>
+          </a:p>
+        </p:txBody>
+      </p:sp>
+      <p:sp>
+        <p:nvSpPr>
+          <p:cNvPr id="45" name="TextBox 44"/>
+          <p:cNvSpPr txBox="1"/>
+          <p:nvPr/>
+        </p:nvSpPr>
+        <p:spPr>
+          <a:xfrm>
+            <a:off x="4681728" y="5221224"/>
+            <a:ext cx="2852928" cy="859536"/>
+          </a:xfrm>
+          <a:prstGeom prst="rect">
+            <a:avLst/>
+          </a:prstGeom>
+          <a:noFill/>
+        </p:spPr>
+        <p:txBody>
+          <a:bodyPr wrap="square" anchor="t" lIns="25400" rIns="25400" tIns="12700" bIns="12700">
+            <a:spAutoFit/>
+          </a:bodyPr>
+          <a:lstStyle/>
+          <a:p>
+            <a:pPr algn="l">
+              <a:lnSpc>
+                <a:spcPct val="116000"/>
+              </a:lnSpc>
+            </a:pPr>
+            <a:r>
+              <a:rPr sz="1150" b="0">
+                <a:solidFill>
+                  <a:srgbClr val="C6BAEA"/>
+                </a:solidFill>
+                <a:latin typeface="Microsoft YaHei"/>
+              </a:rPr>
+              <a:t>动漫 IP  ·  科技应用  ·  交互设计（对齐杨浦「在线新经济·创意设计」千亿集群）</a:t>
+            </a:r>
+          </a:p>
+        </p:txBody>
+      </p:sp>
+      <p:sp>
+        <p:nvSpPr>
+          <p:cNvPr id="46" name="Rounded Rectangle 45"/>
+          <p:cNvSpPr/>
+          <p:nvPr/>
+        </p:nvSpPr>
+        <p:spPr>
+          <a:xfrm>
+            <a:off x="8010144" y="4617720"/>
+            <a:ext cx="3401568" cy="1572768"/>
+          </a:xfrm>
+          <a:prstGeom prst="roundRect">
+            <a:avLst/>
+          </a:prstGeom>
+          <a:ln w="12700">
+            <a:solidFill>
+              <a:srgbClr val="4A3C7C"/>
+            </a:solidFill>
+          </a:ln>
+          <a:effectLst/>
+          <a:gradFill>
+            <a:gsLst>
+              <a:gs pos="0">
+                <a:srgbClr val="2A1E55"/>
+              </a:gs>
+              <a:gs pos="100000">
+                <a:srgbClr val="1E1542"/>
+              </a:gs>
+            </a:gsLst>
+            <a:lin ang="7200000" scaled="1"/>
+          </a:gradFill>
+        </p:spPr>
+        <p:style>
+          <a:lnRef idx="1">
+            <a:schemeClr val="accent1"/>
+          </a:lnRef>
+          <a:fillRef idx="3">
+            <a:schemeClr val="accent1"/>
+          </a:fillRef>
+          <a:effectRef idx="2">
+            <a:schemeClr val="accent1"/>
+          </a:effectRef>
+          <a:fontRef idx="minor">
+            <a:schemeClr val="lt1"/>
+          </a:fontRef>
+        </p:style>
+        <p:txBody>
+          <a:bodyPr rtlCol="0" anchor="ctr"/>
+          <a:lstStyle/>
+          <a:p>
+            <a:pPr algn="ctr"/>
+          </a:p>
+        </p:txBody>
+      </p:sp>
+      <p:sp>
+        <p:nvSpPr>
+          <p:cNvPr id="47" name="Rectangle 46"/>
+          <p:cNvSpPr/>
+          <p:nvPr/>
+        </p:nvSpPr>
+        <p:spPr>
+          <a:xfrm>
+            <a:off x="8010144" y="4617720"/>
+            <a:ext cx="64008" cy="1572768"/>
+          </a:xfrm>
+          <a:prstGeom prst="rect">
+            <a:avLst/>
+          </a:prstGeom>
+          <a:solidFill>
+            <a:srgbClr val="C77DFF"/>
+          </a:solidFill>
+          <a:ln>
+            <a:noFill/>
+          </a:ln>
+          <a:effectLst/>
+        </p:spPr>
+        <p:style>
+          <a:lnRef idx="1">
+            <a:schemeClr val="accent1"/>
+          </a:lnRef>
+          <a:fillRef idx="3">
+            <a:schemeClr val="accent1"/>
+          </a:fillRef>
+          <a:effectRef idx="2">
+            <a:schemeClr val="accent1"/>
+          </a:effectRef>
+          <a:fontRef idx="minor">
+            <a:schemeClr val="lt1"/>
+          </a:fontRef>
+        </p:style>
+        <p:txBody>
+          <a:bodyPr rtlCol="0" anchor="ctr"/>
+          <a:lstStyle/>
+          <a:p>
+            <a:pPr algn="ctr"/>
+          </a:p>
+        </p:txBody>
+      </p:sp>
+      <p:sp>
+        <p:nvSpPr>
+          <p:cNvPr id="48" name="TextBox 47"/>
+          <p:cNvSpPr txBox="1"/>
+          <p:nvPr/>
+        </p:nvSpPr>
+        <p:spPr>
+          <a:xfrm>
+            <a:off x="8321040" y="4800600"/>
+            <a:ext cx="2907792" cy="457200"/>
+          </a:xfrm>
+          <a:prstGeom prst="rect">
+            <a:avLst/>
+          </a:prstGeom>
+          <a:noFill/>
+        </p:spPr>
+        <p:txBody>
+          <a:bodyPr wrap="square" anchor="t" lIns="25400" rIns="25400" tIns="12700" bIns="12700">
+            <a:spAutoFit/>
+          </a:bodyPr>
+          <a:lstStyle/>
+          <a:p>
+            <a:pPr algn="l">
+              <a:lnSpc>
+                <a:spcPct val="100000"/>
+              </a:lnSpc>
+            </a:pPr>
+            <a:r>
+              <a:rPr sz="1550" b="1">
+                <a:solidFill>
+                  <a:srgbClr val="F5F1FF"/>
+                </a:solidFill>
+                <a:latin typeface="Microsoft YaHei"/>
+              </a:rPr>
+              <a:t>可链接资源</a:t>
+            </a:r>
+          </a:p>
+        </p:txBody>
+      </p:sp>
+      <p:sp>
+        <p:nvSpPr>
+          <p:cNvPr id="49" name="TextBox 48"/>
+          <p:cNvSpPr txBox="1"/>
+          <p:nvPr/>
+        </p:nvSpPr>
+        <p:spPr>
+          <a:xfrm>
+            <a:off x="8321040" y="5221224"/>
+            <a:ext cx="2852928" cy="859536"/>
+          </a:xfrm>
+          <a:prstGeom prst="rect">
+            <a:avLst/>
+          </a:prstGeom>
+          <a:noFill/>
+        </p:spPr>
+        <p:txBody>
+          <a:bodyPr wrap="square" anchor="t" lIns="25400" rIns="25400" tIns="12700" bIns="12700">
+            <a:spAutoFit/>
+          </a:bodyPr>
+          <a:lstStyle/>
+          <a:p>
+            <a:pPr algn="l">
+              <a:lnSpc>
+                <a:spcPct val="116000"/>
+              </a:lnSpc>
+            </a:pPr>
+            <a:r>
+              <a:rPr sz="1100" b="0">
+                <a:solidFill>
+                  <a:srgbClr val="C6BAEA"/>
+                </a:solidFill>
+                <a:latin typeface="Microsoft YaHei"/>
+              </a:rPr>
+              <a:t>北大上海校友会、同济设计创新院、科企联、IP/玩具/广告协会、混知等 IP、聚成智能、中建四局。</a:t>
+            </a:r>
+          </a:p>
+        </p:txBody>
+      </p:sp>
+    </p:spTree>
+  </p:cSld>
+  <p:clrMapOvr>
+    <a:masterClrMapping/>
+  </p:clrMapOvr>
+</p:sld>
+</file>
+
+<file path=ppt/slides/slide40.xml><?xml version="1.0" encoding="utf-8"?>
 <p:sld xmlns:a="http://schemas.openxmlformats.org/drawingml/2006/main" xmlns:p="http://schemas.openxmlformats.org/presentationml/2006/main" xmlns:r="http://schemas.openxmlformats.org/officeDocument/2006/relationships">
   <p:cSld>
     <p:spTree>
@@ -51438,7 +57815,7 @@
                 </a:solidFill>
                 <a:latin typeface="Arial"/>
               </a:rPr>
-              <a:t>38</a:t>
+              <a:t>40</a:t>
             </a:r>
             <a:r>
               <a:rPr sz="1050" b="0">
@@ -51447,7 +57824,7 @@
                 </a:solidFill>
                 <a:latin typeface="Arial"/>
               </a:rPr>
-              <a:t> / 42</a:t>
+              <a:t> / 44</a:t>
             </a:r>
           </a:p>
         </p:txBody>
@@ -51460,7 +57837,7 @@
 </p:sld>
 </file>
 
-<file path=ppt/slides/slide39.xml><?xml version="1.0" encoding="utf-8"?>
+<file path=ppt/slides/slide41.xml><?xml version="1.0" encoding="utf-8"?>
 <p:sld xmlns:a="http://schemas.openxmlformats.org/drawingml/2006/main" xmlns:p="http://schemas.openxmlformats.org/presentationml/2006/main" xmlns:r="http://schemas.openxmlformats.org/officeDocument/2006/relationships">
   <p:cSld>
     <p:spTree>
@@ -51865,7 +58242,7 @@
                 </a:solidFill>
                 <a:latin typeface="Arial"/>
               </a:rPr>
-              <a:t>39</a:t>
+              <a:t>41</a:t>
             </a:r>
             <a:r>
               <a:rPr sz="1050" b="0">
@@ -51874,7 +58251,7 @@
                 </a:solidFill>
                 <a:latin typeface="Arial"/>
               </a:rPr>
-              <a:t> / 42</a:t>
+              <a:t> / 44</a:t>
             </a:r>
           </a:p>
         </p:txBody>
@@ -53177,2204 +59554,7 @@
 </p:sld>
 </file>
 
-<file path=ppt/slides/slide4.xml><?xml version="1.0" encoding="utf-8"?>
-<p:sld xmlns:a="http://schemas.openxmlformats.org/drawingml/2006/main" xmlns:p="http://schemas.openxmlformats.org/presentationml/2006/main" xmlns:r="http://schemas.openxmlformats.org/officeDocument/2006/relationships">
-  <p:cSld>
-    <p:spTree>
-      <p:nvGrpSpPr>
-        <p:cNvPr id="1" name=""/>
-        <p:cNvGrpSpPr/>
-        <p:nvPr/>
-      </p:nvGrpSpPr>
-      <p:grpSpPr/>
-      <p:sp>
-        <p:nvSpPr>
-          <p:cNvPr id="2" name="Rectangle 1"/>
-          <p:cNvSpPr/>
-          <p:nvPr/>
-        </p:nvSpPr>
-        <p:spPr>
-          <a:xfrm>
-            <a:off x="0" y="0"/>
-            <a:ext cx="12191695" cy="6858000"/>
-          </a:xfrm>
-          <a:prstGeom prst="rect">
-            <a:avLst/>
-          </a:prstGeom>
-          <a:gradFill>
-            <a:gsLst>
-              <a:gs pos="0">
-                <a:srgbClr val="1A1140"/>
-              </a:gs>
-              <a:gs pos="55000">
-                <a:srgbClr val="3A206E"/>
-              </a:gs>
-              <a:gs pos="100000">
-                <a:srgbClr val="1A1140"/>
-              </a:gs>
-            </a:gsLst>
-            <a:lin ang="7200000" scaled="1"/>
-          </a:gradFill>
-          <a:ln>
-            <a:noFill/>
-          </a:ln>
-          <a:effectLst/>
-        </p:spPr>
-        <p:style>
-          <a:lnRef idx="1">
-            <a:schemeClr val="accent1"/>
-          </a:lnRef>
-          <a:fillRef idx="3">
-            <a:schemeClr val="accent1"/>
-          </a:fillRef>
-          <a:effectRef idx="2">
-            <a:schemeClr val="accent1"/>
-          </a:effectRef>
-          <a:fontRef idx="minor">
-            <a:schemeClr val="lt1"/>
-          </a:fontRef>
-        </p:style>
-        <p:txBody>
-          <a:bodyPr rtlCol="0" anchor="ctr"/>
-          <a:lstStyle/>
-          <a:p>
-            <a:pPr algn="ctr"/>
-          </a:p>
-        </p:txBody>
-      </p:sp>
-      <p:sp>
-        <p:nvSpPr>
-          <p:cNvPr id="3" name="Rectangle 2"/>
-          <p:cNvSpPr/>
-          <p:nvPr/>
-        </p:nvSpPr>
-        <p:spPr>
-          <a:xfrm>
-            <a:off x="777240" y="566928"/>
-            <a:ext cx="54864" cy="786384"/>
-          </a:xfrm>
-          <a:prstGeom prst="rect">
-            <a:avLst/>
-          </a:prstGeom>
-          <a:solidFill>
-            <a:srgbClr val="E9C27C"/>
-          </a:solidFill>
-          <a:ln>
-            <a:noFill/>
-          </a:ln>
-          <a:effectLst/>
-        </p:spPr>
-        <p:style>
-          <a:lnRef idx="1">
-            <a:schemeClr val="accent1"/>
-          </a:lnRef>
-          <a:fillRef idx="3">
-            <a:schemeClr val="accent1"/>
-          </a:fillRef>
-          <a:effectRef idx="2">
-            <a:schemeClr val="accent1"/>
-          </a:effectRef>
-          <a:fontRef idx="minor">
-            <a:schemeClr val="lt1"/>
-          </a:fontRef>
-        </p:style>
-        <p:txBody>
-          <a:bodyPr rtlCol="0" anchor="ctr"/>
-          <a:lstStyle/>
-          <a:p>
-            <a:pPr algn="ctr"/>
-          </a:p>
-        </p:txBody>
-      </p:sp>
-      <p:sp>
-        <p:nvSpPr>
-          <p:cNvPr id="4" name="TextBox 3"/>
-          <p:cNvSpPr txBox="1"/>
-          <p:nvPr/>
-        </p:nvSpPr>
-        <p:spPr>
-          <a:xfrm>
-            <a:off x="978408" y="548640"/>
-            <a:ext cx="8229600" cy="310896"/>
-          </a:xfrm>
-          <a:prstGeom prst="rect">
-            <a:avLst/>
-          </a:prstGeom>
-          <a:noFill/>
-        </p:spPr>
-        <p:txBody>
-          <a:bodyPr wrap="square" anchor="t" lIns="25400" rIns="25400" tIns="12700" bIns="12700">
-            <a:spAutoFit/>
-          </a:bodyPr>
-          <a:lstStyle/>
-          <a:p>
-            <a:pPr algn="l">
-              <a:lnSpc>
-                <a:spcPct val="100000"/>
-              </a:lnSpc>
-            </a:pPr>
-            <a:r>
-              <a:rPr sz="1250" b="1" spc="200">
-                <a:solidFill>
-                  <a:srgbClr val="E9C27C"/>
-                </a:solidFill>
-                <a:latin typeface="Arial"/>
-              </a:rPr>
-              <a:t>FACT SHEET</a:t>
-            </a:r>
-          </a:p>
-        </p:txBody>
-      </p:sp>
-      <p:sp>
-        <p:nvSpPr>
-          <p:cNvPr id="5" name="TextBox 4"/>
-          <p:cNvSpPr txBox="1"/>
-          <p:nvPr/>
-        </p:nvSpPr>
-        <p:spPr>
-          <a:xfrm>
-            <a:off x="978408" y="841248"/>
-            <a:ext cx="9509760" cy="603504"/>
-          </a:xfrm>
-          <a:prstGeom prst="rect">
-            <a:avLst/>
-          </a:prstGeom>
-          <a:noFill/>
-        </p:spPr>
-        <p:txBody>
-          <a:bodyPr wrap="square" anchor="t" lIns="25400" rIns="25400" tIns="12700" bIns="12700">
-            <a:spAutoFit/>
-          </a:bodyPr>
-          <a:lstStyle/>
-          <a:p>
-            <a:pPr algn="l">
-              <a:lnSpc>
-                <a:spcPct val="100000"/>
-              </a:lnSpc>
-            </a:pPr>
-            <a:r>
-              <a:rPr sz="2600" b="1">
-                <a:solidFill>
-                  <a:srgbClr val="F5F1FF"/>
-                </a:solidFill>
-                <a:latin typeface="Microsoft YaHei"/>
-              </a:rPr>
-              <a:t>关键信息提取 · 项目基本盘</a:t>
-            </a:r>
-          </a:p>
-        </p:txBody>
-      </p:sp>
-      <p:sp>
-        <p:nvSpPr>
-          <p:cNvPr id="6" name="TextBox 5"/>
-          <p:cNvSpPr txBox="1"/>
-          <p:nvPr/>
-        </p:nvSpPr>
-        <p:spPr>
-          <a:xfrm>
-            <a:off x="10332720" y="457200"/>
-            <a:ext cx="1417320" cy="822960"/>
-          </a:xfrm>
-          <a:prstGeom prst="rect">
-            <a:avLst/>
-          </a:prstGeom>
-          <a:noFill/>
-        </p:spPr>
-        <p:txBody>
-          <a:bodyPr wrap="square" anchor="t" lIns="25400" rIns="25400" tIns="12700" bIns="12700">
-            <a:spAutoFit/>
-          </a:bodyPr>
-          <a:lstStyle/>
-          <a:p>
-            <a:pPr algn="r">
-              <a:lnSpc>
-                <a:spcPct val="100000"/>
-              </a:lnSpc>
-            </a:pPr>
-            <a:r>
-              <a:rPr sz="4000" b="1">
-                <a:solidFill>
-                  <a:srgbClr val="E9C27C"/>
-                </a:solidFill>
-                <a:latin typeface="Arial"/>
-              </a:rPr>
-              <a:t>00</a:t>
-            </a:r>
-          </a:p>
-        </p:txBody>
-      </p:sp>
-      <p:sp>
-        <p:nvSpPr>
-          <p:cNvPr id="7" name="Rectangle 6"/>
-          <p:cNvSpPr/>
-          <p:nvPr/>
-        </p:nvSpPr>
-        <p:spPr>
-          <a:xfrm>
-            <a:off x="10561320" y="1207008"/>
-            <a:ext cx="1170432" cy="25400"/>
-          </a:xfrm>
-          <a:prstGeom prst="rect">
-            <a:avLst/>
-          </a:prstGeom>
-          <a:solidFill>
-            <a:srgbClr val="4A3C7C"/>
-          </a:solidFill>
-          <a:ln>
-            <a:noFill/>
-          </a:ln>
-          <a:effectLst/>
-        </p:spPr>
-        <p:style>
-          <a:lnRef idx="1">
-            <a:schemeClr val="accent1"/>
-          </a:lnRef>
-          <a:fillRef idx="3">
-            <a:schemeClr val="accent1"/>
-          </a:fillRef>
-          <a:effectRef idx="2">
-            <a:schemeClr val="accent1"/>
-          </a:effectRef>
-          <a:fontRef idx="minor">
-            <a:schemeClr val="lt1"/>
-          </a:fontRef>
-        </p:style>
-        <p:txBody>
-          <a:bodyPr rtlCol="0" anchor="ctr"/>
-          <a:lstStyle/>
-          <a:p>
-            <a:pPr algn="ctr"/>
-          </a:p>
-        </p:txBody>
-      </p:sp>
-      <p:sp>
-        <p:nvSpPr>
-          <p:cNvPr id="8" name="Rectangle 7"/>
-          <p:cNvSpPr/>
-          <p:nvPr/>
-        </p:nvSpPr>
-        <p:spPr>
-          <a:xfrm>
-            <a:off x="777240" y="6327648"/>
-            <a:ext cx="10634472" cy="12700"/>
-          </a:xfrm>
-          <a:prstGeom prst="rect">
-            <a:avLst/>
-          </a:prstGeom>
-          <a:solidFill>
-            <a:srgbClr val="4A3C7C"/>
-          </a:solidFill>
-          <a:ln>
-            <a:noFill/>
-          </a:ln>
-          <a:effectLst/>
-        </p:spPr>
-        <p:style>
-          <a:lnRef idx="1">
-            <a:schemeClr val="accent1"/>
-          </a:lnRef>
-          <a:fillRef idx="3">
-            <a:schemeClr val="accent1"/>
-          </a:fillRef>
-          <a:effectRef idx="2">
-            <a:schemeClr val="accent1"/>
-          </a:effectRef>
-          <a:fontRef idx="minor">
-            <a:schemeClr val="lt1"/>
-          </a:fontRef>
-        </p:style>
-        <p:txBody>
-          <a:bodyPr rtlCol="0" anchor="ctr"/>
-          <a:lstStyle/>
-          <a:p>
-            <a:pPr algn="ctr"/>
-          </a:p>
-        </p:txBody>
-      </p:sp>
-      <p:sp>
-        <p:nvSpPr>
-          <p:cNvPr id="9" name="TextBox 8"/>
-          <p:cNvSpPr txBox="1"/>
-          <p:nvPr/>
-        </p:nvSpPr>
-        <p:spPr>
-          <a:xfrm>
-            <a:off x="777240" y="6400800"/>
-            <a:ext cx="8229600" cy="292608"/>
-          </a:xfrm>
-          <a:prstGeom prst="rect">
-            <a:avLst/>
-          </a:prstGeom>
-          <a:noFill/>
-        </p:spPr>
-        <p:txBody>
-          <a:bodyPr wrap="square" anchor="t" lIns="25400" rIns="25400" tIns="12700" bIns="12700">
-            <a:spAutoFit/>
-          </a:bodyPr>
-          <a:lstStyle/>
-          <a:p>
-            <a:pPr algn="l">
-              <a:lnSpc>
-                <a:spcPct val="100000"/>
-              </a:lnSpc>
-            </a:pPr>
-            <a:r>
-              <a:rPr sz="950" b="0">
-                <a:solidFill>
-                  <a:srgbClr val="9486C4"/>
-                </a:solidFill>
-                <a:latin typeface="Microsoft YaHei"/>
-              </a:rPr>
-              <a:t>上海创智汇 </a:t>
-            </a:r>
-            <a:r>
-              <a:rPr sz="950" b="0">
-                <a:solidFill>
-                  <a:srgbClr val="9486C4"/>
-                </a:solidFill>
-                <a:latin typeface="Arial"/>
-              </a:rPr>
-              <a:t>CHUANGZHIHUI</a:t>
-            </a:r>
-            <a:r>
-              <a:rPr sz="950" b="0">
-                <a:solidFill>
-                  <a:srgbClr val="9486C4"/>
-                </a:solidFill>
-                <a:latin typeface="Microsoft YaHei"/>
-              </a:rPr>
-              <a:t>  ·  AI+数字内容无界共创港 · 6600㎡ 谈判集中汇报</a:t>
-            </a:r>
-          </a:p>
-        </p:txBody>
-      </p:sp>
-      <p:sp>
-        <p:nvSpPr>
-          <p:cNvPr id="10" name="TextBox 9"/>
-          <p:cNvSpPr txBox="1"/>
-          <p:nvPr/>
-        </p:nvSpPr>
-        <p:spPr>
-          <a:xfrm>
-            <a:off x="10241280" y="6400800"/>
-            <a:ext cx="1490472" cy="292608"/>
-          </a:xfrm>
-          <a:prstGeom prst="rect">
-            <a:avLst/>
-          </a:prstGeom>
-          <a:noFill/>
-        </p:spPr>
-        <p:txBody>
-          <a:bodyPr wrap="square" anchor="t" lIns="25400" rIns="25400" tIns="12700" bIns="12700">
-            <a:spAutoFit/>
-          </a:bodyPr>
-          <a:lstStyle/>
-          <a:p>
-            <a:pPr algn="r">
-              <a:lnSpc>
-                <a:spcPct val="100000"/>
-              </a:lnSpc>
-            </a:pPr>
-            <a:r>
-              <a:rPr sz="1050" b="1">
-                <a:solidFill>
-                  <a:srgbClr val="E9C27C"/>
-                </a:solidFill>
-                <a:latin typeface="Arial"/>
-              </a:rPr>
-              <a:t>04</a:t>
-            </a:r>
-            <a:r>
-              <a:rPr sz="1050" b="0">
-                <a:solidFill>
-                  <a:srgbClr val="9486C4"/>
-                </a:solidFill>
-                <a:latin typeface="Arial"/>
-              </a:rPr>
-              <a:t> / 42</a:t>
-            </a:r>
-          </a:p>
-        </p:txBody>
-      </p:sp>
-      <p:sp>
-        <p:nvSpPr>
-          <p:cNvPr id="11" name="Rounded Rectangle 10"/>
-          <p:cNvSpPr/>
-          <p:nvPr/>
-        </p:nvSpPr>
-        <p:spPr>
-          <a:xfrm>
-            <a:off x="777240" y="1627632"/>
-            <a:ext cx="5532120" cy="2788920"/>
-          </a:xfrm>
-          <a:prstGeom prst="roundRect">
-            <a:avLst/>
-          </a:prstGeom>
-          <a:ln w="12700">
-            <a:solidFill>
-              <a:srgbClr val="4A3C7C"/>
-            </a:solidFill>
-          </a:ln>
-          <a:effectLst/>
-          <a:gradFill>
-            <a:gsLst>
-              <a:gs pos="0">
-                <a:srgbClr val="2A1E55"/>
-              </a:gs>
-              <a:gs pos="100000">
-                <a:srgbClr val="1E1542"/>
-              </a:gs>
-            </a:gsLst>
-            <a:lin ang="7200000" scaled="1"/>
-          </a:gradFill>
-        </p:spPr>
-        <p:style>
-          <a:lnRef idx="1">
-            <a:schemeClr val="accent1"/>
-          </a:lnRef>
-          <a:fillRef idx="3">
-            <a:schemeClr val="accent1"/>
-          </a:fillRef>
-          <a:effectRef idx="2">
-            <a:schemeClr val="accent1"/>
-          </a:effectRef>
-          <a:fontRef idx="minor">
-            <a:schemeClr val="lt1"/>
-          </a:fontRef>
-        </p:style>
-        <p:txBody>
-          <a:bodyPr rtlCol="0" anchor="ctr"/>
-          <a:lstStyle/>
-          <a:p>
-            <a:pPr algn="ctr"/>
-          </a:p>
-        </p:txBody>
-      </p:sp>
-      <p:sp>
-        <p:nvSpPr>
-          <p:cNvPr id="12" name="Rectangle 11"/>
-          <p:cNvSpPr/>
-          <p:nvPr/>
-        </p:nvSpPr>
-        <p:spPr>
-          <a:xfrm>
-            <a:off x="941832" y="1810512"/>
-            <a:ext cx="5212080" cy="402336"/>
-          </a:xfrm>
-          <a:prstGeom prst="rect">
-            <a:avLst/>
-          </a:prstGeom>
-          <a:ln>
-            <a:noFill/>
-          </a:ln>
-          <a:effectLst/>
-          <a:gradFill>
-            <a:gsLst>
-              <a:gs pos="0">
-                <a:srgbClr val="36276C"/>
-              </a:gs>
-              <a:gs pos="100000">
-                <a:srgbClr val="2A1E55"/>
-              </a:gs>
-            </a:gsLst>
-            <a:lin ang="0" scaled="1"/>
-          </a:gradFill>
-        </p:spPr>
-        <p:style>
-          <a:lnRef idx="1">
-            <a:schemeClr val="accent1"/>
-          </a:lnRef>
-          <a:fillRef idx="3">
-            <a:schemeClr val="accent1"/>
-          </a:fillRef>
-          <a:effectRef idx="2">
-            <a:schemeClr val="accent1"/>
-          </a:effectRef>
-          <a:fontRef idx="minor">
-            <a:schemeClr val="lt1"/>
-          </a:fontRef>
-        </p:style>
-        <p:txBody>
-          <a:bodyPr rtlCol="0" anchor="ctr"/>
-          <a:lstStyle/>
-          <a:p>
-            <a:pPr algn="ctr"/>
-          </a:p>
-        </p:txBody>
-      </p:sp>
-      <p:sp>
-        <p:nvSpPr>
-          <p:cNvPr id="13" name="TextBox 12"/>
-          <p:cNvSpPr txBox="1"/>
-          <p:nvPr/>
-        </p:nvSpPr>
-        <p:spPr>
-          <a:xfrm>
-            <a:off x="941832" y="1810512"/>
-            <a:ext cx="1563624" cy="402336"/>
-          </a:xfrm>
-          <a:prstGeom prst="rect">
-            <a:avLst/>
-          </a:prstGeom>
-          <a:noFill/>
-        </p:spPr>
-        <p:txBody>
-          <a:bodyPr wrap="square" anchor="ctr" lIns="127000" rIns="76200" tIns="25400" bIns="25400">
-            <a:spAutoFit/>
-          </a:bodyPr>
-          <a:lstStyle/>
-          <a:p>
-            <a:pPr>
-              <a:lnSpc>
-                <a:spcPct val="104000"/>
-              </a:lnSpc>
-            </a:pPr>
-            <a:r>
-              <a:rPr sz="1250" b="1">
-                <a:solidFill>
-                  <a:srgbClr val="E9C27C"/>
-                </a:solidFill>
-                <a:latin typeface="Microsoft YaHei"/>
-              </a:rPr>
-              <a:t>项目</a:t>
-            </a:r>
-          </a:p>
-        </p:txBody>
-      </p:sp>
-      <p:sp>
-        <p:nvSpPr>
-          <p:cNvPr id="14" name="TextBox 13"/>
-          <p:cNvSpPr txBox="1"/>
-          <p:nvPr/>
-        </p:nvSpPr>
-        <p:spPr>
-          <a:xfrm>
-            <a:off x="2505456" y="1810512"/>
-            <a:ext cx="3648456" cy="402336"/>
-          </a:xfrm>
-          <a:prstGeom prst="rect">
-            <a:avLst/>
-          </a:prstGeom>
-          <a:noFill/>
-        </p:spPr>
-        <p:txBody>
-          <a:bodyPr wrap="square" anchor="ctr" lIns="127000" rIns="76200" tIns="25400" bIns="25400">
-            <a:spAutoFit/>
-          </a:bodyPr>
-          <a:lstStyle/>
-          <a:p>
-            <a:pPr>
-              <a:lnSpc>
-                <a:spcPct val="104000"/>
-              </a:lnSpc>
-            </a:pPr>
-            <a:r>
-              <a:rPr sz="1250" b="1">
-                <a:solidFill>
-                  <a:srgbClr val="E9C27C"/>
-                </a:solidFill>
-                <a:latin typeface="Microsoft YaHei"/>
-              </a:rPr>
-              <a:t>内容</a:t>
-            </a:r>
-          </a:p>
-        </p:txBody>
-      </p:sp>
-      <p:sp>
-        <p:nvSpPr>
-          <p:cNvPr id="15" name="Rectangle 14"/>
-          <p:cNvSpPr/>
-          <p:nvPr/>
-        </p:nvSpPr>
-        <p:spPr>
-          <a:xfrm>
-            <a:off x="941832" y="2203323"/>
-            <a:ext cx="5212080" cy="9525"/>
-          </a:xfrm>
-          <a:prstGeom prst="rect">
-            <a:avLst/>
-          </a:prstGeom>
-          <a:solidFill>
-            <a:srgbClr val="4A3C7C"/>
-          </a:solidFill>
-          <a:ln>
-            <a:noFill/>
-          </a:ln>
-          <a:effectLst/>
-        </p:spPr>
-        <p:style>
-          <a:lnRef idx="1">
-            <a:schemeClr val="accent1"/>
-          </a:lnRef>
-          <a:fillRef idx="3">
-            <a:schemeClr val="accent1"/>
-          </a:fillRef>
-          <a:effectRef idx="2">
-            <a:schemeClr val="accent1"/>
-          </a:effectRef>
-          <a:fontRef idx="minor">
-            <a:schemeClr val="lt1"/>
-          </a:fontRef>
-        </p:style>
-        <p:txBody>
-          <a:bodyPr rtlCol="0" anchor="ctr"/>
-          <a:lstStyle/>
-          <a:p>
-            <a:pPr algn="ctr"/>
-          </a:p>
-        </p:txBody>
-      </p:sp>
-      <p:sp>
-        <p:nvSpPr>
-          <p:cNvPr id="16" name="TextBox 15"/>
-          <p:cNvSpPr txBox="1"/>
-          <p:nvPr/>
-        </p:nvSpPr>
-        <p:spPr>
-          <a:xfrm>
-            <a:off x="941832" y="2212848"/>
-            <a:ext cx="1563624" cy="420624"/>
-          </a:xfrm>
-          <a:prstGeom prst="rect">
-            <a:avLst/>
-          </a:prstGeom>
-          <a:noFill/>
-        </p:spPr>
-        <p:txBody>
-          <a:bodyPr wrap="square" anchor="ctr" lIns="127000" rIns="76200" tIns="25400" bIns="25400">
-            <a:spAutoFit/>
-          </a:bodyPr>
-          <a:lstStyle/>
-          <a:p>
-            <a:pPr>
-              <a:lnSpc>
-                <a:spcPct val="104000"/>
-              </a:lnSpc>
-            </a:pPr>
-            <a:r>
-              <a:rPr sz="1200" b="1">
-                <a:solidFill>
-                  <a:srgbClr val="E9C27C"/>
-                </a:solidFill>
-                <a:latin typeface="Microsoft YaHei"/>
-              </a:rPr>
-              <a:t>位置</a:t>
-            </a:r>
-          </a:p>
-        </p:txBody>
-      </p:sp>
-      <p:sp>
-        <p:nvSpPr>
-          <p:cNvPr id="17" name="TextBox 16"/>
-          <p:cNvSpPr txBox="1"/>
-          <p:nvPr/>
-        </p:nvSpPr>
-        <p:spPr>
-          <a:xfrm>
-            <a:off x="2505456" y="2212848"/>
-            <a:ext cx="3648456" cy="420624"/>
-          </a:xfrm>
-          <a:prstGeom prst="rect">
-            <a:avLst/>
-          </a:prstGeom>
-          <a:noFill/>
-        </p:spPr>
-        <p:txBody>
-          <a:bodyPr wrap="square" anchor="ctr" lIns="127000" rIns="76200" tIns="25400" bIns="25400">
-            <a:spAutoFit/>
-          </a:bodyPr>
-          <a:lstStyle/>
-          <a:p>
-            <a:pPr>
-              <a:lnSpc>
-                <a:spcPct val="104000"/>
-              </a:lnSpc>
-            </a:pPr>
-            <a:r>
-              <a:rPr sz="1200" b="0">
-                <a:solidFill>
-                  <a:srgbClr val="C6BAEA"/>
-                </a:solidFill>
-                <a:latin typeface="Microsoft YaHei"/>
-              </a:rPr>
-              <a:t>上海杨浦五角场 · 创智汇（创智天地）</a:t>
-            </a:r>
-          </a:p>
-        </p:txBody>
-      </p:sp>
-      <p:sp>
-        <p:nvSpPr>
-          <p:cNvPr id="18" name="Rectangle 17"/>
-          <p:cNvSpPr/>
-          <p:nvPr/>
-        </p:nvSpPr>
-        <p:spPr>
-          <a:xfrm>
-            <a:off x="941832" y="2623947"/>
-            <a:ext cx="5212080" cy="9525"/>
-          </a:xfrm>
-          <a:prstGeom prst="rect">
-            <a:avLst/>
-          </a:prstGeom>
-          <a:solidFill>
-            <a:srgbClr val="4A3C7C"/>
-          </a:solidFill>
-          <a:ln>
-            <a:noFill/>
-          </a:ln>
-          <a:effectLst/>
-        </p:spPr>
-        <p:style>
-          <a:lnRef idx="1">
-            <a:schemeClr val="accent1"/>
-          </a:lnRef>
-          <a:fillRef idx="3">
-            <a:schemeClr val="accent1"/>
-          </a:fillRef>
-          <a:effectRef idx="2">
-            <a:schemeClr val="accent1"/>
-          </a:effectRef>
-          <a:fontRef idx="minor">
-            <a:schemeClr val="lt1"/>
-          </a:fontRef>
-        </p:style>
-        <p:txBody>
-          <a:bodyPr rtlCol="0" anchor="ctr"/>
-          <a:lstStyle/>
-          <a:p>
-            <a:pPr algn="ctr"/>
-          </a:p>
-        </p:txBody>
-      </p:sp>
-      <p:sp>
-        <p:nvSpPr>
-          <p:cNvPr id="19" name="Rectangle 18"/>
-          <p:cNvSpPr/>
-          <p:nvPr/>
-        </p:nvSpPr>
-        <p:spPr>
-          <a:xfrm>
-            <a:off x="941832" y="2633472"/>
-            <a:ext cx="5212080" cy="420624"/>
-          </a:xfrm>
-          <a:prstGeom prst="rect">
-            <a:avLst/>
-          </a:prstGeom>
-          <a:solidFill>
-            <a:srgbClr val="221844"/>
-          </a:solidFill>
-          <a:ln>
-            <a:noFill/>
-          </a:ln>
-          <a:effectLst/>
-        </p:spPr>
-        <p:style>
-          <a:lnRef idx="1">
-            <a:schemeClr val="accent1"/>
-          </a:lnRef>
-          <a:fillRef idx="3">
-            <a:schemeClr val="accent1"/>
-          </a:fillRef>
-          <a:effectRef idx="2">
-            <a:schemeClr val="accent1"/>
-          </a:effectRef>
-          <a:fontRef idx="minor">
-            <a:schemeClr val="lt1"/>
-          </a:fontRef>
-        </p:style>
-        <p:txBody>
-          <a:bodyPr rtlCol="0" anchor="ctr"/>
-          <a:lstStyle/>
-          <a:p>
-            <a:pPr algn="ctr"/>
-          </a:p>
-        </p:txBody>
-      </p:sp>
-      <p:sp>
-        <p:nvSpPr>
-          <p:cNvPr id="20" name="TextBox 19"/>
-          <p:cNvSpPr txBox="1"/>
-          <p:nvPr/>
-        </p:nvSpPr>
-        <p:spPr>
-          <a:xfrm>
-            <a:off x="941832" y="2633472"/>
-            <a:ext cx="1563624" cy="420624"/>
-          </a:xfrm>
-          <a:prstGeom prst="rect">
-            <a:avLst/>
-          </a:prstGeom>
-          <a:noFill/>
-        </p:spPr>
-        <p:txBody>
-          <a:bodyPr wrap="square" anchor="ctr" lIns="127000" rIns="76200" tIns="25400" bIns="25400">
-            <a:spAutoFit/>
-          </a:bodyPr>
-          <a:lstStyle/>
-          <a:p>
-            <a:pPr>
-              <a:lnSpc>
-                <a:spcPct val="104000"/>
-              </a:lnSpc>
-            </a:pPr>
-            <a:r>
-              <a:rPr sz="1200" b="1">
-                <a:solidFill>
-                  <a:srgbClr val="E9C27C"/>
-                </a:solidFill>
-                <a:latin typeface="Microsoft YaHei"/>
-              </a:rPr>
-              <a:t>合作面积</a:t>
-            </a:r>
-          </a:p>
-        </p:txBody>
-      </p:sp>
-      <p:sp>
-        <p:nvSpPr>
-          <p:cNvPr id="21" name="TextBox 20"/>
-          <p:cNvSpPr txBox="1"/>
-          <p:nvPr/>
-        </p:nvSpPr>
-        <p:spPr>
-          <a:xfrm>
-            <a:off x="2505456" y="2633472"/>
-            <a:ext cx="3648456" cy="420624"/>
-          </a:xfrm>
-          <a:prstGeom prst="rect">
-            <a:avLst/>
-          </a:prstGeom>
-          <a:noFill/>
-        </p:spPr>
-        <p:txBody>
-          <a:bodyPr wrap="square" anchor="ctr" lIns="127000" rIns="76200" tIns="25400" bIns="25400">
-            <a:spAutoFit/>
-          </a:bodyPr>
-          <a:lstStyle/>
-          <a:p>
-            <a:pPr>
-              <a:lnSpc>
-                <a:spcPct val="104000"/>
-              </a:lnSpc>
-            </a:pPr>
-            <a:r>
-              <a:rPr sz="1200" b="0">
-                <a:solidFill>
-                  <a:srgbClr val="C6BAEA"/>
-                </a:solidFill>
-                <a:latin typeface="Microsoft YaHei"/>
-              </a:rPr>
-              <a:t>约 6600㎡</a:t>
-            </a:r>
-          </a:p>
-        </p:txBody>
-      </p:sp>
-      <p:sp>
-        <p:nvSpPr>
-          <p:cNvPr id="22" name="Rectangle 21"/>
-          <p:cNvSpPr/>
-          <p:nvPr/>
-        </p:nvSpPr>
-        <p:spPr>
-          <a:xfrm>
-            <a:off x="941832" y="3044571"/>
-            <a:ext cx="5212080" cy="9525"/>
-          </a:xfrm>
-          <a:prstGeom prst="rect">
-            <a:avLst/>
-          </a:prstGeom>
-          <a:solidFill>
-            <a:srgbClr val="4A3C7C"/>
-          </a:solidFill>
-          <a:ln>
-            <a:noFill/>
-          </a:ln>
-          <a:effectLst/>
-        </p:spPr>
-        <p:style>
-          <a:lnRef idx="1">
-            <a:schemeClr val="accent1"/>
-          </a:lnRef>
-          <a:fillRef idx="3">
-            <a:schemeClr val="accent1"/>
-          </a:fillRef>
-          <a:effectRef idx="2">
-            <a:schemeClr val="accent1"/>
-          </a:effectRef>
-          <a:fontRef idx="minor">
-            <a:schemeClr val="lt1"/>
-          </a:fontRef>
-        </p:style>
-        <p:txBody>
-          <a:bodyPr rtlCol="0" anchor="ctr"/>
-          <a:lstStyle/>
-          <a:p>
-            <a:pPr algn="ctr"/>
-          </a:p>
-        </p:txBody>
-      </p:sp>
-      <p:sp>
-        <p:nvSpPr>
-          <p:cNvPr id="23" name="TextBox 22"/>
-          <p:cNvSpPr txBox="1"/>
-          <p:nvPr/>
-        </p:nvSpPr>
-        <p:spPr>
-          <a:xfrm>
-            <a:off x="941832" y="3054096"/>
-            <a:ext cx="1563624" cy="420624"/>
-          </a:xfrm>
-          <a:prstGeom prst="rect">
-            <a:avLst/>
-          </a:prstGeom>
-          <a:noFill/>
-        </p:spPr>
-        <p:txBody>
-          <a:bodyPr wrap="square" anchor="ctr" lIns="127000" rIns="76200" tIns="25400" bIns="25400">
-            <a:spAutoFit/>
-          </a:bodyPr>
-          <a:lstStyle/>
-          <a:p>
-            <a:pPr>
-              <a:lnSpc>
-                <a:spcPct val="104000"/>
-              </a:lnSpc>
-            </a:pPr>
-            <a:r>
-              <a:rPr sz="1200" b="1">
-                <a:solidFill>
-                  <a:srgbClr val="E9C27C"/>
-                </a:solidFill>
-                <a:latin typeface="Microsoft YaHei"/>
-              </a:rPr>
-              <a:t>3 楼 ≈2850㎡</a:t>
-            </a:r>
-          </a:p>
-        </p:txBody>
-      </p:sp>
-      <p:sp>
-        <p:nvSpPr>
-          <p:cNvPr id="24" name="TextBox 23"/>
-          <p:cNvSpPr txBox="1"/>
-          <p:nvPr/>
-        </p:nvSpPr>
-        <p:spPr>
-          <a:xfrm>
-            <a:off x="2505456" y="3054096"/>
-            <a:ext cx="3648456" cy="420624"/>
-          </a:xfrm>
-          <a:prstGeom prst="rect">
-            <a:avLst/>
-          </a:prstGeom>
-          <a:noFill/>
-        </p:spPr>
-        <p:txBody>
-          <a:bodyPr wrap="square" anchor="ctr" lIns="127000" rIns="76200" tIns="25400" bIns="25400">
-            <a:spAutoFit/>
-          </a:bodyPr>
-          <a:lstStyle/>
-          <a:p>
-            <a:pPr>
-              <a:lnSpc>
-                <a:spcPct val="104000"/>
-              </a:lnSpc>
-            </a:pPr>
-            <a:r>
-              <a:rPr sz="1200" b="0">
-                <a:solidFill>
-                  <a:srgbClr val="C6BAEA"/>
-                </a:solidFill>
-                <a:latin typeface="Microsoft YaHei"/>
-              </a:rPr>
-              <a:t>孵化器 + 办公（AI / OPC 主轴）</a:t>
-            </a:r>
-          </a:p>
-        </p:txBody>
-      </p:sp>
-      <p:sp>
-        <p:nvSpPr>
-          <p:cNvPr id="25" name="Rectangle 24"/>
-          <p:cNvSpPr/>
-          <p:nvPr/>
-        </p:nvSpPr>
-        <p:spPr>
-          <a:xfrm>
-            <a:off x="941832" y="3465195"/>
-            <a:ext cx="5212080" cy="9525"/>
-          </a:xfrm>
-          <a:prstGeom prst="rect">
-            <a:avLst/>
-          </a:prstGeom>
-          <a:solidFill>
-            <a:srgbClr val="4A3C7C"/>
-          </a:solidFill>
-          <a:ln>
-            <a:noFill/>
-          </a:ln>
-          <a:effectLst/>
-        </p:spPr>
-        <p:style>
-          <a:lnRef idx="1">
-            <a:schemeClr val="accent1"/>
-          </a:lnRef>
-          <a:fillRef idx="3">
-            <a:schemeClr val="accent1"/>
-          </a:fillRef>
-          <a:effectRef idx="2">
-            <a:schemeClr val="accent1"/>
-          </a:effectRef>
-          <a:fontRef idx="minor">
-            <a:schemeClr val="lt1"/>
-          </a:fontRef>
-        </p:style>
-        <p:txBody>
-          <a:bodyPr rtlCol="0" anchor="ctr"/>
-          <a:lstStyle/>
-          <a:p>
-            <a:pPr algn="ctr"/>
-          </a:p>
-        </p:txBody>
-      </p:sp>
-      <p:sp>
-        <p:nvSpPr>
-          <p:cNvPr id="26" name="Rectangle 25"/>
-          <p:cNvSpPr/>
-          <p:nvPr/>
-        </p:nvSpPr>
-        <p:spPr>
-          <a:xfrm>
-            <a:off x="941832" y="3474720"/>
-            <a:ext cx="5212080" cy="420624"/>
-          </a:xfrm>
-          <a:prstGeom prst="rect">
-            <a:avLst/>
-          </a:prstGeom>
-          <a:solidFill>
-            <a:srgbClr val="221844"/>
-          </a:solidFill>
-          <a:ln>
-            <a:noFill/>
-          </a:ln>
-          <a:effectLst/>
-        </p:spPr>
-        <p:style>
-          <a:lnRef idx="1">
-            <a:schemeClr val="accent1"/>
-          </a:lnRef>
-          <a:fillRef idx="3">
-            <a:schemeClr val="accent1"/>
-          </a:fillRef>
-          <a:effectRef idx="2">
-            <a:schemeClr val="accent1"/>
-          </a:effectRef>
-          <a:fontRef idx="minor">
-            <a:schemeClr val="lt1"/>
-          </a:fontRef>
-        </p:style>
-        <p:txBody>
-          <a:bodyPr rtlCol="0" anchor="ctr"/>
-          <a:lstStyle/>
-          <a:p>
-            <a:pPr algn="ctr"/>
-          </a:p>
-        </p:txBody>
-      </p:sp>
-      <p:sp>
-        <p:nvSpPr>
-          <p:cNvPr id="27" name="TextBox 26"/>
-          <p:cNvSpPr txBox="1"/>
-          <p:nvPr/>
-        </p:nvSpPr>
-        <p:spPr>
-          <a:xfrm>
-            <a:off x="941832" y="3474720"/>
-            <a:ext cx="1563624" cy="420624"/>
-          </a:xfrm>
-          <a:prstGeom prst="rect">
-            <a:avLst/>
-          </a:prstGeom>
-          <a:noFill/>
-        </p:spPr>
-        <p:txBody>
-          <a:bodyPr wrap="square" anchor="ctr" lIns="127000" rIns="76200" tIns="25400" bIns="25400">
-            <a:spAutoFit/>
-          </a:bodyPr>
-          <a:lstStyle/>
-          <a:p>
-            <a:pPr>
-              <a:lnSpc>
-                <a:spcPct val="104000"/>
-              </a:lnSpc>
-            </a:pPr>
-            <a:r>
-              <a:rPr sz="1200" b="1">
-                <a:solidFill>
-                  <a:srgbClr val="E9C27C"/>
-                </a:solidFill>
-                <a:latin typeface="Microsoft YaHei"/>
-              </a:rPr>
-              <a:t>5 楼 ≈3670㎡</a:t>
-            </a:r>
-          </a:p>
-        </p:txBody>
-      </p:sp>
-      <p:sp>
-        <p:nvSpPr>
-          <p:cNvPr id="28" name="TextBox 27"/>
-          <p:cNvSpPr txBox="1"/>
-          <p:nvPr/>
-        </p:nvSpPr>
-        <p:spPr>
-          <a:xfrm>
-            <a:off x="2505456" y="3474720"/>
-            <a:ext cx="3648456" cy="420624"/>
-          </a:xfrm>
-          <a:prstGeom prst="rect">
-            <a:avLst/>
-          </a:prstGeom>
-          <a:noFill/>
-        </p:spPr>
-        <p:txBody>
-          <a:bodyPr wrap="square" anchor="ctr" lIns="127000" rIns="76200" tIns="25400" bIns="25400">
-            <a:spAutoFit/>
-          </a:bodyPr>
-          <a:lstStyle/>
-          <a:p>
-            <a:pPr>
-              <a:lnSpc>
-                <a:spcPct val="104000"/>
-              </a:lnSpc>
-            </a:pPr>
-            <a:r>
-              <a:rPr sz="1200" b="0">
-                <a:solidFill>
-                  <a:srgbClr val="C6BAEA"/>
-                </a:solidFill>
-                <a:latin typeface="Microsoft YaHei"/>
-              </a:rPr>
-              <a:t>展厅 + 贸易（IP 内容主轴）</a:t>
-            </a:r>
-          </a:p>
-        </p:txBody>
-      </p:sp>
-      <p:sp>
-        <p:nvSpPr>
-          <p:cNvPr id="29" name="Rectangle 28"/>
-          <p:cNvSpPr/>
-          <p:nvPr/>
-        </p:nvSpPr>
-        <p:spPr>
-          <a:xfrm>
-            <a:off x="941832" y="3885819"/>
-            <a:ext cx="5212080" cy="9525"/>
-          </a:xfrm>
-          <a:prstGeom prst="rect">
-            <a:avLst/>
-          </a:prstGeom>
-          <a:solidFill>
-            <a:srgbClr val="4A3C7C"/>
-          </a:solidFill>
-          <a:ln>
-            <a:noFill/>
-          </a:ln>
-          <a:effectLst/>
-        </p:spPr>
-        <p:style>
-          <a:lnRef idx="1">
-            <a:schemeClr val="accent1"/>
-          </a:lnRef>
-          <a:fillRef idx="3">
-            <a:schemeClr val="accent1"/>
-          </a:fillRef>
-          <a:effectRef idx="2">
-            <a:schemeClr val="accent1"/>
-          </a:effectRef>
-          <a:fontRef idx="minor">
-            <a:schemeClr val="lt1"/>
-          </a:fontRef>
-        </p:style>
-        <p:txBody>
-          <a:bodyPr rtlCol="0" anchor="ctr"/>
-          <a:lstStyle/>
-          <a:p>
-            <a:pPr algn="ctr"/>
-          </a:p>
-        </p:txBody>
-      </p:sp>
-      <p:sp>
-        <p:nvSpPr>
-          <p:cNvPr id="30" name="TextBox 29"/>
-          <p:cNvSpPr txBox="1"/>
-          <p:nvPr/>
-        </p:nvSpPr>
-        <p:spPr>
-          <a:xfrm>
-            <a:off x="941832" y="3895344"/>
-            <a:ext cx="1563624" cy="420624"/>
-          </a:xfrm>
-          <a:prstGeom prst="rect">
-            <a:avLst/>
-          </a:prstGeom>
-          <a:noFill/>
-        </p:spPr>
-        <p:txBody>
-          <a:bodyPr wrap="square" anchor="ctr" lIns="127000" rIns="76200" tIns="25400" bIns="25400">
-            <a:spAutoFit/>
-          </a:bodyPr>
-          <a:lstStyle/>
-          <a:p>
-            <a:pPr>
-              <a:lnSpc>
-                <a:spcPct val="104000"/>
-              </a:lnSpc>
-            </a:pPr>
-            <a:r>
-              <a:rPr sz="1200" b="1">
-                <a:solidFill>
-                  <a:srgbClr val="E9C27C"/>
-                </a:solidFill>
-                <a:latin typeface="Microsoft YaHei"/>
-              </a:rPr>
-              <a:t>合作周期</a:t>
-            </a:r>
-          </a:p>
-        </p:txBody>
-      </p:sp>
-      <p:sp>
-        <p:nvSpPr>
-          <p:cNvPr id="31" name="TextBox 30"/>
-          <p:cNvSpPr txBox="1"/>
-          <p:nvPr/>
-        </p:nvSpPr>
-        <p:spPr>
-          <a:xfrm>
-            <a:off x="2505456" y="3895344"/>
-            <a:ext cx="3648456" cy="420624"/>
-          </a:xfrm>
-          <a:prstGeom prst="rect">
-            <a:avLst/>
-          </a:prstGeom>
-          <a:noFill/>
-        </p:spPr>
-        <p:txBody>
-          <a:bodyPr wrap="square" anchor="ctr" lIns="127000" rIns="76200" tIns="25400" bIns="25400">
-            <a:spAutoFit/>
-          </a:bodyPr>
-          <a:lstStyle/>
-          <a:p>
-            <a:pPr>
-              <a:lnSpc>
-                <a:spcPct val="104000"/>
-              </a:lnSpc>
-            </a:pPr>
-            <a:r>
-              <a:rPr sz="1200" b="0">
-                <a:solidFill>
-                  <a:srgbClr val="C6BAEA"/>
-                </a:solidFill>
-                <a:latin typeface="Microsoft YaHei"/>
-              </a:rPr>
-              <a:t>3 年 · 可复制 · 协同周边 ≤2 项目</a:t>
-            </a:r>
-          </a:p>
-        </p:txBody>
-      </p:sp>
-      <p:sp>
-        <p:nvSpPr>
-          <p:cNvPr id="32" name="Rectangle 31"/>
-          <p:cNvSpPr/>
-          <p:nvPr/>
-        </p:nvSpPr>
-        <p:spPr>
-          <a:xfrm>
-            <a:off x="941832" y="4306443"/>
-            <a:ext cx="5212080" cy="9525"/>
-          </a:xfrm>
-          <a:prstGeom prst="rect">
-            <a:avLst/>
-          </a:prstGeom>
-          <a:solidFill>
-            <a:srgbClr val="4A3C7C"/>
-          </a:solidFill>
-          <a:ln>
-            <a:noFill/>
-          </a:ln>
-          <a:effectLst/>
-        </p:spPr>
-        <p:style>
-          <a:lnRef idx="1">
-            <a:schemeClr val="accent1"/>
-          </a:lnRef>
-          <a:fillRef idx="3">
-            <a:schemeClr val="accent1"/>
-          </a:fillRef>
-          <a:effectRef idx="2">
-            <a:schemeClr val="accent1"/>
-          </a:effectRef>
-          <a:fontRef idx="minor">
-            <a:schemeClr val="lt1"/>
-          </a:fontRef>
-        </p:style>
-        <p:txBody>
-          <a:bodyPr rtlCol="0" anchor="ctr"/>
-          <a:lstStyle/>
-          <a:p>
-            <a:pPr algn="ctr"/>
-          </a:p>
-        </p:txBody>
-      </p:sp>
-      <p:sp>
-        <p:nvSpPr>
-          <p:cNvPr id="33" name="Rectangle 32"/>
-          <p:cNvSpPr/>
-          <p:nvPr/>
-        </p:nvSpPr>
-        <p:spPr>
-          <a:xfrm>
-            <a:off x="941832" y="1810512"/>
-            <a:ext cx="31750" cy="2505456"/>
-          </a:xfrm>
-          <a:prstGeom prst="rect">
-            <a:avLst/>
-          </a:prstGeom>
-          <a:solidFill>
-            <a:srgbClr val="E9C27C"/>
-          </a:solidFill>
-          <a:ln>
-            <a:noFill/>
-          </a:ln>
-          <a:effectLst/>
-        </p:spPr>
-        <p:style>
-          <a:lnRef idx="1">
-            <a:schemeClr val="accent1"/>
-          </a:lnRef>
-          <a:fillRef idx="3">
-            <a:schemeClr val="accent1"/>
-          </a:fillRef>
-          <a:effectRef idx="2">
-            <a:schemeClr val="accent1"/>
-          </a:effectRef>
-          <a:fontRef idx="minor">
-            <a:schemeClr val="lt1"/>
-          </a:fontRef>
-        </p:style>
-        <p:txBody>
-          <a:bodyPr rtlCol="0" anchor="ctr"/>
-          <a:lstStyle/>
-          <a:p>
-            <a:pPr algn="ctr"/>
-          </a:p>
-        </p:txBody>
-      </p:sp>
-      <p:sp>
-        <p:nvSpPr>
-          <p:cNvPr id="34" name="Rounded Rectangle 33"/>
-          <p:cNvSpPr/>
-          <p:nvPr/>
-        </p:nvSpPr>
-        <p:spPr>
-          <a:xfrm>
-            <a:off x="6537960" y="1627632"/>
-            <a:ext cx="4873752" cy="2788920"/>
-          </a:xfrm>
-          <a:prstGeom prst="roundRect">
-            <a:avLst/>
-          </a:prstGeom>
-          <a:ln w="12700">
-            <a:solidFill>
-              <a:srgbClr val="4A3C7C"/>
-            </a:solidFill>
-          </a:ln>
-          <a:effectLst/>
-          <a:gradFill>
-            <a:gsLst>
-              <a:gs pos="0">
-                <a:srgbClr val="2A1E55"/>
-              </a:gs>
-              <a:gs pos="100000">
-                <a:srgbClr val="1E1542"/>
-              </a:gs>
-            </a:gsLst>
-            <a:lin ang="7200000" scaled="1"/>
-          </a:gradFill>
-        </p:spPr>
-        <p:style>
-          <a:lnRef idx="1">
-            <a:schemeClr val="accent1"/>
-          </a:lnRef>
-          <a:fillRef idx="3">
-            <a:schemeClr val="accent1"/>
-          </a:fillRef>
-          <a:effectRef idx="2">
-            <a:schemeClr val="accent1"/>
-          </a:effectRef>
-          <a:fontRef idx="minor">
-            <a:schemeClr val="lt1"/>
-          </a:fontRef>
-        </p:style>
-        <p:txBody>
-          <a:bodyPr rtlCol="0" anchor="ctr"/>
-          <a:lstStyle/>
-          <a:p>
-            <a:pPr algn="ctr"/>
-          </a:p>
-        </p:txBody>
-      </p:sp>
-      <p:sp>
-        <p:nvSpPr>
-          <p:cNvPr id="35" name="Rectangle 34"/>
-          <p:cNvSpPr/>
-          <p:nvPr/>
-        </p:nvSpPr>
-        <p:spPr>
-          <a:xfrm>
-            <a:off x="6537960" y="1627632"/>
-            <a:ext cx="64008" cy="2788920"/>
-          </a:xfrm>
-          <a:prstGeom prst="rect">
-            <a:avLst/>
-          </a:prstGeom>
-          <a:solidFill>
-            <a:srgbClr val="E9C27C"/>
-          </a:solidFill>
-          <a:ln>
-            <a:noFill/>
-          </a:ln>
-          <a:effectLst/>
-        </p:spPr>
-        <p:style>
-          <a:lnRef idx="1">
-            <a:schemeClr val="accent1"/>
-          </a:lnRef>
-          <a:fillRef idx="3">
-            <a:schemeClr val="accent1"/>
-          </a:fillRef>
-          <a:effectRef idx="2">
-            <a:schemeClr val="accent1"/>
-          </a:effectRef>
-          <a:fontRef idx="minor">
-            <a:schemeClr val="lt1"/>
-          </a:fontRef>
-        </p:style>
-        <p:txBody>
-          <a:bodyPr rtlCol="0" anchor="ctr"/>
-          <a:lstStyle/>
-          <a:p>
-            <a:pPr algn="ctr"/>
-          </a:p>
-        </p:txBody>
-      </p:sp>
-      <p:sp>
-        <p:nvSpPr>
-          <p:cNvPr id="36" name="TextBox 35"/>
-          <p:cNvSpPr txBox="1"/>
-          <p:nvPr/>
-        </p:nvSpPr>
-        <p:spPr>
-          <a:xfrm>
-            <a:off x="6848856" y="1810512"/>
-            <a:ext cx="4379976" cy="457200"/>
-          </a:xfrm>
-          <a:prstGeom prst="rect">
-            <a:avLst/>
-          </a:prstGeom>
-          <a:noFill/>
-        </p:spPr>
-        <p:txBody>
-          <a:bodyPr wrap="square" anchor="t" lIns="25400" rIns="25400" tIns="12700" bIns="12700">
-            <a:spAutoFit/>
-          </a:bodyPr>
-          <a:lstStyle/>
-          <a:p>
-            <a:pPr algn="l">
-              <a:lnSpc>
-                <a:spcPct val="100000"/>
-              </a:lnSpc>
-            </a:pPr>
-            <a:r>
-              <a:rPr sz="1550" b="1">
-                <a:solidFill>
-                  <a:srgbClr val="F5F1FF"/>
-                </a:solidFill>
-                <a:latin typeface="Microsoft YaHei"/>
-              </a:rPr>
-              <a:t>区位与政策腹地</a:t>
-            </a:r>
-          </a:p>
-        </p:txBody>
-      </p:sp>
-      <p:sp>
-        <p:nvSpPr>
-          <p:cNvPr id="37" name="TextBox 36"/>
-          <p:cNvSpPr txBox="1"/>
-          <p:nvPr/>
-        </p:nvSpPr>
-        <p:spPr>
-          <a:xfrm>
-            <a:off x="6848856" y="2194560"/>
-            <a:ext cx="4325112" cy="2130552"/>
-          </a:xfrm>
-          <a:prstGeom prst="rect">
-            <a:avLst/>
-          </a:prstGeom>
-          <a:noFill/>
-        </p:spPr>
-        <p:txBody>
-          <a:bodyPr wrap="square" lIns="25400" tIns="25400">
-            <a:spAutoFit/>
-          </a:bodyPr>
-          <a:lstStyle/>
-          <a:p>
-            <a:pPr>
-              <a:lnSpc>
-                <a:spcPct val="118000"/>
-              </a:lnSpc>
-              <a:spcAft>
-                <a:spcPts val="800"/>
-              </a:spcAft>
-            </a:pPr>
-            <a:r>
-              <a:rPr sz="1250">
-                <a:solidFill>
-                  <a:srgbClr val="E9C27C"/>
-                </a:solidFill>
-                <a:latin typeface="Microsoft YaHei"/>
-              </a:rPr>
-              <a:t>▪  </a:t>
-            </a:r>
-            <a:r>
-              <a:rPr sz="1250">
-                <a:solidFill>
-                  <a:srgbClr val="C6BAEA"/>
-                </a:solidFill>
-                <a:latin typeface="Microsoft YaHei"/>
-              </a:rPr>
-              <a:t>环同济：复旦 / 同济 / 财大 / 上理工高校群</a:t>
-            </a:r>
-          </a:p>
-          <a:p>
-            <a:pPr>
-              <a:lnSpc>
-                <a:spcPct val="118000"/>
-              </a:lnSpc>
-              <a:spcAft>
-                <a:spcPts val="800"/>
-              </a:spcAft>
-            </a:pPr>
-            <a:r>
-              <a:rPr sz="1250">
-                <a:solidFill>
-                  <a:srgbClr val="E9C27C"/>
-                </a:solidFill>
-                <a:latin typeface="Microsoft YaHei"/>
-              </a:rPr>
-              <a:t>▪  </a:t>
-            </a:r>
-            <a:r>
-              <a:rPr sz="1250">
-                <a:solidFill>
-                  <a:srgbClr val="C6BAEA"/>
-                </a:solidFill>
-                <a:latin typeface="Microsoft YaHei"/>
-              </a:rPr>
-              <a:t>正处杨浦「YOUNG立方」内容集聚区核心圈</a:t>
-            </a:r>
-          </a:p>
-          <a:p>
-            <a:pPr>
-              <a:lnSpc>
-                <a:spcPct val="118000"/>
-              </a:lnSpc>
-              <a:spcAft>
-                <a:spcPts val="800"/>
-              </a:spcAft>
-            </a:pPr>
-            <a:r>
-              <a:rPr sz="1250">
-                <a:solidFill>
-                  <a:srgbClr val="E9C27C"/>
-                </a:solidFill>
-                <a:latin typeface="Microsoft YaHei"/>
-              </a:rPr>
-              <a:t>▪  </a:t>
-            </a:r>
-            <a:r>
-              <a:rPr sz="1250">
-                <a:solidFill>
-                  <a:srgbClr val="C6BAEA"/>
-                </a:solidFill>
-                <a:latin typeface="Microsoft YaHei"/>
-              </a:rPr>
-              <a:t>紧邻 V聚场(6号楼) · 大学路 · B站新世代产业园</a:t>
-            </a:r>
-          </a:p>
-          <a:p>
-            <a:pPr>
-              <a:lnSpc>
-                <a:spcPct val="118000"/>
-              </a:lnSpc>
-              <a:spcAft>
-                <a:spcPts val="800"/>
-              </a:spcAft>
-            </a:pPr>
-            <a:r>
-              <a:rPr sz="1250">
-                <a:solidFill>
-                  <a:srgbClr val="E9C27C"/>
-                </a:solidFill>
-                <a:latin typeface="Microsoft YaHei"/>
-              </a:rPr>
-              <a:t>▪  </a:t>
-            </a:r>
-            <a:r>
-              <a:rPr sz="1250">
-                <a:solidFill>
-                  <a:srgbClr val="C6BAEA"/>
-                </a:solidFill>
-                <a:latin typeface="Microsoft YaHei"/>
-              </a:rPr>
-              <a:t>离我方极近（20–30min）→ 轻驻场 · 高频次</a:t>
-            </a:r>
-          </a:p>
-        </p:txBody>
-      </p:sp>
-      <p:sp>
-        <p:nvSpPr>
-          <p:cNvPr id="38" name="Rounded Rectangle 37"/>
-          <p:cNvSpPr/>
-          <p:nvPr/>
-        </p:nvSpPr>
-        <p:spPr>
-          <a:xfrm>
-            <a:off x="777240" y="4617720"/>
-            <a:ext cx="3401568" cy="1572768"/>
-          </a:xfrm>
-          <a:prstGeom prst="roundRect">
-            <a:avLst/>
-          </a:prstGeom>
-          <a:ln w="12700">
-            <a:solidFill>
-              <a:srgbClr val="4A3C7C"/>
-            </a:solidFill>
-          </a:ln>
-          <a:effectLst/>
-          <a:gradFill>
-            <a:gsLst>
-              <a:gs pos="0">
-                <a:srgbClr val="2A1E55"/>
-              </a:gs>
-              <a:gs pos="100000">
-                <a:srgbClr val="1E1542"/>
-              </a:gs>
-            </a:gsLst>
-            <a:lin ang="7200000" scaled="1"/>
-          </a:gradFill>
-        </p:spPr>
-        <p:style>
-          <a:lnRef idx="1">
-            <a:schemeClr val="accent1"/>
-          </a:lnRef>
-          <a:fillRef idx="3">
-            <a:schemeClr val="accent1"/>
-          </a:fillRef>
-          <a:effectRef idx="2">
-            <a:schemeClr val="accent1"/>
-          </a:effectRef>
-          <a:fontRef idx="minor">
-            <a:schemeClr val="lt1"/>
-          </a:fontRef>
-        </p:style>
-        <p:txBody>
-          <a:bodyPr rtlCol="0" anchor="ctr"/>
-          <a:lstStyle/>
-          <a:p>
-            <a:pPr algn="ctr"/>
-          </a:p>
-        </p:txBody>
-      </p:sp>
-      <p:sp>
-        <p:nvSpPr>
-          <p:cNvPr id="39" name="Rectangle 38"/>
-          <p:cNvSpPr/>
-          <p:nvPr/>
-        </p:nvSpPr>
-        <p:spPr>
-          <a:xfrm>
-            <a:off x="777240" y="4617720"/>
-            <a:ext cx="64008" cy="1572768"/>
-          </a:xfrm>
-          <a:prstGeom prst="rect">
-            <a:avLst/>
-          </a:prstGeom>
-          <a:solidFill>
-            <a:srgbClr val="8B7BFF"/>
-          </a:solidFill>
-          <a:ln>
-            <a:noFill/>
-          </a:ln>
-          <a:effectLst/>
-        </p:spPr>
-        <p:style>
-          <a:lnRef idx="1">
-            <a:schemeClr val="accent1"/>
-          </a:lnRef>
-          <a:fillRef idx="3">
-            <a:schemeClr val="accent1"/>
-          </a:fillRef>
-          <a:effectRef idx="2">
-            <a:schemeClr val="accent1"/>
-          </a:effectRef>
-          <a:fontRef idx="minor">
-            <a:schemeClr val="lt1"/>
-          </a:fontRef>
-        </p:style>
-        <p:txBody>
-          <a:bodyPr rtlCol="0" anchor="ctr"/>
-          <a:lstStyle/>
-          <a:p>
-            <a:pPr algn="ctr"/>
-          </a:p>
-        </p:txBody>
-      </p:sp>
-      <p:sp>
-        <p:nvSpPr>
-          <p:cNvPr id="40" name="TextBox 39"/>
-          <p:cNvSpPr txBox="1"/>
-          <p:nvPr/>
-        </p:nvSpPr>
-        <p:spPr>
-          <a:xfrm>
-            <a:off x="1088136" y="4800600"/>
-            <a:ext cx="2907792" cy="457200"/>
-          </a:xfrm>
-          <a:prstGeom prst="rect">
-            <a:avLst/>
-          </a:prstGeom>
-          <a:noFill/>
-        </p:spPr>
-        <p:txBody>
-          <a:bodyPr wrap="square" anchor="t" lIns="25400" rIns="25400" tIns="12700" bIns="12700">
-            <a:spAutoFit/>
-          </a:bodyPr>
-          <a:lstStyle/>
-          <a:p>
-            <a:pPr algn="l">
-              <a:lnSpc>
-                <a:spcPct val="100000"/>
-              </a:lnSpc>
-            </a:pPr>
-            <a:r>
-              <a:rPr sz="1550" b="1">
-                <a:solidFill>
-                  <a:srgbClr val="F5F1FF"/>
-                </a:solidFill>
-                <a:latin typeface="Microsoft YaHei"/>
-              </a:rPr>
-              <a:t>定位主线</a:t>
-            </a:r>
-          </a:p>
-        </p:txBody>
-      </p:sp>
-      <p:sp>
-        <p:nvSpPr>
-          <p:cNvPr id="41" name="TextBox 40"/>
-          <p:cNvSpPr txBox="1"/>
-          <p:nvPr/>
-        </p:nvSpPr>
-        <p:spPr>
-          <a:xfrm>
-            <a:off x="1088136" y="5221224"/>
-            <a:ext cx="2852928" cy="859536"/>
-          </a:xfrm>
-          <a:prstGeom prst="rect">
-            <a:avLst/>
-          </a:prstGeom>
-          <a:noFill/>
-        </p:spPr>
-        <p:txBody>
-          <a:bodyPr wrap="square" anchor="t" lIns="25400" rIns="25400" tIns="12700" bIns="12700">
-            <a:spAutoFit/>
-          </a:bodyPr>
-          <a:lstStyle/>
-          <a:p>
-            <a:pPr algn="l">
-              <a:lnSpc>
-                <a:spcPct val="116000"/>
-              </a:lnSpc>
-            </a:pPr>
-            <a:r>
-              <a:rPr sz="1250" b="0">
-                <a:solidFill>
-                  <a:srgbClr val="C6BAEA"/>
-                </a:solidFill>
-                <a:latin typeface="Microsoft YaHei"/>
-              </a:rPr>
-              <a:t>超级链接器：IP 为内容、AI 为工具、空间为载体；产业筋骨 · 文化灵魂 · 商业血脉。</a:t>
-            </a:r>
-          </a:p>
-        </p:txBody>
-      </p:sp>
-      <p:sp>
-        <p:nvSpPr>
-          <p:cNvPr id="42" name="Rounded Rectangle 41"/>
-          <p:cNvSpPr/>
-          <p:nvPr/>
-        </p:nvSpPr>
-        <p:spPr>
-          <a:xfrm>
-            <a:off x="4370832" y="4617720"/>
-            <a:ext cx="3401568" cy="1572768"/>
-          </a:xfrm>
-          <a:prstGeom prst="roundRect">
-            <a:avLst/>
-          </a:prstGeom>
-          <a:ln w="12700">
-            <a:solidFill>
-              <a:srgbClr val="4A3C7C"/>
-            </a:solidFill>
-          </a:ln>
-          <a:effectLst/>
-          <a:gradFill>
-            <a:gsLst>
-              <a:gs pos="0">
-                <a:srgbClr val="2A1E55"/>
-              </a:gs>
-              <a:gs pos="100000">
-                <a:srgbClr val="1E1542"/>
-              </a:gs>
-            </a:gsLst>
-            <a:lin ang="7200000" scaled="1"/>
-          </a:gradFill>
-        </p:spPr>
-        <p:style>
-          <a:lnRef idx="1">
-            <a:schemeClr val="accent1"/>
-          </a:lnRef>
-          <a:fillRef idx="3">
-            <a:schemeClr val="accent1"/>
-          </a:fillRef>
-          <a:effectRef idx="2">
-            <a:schemeClr val="accent1"/>
-          </a:effectRef>
-          <a:fontRef idx="minor">
-            <a:schemeClr val="lt1"/>
-          </a:fontRef>
-        </p:style>
-        <p:txBody>
-          <a:bodyPr rtlCol="0" anchor="ctr"/>
-          <a:lstStyle/>
-          <a:p>
-            <a:pPr algn="ctr"/>
-          </a:p>
-        </p:txBody>
-      </p:sp>
-      <p:sp>
-        <p:nvSpPr>
-          <p:cNvPr id="43" name="Rectangle 42"/>
-          <p:cNvSpPr/>
-          <p:nvPr/>
-        </p:nvSpPr>
-        <p:spPr>
-          <a:xfrm>
-            <a:off x="4370832" y="4617720"/>
-            <a:ext cx="64008" cy="1572768"/>
-          </a:xfrm>
-          <a:prstGeom prst="rect">
-            <a:avLst/>
-          </a:prstGeom>
-          <a:solidFill>
-            <a:srgbClr val="56D6B6"/>
-          </a:solidFill>
-          <a:ln>
-            <a:noFill/>
-          </a:ln>
-          <a:effectLst/>
-        </p:spPr>
-        <p:style>
-          <a:lnRef idx="1">
-            <a:schemeClr val="accent1"/>
-          </a:lnRef>
-          <a:fillRef idx="3">
-            <a:schemeClr val="accent1"/>
-          </a:fillRef>
-          <a:effectRef idx="2">
-            <a:schemeClr val="accent1"/>
-          </a:effectRef>
-          <a:fontRef idx="minor">
-            <a:schemeClr val="lt1"/>
-          </a:fontRef>
-        </p:style>
-        <p:txBody>
-          <a:bodyPr rtlCol="0" anchor="ctr"/>
-          <a:lstStyle/>
-          <a:p>
-            <a:pPr algn="ctr"/>
-          </a:p>
-        </p:txBody>
-      </p:sp>
-      <p:sp>
-        <p:nvSpPr>
-          <p:cNvPr id="44" name="TextBox 43"/>
-          <p:cNvSpPr txBox="1"/>
-          <p:nvPr/>
-        </p:nvSpPr>
-        <p:spPr>
-          <a:xfrm>
-            <a:off x="4681728" y="4800600"/>
-            <a:ext cx="2907792" cy="457200"/>
-          </a:xfrm>
-          <a:prstGeom prst="rect">
-            <a:avLst/>
-          </a:prstGeom>
-          <a:noFill/>
-        </p:spPr>
-        <p:txBody>
-          <a:bodyPr wrap="square" anchor="t" lIns="25400" rIns="25400" tIns="12700" bIns="12700">
-            <a:spAutoFit/>
-          </a:bodyPr>
-          <a:lstStyle/>
-          <a:p>
-            <a:pPr algn="l">
-              <a:lnSpc>
-                <a:spcPct val="100000"/>
-              </a:lnSpc>
-            </a:pPr>
-            <a:r>
-              <a:rPr sz="1550" b="1">
-                <a:solidFill>
-                  <a:srgbClr val="F5F1FF"/>
-                </a:solidFill>
-                <a:latin typeface="Microsoft YaHei"/>
-              </a:rPr>
-              <a:t>三大集群</a:t>
-            </a:r>
-          </a:p>
-        </p:txBody>
-      </p:sp>
-      <p:sp>
-        <p:nvSpPr>
-          <p:cNvPr id="45" name="TextBox 44"/>
-          <p:cNvSpPr txBox="1"/>
-          <p:nvPr/>
-        </p:nvSpPr>
-        <p:spPr>
-          <a:xfrm>
-            <a:off x="4681728" y="5221224"/>
-            <a:ext cx="2852928" cy="859536"/>
-          </a:xfrm>
-          <a:prstGeom prst="rect">
-            <a:avLst/>
-          </a:prstGeom>
-          <a:noFill/>
-        </p:spPr>
-        <p:txBody>
-          <a:bodyPr wrap="square" anchor="t" lIns="25400" rIns="25400" tIns="12700" bIns="12700">
-            <a:spAutoFit/>
-          </a:bodyPr>
-          <a:lstStyle/>
-          <a:p>
-            <a:pPr algn="l">
-              <a:lnSpc>
-                <a:spcPct val="116000"/>
-              </a:lnSpc>
-            </a:pPr>
-            <a:r>
-              <a:rPr sz="1150" b="0">
-                <a:solidFill>
-                  <a:srgbClr val="C6BAEA"/>
-                </a:solidFill>
-                <a:latin typeface="Microsoft YaHei"/>
-              </a:rPr>
-              <a:t>动漫 IP  ·  科技应用  ·  交互设计（对齐杨浦「在线新经济·创意设计」千亿集群）</a:t>
-            </a:r>
-          </a:p>
-        </p:txBody>
-      </p:sp>
-      <p:sp>
-        <p:nvSpPr>
-          <p:cNvPr id="46" name="Rounded Rectangle 45"/>
-          <p:cNvSpPr/>
-          <p:nvPr/>
-        </p:nvSpPr>
-        <p:spPr>
-          <a:xfrm>
-            <a:off x="8010144" y="4617720"/>
-            <a:ext cx="3401568" cy="1572768"/>
-          </a:xfrm>
-          <a:prstGeom prst="roundRect">
-            <a:avLst/>
-          </a:prstGeom>
-          <a:ln w="12700">
-            <a:solidFill>
-              <a:srgbClr val="4A3C7C"/>
-            </a:solidFill>
-          </a:ln>
-          <a:effectLst/>
-          <a:gradFill>
-            <a:gsLst>
-              <a:gs pos="0">
-                <a:srgbClr val="2A1E55"/>
-              </a:gs>
-              <a:gs pos="100000">
-                <a:srgbClr val="1E1542"/>
-              </a:gs>
-            </a:gsLst>
-            <a:lin ang="7200000" scaled="1"/>
-          </a:gradFill>
-        </p:spPr>
-        <p:style>
-          <a:lnRef idx="1">
-            <a:schemeClr val="accent1"/>
-          </a:lnRef>
-          <a:fillRef idx="3">
-            <a:schemeClr val="accent1"/>
-          </a:fillRef>
-          <a:effectRef idx="2">
-            <a:schemeClr val="accent1"/>
-          </a:effectRef>
-          <a:fontRef idx="minor">
-            <a:schemeClr val="lt1"/>
-          </a:fontRef>
-        </p:style>
-        <p:txBody>
-          <a:bodyPr rtlCol="0" anchor="ctr"/>
-          <a:lstStyle/>
-          <a:p>
-            <a:pPr algn="ctr"/>
-          </a:p>
-        </p:txBody>
-      </p:sp>
-      <p:sp>
-        <p:nvSpPr>
-          <p:cNvPr id="47" name="Rectangle 46"/>
-          <p:cNvSpPr/>
-          <p:nvPr/>
-        </p:nvSpPr>
-        <p:spPr>
-          <a:xfrm>
-            <a:off x="8010144" y="4617720"/>
-            <a:ext cx="64008" cy="1572768"/>
-          </a:xfrm>
-          <a:prstGeom prst="rect">
-            <a:avLst/>
-          </a:prstGeom>
-          <a:solidFill>
-            <a:srgbClr val="C77DFF"/>
-          </a:solidFill>
-          <a:ln>
-            <a:noFill/>
-          </a:ln>
-          <a:effectLst/>
-        </p:spPr>
-        <p:style>
-          <a:lnRef idx="1">
-            <a:schemeClr val="accent1"/>
-          </a:lnRef>
-          <a:fillRef idx="3">
-            <a:schemeClr val="accent1"/>
-          </a:fillRef>
-          <a:effectRef idx="2">
-            <a:schemeClr val="accent1"/>
-          </a:effectRef>
-          <a:fontRef idx="minor">
-            <a:schemeClr val="lt1"/>
-          </a:fontRef>
-        </p:style>
-        <p:txBody>
-          <a:bodyPr rtlCol="0" anchor="ctr"/>
-          <a:lstStyle/>
-          <a:p>
-            <a:pPr algn="ctr"/>
-          </a:p>
-        </p:txBody>
-      </p:sp>
-      <p:sp>
-        <p:nvSpPr>
-          <p:cNvPr id="48" name="TextBox 47"/>
-          <p:cNvSpPr txBox="1"/>
-          <p:nvPr/>
-        </p:nvSpPr>
-        <p:spPr>
-          <a:xfrm>
-            <a:off x="8321040" y="4800600"/>
-            <a:ext cx="2907792" cy="457200"/>
-          </a:xfrm>
-          <a:prstGeom prst="rect">
-            <a:avLst/>
-          </a:prstGeom>
-          <a:noFill/>
-        </p:spPr>
-        <p:txBody>
-          <a:bodyPr wrap="square" anchor="t" lIns="25400" rIns="25400" tIns="12700" bIns="12700">
-            <a:spAutoFit/>
-          </a:bodyPr>
-          <a:lstStyle/>
-          <a:p>
-            <a:pPr algn="l">
-              <a:lnSpc>
-                <a:spcPct val="100000"/>
-              </a:lnSpc>
-            </a:pPr>
-            <a:r>
-              <a:rPr sz="1550" b="1">
-                <a:solidFill>
-                  <a:srgbClr val="F5F1FF"/>
-                </a:solidFill>
-                <a:latin typeface="Microsoft YaHei"/>
-              </a:rPr>
-              <a:t>可链接资源</a:t>
-            </a:r>
-          </a:p>
-        </p:txBody>
-      </p:sp>
-      <p:sp>
-        <p:nvSpPr>
-          <p:cNvPr id="49" name="TextBox 48"/>
-          <p:cNvSpPr txBox="1"/>
-          <p:nvPr/>
-        </p:nvSpPr>
-        <p:spPr>
-          <a:xfrm>
-            <a:off x="8321040" y="5221224"/>
-            <a:ext cx="2852928" cy="859536"/>
-          </a:xfrm>
-          <a:prstGeom prst="rect">
-            <a:avLst/>
-          </a:prstGeom>
-          <a:noFill/>
-        </p:spPr>
-        <p:txBody>
-          <a:bodyPr wrap="square" anchor="t" lIns="25400" rIns="25400" tIns="12700" bIns="12700">
-            <a:spAutoFit/>
-          </a:bodyPr>
-          <a:lstStyle/>
-          <a:p>
-            <a:pPr algn="l">
-              <a:lnSpc>
-                <a:spcPct val="116000"/>
-              </a:lnSpc>
-            </a:pPr>
-            <a:r>
-              <a:rPr sz="1100" b="0">
-                <a:solidFill>
-                  <a:srgbClr val="C6BAEA"/>
-                </a:solidFill>
-                <a:latin typeface="Microsoft YaHei"/>
-              </a:rPr>
-              <a:t>北大上海校友会、同济设计创新院、科企联、IP/玩具/广告协会、混知等 IP、聚成智能、中建四局。</a:t>
-            </a:r>
-          </a:p>
-        </p:txBody>
-      </p:sp>
-    </p:spTree>
-  </p:cSld>
-  <p:clrMapOvr>
-    <a:masterClrMapping/>
-  </p:clrMapOvr>
-</p:sld>
-</file>
-
-<file path=ppt/slides/slide40.xml><?xml version="1.0" encoding="utf-8"?>
+<file path=ppt/slides/slide42.xml><?xml version="1.0" encoding="utf-8"?>
 <p:sld xmlns:a="http://schemas.openxmlformats.org/drawingml/2006/main" xmlns:p="http://schemas.openxmlformats.org/presentationml/2006/main" xmlns:r="http://schemas.openxmlformats.org/officeDocument/2006/relationships">
   <p:cSld>
     <p:spTree>
@@ -55842,7 +60022,7 @@
                 </a:solidFill>
                 <a:latin typeface="Arial"/>
               </a:rPr>
-              <a:t>40</a:t>
+              <a:t>42</a:t>
             </a:r>
             <a:r>
               <a:rPr sz="1050" b="0">
@@ -55851,7 +60031,7 @@
                 </a:solidFill>
                 <a:latin typeface="Arial"/>
               </a:rPr>
-              <a:t> / 42</a:t>
+              <a:t> / 44</a:t>
             </a:r>
           </a:p>
         </p:txBody>
@@ -55864,7 +60044,7 @@
 </p:sld>
 </file>
 
-<file path=ppt/slides/slide41.xml><?xml version="1.0" encoding="utf-8"?>
+<file path=ppt/slides/slide43.xml><?xml version="1.0" encoding="utf-8"?>
 <p:sld xmlns:a="http://schemas.openxmlformats.org/drawingml/2006/main" xmlns:p="http://schemas.openxmlformats.org/presentationml/2006/main" xmlns:r="http://schemas.openxmlformats.org/officeDocument/2006/relationships">
   <p:cSld>
     <p:spTree>
@@ -56269,7 +60449,7 @@
                 </a:solidFill>
                 <a:latin typeface="Arial"/>
               </a:rPr>
-              <a:t>41</a:t>
+              <a:t>43</a:t>
             </a:r>
             <a:r>
               <a:rPr sz="1050" b="0">
@@ -56278,7 +60458,7 @@
                 </a:solidFill>
                 <a:latin typeface="Arial"/>
               </a:rPr>
-              <a:t> / 42</a:t>
+              <a:t> / 44</a:t>
             </a:r>
           </a:p>
         </p:txBody>
@@ -57503,7 +61683,7 @@
 </p:sld>
 </file>
 
-<file path=ppt/slides/slide42.xml><?xml version="1.0" encoding="utf-8"?>
+<file path=ppt/slides/slide44.xml><?xml version="1.0" encoding="utf-8"?>
 <p:sld xmlns:a="http://schemas.openxmlformats.org/drawingml/2006/main" xmlns:p="http://schemas.openxmlformats.org/presentationml/2006/main" xmlns:r="http://schemas.openxmlformats.org/officeDocument/2006/relationships">
   <p:cSld>
     <p:spTree>
@@ -58426,7 +62606,7 @@
                 </a:solidFill>
                 <a:latin typeface="Arial"/>
               </a:rPr>
-              <a:t> / 42</a:t>
+              <a:t> / 44</a:t>
             </a:r>
           </a:p>
         </p:txBody>
@@ -59738,7 +63918,7 @@
                 </a:solidFill>
                 <a:latin typeface="Arial"/>
               </a:rPr>
-              <a:t> / 42</a:t>
+              <a:t> / 44</a:t>
             </a:r>
           </a:p>
         </p:txBody>
@@ -61204,7 +65384,7 @@
                 </a:solidFill>
                 <a:latin typeface="Arial"/>
               </a:rPr>
-              <a:t> / 42</a:t>
+              <a:t> / 44</a:t>
             </a:r>
           </a:p>
         </p:txBody>
@@ -61631,7 +65811,7 @@
                 </a:solidFill>
                 <a:latin typeface="Arial"/>
               </a:rPr>
-              <a:t> / 42</a:t>
+              <a:t> / 44</a:t>
             </a:r>
           </a:p>
         </p:txBody>
@@ -63418,7 +67598,7 @@
                 </a:solidFill>
                 <a:latin typeface="Arial"/>
               </a:rPr>
-              <a:t> / 42</a:t>
+              <a:t> / 44</a:t>
             </a:r>
           </a:p>
         </p:txBody>

--- a/proposal/chuangzhihui-6600-proposal.pptx
+++ b/proposal/chuangzhihui-6600-proposal.pptx
@@ -49,6 +49,8 @@
     <p:sldId id="297" r:id="rId48"/>
     <p:sldId id="298" r:id="rId49"/>
     <p:sldId id="299" r:id="rId50"/>
+    <p:sldId id="300" r:id="rId51"/>
+    <p:sldId id="301" r:id="rId52"/>
   </p:sldIdLst>
   <p:sldSz cx="12191695" cy="6858000" type="screen4x3"/>
   <p:notesSz cx="6858000" cy="9144000"/>
@@ -4378,7 +4380,7 @@
                 </a:solidFill>
                 <a:latin typeface="Arial"/>
               </a:rPr>
-              <a:t> / 44</a:t>
+              <a:t> / 46</a:t>
             </a:r>
           </a:p>
         </p:txBody>
@@ -6120,7 +6122,7 @@
                 </a:solidFill>
                 <a:latin typeface="Arial"/>
               </a:rPr>
-              <a:t> / 44</a:t>
+              <a:t> / 46</a:t>
             </a:r>
           </a:p>
         </p:txBody>
@@ -8158,7 +8160,7 @@
                 </a:solidFill>
                 <a:latin typeface="Arial"/>
               </a:rPr>
-              <a:t> / 44</a:t>
+              <a:t> / 46</a:t>
             </a:r>
           </a:p>
         </p:txBody>
@@ -8585,7 +8587,7 @@
                 </a:solidFill>
                 <a:latin typeface="Arial"/>
               </a:rPr>
-              <a:t> / 44</a:t>
+              <a:t> / 46</a:t>
             </a:r>
           </a:p>
         </p:txBody>
@@ -10233,7 +10235,7 @@
                 </a:solidFill>
                 <a:latin typeface="Arial"/>
               </a:rPr>
-              <a:t> / 44</a:t>
+              <a:t> / 46</a:t>
             </a:r>
           </a:p>
         </p:txBody>
@@ -10660,7 +10662,7 @@
                 </a:solidFill>
                 <a:latin typeface="Arial"/>
               </a:rPr>
-              <a:t> / 44</a:t>
+              <a:t> / 46</a:t>
             </a:r>
           </a:p>
         </p:txBody>
@@ -12136,7 +12138,7 @@
                 </a:solidFill>
                 <a:latin typeface="Arial"/>
               </a:rPr>
-              <a:t> / 44</a:t>
+              <a:t> / 46</a:t>
             </a:r>
           </a:p>
         </p:txBody>
@@ -13980,7 +13982,7 @@
                 </a:solidFill>
                 <a:latin typeface="Arial"/>
               </a:rPr>
-              <a:t> / 44</a:t>
+              <a:t> / 46</a:t>
             </a:r>
           </a:p>
         </p:txBody>
@@ -16028,7 +16030,7 @@
                 </a:solidFill>
                 <a:latin typeface="Arial"/>
               </a:rPr>
-              <a:t> / 44</a:t>
+              <a:t> / 46</a:t>
             </a:r>
           </a:p>
         </p:txBody>
@@ -17394,7 +17396,7 @@
                 </a:solidFill>
                 <a:latin typeface="Arial"/>
               </a:rPr>
-              <a:t> / 44</a:t>
+              <a:t> / 46</a:t>
             </a:r>
           </a:p>
         </p:txBody>
@@ -18746,7 +18748,7 @@
                 </a:solidFill>
                 <a:latin typeface="Arial"/>
               </a:rPr>
-              <a:t> / 44</a:t>
+              <a:t> / 46</a:t>
             </a:r>
           </a:p>
         </p:txBody>
@@ -21538,7 +21540,7 @@
                 </a:solidFill>
                 <a:latin typeface="Arial"/>
               </a:rPr>
-              <a:t> / 44</a:t>
+              <a:t> / 46</a:t>
             </a:r>
           </a:p>
         </p:txBody>
@@ -23481,7 +23483,7 @@
                 </a:solidFill>
                 <a:latin typeface="Arial"/>
               </a:rPr>
-              <a:t> / 44</a:t>
+              <a:t> / 46</a:t>
             </a:r>
           </a:p>
         </p:txBody>
@@ -25364,7 +25366,7 @@
                 </a:solidFill>
                 <a:latin typeface="Arial"/>
               </a:rPr>
-              <a:t> / 44</a:t>
+              <a:t> / 46</a:t>
             </a:r>
           </a:p>
         </p:txBody>
@@ -25791,7 +25793,7 @@
                 </a:solidFill>
                 <a:latin typeface="Arial"/>
               </a:rPr>
-              <a:t> / 44</a:t>
+              <a:t> / 46</a:t>
             </a:r>
           </a:p>
         </p:txBody>
@@ -28488,7 +28490,7 @@
                 </a:solidFill>
                 <a:latin typeface="Arial"/>
               </a:rPr>
-              <a:t> / 44</a:t>
+              <a:t> / 46</a:t>
             </a:r>
           </a:p>
         </p:txBody>
@@ -30304,7 +30306,7 @@
                 </a:solidFill>
                 <a:latin typeface="Arial"/>
               </a:rPr>
-              <a:t> / 44</a:t>
+              <a:t> / 46</a:t>
             </a:r>
           </a:p>
         </p:txBody>
@@ -31758,7 +31760,7 @@
                 </a:solidFill>
                 <a:latin typeface="Arial"/>
               </a:rPr>
-              <a:t> / 44</a:t>
+              <a:t> / 46</a:t>
             </a:r>
           </a:p>
         </p:txBody>
@@ -33915,7 +33917,7 @@
                 </a:solidFill>
                 <a:latin typeface="Arial"/>
               </a:rPr>
-              <a:t> / 44</a:t>
+              <a:t> / 46</a:t>
             </a:r>
           </a:p>
         </p:txBody>
@@ -34342,7 +34344,7 @@
                 </a:solidFill>
                 <a:latin typeface="Arial"/>
               </a:rPr>
-              <a:t> / 44</a:t>
+              <a:t> / 46</a:t>
             </a:r>
           </a:p>
         </p:txBody>
@@ -35778,7 +35780,7 @@
                 </a:solidFill>
                 <a:latin typeface="Arial"/>
               </a:rPr>
-              <a:t> / 44</a:t>
+              <a:t> / 46</a:t>
             </a:r>
           </a:p>
         </p:txBody>
@@ -36205,7 +36207,7 @@
                 </a:solidFill>
                 <a:latin typeface="Arial"/>
               </a:rPr>
-              <a:t> / 44</a:t>
+              <a:t> / 46</a:t>
             </a:r>
           </a:p>
         </p:txBody>
@@ -37493,7 +37495,7 @@
                 </a:solidFill>
                 <a:latin typeface="Arial"/>
               </a:rPr>
-              <a:t> / 44</a:t>
+              <a:t> / 46</a:t>
             </a:r>
           </a:p>
         </p:txBody>
@@ -39317,7 +39319,7 @@
                 </a:solidFill>
                 <a:latin typeface="Arial"/>
               </a:rPr>
-              <a:t> / 44</a:t>
+              <a:t> / 46</a:t>
             </a:r>
           </a:p>
         </p:txBody>
@@ -41816,7 +41818,7 @@
                 </a:solidFill>
                 <a:latin typeface="Arial"/>
               </a:rPr>
-              <a:t> / 44</a:t>
+              <a:t> / 46</a:t>
             </a:r>
           </a:p>
         </p:txBody>
@@ -43557,7 +43559,7 @@
                 </a:solidFill>
                 <a:latin typeface="Arial"/>
               </a:rPr>
-              <a:t> / 44</a:t>
+              <a:t> / 46</a:t>
             </a:r>
           </a:p>
         </p:txBody>
@@ -45552,7 +45554,7 @@
                 </a:solidFill>
                 <a:latin typeface="Arial"/>
               </a:rPr>
-              <a:t> / 44</a:t>
+              <a:t> / 46</a:t>
             </a:r>
           </a:p>
         </p:txBody>
@@ -47783,7 +47785,7 @@
                 </a:solidFill>
                 <a:latin typeface="Arial"/>
               </a:rPr>
-              <a:t> / 44</a:t>
+              <a:t> / 46</a:t>
             </a:r>
           </a:p>
         </p:txBody>
@@ -48210,7 +48212,7 @@
                 </a:solidFill>
                 <a:latin typeface="Arial"/>
               </a:rPr>
-              <a:t> / 44</a:t>
+              <a:t> / 46</a:t>
             </a:r>
           </a:p>
         </p:txBody>
@@ -49566,7 +49568,7 @@
                 </a:solidFill>
                 <a:latin typeface="Arial"/>
               </a:rPr>
-              <a:t> / 44</a:t>
+              <a:t> / 46</a:t>
             </a:r>
           </a:p>
         </p:txBody>
@@ -51386,7 +51388,7 @@
                 </a:solidFill>
                 <a:latin typeface="Arial"/>
               </a:rPr>
-              <a:t> / 44</a:t>
+              <a:t> / 46</a:t>
             </a:r>
           </a:p>
         </p:txBody>
@@ -53636,7 +53638,7 @@
                 </a:solidFill>
                 <a:latin typeface="Arial"/>
               </a:rPr>
-              <a:t> / 44</a:t>
+              <a:t> / 46</a:t>
             </a:r>
           </a:p>
         </p:txBody>
@@ -55564,7 +55566,7 @@
                 </a:solidFill>
                 <a:latin typeface="Arial"/>
               </a:rPr>
-              <a:t> / 44</a:t>
+              <a:t> / 46</a:t>
             </a:r>
           </a:p>
         </p:txBody>
@@ -57348,6 +57350,5036 @@
 </file>
 
 <file path=ppt/slides/slide40.xml><?xml version="1.0" encoding="utf-8"?>
+<p:sld xmlns:a="http://schemas.openxmlformats.org/drawingml/2006/main" xmlns:p="http://schemas.openxmlformats.org/presentationml/2006/main" xmlns:r="http://schemas.openxmlformats.org/officeDocument/2006/relationships">
+  <p:cSld>
+    <p:spTree>
+      <p:nvGrpSpPr>
+        <p:cNvPr id="1" name=""/>
+        <p:cNvGrpSpPr/>
+        <p:nvPr/>
+      </p:nvGrpSpPr>
+      <p:grpSpPr/>
+      <p:sp>
+        <p:nvSpPr>
+          <p:cNvPr id="2" name="Rectangle 1"/>
+          <p:cNvSpPr/>
+          <p:nvPr/>
+        </p:nvSpPr>
+        <p:spPr>
+          <a:xfrm>
+            <a:off x="0" y="0"/>
+            <a:ext cx="12191695" cy="6858000"/>
+          </a:xfrm>
+          <a:prstGeom prst="rect">
+            <a:avLst/>
+          </a:prstGeom>
+          <a:gradFill>
+            <a:gsLst>
+              <a:gs pos="0">
+                <a:srgbClr val="1A1140"/>
+              </a:gs>
+              <a:gs pos="55000">
+                <a:srgbClr val="3A206E"/>
+              </a:gs>
+              <a:gs pos="100000">
+                <a:srgbClr val="1A1140"/>
+              </a:gs>
+            </a:gsLst>
+            <a:lin ang="7200000" scaled="1"/>
+          </a:gradFill>
+          <a:ln>
+            <a:noFill/>
+          </a:ln>
+          <a:effectLst/>
+        </p:spPr>
+        <p:style>
+          <a:lnRef idx="1">
+            <a:schemeClr val="accent1"/>
+          </a:lnRef>
+          <a:fillRef idx="3">
+            <a:schemeClr val="accent1"/>
+          </a:fillRef>
+          <a:effectRef idx="2">
+            <a:schemeClr val="accent1"/>
+          </a:effectRef>
+          <a:fontRef idx="minor">
+            <a:schemeClr val="lt1"/>
+          </a:fontRef>
+        </p:style>
+        <p:txBody>
+          <a:bodyPr rtlCol="0" anchor="ctr"/>
+          <a:lstStyle/>
+          <a:p>
+            <a:pPr algn="ctr"/>
+          </a:p>
+        </p:txBody>
+      </p:sp>
+      <p:sp>
+        <p:nvSpPr>
+          <p:cNvPr id="3" name="Rectangle 2"/>
+          <p:cNvSpPr/>
+          <p:nvPr/>
+        </p:nvSpPr>
+        <p:spPr>
+          <a:xfrm>
+            <a:off x="777240" y="566928"/>
+            <a:ext cx="54864" cy="786384"/>
+          </a:xfrm>
+          <a:prstGeom prst="rect">
+            <a:avLst/>
+          </a:prstGeom>
+          <a:solidFill>
+            <a:srgbClr val="E9C27C"/>
+          </a:solidFill>
+          <a:ln>
+            <a:noFill/>
+          </a:ln>
+          <a:effectLst/>
+        </p:spPr>
+        <p:style>
+          <a:lnRef idx="1">
+            <a:schemeClr val="accent1"/>
+          </a:lnRef>
+          <a:fillRef idx="3">
+            <a:schemeClr val="accent1"/>
+          </a:fillRef>
+          <a:effectRef idx="2">
+            <a:schemeClr val="accent1"/>
+          </a:effectRef>
+          <a:fontRef idx="minor">
+            <a:schemeClr val="lt1"/>
+          </a:fontRef>
+        </p:style>
+        <p:txBody>
+          <a:bodyPr rtlCol="0" anchor="ctr"/>
+          <a:lstStyle/>
+          <a:p>
+            <a:pPr algn="ctr"/>
+          </a:p>
+        </p:txBody>
+      </p:sp>
+      <p:sp>
+        <p:nvSpPr>
+          <p:cNvPr id="4" name="TextBox 3"/>
+          <p:cNvSpPr txBox="1"/>
+          <p:nvPr/>
+        </p:nvSpPr>
+        <p:spPr>
+          <a:xfrm>
+            <a:off x="978408" y="548640"/>
+            <a:ext cx="8229600" cy="310896"/>
+          </a:xfrm>
+          <a:prstGeom prst="rect">
+            <a:avLst/>
+          </a:prstGeom>
+          <a:noFill/>
+        </p:spPr>
+        <p:txBody>
+          <a:bodyPr wrap="square" anchor="t" lIns="25400" rIns="25400" tIns="12700" bIns="12700">
+            <a:spAutoFit/>
+          </a:bodyPr>
+          <a:lstStyle/>
+          <a:p>
+            <a:pPr algn="l">
+              <a:lnSpc>
+                <a:spcPct val="100000"/>
+              </a:lnSpc>
+            </a:pPr>
+            <a:r>
+              <a:rPr sz="1250" b="1" spc="200">
+                <a:solidFill>
+                  <a:srgbClr val="E9C27C"/>
+                </a:solidFill>
+                <a:latin typeface="Arial"/>
+              </a:rPr>
+              <a:t>REVENUE MODEL</a:t>
+            </a:r>
+          </a:p>
+        </p:txBody>
+      </p:sp>
+      <p:sp>
+        <p:nvSpPr>
+          <p:cNvPr id="5" name="TextBox 4"/>
+          <p:cNvSpPr txBox="1"/>
+          <p:nvPr/>
+        </p:nvSpPr>
+        <p:spPr>
+          <a:xfrm>
+            <a:off x="978408" y="841248"/>
+            <a:ext cx="9509760" cy="603504"/>
+          </a:xfrm>
+          <a:prstGeom prst="rect">
+            <a:avLst/>
+          </a:prstGeom>
+          <a:noFill/>
+        </p:spPr>
+        <p:txBody>
+          <a:bodyPr wrap="square" anchor="t" lIns="25400" rIns="25400" tIns="12700" bIns="12700">
+            <a:spAutoFit/>
+          </a:bodyPr>
+          <a:lstStyle/>
+          <a:p>
+            <a:pPr algn="l">
+              <a:lnSpc>
+                <a:spcPct val="100000"/>
+              </a:lnSpc>
+            </a:pPr>
+            <a:r>
+              <a:rPr sz="2600" b="1">
+                <a:solidFill>
+                  <a:srgbClr val="F5F1FF"/>
+                </a:solidFill>
+                <a:latin typeface="Microsoft YaHei"/>
+              </a:rPr>
+              <a:t>营收逻辑 · 收入结构（3F + 5F 整体）</a:t>
+            </a:r>
+          </a:p>
+        </p:txBody>
+      </p:sp>
+      <p:sp>
+        <p:nvSpPr>
+          <p:cNvPr id="6" name="TextBox 5"/>
+          <p:cNvSpPr txBox="1"/>
+          <p:nvPr/>
+        </p:nvSpPr>
+        <p:spPr>
+          <a:xfrm>
+            <a:off x="10332720" y="457200"/>
+            <a:ext cx="1417320" cy="822960"/>
+          </a:xfrm>
+          <a:prstGeom prst="rect">
+            <a:avLst/>
+          </a:prstGeom>
+          <a:noFill/>
+        </p:spPr>
+        <p:txBody>
+          <a:bodyPr wrap="square" anchor="t" lIns="25400" rIns="25400" tIns="12700" bIns="12700">
+            <a:spAutoFit/>
+          </a:bodyPr>
+          <a:lstStyle/>
+          <a:p>
+            <a:pPr algn="r">
+              <a:lnSpc>
+                <a:spcPct val="100000"/>
+              </a:lnSpc>
+            </a:pPr>
+            <a:r>
+              <a:rPr sz="4000" b="1">
+                <a:solidFill>
+                  <a:srgbClr val="E9C27C"/>
+                </a:solidFill>
+                <a:latin typeface="Arial"/>
+              </a:rPr>
+              <a:t>08</a:t>
+            </a:r>
+          </a:p>
+        </p:txBody>
+      </p:sp>
+      <p:sp>
+        <p:nvSpPr>
+          <p:cNvPr id="7" name="Rectangle 6"/>
+          <p:cNvSpPr/>
+          <p:nvPr/>
+        </p:nvSpPr>
+        <p:spPr>
+          <a:xfrm>
+            <a:off x="10561320" y="1207008"/>
+            <a:ext cx="1170432" cy="25400"/>
+          </a:xfrm>
+          <a:prstGeom prst="rect">
+            <a:avLst/>
+          </a:prstGeom>
+          <a:solidFill>
+            <a:srgbClr val="4A3C7C"/>
+          </a:solidFill>
+          <a:ln>
+            <a:noFill/>
+          </a:ln>
+          <a:effectLst/>
+        </p:spPr>
+        <p:style>
+          <a:lnRef idx="1">
+            <a:schemeClr val="accent1"/>
+          </a:lnRef>
+          <a:fillRef idx="3">
+            <a:schemeClr val="accent1"/>
+          </a:fillRef>
+          <a:effectRef idx="2">
+            <a:schemeClr val="accent1"/>
+          </a:effectRef>
+          <a:fontRef idx="minor">
+            <a:schemeClr val="lt1"/>
+          </a:fontRef>
+        </p:style>
+        <p:txBody>
+          <a:bodyPr rtlCol="0" anchor="ctr"/>
+          <a:lstStyle/>
+          <a:p>
+            <a:pPr algn="ctr"/>
+          </a:p>
+        </p:txBody>
+      </p:sp>
+      <p:sp>
+        <p:nvSpPr>
+          <p:cNvPr id="8" name="Rectangle 7"/>
+          <p:cNvSpPr/>
+          <p:nvPr/>
+        </p:nvSpPr>
+        <p:spPr>
+          <a:xfrm>
+            <a:off x="777240" y="6327648"/>
+            <a:ext cx="10634472" cy="12700"/>
+          </a:xfrm>
+          <a:prstGeom prst="rect">
+            <a:avLst/>
+          </a:prstGeom>
+          <a:solidFill>
+            <a:srgbClr val="4A3C7C"/>
+          </a:solidFill>
+          <a:ln>
+            <a:noFill/>
+          </a:ln>
+          <a:effectLst/>
+        </p:spPr>
+        <p:style>
+          <a:lnRef idx="1">
+            <a:schemeClr val="accent1"/>
+          </a:lnRef>
+          <a:fillRef idx="3">
+            <a:schemeClr val="accent1"/>
+          </a:fillRef>
+          <a:effectRef idx="2">
+            <a:schemeClr val="accent1"/>
+          </a:effectRef>
+          <a:fontRef idx="minor">
+            <a:schemeClr val="lt1"/>
+          </a:fontRef>
+        </p:style>
+        <p:txBody>
+          <a:bodyPr rtlCol="0" anchor="ctr"/>
+          <a:lstStyle/>
+          <a:p>
+            <a:pPr algn="ctr"/>
+          </a:p>
+        </p:txBody>
+      </p:sp>
+      <p:sp>
+        <p:nvSpPr>
+          <p:cNvPr id="9" name="TextBox 8"/>
+          <p:cNvSpPr txBox="1"/>
+          <p:nvPr/>
+        </p:nvSpPr>
+        <p:spPr>
+          <a:xfrm>
+            <a:off x="777240" y="6400800"/>
+            <a:ext cx="8229600" cy="292608"/>
+          </a:xfrm>
+          <a:prstGeom prst="rect">
+            <a:avLst/>
+          </a:prstGeom>
+          <a:noFill/>
+        </p:spPr>
+        <p:txBody>
+          <a:bodyPr wrap="square" anchor="t" lIns="25400" rIns="25400" tIns="12700" bIns="12700">
+            <a:spAutoFit/>
+          </a:bodyPr>
+          <a:lstStyle/>
+          <a:p>
+            <a:pPr algn="l">
+              <a:lnSpc>
+                <a:spcPct val="100000"/>
+              </a:lnSpc>
+            </a:pPr>
+            <a:r>
+              <a:rPr sz="950" b="0">
+                <a:solidFill>
+                  <a:srgbClr val="9486C4"/>
+                </a:solidFill>
+                <a:latin typeface="Microsoft YaHei"/>
+              </a:rPr>
+              <a:t>上海创智汇 </a:t>
+            </a:r>
+            <a:r>
+              <a:rPr sz="950" b="0">
+                <a:solidFill>
+                  <a:srgbClr val="9486C4"/>
+                </a:solidFill>
+                <a:latin typeface="Arial"/>
+              </a:rPr>
+              <a:t>CHUANGZHIHUI</a:t>
+            </a:r>
+            <a:r>
+              <a:rPr sz="950" b="0">
+                <a:solidFill>
+                  <a:srgbClr val="9486C4"/>
+                </a:solidFill>
+                <a:latin typeface="Microsoft YaHei"/>
+              </a:rPr>
+              <a:t>  ·  AI+数字内容无界共创港 · 6600㎡ 谈判集中汇报</a:t>
+            </a:r>
+          </a:p>
+        </p:txBody>
+      </p:sp>
+      <p:sp>
+        <p:nvSpPr>
+          <p:cNvPr id="10" name="TextBox 9"/>
+          <p:cNvSpPr txBox="1"/>
+          <p:nvPr/>
+        </p:nvSpPr>
+        <p:spPr>
+          <a:xfrm>
+            <a:off x="10241280" y="6400800"/>
+            <a:ext cx="1490472" cy="292608"/>
+          </a:xfrm>
+          <a:prstGeom prst="rect">
+            <a:avLst/>
+          </a:prstGeom>
+          <a:noFill/>
+        </p:spPr>
+        <p:txBody>
+          <a:bodyPr wrap="square" anchor="t" lIns="25400" rIns="25400" tIns="12700" bIns="12700">
+            <a:spAutoFit/>
+          </a:bodyPr>
+          <a:lstStyle/>
+          <a:p>
+            <a:pPr algn="r">
+              <a:lnSpc>
+                <a:spcPct val="100000"/>
+              </a:lnSpc>
+            </a:pPr>
+            <a:r>
+              <a:rPr sz="1050" b="1">
+                <a:solidFill>
+                  <a:srgbClr val="E9C27C"/>
+                </a:solidFill>
+                <a:latin typeface="Arial"/>
+              </a:rPr>
+              <a:t>40</a:t>
+            </a:r>
+            <a:r>
+              <a:rPr sz="1050" b="0">
+                <a:solidFill>
+                  <a:srgbClr val="9486C4"/>
+                </a:solidFill>
+                <a:latin typeface="Arial"/>
+              </a:rPr>
+              <a:t> / 46</a:t>
+            </a:r>
+          </a:p>
+        </p:txBody>
+      </p:sp>
+      <p:sp>
+        <p:nvSpPr>
+          <p:cNvPr id="11" name="Rounded Rectangle 10"/>
+          <p:cNvSpPr/>
+          <p:nvPr/>
+        </p:nvSpPr>
+        <p:spPr>
+          <a:xfrm>
+            <a:off x="777240" y="1536192"/>
+            <a:ext cx="10634472" cy="749808"/>
+          </a:xfrm>
+          <a:prstGeom prst="roundRect">
+            <a:avLst/>
+          </a:prstGeom>
+          <a:ln w="15875">
+            <a:solidFill>
+              <a:srgbClr val="E9C27C"/>
+            </a:solidFill>
+          </a:ln>
+          <a:effectLst/>
+          <a:gradFill>
+            <a:gsLst>
+              <a:gs pos="0">
+                <a:srgbClr val="3A2878"/>
+              </a:gs>
+              <a:gs pos="100000">
+                <a:srgbClr val="2A1E55"/>
+              </a:gs>
+            </a:gsLst>
+            <a:lin ang="0" scaled="1"/>
+          </a:gradFill>
+        </p:spPr>
+        <p:style>
+          <a:lnRef idx="1">
+            <a:schemeClr val="accent1"/>
+          </a:lnRef>
+          <a:fillRef idx="3">
+            <a:schemeClr val="accent1"/>
+          </a:fillRef>
+          <a:effectRef idx="2">
+            <a:schemeClr val="accent1"/>
+          </a:effectRef>
+          <a:fontRef idx="minor">
+            <a:schemeClr val="lt1"/>
+          </a:fontRef>
+        </p:style>
+        <p:txBody>
+          <a:bodyPr rtlCol="0" anchor="ctr"/>
+          <a:lstStyle/>
+          <a:p>
+            <a:pPr algn="ctr"/>
+          </a:p>
+        </p:txBody>
+      </p:sp>
+      <p:sp>
+        <p:nvSpPr>
+          <p:cNvPr id="12" name="TextBox 11"/>
+          <p:cNvSpPr txBox="1"/>
+          <p:nvPr/>
+        </p:nvSpPr>
+        <p:spPr>
+          <a:xfrm>
+            <a:off x="1005840" y="1536192"/>
+            <a:ext cx="10241280" cy="749808"/>
+          </a:xfrm>
+          <a:prstGeom prst="rect">
+            <a:avLst/>
+          </a:prstGeom>
+          <a:noFill/>
+        </p:spPr>
+        <p:txBody>
+          <a:bodyPr wrap="square" anchor="ctr" lIns="25400" rIns="25400" tIns="12700" bIns="12700">
+            <a:spAutoFit/>
+          </a:bodyPr>
+          <a:lstStyle/>
+          <a:p>
+            <a:pPr algn="l">
+              <a:lnSpc>
+                <a:spcPct val="115000"/>
+              </a:lnSpc>
+            </a:pPr>
+            <a:r>
+              <a:rPr sz="1250" b="1">
+                <a:solidFill>
+                  <a:srgbClr val="E9C27C"/>
+                </a:solidFill>
+                <a:latin typeface="Microsoft YaHei"/>
+              </a:rPr>
+              <a:t>收入逻辑　</a:t>
+            </a:r>
+            <a:r>
+              <a:rPr sz="1250" b="0">
+                <a:solidFill>
+                  <a:srgbClr val="F5F1FF"/>
+                </a:solidFill>
+                <a:latin typeface="Microsoft YaHei"/>
+              </a:rPr>
+              <a:t>园区空间盘（租金/物业）＝对赌基础与出海反哺来源；运营平台收入＝固定服务 + 浮动佣金/分成 + 经营性 + 补贴。</a:t>
+            </a:r>
+          </a:p>
+        </p:txBody>
+      </p:sp>
+      <p:sp>
+        <p:nvSpPr>
+          <p:cNvPr id="13" name="Rounded Rectangle 12"/>
+          <p:cNvSpPr/>
+          <p:nvPr/>
+        </p:nvSpPr>
+        <p:spPr>
+          <a:xfrm>
+            <a:off x="777240" y="2432304"/>
+            <a:ext cx="5230368" cy="3383280"/>
+          </a:xfrm>
+          <a:prstGeom prst="roundRect">
+            <a:avLst/>
+          </a:prstGeom>
+          <a:ln w="12700">
+            <a:solidFill>
+              <a:srgbClr val="4A3C7C"/>
+            </a:solidFill>
+          </a:ln>
+          <a:effectLst/>
+          <a:gradFill>
+            <a:gsLst>
+              <a:gs pos="0">
+                <a:srgbClr val="2A1E55"/>
+              </a:gs>
+              <a:gs pos="100000">
+                <a:srgbClr val="1E1542"/>
+              </a:gs>
+            </a:gsLst>
+            <a:lin ang="7200000" scaled="1"/>
+          </a:gradFill>
+        </p:spPr>
+        <p:style>
+          <a:lnRef idx="1">
+            <a:schemeClr val="accent1"/>
+          </a:lnRef>
+          <a:fillRef idx="3">
+            <a:schemeClr val="accent1"/>
+          </a:fillRef>
+          <a:effectRef idx="2">
+            <a:schemeClr val="accent1"/>
+          </a:effectRef>
+          <a:fontRef idx="minor">
+            <a:schemeClr val="lt1"/>
+          </a:fontRef>
+        </p:style>
+        <p:txBody>
+          <a:bodyPr rtlCol="0" anchor="ctr"/>
+          <a:lstStyle/>
+          <a:p>
+            <a:pPr algn="ctr"/>
+          </a:p>
+        </p:txBody>
+      </p:sp>
+      <p:sp>
+        <p:nvSpPr>
+          <p:cNvPr id="14" name="Rectangle 13"/>
+          <p:cNvSpPr/>
+          <p:nvPr/>
+        </p:nvSpPr>
+        <p:spPr>
+          <a:xfrm>
+            <a:off x="777240" y="2432304"/>
+            <a:ext cx="64008" cy="3383280"/>
+          </a:xfrm>
+          <a:prstGeom prst="rect">
+            <a:avLst/>
+          </a:prstGeom>
+          <a:solidFill>
+            <a:srgbClr val="8B7BFF"/>
+          </a:solidFill>
+          <a:ln>
+            <a:noFill/>
+          </a:ln>
+          <a:effectLst/>
+        </p:spPr>
+        <p:style>
+          <a:lnRef idx="1">
+            <a:schemeClr val="accent1"/>
+          </a:lnRef>
+          <a:fillRef idx="3">
+            <a:schemeClr val="accent1"/>
+          </a:fillRef>
+          <a:effectRef idx="2">
+            <a:schemeClr val="accent1"/>
+          </a:effectRef>
+          <a:fontRef idx="minor">
+            <a:schemeClr val="lt1"/>
+          </a:fontRef>
+        </p:style>
+        <p:txBody>
+          <a:bodyPr rtlCol="0" anchor="ctr"/>
+          <a:lstStyle/>
+          <a:p>
+            <a:pPr algn="ctr"/>
+          </a:p>
+        </p:txBody>
+      </p:sp>
+      <p:sp>
+        <p:nvSpPr>
+          <p:cNvPr id="15" name="TextBox 14"/>
+          <p:cNvSpPr txBox="1"/>
+          <p:nvPr/>
+        </p:nvSpPr>
+        <p:spPr>
+          <a:xfrm>
+            <a:off x="987552" y="2560320"/>
+            <a:ext cx="4937760" cy="365760"/>
+          </a:xfrm>
+          <a:prstGeom prst="rect">
+            <a:avLst/>
+          </a:prstGeom>
+          <a:noFill/>
+        </p:spPr>
+        <p:txBody>
+          <a:bodyPr wrap="square" anchor="t" lIns="25400" rIns="25400" tIns="12700" bIns="12700">
+            <a:spAutoFit/>
+          </a:bodyPr>
+          <a:lstStyle/>
+          <a:p>
+            <a:pPr algn="l">
+              <a:lnSpc>
+                <a:spcPct val="100000"/>
+              </a:lnSpc>
+            </a:pPr>
+            <a:r>
+              <a:rPr sz="1300" b="1">
+                <a:solidFill>
+                  <a:srgbClr val="8B7BFF"/>
+                </a:solidFill>
+                <a:latin typeface="Microsoft YaHei"/>
+              </a:rPr>
+              <a:t>① 园区空间盘（甲方口径 · 对赌基础）</a:t>
+            </a:r>
+          </a:p>
+        </p:txBody>
+      </p:sp>
+      <p:sp>
+        <p:nvSpPr>
+          <p:cNvPr id="16" name="Rectangle 15"/>
+          <p:cNvSpPr/>
+          <p:nvPr/>
+        </p:nvSpPr>
+        <p:spPr>
+          <a:xfrm>
+            <a:off x="941832" y="3017520"/>
+            <a:ext cx="4937760" cy="384048"/>
+          </a:xfrm>
+          <a:prstGeom prst="rect">
+            <a:avLst/>
+          </a:prstGeom>
+          <a:ln>
+            <a:noFill/>
+          </a:ln>
+          <a:effectLst/>
+          <a:gradFill>
+            <a:gsLst>
+              <a:gs pos="0">
+                <a:srgbClr val="36276C"/>
+              </a:gs>
+              <a:gs pos="100000">
+                <a:srgbClr val="2A1E55"/>
+              </a:gs>
+            </a:gsLst>
+            <a:lin ang="0" scaled="1"/>
+          </a:gradFill>
+        </p:spPr>
+        <p:style>
+          <a:lnRef idx="1">
+            <a:schemeClr val="accent1"/>
+          </a:lnRef>
+          <a:fillRef idx="3">
+            <a:schemeClr val="accent1"/>
+          </a:fillRef>
+          <a:effectRef idx="2">
+            <a:schemeClr val="accent1"/>
+          </a:effectRef>
+          <a:fontRef idx="minor">
+            <a:schemeClr val="lt1"/>
+          </a:fontRef>
+        </p:style>
+        <p:txBody>
+          <a:bodyPr rtlCol="0" anchor="ctr"/>
+          <a:lstStyle/>
+          <a:p>
+            <a:pPr algn="ctr"/>
+          </a:p>
+        </p:txBody>
+      </p:sp>
+      <p:sp>
+        <p:nvSpPr>
+          <p:cNvPr id="17" name="TextBox 16"/>
+          <p:cNvSpPr txBox="1"/>
+          <p:nvPr/>
+        </p:nvSpPr>
+        <p:spPr>
+          <a:xfrm>
+            <a:off x="941832" y="3017520"/>
+            <a:ext cx="2271369" cy="384048"/>
+          </a:xfrm>
+          <a:prstGeom prst="rect">
+            <a:avLst/>
+          </a:prstGeom>
+          <a:noFill/>
+        </p:spPr>
+        <p:txBody>
+          <a:bodyPr wrap="square" anchor="ctr" lIns="127000" rIns="76200" tIns="25400" bIns="25400">
+            <a:spAutoFit/>
+          </a:bodyPr>
+          <a:lstStyle/>
+          <a:p>
+            <a:pPr>
+              <a:lnSpc>
+                <a:spcPct val="104000"/>
+              </a:lnSpc>
+            </a:pPr>
+            <a:r>
+              <a:rPr sz="1250" b="1">
+                <a:solidFill>
+                  <a:srgbClr val="E9C27C"/>
+                </a:solidFill>
+                <a:latin typeface="Microsoft YaHei"/>
+              </a:rPr>
+              <a:t>科目</a:t>
+            </a:r>
+          </a:p>
+        </p:txBody>
+      </p:sp>
+      <p:sp>
+        <p:nvSpPr>
+          <p:cNvPr id="18" name="TextBox 17"/>
+          <p:cNvSpPr txBox="1"/>
+          <p:nvPr/>
+        </p:nvSpPr>
+        <p:spPr>
+          <a:xfrm>
+            <a:off x="3213201" y="3017520"/>
+            <a:ext cx="2666390" cy="384048"/>
+          </a:xfrm>
+          <a:prstGeom prst="rect">
+            <a:avLst/>
+          </a:prstGeom>
+          <a:noFill/>
+        </p:spPr>
+        <p:txBody>
+          <a:bodyPr wrap="square" anchor="ctr" lIns="127000" rIns="76200" tIns="25400" bIns="25400">
+            <a:spAutoFit/>
+          </a:bodyPr>
+          <a:lstStyle/>
+          <a:p>
+            <a:pPr>
+              <a:lnSpc>
+                <a:spcPct val="104000"/>
+              </a:lnSpc>
+            </a:pPr>
+            <a:r>
+              <a:rPr sz="1250" b="1">
+                <a:solidFill>
+                  <a:srgbClr val="E9C27C"/>
+                </a:solidFill>
+                <a:latin typeface="Microsoft YaHei"/>
+              </a:rPr>
+              <a:t>年化（示意）</a:t>
+            </a:r>
+          </a:p>
+        </p:txBody>
+      </p:sp>
+      <p:sp>
+        <p:nvSpPr>
+          <p:cNvPr id="19" name="Rectangle 18"/>
+          <p:cNvSpPr/>
+          <p:nvPr/>
+        </p:nvSpPr>
+        <p:spPr>
+          <a:xfrm>
+            <a:off x="941832" y="3392043"/>
+            <a:ext cx="4937760" cy="9525"/>
+          </a:xfrm>
+          <a:prstGeom prst="rect">
+            <a:avLst/>
+          </a:prstGeom>
+          <a:solidFill>
+            <a:srgbClr val="4A3C7C"/>
+          </a:solidFill>
+          <a:ln>
+            <a:noFill/>
+          </a:ln>
+          <a:effectLst/>
+        </p:spPr>
+        <p:style>
+          <a:lnRef idx="1">
+            <a:schemeClr val="accent1"/>
+          </a:lnRef>
+          <a:fillRef idx="3">
+            <a:schemeClr val="accent1"/>
+          </a:fillRef>
+          <a:effectRef idx="2">
+            <a:schemeClr val="accent1"/>
+          </a:effectRef>
+          <a:fontRef idx="minor">
+            <a:schemeClr val="lt1"/>
+          </a:fontRef>
+        </p:style>
+        <p:txBody>
+          <a:bodyPr rtlCol="0" anchor="ctr"/>
+          <a:lstStyle/>
+          <a:p>
+            <a:pPr algn="ctr"/>
+          </a:p>
+        </p:txBody>
+      </p:sp>
+      <p:sp>
+        <p:nvSpPr>
+          <p:cNvPr id="20" name="TextBox 19"/>
+          <p:cNvSpPr txBox="1"/>
+          <p:nvPr/>
+        </p:nvSpPr>
+        <p:spPr>
+          <a:xfrm>
+            <a:off x="941832" y="3401568"/>
+            <a:ext cx="2271369" cy="457200"/>
+          </a:xfrm>
+          <a:prstGeom prst="rect">
+            <a:avLst/>
+          </a:prstGeom>
+          <a:noFill/>
+        </p:spPr>
+        <p:txBody>
+          <a:bodyPr wrap="square" anchor="ctr" lIns="127000" rIns="76200" tIns="25400" bIns="25400">
+            <a:spAutoFit/>
+          </a:bodyPr>
+          <a:lstStyle/>
+          <a:p>
+            <a:pPr>
+              <a:lnSpc>
+                <a:spcPct val="104000"/>
+              </a:lnSpc>
+            </a:pPr>
+            <a:r>
+              <a:rPr sz="1050" b="1">
+                <a:solidFill>
+                  <a:srgbClr val="F5F1FF"/>
+                </a:solidFill>
+                <a:latin typeface="Microsoft YaHei"/>
+              </a:rPr>
+              <a:t>3F 办公租金 2850㎡</a:t>
+            </a:r>
+          </a:p>
+        </p:txBody>
+      </p:sp>
+      <p:sp>
+        <p:nvSpPr>
+          <p:cNvPr id="21" name="TextBox 20"/>
+          <p:cNvSpPr txBox="1"/>
+          <p:nvPr/>
+        </p:nvSpPr>
+        <p:spPr>
+          <a:xfrm>
+            <a:off x="3213201" y="3401568"/>
+            <a:ext cx="2666390" cy="457200"/>
+          </a:xfrm>
+          <a:prstGeom prst="rect">
+            <a:avLst/>
+          </a:prstGeom>
+          <a:noFill/>
+        </p:spPr>
+        <p:txBody>
+          <a:bodyPr wrap="square" anchor="ctr" lIns="127000" rIns="76200" tIns="25400" bIns="25400">
+            <a:spAutoFit/>
+          </a:bodyPr>
+          <a:lstStyle/>
+          <a:p>
+            <a:pPr>
+              <a:lnSpc>
+                <a:spcPct val="104000"/>
+              </a:lnSpc>
+            </a:pPr>
+            <a:r>
+              <a:rPr sz="1050" b="0">
+                <a:solidFill>
+                  <a:srgbClr val="C6BAEA"/>
+                </a:solidFill>
+                <a:latin typeface="Microsoft YaHei"/>
+              </a:rPr>
+              <a:t>约 400 万（85% 去化 · ~4.5 元/㎡/天）</a:t>
+            </a:r>
+          </a:p>
+        </p:txBody>
+      </p:sp>
+      <p:sp>
+        <p:nvSpPr>
+          <p:cNvPr id="22" name="Rectangle 21"/>
+          <p:cNvSpPr/>
+          <p:nvPr/>
+        </p:nvSpPr>
+        <p:spPr>
+          <a:xfrm>
+            <a:off x="941832" y="3849243"/>
+            <a:ext cx="4937760" cy="9525"/>
+          </a:xfrm>
+          <a:prstGeom prst="rect">
+            <a:avLst/>
+          </a:prstGeom>
+          <a:solidFill>
+            <a:srgbClr val="4A3C7C"/>
+          </a:solidFill>
+          <a:ln>
+            <a:noFill/>
+          </a:ln>
+          <a:effectLst/>
+        </p:spPr>
+        <p:style>
+          <a:lnRef idx="1">
+            <a:schemeClr val="accent1"/>
+          </a:lnRef>
+          <a:fillRef idx="3">
+            <a:schemeClr val="accent1"/>
+          </a:fillRef>
+          <a:effectRef idx="2">
+            <a:schemeClr val="accent1"/>
+          </a:effectRef>
+          <a:fontRef idx="minor">
+            <a:schemeClr val="lt1"/>
+          </a:fontRef>
+        </p:style>
+        <p:txBody>
+          <a:bodyPr rtlCol="0" anchor="ctr"/>
+          <a:lstStyle/>
+          <a:p>
+            <a:pPr algn="ctr"/>
+          </a:p>
+        </p:txBody>
+      </p:sp>
+      <p:sp>
+        <p:nvSpPr>
+          <p:cNvPr id="23" name="Rectangle 22"/>
+          <p:cNvSpPr/>
+          <p:nvPr/>
+        </p:nvSpPr>
+        <p:spPr>
+          <a:xfrm>
+            <a:off x="941832" y="3858768"/>
+            <a:ext cx="4937760" cy="457200"/>
+          </a:xfrm>
+          <a:prstGeom prst="rect">
+            <a:avLst/>
+          </a:prstGeom>
+          <a:solidFill>
+            <a:srgbClr val="221844"/>
+          </a:solidFill>
+          <a:ln>
+            <a:noFill/>
+          </a:ln>
+          <a:effectLst/>
+        </p:spPr>
+        <p:style>
+          <a:lnRef idx="1">
+            <a:schemeClr val="accent1"/>
+          </a:lnRef>
+          <a:fillRef idx="3">
+            <a:schemeClr val="accent1"/>
+          </a:fillRef>
+          <a:effectRef idx="2">
+            <a:schemeClr val="accent1"/>
+          </a:effectRef>
+          <a:fontRef idx="minor">
+            <a:schemeClr val="lt1"/>
+          </a:fontRef>
+        </p:style>
+        <p:txBody>
+          <a:bodyPr rtlCol="0" anchor="ctr"/>
+          <a:lstStyle/>
+          <a:p>
+            <a:pPr algn="ctr"/>
+          </a:p>
+        </p:txBody>
+      </p:sp>
+      <p:sp>
+        <p:nvSpPr>
+          <p:cNvPr id="24" name="TextBox 23"/>
+          <p:cNvSpPr txBox="1"/>
+          <p:nvPr/>
+        </p:nvSpPr>
+        <p:spPr>
+          <a:xfrm>
+            <a:off x="941832" y="3858768"/>
+            <a:ext cx="2271369" cy="457200"/>
+          </a:xfrm>
+          <a:prstGeom prst="rect">
+            <a:avLst/>
+          </a:prstGeom>
+          <a:noFill/>
+        </p:spPr>
+        <p:txBody>
+          <a:bodyPr wrap="square" anchor="ctr" lIns="127000" rIns="76200" tIns="25400" bIns="25400">
+            <a:spAutoFit/>
+          </a:bodyPr>
+          <a:lstStyle/>
+          <a:p>
+            <a:pPr>
+              <a:lnSpc>
+                <a:spcPct val="104000"/>
+              </a:lnSpc>
+            </a:pPr>
+            <a:r>
+              <a:rPr sz="1050" b="1">
+                <a:solidFill>
+                  <a:srgbClr val="F5F1FF"/>
+                </a:solidFill>
+                <a:latin typeface="Microsoft YaHei"/>
+              </a:rPr>
+              <a:t>5F 展贸租金 + 物业</a:t>
+            </a:r>
+          </a:p>
+        </p:txBody>
+      </p:sp>
+      <p:sp>
+        <p:nvSpPr>
+          <p:cNvPr id="25" name="TextBox 24"/>
+          <p:cNvSpPr txBox="1"/>
+          <p:nvPr/>
+        </p:nvSpPr>
+        <p:spPr>
+          <a:xfrm>
+            <a:off x="3213201" y="3858768"/>
+            <a:ext cx="2666390" cy="457200"/>
+          </a:xfrm>
+          <a:prstGeom prst="rect">
+            <a:avLst/>
+          </a:prstGeom>
+          <a:noFill/>
+        </p:spPr>
+        <p:txBody>
+          <a:bodyPr wrap="square" anchor="ctr" lIns="127000" rIns="76200" tIns="25400" bIns="25400">
+            <a:spAutoFit/>
+          </a:bodyPr>
+          <a:lstStyle/>
+          <a:p>
+            <a:pPr>
+              <a:lnSpc>
+                <a:spcPct val="104000"/>
+              </a:lnSpc>
+            </a:pPr>
+            <a:r>
+              <a:rPr sz="1050" b="0">
+                <a:solidFill>
+                  <a:srgbClr val="C6BAEA"/>
+                </a:solidFill>
+                <a:latin typeface="Microsoft YaHei"/>
+              </a:rPr>
+              <a:t>约 300 万（部分免租 · 订单扣点反哺）</a:t>
+            </a:r>
+          </a:p>
+        </p:txBody>
+      </p:sp>
+      <p:sp>
+        <p:nvSpPr>
+          <p:cNvPr id="26" name="Rectangle 25"/>
+          <p:cNvSpPr/>
+          <p:nvPr/>
+        </p:nvSpPr>
+        <p:spPr>
+          <a:xfrm>
+            <a:off x="941832" y="4306443"/>
+            <a:ext cx="4937760" cy="9525"/>
+          </a:xfrm>
+          <a:prstGeom prst="rect">
+            <a:avLst/>
+          </a:prstGeom>
+          <a:solidFill>
+            <a:srgbClr val="4A3C7C"/>
+          </a:solidFill>
+          <a:ln>
+            <a:noFill/>
+          </a:ln>
+          <a:effectLst/>
+        </p:spPr>
+        <p:style>
+          <a:lnRef idx="1">
+            <a:schemeClr val="accent1"/>
+          </a:lnRef>
+          <a:fillRef idx="3">
+            <a:schemeClr val="accent1"/>
+          </a:fillRef>
+          <a:effectRef idx="2">
+            <a:schemeClr val="accent1"/>
+          </a:effectRef>
+          <a:fontRef idx="minor">
+            <a:schemeClr val="lt1"/>
+          </a:fontRef>
+        </p:style>
+        <p:txBody>
+          <a:bodyPr rtlCol="0" anchor="ctr"/>
+          <a:lstStyle/>
+          <a:p>
+            <a:pPr algn="ctr"/>
+          </a:p>
+        </p:txBody>
+      </p:sp>
+      <p:sp>
+        <p:nvSpPr>
+          <p:cNvPr id="27" name="TextBox 26"/>
+          <p:cNvSpPr txBox="1"/>
+          <p:nvPr/>
+        </p:nvSpPr>
+        <p:spPr>
+          <a:xfrm>
+            <a:off x="941832" y="4315968"/>
+            <a:ext cx="2271369" cy="457200"/>
+          </a:xfrm>
+          <a:prstGeom prst="rect">
+            <a:avLst/>
+          </a:prstGeom>
+          <a:noFill/>
+        </p:spPr>
+        <p:txBody>
+          <a:bodyPr wrap="square" anchor="ctr" lIns="127000" rIns="76200" tIns="25400" bIns="25400">
+            <a:spAutoFit/>
+          </a:bodyPr>
+          <a:lstStyle/>
+          <a:p>
+            <a:pPr>
+              <a:lnSpc>
+                <a:spcPct val="104000"/>
+              </a:lnSpc>
+            </a:pPr>
+            <a:r>
+              <a:rPr sz="1050" b="1">
+                <a:solidFill>
+                  <a:srgbClr val="F5F1FF"/>
+                </a:solidFill>
+                <a:latin typeface="Microsoft YaHei"/>
+              </a:rPr>
+              <a:t>6600㎡ 物业费</a:t>
+            </a:r>
+          </a:p>
+        </p:txBody>
+      </p:sp>
+      <p:sp>
+        <p:nvSpPr>
+          <p:cNvPr id="28" name="TextBox 27"/>
+          <p:cNvSpPr txBox="1"/>
+          <p:nvPr/>
+        </p:nvSpPr>
+        <p:spPr>
+          <a:xfrm>
+            <a:off x="3213201" y="4315968"/>
+            <a:ext cx="2666390" cy="457200"/>
+          </a:xfrm>
+          <a:prstGeom prst="rect">
+            <a:avLst/>
+          </a:prstGeom>
+          <a:noFill/>
+        </p:spPr>
+        <p:txBody>
+          <a:bodyPr wrap="square" anchor="ctr" lIns="127000" rIns="76200" tIns="25400" bIns="25400">
+            <a:spAutoFit/>
+          </a:bodyPr>
+          <a:lstStyle/>
+          <a:p>
+            <a:pPr>
+              <a:lnSpc>
+                <a:spcPct val="104000"/>
+              </a:lnSpc>
+            </a:pPr>
+            <a:r>
+              <a:rPr sz="1050" b="0">
+                <a:solidFill>
+                  <a:srgbClr val="C6BAEA"/>
+                </a:solidFill>
+                <a:latin typeface="Microsoft YaHei"/>
+              </a:rPr>
+              <a:t>约 200 万（1.0 元/㎡/天 计）</a:t>
+            </a:r>
+          </a:p>
+        </p:txBody>
+      </p:sp>
+      <p:sp>
+        <p:nvSpPr>
+          <p:cNvPr id="29" name="Rectangle 28"/>
+          <p:cNvSpPr/>
+          <p:nvPr/>
+        </p:nvSpPr>
+        <p:spPr>
+          <a:xfrm>
+            <a:off x="941832" y="4763643"/>
+            <a:ext cx="4937760" cy="9525"/>
+          </a:xfrm>
+          <a:prstGeom prst="rect">
+            <a:avLst/>
+          </a:prstGeom>
+          <a:solidFill>
+            <a:srgbClr val="4A3C7C"/>
+          </a:solidFill>
+          <a:ln>
+            <a:noFill/>
+          </a:ln>
+          <a:effectLst/>
+        </p:spPr>
+        <p:style>
+          <a:lnRef idx="1">
+            <a:schemeClr val="accent1"/>
+          </a:lnRef>
+          <a:fillRef idx="3">
+            <a:schemeClr val="accent1"/>
+          </a:fillRef>
+          <a:effectRef idx="2">
+            <a:schemeClr val="accent1"/>
+          </a:effectRef>
+          <a:fontRef idx="minor">
+            <a:schemeClr val="lt1"/>
+          </a:fontRef>
+        </p:style>
+        <p:txBody>
+          <a:bodyPr rtlCol="0" anchor="ctr"/>
+          <a:lstStyle/>
+          <a:p>
+            <a:pPr algn="ctr"/>
+          </a:p>
+        </p:txBody>
+      </p:sp>
+      <p:sp>
+        <p:nvSpPr>
+          <p:cNvPr id="30" name="Rectangle 29"/>
+          <p:cNvSpPr/>
+          <p:nvPr/>
+        </p:nvSpPr>
+        <p:spPr>
+          <a:xfrm>
+            <a:off x="941832" y="4773168"/>
+            <a:ext cx="4937760" cy="457200"/>
+          </a:xfrm>
+          <a:prstGeom prst="rect">
+            <a:avLst/>
+          </a:prstGeom>
+          <a:solidFill>
+            <a:srgbClr val="221844"/>
+          </a:solidFill>
+          <a:ln>
+            <a:noFill/>
+          </a:ln>
+          <a:effectLst/>
+        </p:spPr>
+        <p:style>
+          <a:lnRef idx="1">
+            <a:schemeClr val="accent1"/>
+          </a:lnRef>
+          <a:fillRef idx="3">
+            <a:schemeClr val="accent1"/>
+          </a:fillRef>
+          <a:effectRef idx="2">
+            <a:schemeClr val="accent1"/>
+          </a:effectRef>
+          <a:fontRef idx="minor">
+            <a:schemeClr val="lt1"/>
+          </a:fontRef>
+        </p:style>
+        <p:txBody>
+          <a:bodyPr rtlCol="0" anchor="ctr"/>
+          <a:lstStyle/>
+          <a:p>
+            <a:pPr algn="ctr"/>
+          </a:p>
+        </p:txBody>
+      </p:sp>
+      <p:sp>
+        <p:nvSpPr>
+          <p:cNvPr id="31" name="TextBox 30"/>
+          <p:cNvSpPr txBox="1"/>
+          <p:nvPr/>
+        </p:nvSpPr>
+        <p:spPr>
+          <a:xfrm>
+            <a:off x="941832" y="4773168"/>
+            <a:ext cx="2271369" cy="457200"/>
+          </a:xfrm>
+          <a:prstGeom prst="rect">
+            <a:avLst/>
+          </a:prstGeom>
+          <a:noFill/>
+        </p:spPr>
+        <p:txBody>
+          <a:bodyPr wrap="square" anchor="ctr" lIns="127000" rIns="76200" tIns="25400" bIns="25400">
+            <a:spAutoFit/>
+          </a:bodyPr>
+          <a:lstStyle/>
+          <a:p>
+            <a:pPr>
+              <a:lnSpc>
+                <a:spcPct val="104000"/>
+              </a:lnSpc>
+            </a:pPr>
+            <a:r>
+              <a:rPr sz="1050" b="1">
+                <a:solidFill>
+                  <a:srgbClr val="F5F1FF"/>
+                </a:solidFill>
+                <a:latin typeface="Microsoft YaHei"/>
+              </a:rPr>
+              <a:t>空间盘合计</a:t>
+            </a:r>
+          </a:p>
+        </p:txBody>
+      </p:sp>
+      <p:sp>
+        <p:nvSpPr>
+          <p:cNvPr id="32" name="TextBox 31"/>
+          <p:cNvSpPr txBox="1"/>
+          <p:nvPr/>
+        </p:nvSpPr>
+        <p:spPr>
+          <a:xfrm>
+            <a:off x="3213201" y="4773168"/>
+            <a:ext cx="2666390" cy="457200"/>
+          </a:xfrm>
+          <a:prstGeom prst="rect">
+            <a:avLst/>
+          </a:prstGeom>
+          <a:noFill/>
+        </p:spPr>
+        <p:txBody>
+          <a:bodyPr wrap="square" anchor="ctr" lIns="127000" rIns="76200" tIns="25400" bIns="25400">
+            <a:spAutoFit/>
+          </a:bodyPr>
+          <a:lstStyle/>
+          <a:p>
+            <a:pPr>
+              <a:lnSpc>
+                <a:spcPct val="104000"/>
+              </a:lnSpc>
+            </a:pPr>
+            <a:r>
+              <a:rPr sz="1050" b="0">
+                <a:solidFill>
+                  <a:srgbClr val="C6BAEA"/>
+                </a:solidFill>
+                <a:latin typeface="Microsoft YaHei"/>
+              </a:rPr>
+              <a:t>约 900 万/年（满租稳定期）</a:t>
+            </a:r>
+          </a:p>
+        </p:txBody>
+      </p:sp>
+      <p:sp>
+        <p:nvSpPr>
+          <p:cNvPr id="33" name="Rectangle 32"/>
+          <p:cNvSpPr/>
+          <p:nvPr/>
+        </p:nvSpPr>
+        <p:spPr>
+          <a:xfrm>
+            <a:off x="941832" y="5220843"/>
+            <a:ext cx="4937760" cy="9525"/>
+          </a:xfrm>
+          <a:prstGeom prst="rect">
+            <a:avLst/>
+          </a:prstGeom>
+          <a:solidFill>
+            <a:srgbClr val="4A3C7C"/>
+          </a:solidFill>
+          <a:ln>
+            <a:noFill/>
+          </a:ln>
+          <a:effectLst/>
+        </p:spPr>
+        <p:style>
+          <a:lnRef idx="1">
+            <a:schemeClr val="accent1"/>
+          </a:lnRef>
+          <a:fillRef idx="3">
+            <a:schemeClr val="accent1"/>
+          </a:fillRef>
+          <a:effectRef idx="2">
+            <a:schemeClr val="accent1"/>
+          </a:effectRef>
+          <a:fontRef idx="minor">
+            <a:schemeClr val="lt1"/>
+          </a:fontRef>
+        </p:style>
+        <p:txBody>
+          <a:bodyPr rtlCol="0" anchor="ctr"/>
+          <a:lstStyle/>
+          <a:p>
+            <a:pPr algn="ctr"/>
+          </a:p>
+        </p:txBody>
+      </p:sp>
+      <p:sp>
+        <p:nvSpPr>
+          <p:cNvPr id="34" name="Rectangle 33"/>
+          <p:cNvSpPr/>
+          <p:nvPr/>
+        </p:nvSpPr>
+        <p:spPr>
+          <a:xfrm>
+            <a:off x="941832" y="3017520"/>
+            <a:ext cx="31750" cy="2212848"/>
+          </a:xfrm>
+          <a:prstGeom prst="rect">
+            <a:avLst/>
+          </a:prstGeom>
+          <a:solidFill>
+            <a:srgbClr val="E9C27C"/>
+          </a:solidFill>
+          <a:ln>
+            <a:noFill/>
+          </a:ln>
+          <a:effectLst/>
+        </p:spPr>
+        <p:style>
+          <a:lnRef idx="1">
+            <a:schemeClr val="accent1"/>
+          </a:lnRef>
+          <a:fillRef idx="3">
+            <a:schemeClr val="accent1"/>
+          </a:fillRef>
+          <a:effectRef idx="2">
+            <a:schemeClr val="accent1"/>
+          </a:effectRef>
+          <a:fontRef idx="minor">
+            <a:schemeClr val="lt1"/>
+          </a:fontRef>
+        </p:style>
+        <p:txBody>
+          <a:bodyPr rtlCol="0" anchor="ctr"/>
+          <a:lstStyle/>
+          <a:p>
+            <a:pPr algn="ctr"/>
+          </a:p>
+        </p:txBody>
+      </p:sp>
+      <p:sp>
+        <p:nvSpPr>
+          <p:cNvPr id="35" name="Rounded Rectangle 34"/>
+          <p:cNvSpPr/>
+          <p:nvPr/>
+        </p:nvSpPr>
+        <p:spPr>
+          <a:xfrm>
+            <a:off x="6181344" y="2432304"/>
+            <a:ext cx="5230368" cy="3383280"/>
+          </a:xfrm>
+          <a:prstGeom prst="roundRect">
+            <a:avLst/>
+          </a:prstGeom>
+          <a:ln w="15875">
+            <a:solidFill>
+              <a:srgbClr val="E9C27C"/>
+            </a:solidFill>
+          </a:ln>
+          <a:effectLst/>
+          <a:gradFill>
+            <a:gsLst>
+              <a:gs pos="0">
+                <a:srgbClr val="2A1E55"/>
+              </a:gs>
+              <a:gs pos="100000">
+                <a:srgbClr val="1E1542"/>
+              </a:gs>
+            </a:gsLst>
+            <a:lin ang="7200000" scaled="1"/>
+          </a:gradFill>
+        </p:spPr>
+        <p:style>
+          <a:lnRef idx="1">
+            <a:schemeClr val="accent1"/>
+          </a:lnRef>
+          <a:fillRef idx="3">
+            <a:schemeClr val="accent1"/>
+          </a:fillRef>
+          <a:effectRef idx="2">
+            <a:schemeClr val="accent1"/>
+          </a:effectRef>
+          <a:fontRef idx="minor">
+            <a:schemeClr val="lt1"/>
+          </a:fontRef>
+        </p:style>
+        <p:txBody>
+          <a:bodyPr rtlCol="0" anchor="ctr"/>
+          <a:lstStyle/>
+          <a:p>
+            <a:pPr algn="ctr"/>
+          </a:p>
+        </p:txBody>
+      </p:sp>
+      <p:sp>
+        <p:nvSpPr>
+          <p:cNvPr id="36" name="Rectangle 35"/>
+          <p:cNvSpPr/>
+          <p:nvPr/>
+        </p:nvSpPr>
+        <p:spPr>
+          <a:xfrm>
+            <a:off x="6181344" y="2432304"/>
+            <a:ext cx="64008" cy="3383280"/>
+          </a:xfrm>
+          <a:prstGeom prst="rect">
+            <a:avLst/>
+          </a:prstGeom>
+          <a:solidFill>
+            <a:srgbClr val="E9C27C"/>
+          </a:solidFill>
+          <a:ln>
+            <a:noFill/>
+          </a:ln>
+          <a:effectLst/>
+        </p:spPr>
+        <p:style>
+          <a:lnRef idx="1">
+            <a:schemeClr val="accent1"/>
+          </a:lnRef>
+          <a:fillRef idx="3">
+            <a:schemeClr val="accent1"/>
+          </a:fillRef>
+          <a:effectRef idx="2">
+            <a:schemeClr val="accent1"/>
+          </a:effectRef>
+          <a:fontRef idx="minor">
+            <a:schemeClr val="lt1"/>
+          </a:fontRef>
+        </p:style>
+        <p:txBody>
+          <a:bodyPr rtlCol="0" anchor="ctr"/>
+          <a:lstStyle/>
+          <a:p>
+            <a:pPr algn="ctr"/>
+          </a:p>
+        </p:txBody>
+      </p:sp>
+      <p:sp>
+        <p:nvSpPr>
+          <p:cNvPr id="37" name="TextBox 36"/>
+          <p:cNvSpPr txBox="1"/>
+          <p:nvPr/>
+        </p:nvSpPr>
+        <p:spPr>
+          <a:xfrm>
+            <a:off x="6437376" y="2560320"/>
+            <a:ext cx="4937760" cy="365760"/>
+          </a:xfrm>
+          <a:prstGeom prst="rect">
+            <a:avLst/>
+          </a:prstGeom>
+          <a:noFill/>
+        </p:spPr>
+        <p:txBody>
+          <a:bodyPr wrap="square" anchor="t" lIns="25400" rIns="25400" tIns="12700" bIns="12700">
+            <a:spAutoFit/>
+          </a:bodyPr>
+          <a:lstStyle/>
+          <a:p>
+            <a:pPr algn="l">
+              <a:lnSpc>
+                <a:spcPct val="100000"/>
+              </a:lnSpc>
+            </a:pPr>
+            <a:r>
+              <a:rPr sz="1300" b="1">
+                <a:solidFill>
+                  <a:srgbClr val="E9C27C"/>
+                </a:solidFill>
+                <a:latin typeface="Microsoft YaHei"/>
+              </a:rPr>
+              <a:t>② 运营平台收入（乙方口径）</a:t>
+            </a:r>
+          </a:p>
+        </p:txBody>
+      </p:sp>
+      <p:sp>
+        <p:nvSpPr>
+          <p:cNvPr id="38" name="Rectangle 37"/>
+          <p:cNvSpPr/>
+          <p:nvPr/>
+        </p:nvSpPr>
+        <p:spPr>
+          <a:xfrm>
+            <a:off x="6391656" y="3017520"/>
+            <a:ext cx="4937760" cy="384048"/>
+          </a:xfrm>
+          <a:prstGeom prst="rect">
+            <a:avLst/>
+          </a:prstGeom>
+          <a:ln>
+            <a:noFill/>
+          </a:ln>
+          <a:effectLst/>
+          <a:gradFill>
+            <a:gsLst>
+              <a:gs pos="0">
+                <a:srgbClr val="36276C"/>
+              </a:gs>
+              <a:gs pos="100000">
+                <a:srgbClr val="2A1E55"/>
+              </a:gs>
+            </a:gsLst>
+            <a:lin ang="0" scaled="1"/>
+          </a:gradFill>
+        </p:spPr>
+        <p:style>
+          <a:lnRef idx="1">
+            <a:schemeClr val="accent1"/>
+          </a:lnRef>
+          <a:fillRef idx="3">
+            <a:schemeClr val="accent1"/>
+          </a:fillRef>
+          <a:effectRef idx="2">
+            <a:schemeClr val="accent1"/>
+          </a:effectRef>
+          <a:fontRef idx="minor">
+            <a:schemeClr val="lt1"/>
+          </a:fontRef>
+        </p:style>
+        <p:txBody>
+          <a:bodyPr rtlCol="0" anchor="ctr"/>
+          <a:lstStyle/>
+          <a:p>
+            <a:pPr algn="ctr"/>
+          </a:p>
+        </p:txBody>
+      </p:sp>
+      <p:sp>
+        <p:nvSpPr>
+          <p:cNvPr id="39" name="TextBox 38"/>
+          <p:cNvSpPr txBox="1"/>
+          <p:nvPr/>
+        </p:nvSpPr>
+        <p:spPr>
+          <a:xfrm>
+            <a:off x="6391656" y="3017520"/>
+            <a:ext cx="1975104" cy="384048"/>
+          </a:xfrm>
+          <a:prstGeom prst="rect">
+            <a:avLst/>
+          </a:prstGeom>
+          <a:noFill/>
+        </p:spPr>
+        <p:txBody>
+          <a:bodyPr wrap="square" anchor="ctr" lIns="127000" rIns="76200" tIns="25400" bIns="25400">
+            <a:spAutoFit/>
+          </a:bodyPr>
+          <a:lstStyle/>
+          <a:p>
+            <a:pPr>
+              <a:lnSpc>
+                <a:spcPct val="104000"/>
+              </a:lnSpc>
+            </a:pPr>
+            <a:r>
+              <a:rPr sz="1250" b="1">
+                <a:solidFill>
+                  <a:srgbClr val="E9C27C"/>
+                </a:solidFill>
+                <a:latin typeface="Microsoft YaHei"/>
+              </a:rPr>
+              <a:t>收入类别</a:t>
+            </a:r>
+          </a:p>
+        </p:txBody>
+      </p:sp>
+      <p:sp>
+        <p:nvSpPr>
+          <p:cNvPr id="40" name="TextBox 39"/>
+          <p:cNvSpPr txBox="1"/>
+          <p:nvPr/>
+        </p:nvSpPr>
+        <p:spPr>
+          <a:xfrm>
+            <a:off x="8366760" y="3017520"/>
+            <a:ext cx="2962656" cy="384048"/>
+          </a:xfrm>
+          <a:prstGeom prst="rect">
+            <a:avLst/>
+          </a:prstGeom>
+          <a:noFill/>
+        </p:spPr>
+        <p:txBody>
+          <a:bodyPr wrap="square" anchor="ctr" lIns="127000" rIns="76200" tIns="25400" bIns="25400">
+            <a:spAutoFit/>
+          </a:bodyPr>
+          <a:lstStyle/>
+          <a:p>
+            <a:pPr>
+              <a:lnSpc>
+                <a:spcPct val="104000"/>
+              </a:lnSpc>
+            </a:pPr>
+            <a:r>
+              <a:rPr sz="1250" b="1">
+                <a:solidFill>
+                  <a:srgbClr val="E9C27C"/>
+                </a:solidFill>
+                <a:latin typeface="Microsoft YaHei"/>
+              </a:rPr>
+              <a:t>年化（示意）</a:t>
+            </a:r>
+          </a:p>
+        </p:txBody>
+      </p:sp>
+      <p:sp>
+        <p:nvSpPr>
+          <p:cNvPr id="41" name="Rectangle 40"/>
+          <p:cNvSpPr/>
+          <p:nvPr/>
+        </p:nvSpPr>
+        <p:spPr>
+          <a:xfrm>
+            <a:off x="6391656" y="3392043"/>
+            <a:ext cx="4937760" cy="9525"/>
+          </a:xfrm>
+          <a:prstGeom prst="rect">
+            <a:avLst/>
+          </a:prstGeom>
+          <a:solidFill>
+            <a:srgbClr val="4A3C7C"/>
+          </a:solidFill>
+          <a:ln>
+            <a:noFill/>
+          </a:ln>
+          <a:effectLst/>
+        </p:spPr>
+        <p:style>
+          <a:lnRef idx="1">
+            <a:schemeClr val="accent1"/>
+          </a:lnRef>
+          <a:fillRef idx="3">
+            <a:schemeClr val="accent1"/>
+          </a:fillRef>
+          <a:effectRef idx="2">
+            <a:schemeClr val="accent1"/>
+          </a:effectRef>
+          <a:fontRef idx="minor">
+            <a:schemeClr val="lt1"/>
+          </a:fontRef>
+        </p:style>
+        <p:txBody>
+          <a:bodyPr rtlCol="0" anchor="ctr"/>
+          <a:lstStyle/>
+          <a:p>
+            <a:pPr algn="ctr"/>
+          </a:p>
+        </p:txBody>
+      </p:sp>
+      <p:sp>
+        <p:nvSpPr>
+          <p:cNvPr id="42" name="TextBox 41"/>
+          <p:cNvSpPr txBox="1"/>
+          <p:nvPr/>
+        </p:nvSpPr>
+        <p:spPr>
+          <a:xfrm>
+            <a:off x="6391656" y="3401568"/>
+            <a:ext cx="1975104" cy="457200"/>
+          </a:xfrm>
+          <a:prstGeom prst="rect">
+            <a:avLst/>
+          </a:prstGeom>
+          <a:noFill/>
+        </p:spPr>
+        <p:txBody>
+          <a:bodyPr wrap="square" anchor="ctr" lIns="127000" rIns="76200" tIns="25400" bIns="25400">
+            <a:spAutoFit/>
+          </a:bodyPr>
+          <a:lstStyle/>
+          <a:p>
+            <a:pPr>
+              <a:lnSpc>
+                <a:spcPct val="104000"/>
+              </a:lnSpc>
+            </a:pPr>
+            <a:r>
+              <a:rPr sz="1050" b="1">
+                <a:solidFill>
+                  <a:srgbClr val="F5F1FF"/>
+                </a:solidFill>
+                <a:latin typeface="Microsoft YaHei"/>
+              </a:rPr>
+              <a:t>固定服务费</a:t>
+            </a:r>
+          </a:p>
+        </p:txBody>
+      </p:sp>
+      <p:sp>
+        <p:nvSpPr>
+          <p:cNvPr id="43" name="TextBox 42"/>
+          <p:cNvSpPr txBox="1"/>
+          <p:nvPr/>
+        </p:nvSpPr>
+        <p:spPr>
+          <a:xfrm>
+            <a:off x="8366760" y="3401568"/>
+            <a:ext cx="2962656" cy="457200"/>
+          </a:xfrm>
+          <a:prstGeom prst="rect">
+            <a:avLst/>
+          </a:prstGeom>
+          <a:noFill/>
+        </p:spPr>
+        <p:txBody>
+          <a:bodyPr wrap="square" anchor="ctr" lIns="127000" rIns="76200" tIns="25400" bIns="25400">
+            <a:spAutoFit/>
+          </a:bodyPr>
+          <a:lstStyle/>
+          <a:p>
+            <a:pPr>
+              <a:lnSpc>
+                <a:spcPct val="104000"/>
+              </a:lnSpc>
+            </a:pPr>
+            <a:r>
+              <a:rPr sz="1050" b="0">
+                <a:solidFill>
+                  <a:srgbClr val="C6BAEA"/>
+                </a:solidFill>
+                <a:latin typeface="Microsoft YaHei"/>
+              </a:rPr>
+              <a:t>约 146 万（运营 96 + 活动 30 + 媒体 10 + 挂牌）</a:t>
+            </a:r>
+          </a:p>
+        </p:txBody>
+      </p:sp>
+      <p:sp>
+        <p:nvSpPr>
+          <p:cNvPr id="44" name="Rectangle 43"/>
+          <p:cNvSpPr/>
+          <p:nvPr/>
+        </p:nvSpPr>
+        <p:spPr>
+          <a:xfrm>
+            <a:off x="6391656" y="3849243"/>
+            <a:ext cx="4937760" cy="9525"/>
+          </a:xfrm>
+          <a:prstGeom prst="rect">
+            <a:avLst/>
+          </a:prstGeom>
+          <a:solidFill>
+            <a:srgbClr val="4A3C7C"/>
+          </a:solidFill>
+          <a:ln>
+            <a:noFill/>
+          </a:ln>
+          <a:effectLst/>
+        </p:spPr>
+        <p:style>
+          <a:lnRef idx="1">
+            <a:schemeClr val="accent1"/>
+          </a:lnRef>
+          <a:fillRef idx="3">
+            <a:schemeClr val="accent1"/>
+          </a:fillRef>
+          <a:effectRef idx="2">
+            <a:schemeClr val="accent1"/>
+          </a:effectRef>
+          <a:fontRef idx="minor">
+            <a:schemeClr val="lt1"/>
+          </a:fontRef>
+        </p:style>
+        <p:txBody>
+          <a:bodyPr rtlCol="0" anchor="ctr"/>
+          <a:lstStyle/>
+          <a:p>
+            <a:pPr algn="ctr"/>
+          </a:p>
+        </p:txBody>
+      </p:sp>
+      <p:sp>
+        <p:nvSpPr>
+          <p:cNvPr id="45" name="Rectangle 44"/>
+          <p:cNvSpPr/>
+          <p:nvPr/>
+        </p:nvSpPr>
+        <p:spPr>
+          <a:xfrm>
+            <a:off x="6391656" y="3858768"/>
+            <a:ext cx="4937760" cy="457200"/>
+          </a:xfrm>
+          <a:prstGeom prst="rect">
+            <a:avLst/>
+          </a:prstGeom>
+          <a:solidFill>
+            <a:srgbClr val="221844"/>
+          </a:solidFill>
+          <a:ln>
+            <a:noFill/>
+          </a:ln>
+          <a:effectLst/>
+        </p:spPr>
+        <p:style>
+          <a:lnRef idx="1">
+            <a:schemeClr val="accent1"/>
+          </a:lnRef>
+          <a:fillRef idx="3">
+            <a:schemeClr val="accent1"/>
+          </a:fillRef>
+          <a:effectRef idx="2">
+            <a:schemeClr val="accent1"/>
+          </a:effectRef>
+          <a:fontRef idx="minor">
+            <a:schemeClr val="lt1"/>
+          </a:fontRef>
+        </p:style>
+        <p:txBody>
+          <a:bodyPr rtlCol="0" anchor="ctr"/>
+          <a:lstStyle/>
+          <a:p>
+            <a:pPr algn="ctr"/>
+          </a:p>
+        </p:txBody>
+      </p:sp>
+      <p:sp>
+        <p:nvSpPr>
+          <p:cNvPr id="46" name="TextBox 45"/>
+          <p:cNvSpPr txBox="1"/>
+          <p:nvPr/>
+        </p:nvSpPr>
+        <p:spPr>
+          <a:xfrm>
+            <a:off x="6391656" y="3858768"/>
+            <a:ext cx="1975104" cy="457200"/>
+          </a:xfrm>
+          <a:prstGeom prst="rect">
+            <a:avLst/>
+          </a:prstGeom>
+          <a:noFill/>
+        </p:spPr>
+        <p:txBody>
+          <a:bodyPr wrap="square" anchor="ctr" lIns="127000" rIns="76200" tIns="25400" bIns="25400">
+            <a:spAutoFit/>
+          </a:bodyPr>
+          <a:lstStyle/>
+          <a:p>
+            <a:pPr>
+              <a:lnSpc>
+                <a:spcPct val="104000"/>
+              </a:lnSpc>
+            </a:pPr>
+            <a:r>
+              <a:rPr sz="1050" b="1">
+                <a:solidFill>
+                  <a:srgbClr val="F5F1FF"/>
+                </a:solidFill>
+                <a:latin typeface="Microsoft YaHei"/>
+              </a:rPr>
+              <a:t>招商佣金</a:t>
+            </a:r>
+          </a:p>
+        </p:txBody>
+      </p:sp>
+      <p:sp>
+        <p:nvSpPr>
+          <p:cNvPr id="47" name="TextBox 46"/>
+          <p:cNvSpPr txBox="1"/>
+          <p:nvPr/>
+        </p:nvSpPr>
+        <p:spPr>
+          <a:xfrm>
+            <a:off x="8366760" y="3858768"/>
+            <a:ext cx="2962656" cy="457200"/>
+          </a:xfrm>
+          <a:prstGeom prst="rect">
+            <a:avLst/>
+          </a:prstGeom>
+          <a:noFill/>
+        </p:spPr>
+        <p:txBody>
+          <a:bodyPr wrap="square" anchor="ctr" lIns="127000" rIns="76200" tIns="25400" bIns="25400">
+            <a:spAutoFit/>
+          </a:bodyPr>
+          <a:lstStyle/>
+          <a:p>
+            <a:pPr>
+              <a:lnSpc>
+                <a:spcPct val="104000"/>
+              </a:lnSpc>
+            </a:pPr>
+            <a:r>
+              <a:rPr sz="1050" b="0">
+                <a:solidFill>
+                  <a:srgbClr val="C6BAEA"/>
+                </a:solidFill>
+                <a:latin typeface="Microsoft YaHei"/>
+              </a:rPr>
+              <a:t>1 月租金/成交（约 30–50 万）</a:t>
+            </a:r>
+          </a:p>
+        </p:txBody>
+      </p:sp>
+      <p:sp>
+        <p:nvSpPr>
+          <p:cNvPr id="48" name="Rectangle 47"/>
+          <p:cNvSpPr/>
+          <p:nvPr/>
+        </p:nvSpPr>
+        <p:spPr>
+          <a:xfrm>
+            <a:off x="6391656" y="4306443"/>
+            <a:ext cx="4937760" cy="9525"/>
+          </a:xfrm>
+          <a:prstGeom prst="rect">
+            <a:avLst/>
+          </a:prstGeom>
+          <a:solidFill>
+            <a:srgbClr val="4A3C7C"/>
+          </a:solidFill>
+          <a:ln>
+            <a:noFill/>
+          </a:ln>
+          <a:effectLst/>
+        </p:spPr>
+        <p:style>
+          <a:lnRef idx="1">
+            <a:schemeClr val="accent1"/>
+          </a:lnRef>
+          <a:fillRef idx="3">
+            <a:schemeClr val="accent1"/>
+          </a:fillRef>
+          <a:effectRef idx="2">
+            <a:schemeClr val="accent1"/>
+          </a:effectRef>
+          <a:fontRef idx="minor">
+            <a:schemeClr val="lt1"/>
+          </a:fontRef>
+        </p:style>
+        <p:txBody>
+          <a:bodyPr rtlCol="0" anchor="ctr"/>
+          <a:lstStyle/>
+          <a:p>
+            <a:pPr algn="ctr"/>
+          </a:p>
+        </p:txBody>
+      </p:sp>
+      <p:sp>
+        <p:nvSpPr>
+          <p:cNvPr id="49" name="TextBox 48"/>
+          <p:cNvSpPr txBox="1"/>
+          <p:nvPr/>
+        </p:nvSpPr>
+        <p:spPr>
+          <a:xfrm>
+            <a:off x="6391656" y="4315968"/>
+            <a:ext cx="1975104" cy="457200"/>
+          </a:xfrm>
+          <a:prstGeom prst="rect">
+            <a:avLst/>
+          </a:prstGeom>
+          <a:noFill/>
+        </p:spPr>
+        <p:txBody>
+          <a:bodyPr wrap="square" anchor="ctr" lIns="127000" rIns="76200" tIns="25400" bIns="25400">
+            <a:spAutoFit/>
+          </a:bodyPr>
+          <a:lstStyle/>
+          <a:p>
+            <a:pPr>
+              <a:lnSpc>
+                <a:spcPct val="104000"/>
+              </a:lnSpc>
+            </a:pPr>
+            <a:r>
+              <a:rPr sz="1050" b="1">
+                <a:solidFill>
+                  <a:srgbClr val="F5F1FF"/>
+                </a:solidFill>
+                <a:latin typeface="Microsoft YaHei"/>
+              </a:rPr>
+              <a:t>增值 + 出海分成</a:t>
+            </a:r>
+          </a:p>
+        </p:txBody>
+      </p:sp>
+      <p:sp>
+        <p:nvSpPr>
+          <p:cNvPr id="50" name="TextBox 49"/>
+          <p:cNvSpPr txBox="1"/>
+          <p:nvPr/>
+        </p:nvSpPr>
+        <p:spPr>
+          <a:xfrm>
+            <a:off x="8366760" y="4315968"/>
+            <a:ext cx="2962656" cy="457200"/>
+          </a:xfrm>
+          <a:prstGeom prst="rect">
+            <a:avLst/>
+          </a:prstGeom>
+          <a:noFill/>
+        </p:spPr>
+        <p:txBody>
+          <a:bodyPr wrap="square" anchor="ctr" lIns="127000" rIns="76200" tIns="25400" bIns="25400">
+            <a:spAutoFit/>
+          </a:bodyPr>
+          <a:lstStyle/>
+          <a:p>
+            <a:pPr>
+              <a:lnSpc>
+                <a:spcPct val="104000"/>
+              </a:lnSpc>
+            </a:pPr>
+            <a:r>
+              <a:rPr sz="1050" b="0">
+                <a:solidFill>
+                  <a:srgbClr val="C6BAEA"/>
+                </a:solidFill>
+                <a:latin typeface="Microsoft YaHei"/>
+              </a:rPr>
+              <a:t>约 150–450 万（联合公司）</a:t>
+            </a:r>
+          </a:p>
+        </p:txBody>
+      </p:sp>
+      <p:sp>
+        <p:nvSpPr>
+          <p:cNvPr id="51" name="Rectangle 50"/>
+          <p:cNvSpPr/>
+          <p:nvPr/>
+        </p:nvSpPr>
+        <p:spPr>
+          <a:xfrm>
+            <a:off x="6391656" y="4763643"/>
+            <a:ext cx="4937760" cy="9525"/>
+          </a:xfrm>
+          <a:prstGeom prst="rect">
+            <a:avLst/>
+          </a:prstGeom>
+          <a:solidFill>
+            <a:srgbClr val="4A3C7C"/>
+          </a:solidFill>
+          <a:ln>
+            <a:noFill/>
+          </a:ln>
+          <a:effectLst/>
+        </p:spPr>
+        <p:style>
+          <a:lnRef idx="1">
+            <a:schemeClr val="accent1"/>
+          </a:lnRef>
+          <a:fillRef idx="3">
+            <a:schemeClr val="accent1"/>
+          </a:fillRef>
+          <a:effectRef idx="2">
+            <a:schemeClr val="accent1"/>
+          </a:effectRef>
+          <a:fontRef idx="minor">
+            <a:schemeClr val="lt1"/>
+          </a:fontRef>
+        </p:style>
+        <p:txBody>
+          <a:bodyPr rtlCol="0" anchor="ctr"/>
+          <a:lstStyle/>
+          <a:p>
+            <a:pPr algn="ctr"/>
+          </a:p>
+        </p:txBody>
+      </p:sp>
+      <p:sp>
+        <p:nvSpPr>
+          <p:cNvPr id="52" name="Rectangle 51"/>
+          <p:cNvSpPr/>
+          <p:nvPr/>
+        </p:nvSpPr>
+        <p:spPr>
+          <a:xfrm>
+            <a:off x="6391656" y="4773168"/>
+            <a:ext cx="4937760" cy="457200"/>
+          </a:xfrm>
+          <a:prstGeom prst="rect">
+            <a:avLst/>
+          </a:prstGeom>
+          <a:solidFill>
+            <a:srgbClr val="221844"/>
+          </a:solidFill>
+          <a:ln>
+            <a:noFill/>
+          </a:ln>
+          <a:effectLst/>
+        </p:spPr>
+        <p:style>
+          <a:lnRef idx="1">
+            <a:schemeClr val="accent1"/>
+          </a:lnRef>
+          <a:fillRef idx="3">
+            <a:schemeClr val="accent1"/>
+          </a:fillRef>
+          <a:effectRef idx="2">
+            <a:schemeClr val="accent1"/>
+          </a:effectRef>
+          <a:fontRef idx="minor">
+            <a:schemeClr val="lt1"/>
+          </a:fontRef>
+        </p:style>
+        <p:txBody>
+          <a:bodyPr rtlCol="0" anchor="ctr"/>
+          <a:lstStyle/>
+          <a:p>
+            <a:pPr algn="ctr"/>
+          </a:p>
+        </p:txBody>
+      </p:sp>
+      <p:sp>
+        <p:nvSpPr>
+          <p:cNvPr id="53" name="TextBox 52"/>
+          <p:cNvSpPr txBox="1"/>
+          <p:nvPr/>
+        </p:nvSpPr>
+        <p:spPr>
+          <a:xfrm>
+            <a:off x="6391656" y="4773168"/>
+            <a:ext cx="1975104" cy="457200"/>
+          </a:xfrm>
+          <a:prstGeom prst="rect">
+            <a:avLst/>
+          </a:prstGeom>
+          <a:noFill/>
+        </p:spPr>
+        <p:txBody>
+          <a:bodyPr wrap="square" anchor="ctr" lIns="127000" rIns="76200" tIns="25400" bIns="25400">
+            <a:spAutoFit/>
+          </a:bodyPr>
+          <a:lstStyle/>
+          <a:p>
+            <a:pPr>
+              <a:lnSpc>
+                <a:spcPct val="104000"/>
+              </a:lnSpc>
+            </a:pPr>
+            <a:r>
+              <a:rPr sz="1050" b="1">
+                <a:solidFill>
+                  <a:srgbClr val="F5F1FF"/>
+                </a:solidFill>
+                <a:latin typeface="Microsoft YaHei"/>
+              </a:rPr>
+              <a:t>经营性 + 补贴</a:t>
+            </a:r>
+          </a:p>
+        </p:txBody>
+      </p:sp>
+      <p:sp>
+        <p:nvSpPr>
+          <p:cNvPr id="54" name="TextBox 53"/>
+          <p:cNvSpPr txBox="1"/>
+          <p:nvPr/>
+        </p:nvSpPr>
+        <p:spPr>
+          <a:xfrm>
+            <a:off x="8366760" y="4773168"/>
+            <a:ext cx="2962656" cy="457200"/>
+          </a:xfrm>
+          <a:prstGeom prst="rect">
+            <a:avLst/>
+          </a:prstGeom>
+          <a:noFill/>
+        </p:spPr>
+        <p:txBody>
+          <a:bodyPr wrap="square" anchor="ctr" lIns="127000" rIns="76200" tIns="25400" bIns="25400">
+            <a:spAutoFit/>
+          </a:bodyPr>
+          <a:lstStyle/>
+          <a:p>
+            <a:pPr>
+              <a:lnSpc>
+                <a:spcPct val="104000"/>
+              </a:lnSpc>
+            </a:pPr>
+            <a:r>
+              <a:rPr sz="1050" b="0">
+                <a:solidFill>
+                  <a:srgbClr val="C6BAEA"/>
+                </a:solidFill>
+                <a:latin typeface="Microsoft YaHei"/>
+              </a:rPr>
+              <a:t>约 50–100 万（门票/培训/空间 + 载体奖励）</a:t>
+            </a:r>
+          </a:p>
+        </p:txBody>
+      </p:sp>
+      <p:sp>
+        <p:nvSpPr>
+          <p:cNvPr id="55" name="Rectangle 54"/>
+          <p:cNvSpPr/>
+          <p:nvPr/>
+        </p:nvSpPr>
+        <p:spPr>
+          <a:xfrm>
+            <a:off x="6391656" y="5220843"/>
+            <a:ext cx="4937760" cy="9525"/>
+          </a:xfrm>
+          <a:prstGeom prst="rect">
+            <a:avLst/>
+          </a:prstGeom>
+          <a:solidFill>
+            <a:srgbClr val="4A3C7C"/>
+          </a:solidFill>
+          <a:ln>
+            <a:noFill/>
+          </a:ln>
+          <a:effectLst/>
+        </p:spPr>
+        <p:style>
+          <a:lnRef idx="1">
+            <a:schemeClr val="accent1"/>
+          </a:lnRef>
+          <a:fillRef idx="3">
+            <a:schemeClr val="accent1"/>
+          </a:fillRef>
+          <a:effectRef idx="2">
+            <a:schemeClr val="accent1"/>
+          </a:effectRef>
+          <a:fontRef idx="minor">
+            <a:schemeClr val="lt1"/>
+          </a:fontRef>
+        </p:style>
+        <p:txBody>
+          <a:bodyPr rtlCol="0" anchor="ctr"/>
+          <a:lstStyle/>
+          <a:p>
+            <a:pPr algn="ctr"/>
+          </a:p>
+        </p:txBody>
+      </p:sp>
+      <p:sp>
+        <p:nvSpPr>
+          <p:cNvPr id="56" name="Rectangle 55"/>
+          <p:cNvSpPr/>
+          <p:nvPr/>
+        </p:nvSpPr>
+        <p:spPr>
+          <a:xfrm>
+            <a:off x="6391656" y="3017520"/>
+            <a:ext cx="31750" cy="2212848"/>
+          </a:xfrm>
+          <a:prstGeom prst="rect">
+            <a:avLst/>
+          </a:prstGeom>
+          <a:solidFill>
+            <a:srgbClr val="E9C27C"/>
+          </a:solidFill>
+          <a:ln>
+            <a:noFill/>
+          </a:ln>
+          <a:effectLst/>
+        </p:spPr>
+        <p:style>
+          <a:lnRef idx="1">
+            <a:schemeClr val="accent1"/>
+          </a:lnRef>
+          <a:fillRef idx="3">
+            <a:schemeClr val="accent1"/>
+          </a:fillRef>
+          <a:effectRef idx="2">
+            <a:schemeClr val="accent1"/>
+          </a:effectRef>
+          <a:fontRef idx="minor">
+            <a:schemeClr val="lt1"/>
+          </a:fontRef>
+        </p:style>
+        <p:txBody>
+          <a:bodyPr rtlCol="0" anchor="ctr"/>
+          <a:lstStyle/>
+          <a:p>
+            <a:pPr algn="ctr"/>
+          </a:p>
+        </p:txBody>
+      </p:sp>
+      <p:sp>
+        <p:nvSpPr>
+          <p:cNvPr id="57" name="TextBox 56"/>
+          <p:cNvSpPr txBox="1"/>
+          <p:nvPr/>
+        </p:nvSpPr>
+        <p:spPr>
+          <a:xfrm>
+            <a:off x="777240" y="5943600"/>
+            <a:ext cx="10607040" cy="274320"/>
+          </a:xfrm>
+          <a:prstGeom prst="rect">
+            <a:avLst/>
+          </a:prstGeom>
+          <a:noFill/>
+        </p:spPr>
+        <p:txBody>
+          <a:bodyPr wrap="square" anchor="t" lIns="25400" rIns="25400" tIns="12700" bIns="12700">
+            <a:spAutoFit/>
+          </a:bodyPr>
+          <a:lstStyle/>
+          <a:p>
+            <a:pPr algn="l">
+              <a:lnSpc>
+                <a:spcPct val="100000"/>
+              </a:lnSpc>
+            </a:pPr>
+            <a:r>
+              <a:rPr sz="950" b="0">
+                <a:solidFill>
+                  <a:srgbClr val="9486C4"/>
+                </a:solidFill>
+                <a:latin typeface="Microsoft YaHei"/>
+              </a:rPr>
+              <a:t>＊示意测算，用于沟通商业空间；租金/去化/分成以物业条件、签约与执行节奏为准。运营平台稳定期年收入区间约 380–740 万。</a:t>
+            </a:r>
+          </a:p>
+        </p:txBody>
+      </p:sp>
+    </p:spTree>
+  </p:cSld>
+  <p:clrMapOvr>
+    <a:masterClrMapping/>
+  </p:clrMapOvr>
+</p:sld>
+</file>
+
+<file path=ppt/slides/slide41.xml><?xml version="1.0" encoding="utf-8"?>
+<p:sld xmlns:a="http://schemas.openxmlformats.org/drawingml/2006/main" xmlns:p="http://schemas.openxmlformats.org/presentationml/2006/main" xmlns:r="http://schemas.openxmlformats.org/officeDocument/2006/relationships">
+  <p:cSld>
+    <p:spTree>
+      <p:nvGrpSpPr>
+        <p:cNvPr id="1" name=""/>
+        <p:cNvGrpSpPr/>
+        <p:nvPr/>
+      </p:nvGrpSpPr>
+      <p:grpSpPr/>
+      <p:sp>
+        <p:nvSpPr>
+          <p:cNvPr id="2" name="Rectangle 1"/>
+          <p:cNvSpPr/>
+          <p:nvPr/>
+        </p:nvSpPr>
+        <p:spPr>
+          <a:xfrm>
+            <a:off x="0" y="0"/>
+            <a:ext cx="12191695" cy="6858000"/>
+          </a:xfrm>
+          <a:prstGeom prst="rect">
+            <a:avLst/>
+          </a:prstGeom>
+          <a:gradFill>
+            <a:gsLst>
+              <a:gs pos="0">
+                <a:srgbClr val="1A1140"/>
+              </a:gs>
+              <a:gs pos="55000">
+                <a:srgbClr val="3A206E"/>
+              </a:gs>
+              <a:gs pos="100000">
+                <a:srgbClr val="1A1140"/>
+              </a:gs>
+            </a:gsLst>
+            <a:lin ang="7200000" scaled="1"/>
+          </a:gradFill>
+          <a:ln>
+            <a:noFill/>
+          </a:ln>
+          <a:effectLst/>
+        </p:spPr>
+        <p:style>
+          <a:lnRef idx="1">
+            <a:schemeClr val="accent1"/>
+          </a:lnRef>
+          <a:fillRef idx="3">
+            <a:schemeClr val="accent1"/>
+          </a:fillRef>
+          <a:effectRef idx="2">
+            <a:schemeClr val="accent1"/>
+          </a:effectRef>
+          <a:fontRef idx="minor">
+            <a:schemeClr val="lt1"/>
+          </a:fontRef>
+        </p:style>
+        <p:txBody>
+          <a:bodyPr rtlCol="0" anchor="ctr"/>
+          <a:lstStyle/>
+          <a:p>
+            <a:pPr algn="ctr"/>
+          </a:p>
+        </p:txBody>
+      </p:sp>
+      <p:sp>
+        <p:nvSpPr>
+          <p:cNvPr id="3" name="Rectangle 2"/>
+          <p:cNvSpPr/>
+          <p:nvPr/>
+        </p:nvSpPr>
+        <p:spPr>
+          <a:xfrm>
+            <a:off x="777240" y="566928"/>
+            <a:ext cx="54864" cy="786384"/>
+          </a:xfrm>
+          <a:prstGeom prst="rect">
+            <a:avLst/>
+          </a:prstGeom>
+          <a:solidFill>
+            <a:srgbClr val="E9C27C"/>
+          </a:solidFill>
+          <a:ln>
+            <a:noFill/>
+          </a:ln>
+          <a:effectLst/>
+        </p:spPr>
+        <p:style>
+          <a:lnRef idx="1">
+            <a:schemeClr val="accent1"/>
+          </a:lnRef>
+          <a:fillRef idx="3">
+            <a:schemeClr val="accent1"/>
+          </a:fillRef>
+          <a:effectRef idx="2">
+            <a:schemeClr val="accent1"/>
+          </a:effectRef>
+          <a:fontRef idx="minor">
+            <a:schemeClr val="lt1"/>
+          </a:fontRef>
+        </p:style>
+        <p:txBody>
+          <a:bodyPr rtlCol="0" anchor="ctr"/>
+          <a:lstStyle/>
+          <a:p>
+            <a:pPr algn="ctr"/>
+          </a:p>
+        </p:txBody>
+      </p:sp>
+      <p:sp>
+        <p:nvSpPr>
+          <p:cNvPr id="4" name="TextBox 3"/>
+          <p:cNvSpPr txBox="1"/>
+          <p:nvPr/>
+        </p:nvSpPr>
+        <p:spPr>
+          <a:xfrm>
+            <a:off x="978408" y="548640"/>
+            <a:ext cx="8229600" cy="310896"/>
+          </a:xfrm>
+          <a:prstGeom prst="rect">
+            <a:avLst/>
+          </a:prstGeom>
+          <a:noFill/>
+        </p:spPr>
+        <p:txBody>
+          <a:bodyPr wrap="square" anchor="t" lIns="25400" rIns="25400" tIns="12700" bIns="12700">
+            <a:spAutoFit/>
+          </a:bodyPr>
+          <a:lstStyle/>
+          <a:p>
+            <a:pPr algn="l">
+              <a:lnSpc>
+                <a:spcPct val="100000"/>
+              </a:lnSpc>
+            </a:pPr>
+            <a:r>
+              <a:rPr sz="1250" b="1" spc="200">
+                <a:solidFill>
+                  <a:srgbClr val="E9C27C"/>
+                </a:solidFill>
+                <a:latin typeface="Arial"/>
+              </a:rPr>
+              <a:t>REVENUE MODEL</a:t>
+            </a:r>
+          </a:p>
+        </p:txBody>
+      </p:sp>
+      <p:sp>
+        <p:nvSpPr>
+          <p:cNvPr id="5" name="TextBox 4"/>
+          <p:cNvSpPr txBox="1"/>
+          <p:nvPr/>
+        </p:nvSpPr>
+        <p:spPr>
+          <a:xfrm>
+            <a:off x="978408" y="841248"/>
+            <a:ext cx="9509760" cy="603504"/>
+          </a:xfrm>
+          <a:prstGeom prst="rect">
+            <a:avLst/>
+          </a:prstGeom>
+          <a:noFill/>
+        </p:spPr>
+        <p:txBody>
+          <a:bodyPr wrap="square" anchor="t" lIns="25400" rIns="25400" tIns="12700" bIns="12700">
+            <a:spAutoFit/>
+          </a:bodyPr>
+          <a:lstStyle/>
+          <a:p>
+            <a:pPr algn="l">
+              <a:lnSpc>
+                <a:spcPct val="100000"/>
+              </a:lnSpc>
+            </a:pPr>
+            <a:r>
+              <a:rPr sz="2600" b="1">
+                <a:solidFill>
+                  <a:srgbClr val="F5F1FF"/>
+                </a:solidFill>
+                <a:latin typeface="Microsoft YaHei"/>
+              </a:rPr>
+              <a:t>营收逻辑 · 成本结构与盈亏测算</a:t>
+            </a:r>
+          </a:p>
+        </p:txBody>
+      </p:sp>
+      <p:sp>
+        <p:nvSpPr>
+          <p:cNvPr id="6" name="TextBox 5"/>
+          <p:cNvSpPr txBox="1"/>
+          <p:nvPr/>
+        </p:nvSpPr>
+        <p:spPr>
+          <a:xfrm>
+            <a:off x="10332720" y="457200"/>
+            <a:ext cx="1417320" cy="822960"/>
+          </a:xfrm>
+          <a:prstGeom prst="rect">
+            <a:avLst/>
+          </a:prstGeom>
+          <a:noFill/>
+        </p:spPr>
+        <p:txBody>
+          <a:bodyPr wrap="square" anchor="t" lIns="25400" rIns="25400" tIns="12700" bIns="12700">
+            <a:spAutoFit/>
+          </a:bodyPr>
+          <a:lstStyle/>
+          <a:p>
+            <a:pPr algn="r">
+              <a:lnSpc>
+                <a:spcPct val="100000"/>
+              </a:lnSpc>
+            </a:pPr>
+            <a:r>
+              <a:rPr sz="4000" b="1">
+                <a:solidFill>
+                  <a:srgbClr val="E9C27C"/>
+                </a:solidFill>
+                <a:latin typeface="Arial"/>
+              </a:rPr>
+              <a:t>08</a:t>
+            </a:r>
+          </a:p>
+        </p:txBody>
+      </p:sp>
+      <p:sp>
+        <p:nvSpPr>
+          <p:cNvPr id="7" name="Rectangle 6"/>
+          <p:cNvSpPr/>
+          <p:nvPr/>
+        </p:nvSpPr>
+        <p:spPr>
+          <a:xfrm>
+            <a:off x="10561320" y="1207008"/>
+            <a:ext cx="1170432" cy="25400"/>
+          </a:xfrm>
+          <a:prstGeom prst="rect">
+            <a:avLst/>
+          </a:prstGeom>
+          <a:solidFill>
+            <a:srgbClr val="4A3C7C"/>
+          </a:solidFill>
+          <a:ln>
+            <a:noFill/>
+          </a:ln>
+          <a:effectLst/>
+        </p:spPr>
+        <p:style>
+          <a:lnRef idx="1">
+            <a:schemeClr val="accent1"/>
+          </a:lnRef>
+          <a:fillRef idx="3">
+            <a:schemeClr val="accent1"/>
+          </a:fillRef>
+          <a:effectRef idx="2">
+            <a:schemeClr val="accent1"/>
+          </a:effectRef>
+          <a:fontRef idx="minor">
+            <a:schemeClr val="lt1"/>
+          </a:fontRef>
+        </p:style>
+        <p:txBody>
+          <a:bodyPr rtlCol="0" anchor="ctr"/>
+          <a:lstStyle/>
+          <a:p>
+            <a:pPr algn="ctr"/>
+          </a:p>
+        </p:txBody>
+      </p:sp>
+      <p:sp>
+        <p:nvSpPr>
+          <p:cNvPr id="8" name="Rectangle 7"/>
+          <p:cNvSpPr/>
+          <p:nvPr/>
+        </p:nvSpPr>
+        <p:spPr>
+          <a:xfrm>
+            <a:off x="777240" y="6327648"/>
+            <a:ext cx="10634472" cy="12700"/>
+          </a:xfrm>
+          <a:prstGeom prst="rect">
+            <a:avLst/>
+          </a:prstGeom>
+          <a:solidFill>
+            <a:srgbClr val="4A3C7C"/>
+          </a:solidFill>
+          <a:ln>
+            <a:noFill/>
+          </a:ln>
+          <a:effectLst/>
+        </p:spPr>
+        <p:style>
+          <a:lnRef idx="1">
+            <a:schemeClr val="accent1"/>
+          </a:lnRef>
+          <a:fillRef idx="3">
+            <a:schemeClr val="accent1"/>
+          </a:fillRef>
+          <a:effectRef idx="2">
+            <a:schemeClr val="accent1"/>
+          </a:effectRef>
+          <a:fontRef idx="minor">
+            <a:schemeClr val="lt1"/>
+          </a:fontRef>
+        </p:style>
+        <p:txBody>
+          <a:bodyPr rtlCol="0" anchor="ctr"/>
+          <a:lstStyle/>
+          <a:p>
+            <a:pPr algn="ctr"/>
+          </a:p>
+        </p:txBody>
+      </p:sp>
+      <p:sp>
+        <p:nvSpPr>
+          <p:cNvPr id="9" name="TextBox 8"/>
+          <p:cNvSpPr txBox="1"/>
+          <p:nvPr/>
+        </p:nvSpPr>
+        <p:spPr>
+          <a:xfrm>
+            <a:off x="777240" y="6400800"/>
+            <a:ext cx="8229600" cy="292608"/>
+          </a:xfrm>
+          <a:prstGeom prst="rect">
+            <a:avLst/>
+          </a:prstGeom>
+          <a:noFill/>
+        </p:spPr>
+        <p:txBody>
+          <a:bodyPr wrap="square" anchor="t" lIns="25400" rIns="25400" tIns="12700" bIns="12700">
+            <a:spAutoFit/>
+          </a:bodyPr>
+          <a:lstStyle/>
+          <a:p>
+            <a:pPr algn="l">
+              <a:lnSpc>
+                <a:spcPct val="100000"/>
+              </a:lnSpc>
+            </a:pPr>
+            <a:r>
+              <a:rPr sz="950" b="0">
+                <a:solidFill>
+                  <a:srgbClr val="9486C4"/>
+                </a:solidFill>
+                <a:latin typeface="Microsoft YaHei"/>
+              </a:rPr>
+              <a:t>上海创智汇 </a:t>
+            </a:r>
+            <a:r>
+              <a:rPr sz="950" b="0">
+                <a:solidFill>
+                  <a:srgbClr val="9486C4"/>
+                </a:solidFill>
+                <a:latin typeface="Arial"/>
+              </a:rPr>
+              <a:t>CHUANGZHIHUI</a:t>
+            </a:r>
+            <a:r>
+              <a:rPr sz="950" b="0">
+                <a:solidFill>
+                  <a:srgbClr val="9486C4"/>
+                </a:solidFill>
+                <a:latin typeface="Microsoft YaHei"/>
+              </a:rPr>
+              <a:t>  ·  AI+数字内容无界共创港 · 6600㎡ 谈判集中汇报</a:t>
+            </a:r>
+          </a:p>
+        </p:txBody>
+      </p:sp>
+      <p:sp>
+        <p:nvSpPr>
+          <p:cNvPr id="10" name="TextBox 9"/>
+          <p:cNvSpPr txBox="1"/>
+          <p:nvPr/>
+        </p:nvSpPr>
+        <p:spPr>
+          <a:xfrm>
+            <a:off x="10241280" y="6400800"/>
+            <a:ext cx="1490472" cy="292608"/>
+          </a:xfrm>
+          <a:prstGeom prst="rect">
+            <a:avLst/>
+          </a:prstGeom>
+          <a:noFill/>
+        </p:spPr>
+        <p:txBody>
+          <a:bodyPr wrap="square" anchor="t" lIns="25400" rIns="25400" tIns="12700" bIns="12700">
+            <a:spAutoFit/>
+          </a:bodyPr>
+          <a:lstStyle/>
+          <a:p>
+            <a:pPr algn="r">
+              <a:lnSpc>
+                <a:spcPct val="100000"/>
+              </a:lnSpc>
+            </a:pPr>
+            <a:r>
+              <a:rPr sz="1050" b="1">
+                <a:solidFill>
+                  <a:srgbClr val="E9C27C"/>
+                </a:solidFill>
+                <a:latin typeface="Arial"/>
+              </a:rPr>
+              <a:t>41</a:t>
+            </a:r>
+            <a:r>
+              <a:rPr sz="1050" b="0">
+                <a:solidFill>
+                  <a:srgbClr val="9486C4"/>
+                </a:solidFill>
+                <a:latin typeface="Arial"/>
+              </a:rPr>
+              <a:t> / 46</a:t>
+            </a:r>
+          </a:p>
+        </p:txBody>
+      </p:sp>
+      <p:sp>
+        <p:nvSpPr>
+          <p:cNvPr id="11" name="Rounded Rectangle 10"/>
+          <p:cNvSpPr/>
+          <p:nvPr/>
+        </p:nvSpPr>
+        <p:spPr>
+          <a:xfrm>
+            <a:off x="777240" y="1554480"/>
+            <a:ext cx="5230368" cy="3246120"/>
+          </a:xfrm>
+          <a:prstGeom prst="roundRect">
+            <a:avLst/>
+          </a:prstGeom>
+          <a:ln w="12700">
+            <a:solidFill>
+              <a:srgbClr val="4A3C7C"/>
+            </a:solidFill>
+          </a:ln>
+          <a:effectLst/>
+          <a:gradFill>
+            <a:gsLst>
+              <a:gs pos="0">
+                <a:srgbClr val="2A1E55"/>
+              </a:gs>
+              <a:gs pos="100000">
+                <a:srgbClr val="1E1542"/>
+              </a:gs>
+            </a:gsLst>
+            <a:lin ang="7200000" scaled="1"/>
+          </a:gradFill>
+        </p:spPr>
+        <p:style>
+          <a:lnRef idx="1">
+            <a:schemeClr val="accent1"/>
+          </a:lnRef>
+          <a:fillRef idx="3">
+            <a:schemeClr val="accent1"/>
+          </a:fillRef>
+          <a:effectRef idx="2">
+            <a:schemeClr val="accent1"/>
+          </a:effectRef>
+          <a:fontRef idx="minor">
+            <a:schemeClr val="lt1"/>
+          </a:fontRef>
+        </p:style>
+        <p:txBody>
+          <a:bodyPr rtlCol="0" anchor="ctr"/>
+          <a:lstStyle/>
+          <a:p>
+            <a:pPr algn="ctr"/>
+          </a:p>
+        </p:txBody>
+      </p:sp>
+      <p:sp>
+        <p:nvSpPr>
+          <p:cNvPr id="12" name="Rectangle 11"/>
+          <p:cNvSpPr/>
+          <p:nvPr/>
+        </p:nvSpPr>
+        <p:spPr>
+          <a:xfrm>
+            <a:off x="777240" y="1554480"/>
+            <a:ext cx="64008" cy="3246120"/>
+          </a:xfrm>
+          <a:prstGeom prst="rect">
+            <a:avLst/>
+          </a:prstGeom>
+          <a:solidFill>
+            <a:srgbClr val="F58BB8"/>
+          </a:solidFill>
+          <a:ln>
+            <a:noFill/>
+          </a:ln>
+          <a:effectLst/>
+        </p:spPr>
+        <p:style>
+          <a:lnRef idx="1">
+            <a:schemeClr val="accent1"/>
+          </a:lnRef>
+          <a:fillRef idx="3">
+            <a:schemeClr val="accent1"/>
+          </a:fillRef>
+          <a:effectRef idx="2">
+            <a:schemeClr val="accent1"/>
+          </a:effectRef>
+          <a:fontRef idx="minor">
+            <a:schemeClr val="lt1"/>
+          </a:fontRef>
+        </p:style>
+        <p:txBody>
+          <a:bodyPr rtlCol="0" anchor="ctr"/>
+          <a:lstStyle/>
+          <a:p>
+            <a:pPr algn="ctr"/>
+          </a:p>
+        </p:txBody>
+      </p:sp>
+      <p:sp>
+        <p:nvSpPr>
+          <p:cNvPr id="13" name="TextBox 12"/>
+          <p:cNvSpPr txBox="1"/>
+          <p:nvPr/>
+        </p:nvSpPr>
+        <p:spPr>
+          <a:xfrm>
+            <a:off x="987552" y="1682496"/>
+            <a:ext cx="4937760" cy="365760"/>
+          </a:xfrm>
+          <a:prstGeom prst="rect">
+            <a:avLst/>
+          </a:prstGeom>
+          <a:noFill/>
+        </p:spPr>
+        <p:txBody>
+          <a:bodyPr wrap="square" anchor="t" lIns="25400" rIns="25400" tIns="12700" bIns="12700">
+            <a:spAutoFit/>
+          </a:bodyPr>
+          <a:lstStyle/>
+          <a:p>
+            <a:pPr algn="l">
+              <a:lnSpc>
+                <a:spcPct val="100000"/>
+              </a:lnSpc>
+            </a:pPr>
+            <a:r>
+              <a:rPr sz="1300" b="1">
+                <a:solidFill>
+                  <a:srgbClr val="F58BB8"/>
+                </a:solidFill>
+                <a:latin typeface="Microsoft YaHei"/>
+              </a:rPr>
+              <a:t>成本结构（运营平台 · 年化）</a:t>
+            </a:r>
+          </a:p>
+        </p:txBody>
+      </p:sp>
+      <p:sp>
+        <p:nvSpPr>
+          <p:cNvPr id="14" name="Rectangle 13"/>
+          <p:cNvSpPr/>
+          <p:nvPr/>
+        </p:nvSpPr>
+        <p:spPr>
+          <a:xfrm>
+            <a:off x="941832" y="2139696"/>
+            <a:ext cx="4937760" cy="365760"/>
+          </a:xfrm>
+          <a:prstGeom prst="rect">
+            <a:avLst/>
+          </a:prstGeom>
+          <a:ln>
+            <a:noFill/>
+          </a:ln>
+          <a:effectLst/>
+          <a:gradFill>
+            <a:gsLst>
+              <a:gs pos="0">
+                <a:srgbClr val="36276C"/>
+              </a:gs>
+              <a:gs pos="100000">
+                <a:srgbClr val="2A1E55"/>
+              </a:gs>
+            </a:gsLst>
+            <a:lin ang="0" scaled="1"/>
+          </a:gradFill>
+        </p:spPr>
+        <p:style>
+          <a:lnRef idx="1">
+            <a:schemeClr val="accent1"/>
+          </a:lnRef>
+          <a:fillRef idx="3">
+            <a:schemeClr val="accent1"/>
+          </a:fillRef>
+          <a:effectRef idx="2">
+            <a:schemeClr val="accent1"/>
+          </a:effectRef>
+          <a:fontRef idx="minor">
+            <a:schemeClr val="lt1"/>
+          </a:fontRef>
+        </p:style>
+        <p:txBody>
+          <a:bodyPr rtlCol="0" anchor="ctr"/>
+          <a:lstStyle/>
+          <a:p>
+            <a:pPr algn="ctr"/>
+          </a:p>
+        </p:txBody>
+      </p:sp>
+      <p:sp>
+        <p:nvSpPr>
+          <p:cNvPr id="15" name="TextBox 14"/>
+          <p:cNvSpPr txBox="1"/>
+          <p:nvPr/>
+        </p:nvSpPr>
+        <p:spPr>
+          <a:xfrm>
+            <a:off x="941832" y="2139696"/>
+            <a:ext cx="3061411" cy="365760"/>
+          </a:xfrm>
+          <a:prstGeom prst="rect">
+            <a:avLst/>
+          </a:prstGeom>
+          <a:noFill/>
+        </p:spPr>
+        <p:txBody>
+          <a:bodyPr wrap="square" anchor="ctr" lIns="127000" rIns="76200" tIns="25400" bIns="25400">
+            <a:spAutoFit/>
+          </a:bodyPr>
+          <a:lstStyle/>
+          <a:p>
+            <a:pPr>
+              <a:lnSpc>
+                <a:spcPct val="104000"/>
+              </a:lnSpc>
+            </a:pPr>
+            <a:r>
+              <a:rPr sz="1250" b="1">
+                <a:solidFill>
+                  <a:srgbClr val="E9C27C"/>
+                </a:solidFill>
+                <a:latin typeface="Microsoft YaHei"/>
+              </a:rPr>
+              <a:t>成本科目</a:t>
+            </a:r>
+          </a:p>
+        </p:txBody>
+      </p:sp>
+      <p:sp>
+        <p:nvSpPr>
+          <p:cNvPr id="16" name="TextBox 15"/>
+          <p:cNvSpPr txBox="1"/>
+          <p:nvPr/>
+        </p:nvSpPr>
+        <p:spPr>
+          <a:xfrm>
+            <a:off x="4003243" y="2139696"/>
+            <a:ext cx="1876348" cy="365760"/>
+          </a:xfrm>
+          <a:prstGeom prst="rect">
+            <a:avLst/>
+          </a:prstGeom>
+          <a:noFill/>
+        </p:spPr>
+        <p:txBody>
+          <a:bodyPr wrap="square" anchor="ctr" lIns="127000" rIns="76200" tIns="25400" bIns="25400">
+            <a:spAutoFit/>
+          </a:bodyPr>
+          <a:lstStyle/>
+          <a:p>
+            <a:pPr>
+              <a:lnSpc>
+                <a:spcPct val="104000"/>
+              </a:lnSpc>
+            </a:pPr>
+            <a:r>
+              <a:rPr sz="1250" b="1">
+                <a:solidFill>
+                  <a:srgbClr val="E9C27C"/>
+                </a:solidFill>
+                <a:latin typeface="Microsoft YaHei"/>
+              </a:rPr>
+              <a:t>年化（示意）</a:t>
+            </a:r>
+          </a:p>
+        </p:txBody>
+      </p:sp>
+      <p:sp>
+        <p:nvSpPr>
+          <p:cNvPr id="17" name="Rectangle 16"/>
+          <p:cNvSpPr/>
+          <p:nvPr/>
+        </p:nvSpPr>
+        <p:spPr>
+          <a:xfrm>
+            <a:off x="941832" y="2495931"/>
+            <a:ext cx="4937760" cy="9525"/>
+          </a:xfrm>
+          <a:prstGeom prst="rect">
+            <a:avLst/>
+          </a:prstGeom>
+          <a:solidFill>
+            <a:srgbClr val="4A3C7C"/>
+          </a:solidFill>
+          <a:ln>
+            <a:noFill/>
+          </a:ln>
+          <a:effectLst/>
+        </p:spPr>
+        <p:style>
+          <a:lnRef idx="1">
+            <a:schemeClr val="accent1"/>
+          </a:lnRef>
+          <a:fillRef idx="3">
+            <a:schemeClr val="accent1"/>
+          </a:fillRef>
+          <a:effectRef idx="2">
+            <a:schemeClr val="accent1"/>
+          </a:effectRef>
+          <a:fontRef idx="minor">
+            <a:schemeClr val="lt1"/>
+          </a:fontRef>
+        </p:style>
+        <p:txBody>
+          <a:bodyPr rtlCol="0" anchor="ctr"/>
+          <a:lstStyle/>
+          <a:p>
+            <a:pPr algn="ctr"/>
+          </a:p>
+        </p:txBody>
+      </p:sp>
+      <p:sp>
+        <p:nvSpPr>
+          <p:cNvPr id="18" name="TextBox 17"/>
+          <p:cNvSpPr txBox="1"/>
+          <p:nvPr/>
+        </p:nvSpPr>
+        <p:spPr>
+          <a:xfrm>
+            <a:off x="941832" y="2505456"/>
+            <a:ext cx="3061411" cy="402336"/>
+          </a:xfrm>
+          <a:prstGeom prst="rect">
+            <a:avLst/>
+          </a:prstGeom>
+          <a:noFill/>
+        </p:spPr>
+        <p:txBody>
+          <a:bodyPr wrap="square" anchor="ctr" lIns="127000" rIns="76200" tIns="25400" bIns="25400">
+            <a:spAutoFit/>
+          </a:bodyPr>
+          <a:lstStyle/>
+          <a:p>
+            <a:pPr>
+              <a:lnSpc>
+                <a:spcPct val="104000"/>
+              </a:lnSpc>
+            </a:pPr>
+            <a:r>
+              <a:rPr sz="1000" b="1">
+                <a:solidFill>
+                  <a:srgbClr val="F5F1FF"/>
+                </a:solidFill>
+                <a:latin typeface="Microsoft YaHei"/>
+              </a:rPr>
+              <a:t>团队人力（在地 2 + 出海 1–3 + 兼职）</a:t>
+            </a:r>
+          </a:p>
+        </p:txBody>
+      </p:sp>
+      <p:sp>
+        <p:nvSpPr>
+          <p:cNvPr id="19" name="TextBox 18"/>
+          <p:cNvSpPr txBox="1"/>
+          <p:nvPr/>
+        </p:nvSpPr>
+        <p:spPr>
+          <a:xfrm>
+            <a:off x="4003243" y="2505456"/>
+            <a:ext cx="1876348" cy="402336"/>
+          </a:xfrm>
+          <a:prstGeom prst="rect">
+            <a:avLst/>
+          </a:prstGeom>
+          <a:noFill/>
+        </p:spPr>
+        <p:txBody>
+          <a:bodyPr wrap="square" anchor="ctr" lIns="127000" rIns="76200" tIns="25400" bIns="25400">
+            <a:spAutoFit/>
+          </a:bodyPr>
+          <a:lstStyle/>
+          <a:p>
+            <a:pPr>
+              <a:lnSpc>
+                <a:spcPct val="104000"/>
+              </a:lnSpc>
+            </a:pPr>
+            <a:r>
+              <a:rPr sz="1050" b="0">
+                <a:solidFill>
+                  <a:srgbClr val="C6BAEA"/>
+                </a:solidFill>
+                <a:latin typeface="Microsoft YaHei"/>
+              </a:rPr>
+              <a:t>100–180 万</a:t>
+            </a:r>
+          </a:p>
+        </p:txBody>
+      </p:sp>
+      <p:sp>
+        <p:nvSpPr>
+          <p:cNvPr id="20" name="Rectangle 19"/>
+          <p:cNvSpPr/>
+          <p:nvPr/>
+        </p:nvSpPr>
+        <p:spPr>
+          <a:xfrm>
+            <a:off x="941832" y="2898267"/>
+            <a:ext cx="4937760" cy="9525"/>
+          </a:xfrm>
+          <a:prstGeom prst="rect">
+            <a:avLst/>
+          </a:prstGeom>
+          <a:solidFill>
+            <a:srgbClr val="4A3C7C"/>
+          </a:solidFill>
+          <a:ln>
+            <a:noFill/>
+          </a:ln>
+          <a:effectLst/>
+        </p:spPr>
+        <p:style>
+          <a:lnRef idx="1">
+            <a:schemeClr val="accent1"/>
+          </a:lnRef>
+          <a:fillRef idx="3">
+            <a:schemeClr val="accent1"/>
+          </a:fillRef>
+          <a:effectRef idx="2">
+            <a:schemeClr val="accent1"/>
+          </a:effectRef>
+          <a:fontRef idx="minor">
+            <a:schemeClr val="lt1"/>
+          </a:fontRef>
+        </p:style>
+        <p:txBody>
+          <a:bodyPr rtlCol="0" anchor="ctr"/>
+          <a:lstStyle/>
+          <a:p>
+            <a:pPr algn="ctr"/>
+          </a:p>
+        </p:txBody>
+      </p:sp>
+      <p:sp>
+        <p:nvSpPr>
+          <p:cNvPr id="21" name="Rectangle 20"/>
+          <p:cNvSpPr/>
+          <p:nvPr/>
+        </p:nvSpPr>
+        <p:spPr>
+          <a:xfrm>
+            <a:off x="941832" y="2907792"/>
+            <a:ext cx="4937760" cy="402336"/>
+          </a:xfrm>
+          <a:prstGeom prst="rect">
+            <a:avLst/>
+          </a:prstGeom>
+          <a:solidFill>
+            <a:srgbClr val="221844"/>
+          </a:solidFill>
+          <a:ln>
+            <a:noFill/>
+          </a:ln>
+          <a:effectLst/>
+        </p:spPr>
+        <p:style>
+          <a:lnRef idx="1">
+            <a:schemeClr val="accent1"/>
+          </a:lnRef>
+          <a:fillRef idx="3">
+            <a:schemeClr val="accent1"/>
+          </a:fillRef>
+          <a:effectRef idx="2">
+            <a:schemeClr val="accent1"/>
+          </a:effectRef>
+          <a:fontRef idx="minor">
+            <a:schemeClr val="lt1"/>
+          </a:fontRef>
+        </p:style>
+        <p:txBody>
+          <a:bodyPr rtlCol="0" anchor="ctr"/>
+          <a:lstStyle/>
+          <a:p>
+            <a:pPr algn="ctr"/>
+          </a:p>
+        </p:txBody>
+      </p:sp>
+      <p:sp>
+        <p:nvSpPr>
+          <p:cNvPr id="22" name="TextBox 21"/>
+          <p:cNvSpPr txBox="1"/>
+          <p:nvPr/>
+        </p:nvSpPr>
+        <p:spPr>
+          <a:xfrm>
+            <a:off x="941832" y="2907792"/>
+            <a:ext cx="3061411" cy="402336"/>
+          </a:xfrm>
+          <a:prstGeom prst="rect">
+            <a:avLst/>
+          </a:prstGeom>
+          <a:noFill/>
+        </p:spPr>
+        <p:txBody>
+          <a:bodyPr wrap="square" anchor="ctr" lIns="127000" rIns="76200" tIns="25400" bIns="25400">
+            <a:spAutoFit/>
+          </a:bodyPr>
+          <a:lstStyle/>
+          <a:p>
+            <a:pPr>
+              <a:lnSpc>
+                <a:spcPct val="104000"/>
+              </a:lnSpc>
+            </a:pPr>
+            <a:r>
+              <a:rPr sz="1000" b="1">
+                <a:solidFill>
+                  <a:srgbClr val="F5F1FF"/>
+                </a:solidFill>
+                <a:latin typeface="Microsoft YaHei"/>
+              </a:rPr>
+              <a:t>活动执行（约 30 场）</a:t>
+            </a:r>
+          </a:p>
+        </p:txBody>
+      </p:sp>
+      <p:sp>
+        <p:nvSpPr>
+          <p:cNvPr id="23" name="TextBox 22"/>
+          <p:cNvSpPr txBox="1"/>
+          <p:nvPr/>
+        </p:nvSpPr>
+        <p:spPr>
+          <a:xfrm>
+            <a:off x="4003243" y="2907792"/>
+            <a:ext cx="1876348" cy="402336"/>
+          </a:xfrm>
+          <a:prstGeom prst="rect">
+            <a:avLst/>
+          </a:prstGeom>
+          <a:noFill/>
+        </p:spPr>
+        <p:txBody>
+          <a:bodyPr wrap="square" anchor="ctr" lIns="127000" rIns="76200" tIns="25400" bIns="25400">
+            <a:spAutoFit/>
+          </a:bodyPr>
+          <a:lstStyle/>
+          <a:p>
+            <a:pPr>
+              <a:lnSpc>
+                <a:spcPct val="104000"/>
+              </a:lnSpc>
+            </a:pPr>
+            <a:r>
+              <a:rPr sz="1050" b="0">
+                <a:solidFill>
+                  <a:srgbClr val="C6BAEA"/>
+                </a:solidFill>
+                <a:latin typeface="Microsoft YaHei"/>
+              </a:rPr>
+              <a:t>约 30 万</a:t>
+            </a:r>
+          </a:p>
+        </p:txBody>
+      </p:sp>
+      <p:sp>
+        <p:nvSpPr>
+          <p:cNvPr id="24" name="Rectangle 23"/>
+          <p:cNvSpPr/>
+          <p:nvPr/>
+        </p:nvSpPr>
+        <p:spPr>
+          <a:xfrm>
+            <a:off x="941832" y="3300603"/>
+            <a:ext cx="4937760" cy="9525"/>
+          </a:xfrm>
+          <a:prstGeom prst="rect">
+            <a:avLst/>
+          </a:prstGeom>
+          <a:solidFill>
+            <a:srgbClr val="4A3C7C"/>
+          </a:solidFill>
+          <a:ln>
+            <a:noFill/>
+          </a:ln>
+          <a:effectLst/>
+        </p:spPr>
+        <p:style>
+          <a:lnRef idx="1">
+            <a:schemeClr val="accent1"/>
+          </a:lnRef>
+          <a:fillRef idx="3">
+            <a:schemeClr val="accent1"/>
+          </a:fillRef>
+          <a:effectRef idx="2">
+            <a:schemeClr val="accent1"/>
+          </a:effectRef>
+          <a:fontRef idx="minor">
+            <a:schemeClr val="lt1"/>
+          </a:fontRef>
+        </p:style>
+        <p:txBody>
+          <a:bodyPr rtlCol="0" anchor="ctr"/>
+          <a:lstStyle/>
+          <a:p>
+            <a:pPr algn="ctr"/>
+          </a:p>
+        </p:txBody>
+      </p:sp>
+      <p:sp>
+        <p:nvSpPr>
+          <p:cNvPr id="25" name="TextBox 24"/>
+          <p:cNvSpPr txBox="1"/>
+          <p:nvPr/>
+        </p:nvSpPr>
+        <p:spPr>
+          <a:xfrm>
+            <a:off x="941832" y="3310128"/>
+            <a:ext cx="3061411" cy="402336"/>
+          </a:xfrm>
+          <a:prstGeom prst="rect">
+            <a:avLst/>
+          </a:prstGeom>
+          <a:noFill/>
+        </p:spPr>
+        <p:txBody>
+          <a:bodyPr wrap="square" anchor="ctr" lIns="127000" rIns="76200" tIns="25400" bIns="25400">
+            <a:spAutoFit/>
+          </a:bodyPr>
+          <a:lstStyle/>
+          <a:p>
+            <a:pPr>
+              <a:lnSpc>
+                <a:spcPct val="104000"/>
+              </a:lnSpc>
+            </a:pPr>
+            <a:r>
+              <a:rPr sz="1000" b="1">
+                <a:solidFill>
+                  <a:srgbClr val="F5F1FF"/>
+                </a:solidFill>
+                <a:latin typeface="Microsoft YaHei"/>
+              </a:rPr>
+              <a:t>媒体 + 网络投流</a:t>
+            </a:r>
+          </a:p>
+        </p:txBody>
+      </p:sp>
+      <p:sp>
+        <p:nvSpPr>
+          <p:cNvPr id="26" name="TextBox 25"/>
+          <p:cNvSpPr txBox="1"/>
+          <p:nvPr/>
+        </p:nvSpPr>
+        <p:spPr>
+          <a:xfrm>
+            <a:off x="4003243" y="3310128"/>
+            <a:ext cx="1876348" cy="402336"/>
+          </a:xfrm>
+          <a:prstGeom prst="rect">
+            <a:avLst/>
+          </a:prstGeom>
+          <a:noFill/>
+        </p:spPr>
+        <p:txBody>
+          <a:bodyPr wrap="square" anchor="ctr" lIns="127000" rIns="76200" tIns="25400" bIns="25400">
+            <a:spAutoFit/>
+          </a:bodyPr>
+          <a:lstStyle/>
+          <a:p>
+            <a:pPr>
+              <a:lnSpc>
+                <a:spcPct val="104000"/>
+              </a:lnSpc>
+            </a:pPr>
+            <a:r>
+              <a:rPr sz="1050" b="0">
+                <a:solidFill>
+                  <a:srgbClr val="C6BAEA"/>
+                </a:solidFill>
+                <a:latin typeface="Microsoft YaHei"/>
+              </a:rPr>
+              <a:t>约 10 万</a:t>
+            </a:r>
+          </a:p>
+        </p:txBody>
+      </p:sp>
+      <p:sp>
+        <p:nvSpPr>
+          <p:cNvPr id="27" name="Rectangle 26"/>
+          <p:cNvSpPr/>
+          <p:nvPr/>
+        </p:nvSpPr>
+        <p:spPr>
+          <a:xfrm>
+            <a:off x="941832" y="3702939"/>
+            <a:ext cx="4937760" cy="9525"/>
+          </a:xfrm>
+          <a:prstGeom prst="rect">
+            <a:avLst/>
+          </a:prstGeom>
+          <a:solidFill>
+            <a:srgbClr val="4A3C7C"/>
+          </a:solidFill>
+          <a:ln>
+            <a:noFill/>
+          </a:ln>
+          <a:effectLst/>
+        </p:spPr>
+        <p:style>
+          <a:lnRef idx="1">
+            <a:schemeClr val="accent1"/>
+          </a:lnRef>
+          <a:fillRef idx="3">
+            <a:schemeClr val="accent1"/>
+          </a:fillRef>
+          <a:effectRef idx="2">
+            <a:schemeClr val="accent1"/>
+          </a:effectRef>
+          <a:fontRef idx="minor">
+            <a:schemeClr val="lt1"/>
+          </a:fontRef>
+        </p:style>
+        <p:txBody>
+          <a:bodyPr rtlCol="0" anchor="ctr"/>
+          <a:lstStyle/>
+          <a:p>
+            <a:pPr algn="ctr"/>
+          </a:p>
+        </p:txBody>
+      </p:sp>
+      <p:sp>
+        <p:nvSpPr>
+          <p:cNvPr id="28" name="Rectangle 27"/>
+          <p:cNvSpPr/>
+          <p:nvPr/>
+        </p:nvSpPr>
+        <p:spPr>
+          <a:xfrm>
+            <a:off x="941832" y="3712464"/>
+            <a:ext cx="4937760" cy="402336"/>
+          </a:xfrm>
+          <a:prstGeom prst="rect">
+            <a:avLst/>
+          </a:prstGeom>
+          <a:solidFill>
+            <a:srgbClr val="221844"/>
+          </a:solidFill>
+          <a:ln>
+            <a:noFill/>
+          </a:ln>
+          <a:effectLst/>
+        </p:spPr>
+        <p:style>
+          <a:lnRef idx="1">
+            <a:schemeClr val="accent1"/>
+          </a:lnRef>
+          <a:fillRef idx="3">
+            <a:schemeClr val="accent1"/>
+          </a:fillRef>
+          <a:effectRef idx="2">
+            <a:schemeClr val="accent1"/>
+          </a:effectRef>
+          <a:fontRef idx="minor">
+            <a:schemeClr val="lt1"/>
+          </a:fontRef>
+        </p:style>
+        <p:txBody>
+          <a:bodyPr rtlCol="0" anchor="ctr"/>
+          <a:lstStyle/>
+          <a:p>
+            <a:pPr algn="ctr"/>
+          </a:p>
+        </p:txBody>
+      </p:sp>
+      <p:sp>
+        <p:nvSpPr>
+          <p:cNvPr id="29" name="TextBox 28"/>
+          <p:cNvSpPr txBox="1"/>
+          <p:nvPr/>
+        </p:nvSpPr>
+        <p:spPr>
+          <a:xfrm>
+            <a:off x="941832" y="3712464"/>
+            <a:ext cx="3061411" cy="402336"/>
+          </a:xfrm>
+          <a:prstGeom prst="rect">
+            <a:avLst/>
+          </a:prstGeom>
+          <a:noFill/>
+        </p:spPr>
+        <p:txBody>
+          <a:bodyPr wrap="square" anchor="ctr" lIns="127000" rIns="76200" tIns="25400" bIns="25400">
+            <a:spAutoFit/>
+          </a:bodyPr>
+          <a:lstStyle/>
+          <a:p>
+            <a:pPr>
+              <a:lnSpc>
+                <a:spcPct val="104000"/>
+              </a:lnSpc>
+            </a:pPr>
+            <a:r>
+              <a:rPr sz="1000" b="1">
+                <a:solidFill>
+                  <a:srgbClr val="F5F1FF"/>
+                </a:solidFill>
+                <a:latin typeface="Microsoft YaHei"/>
+              </a:rPr>
+              <a:t>运营杂费 / 差旅 / 办公</a:t>
+            </a:r>
+          </a:p>
+        </p:txBody>
+      </p:sp>
+      <p:sp>
+        <p:nvSpPr>
+          <p:cNvPr id="30" name="TextBox 29"/>
+          <p:cNvSpPr txBox="1"/>
+          <p:nvPr/>
+        </p:nvSpPr>
+        <p:spPr>
+          <a:xfrm>
+            <a:off x="4003243" y="3712464"/>
+            <a:ext cx="1876348" cy="402336"/>
+          </a:xfrm>
+          <a:prstGeom prst="rect">
+            <a:avLst/>
+          </a:prstGeom>
+          <a:noFill/>
+        </p:spPr>
+        <p:txBody>
+          <a:bodyPr wrap="square" anchor="ctr" lIns="127000" rIns="76200" tIns="25400" bIns="25400">
+            <a:spAutoFit/>
+          </a:bodyPr>
+          <a:lstStyle/>
+          <a:p>
+            <a:pPr>
+              <a:lnSpc>
+                <a:spcPct val="104000"/>
+              </a:lnSpc>
+            </a:pPr>
+            <a:r>
+              <a:rPr sz="1050" b="0">
+                <a:solidFill>
+                  <a:srgbClr val="C6BAEA"/>
+                </a:solidFill>
+                <a:latin typeface="Microsoft YaHei"/>
+              </a:rPr>
+              <a:t>20–40 万</a:t>
+            </a:r>
+          </a:p>
+        </p:txBody>
+      </p:sp>
+      <p:sp>
+        <p:nvSpPr>
+          <p:cNvPr id="31" name="Rectangle 30"/>
+          <p:cNvSpPr/>
+          <p:nvPr/>
+        </p:nvSpPr>
+        <p:spPr>
+          <a:xfrm>
+            <a:off x="941832" y="4105275"/>
+            <a:ext cx="4937760" cy="9525"/>
+          </a:xfrm>
+          <a:prstGeom prst="rect">
+            <a:avLst/>
+          </a:prstGeom>
+          <a:solidFill>
+            <a:srgbClr val="4A3C7C"/>
+          </a:solidFill>
+          <a:ln>
+            <a:noFill/>
+          </a:ln>
+          <a:effectLst/>
+        </p:spPr>
+        <p:style>
+          <a:lnRef idx="1">
+            <a:schemeClr val="accent1"/>
+          </a:lnRef>
+          <a:fillRef idx="3">
+            <a:schemeClr val="accent1"/>
+          </a:fillRef>
+          <a:effectRef idx="2">
+            <a:schemeClr val="accent1"/>
+          </a:effectRef>
+          <a:fontRef idx="minor">
+            <a:schemeClr val="lt1"/>
+          </a:fontRef>
+        </p:style>
+        <p:txBody>
+          <a:bodyPr rtlCol="0" anchor="ctr"/>
+          <a:lstStyle/>
+          <a:p>
+            <a:pPr algn="ctr"/>
+          </a:p>
+        </p:txBody>
+      </p:sp>
+      <p:sp>
+        <p:nvSpPr>
+          <p:cNvPr id="32" name="TextBox 31"/>
+          <p:cNvSpPr txBox="1"/>
+          <p:nvPr/>
+        </p:nvSpPr>
+        <p:spPr>
+          <a:xfrm>
+            <a:off x="941832" y="4114800"/>
+            <a:ext cx="3061411" cy="402336"/>
+          </a:xfrm>
+          <a:prstGeom prst="rect">
+            <a:avLst/>
+          </a:prstGeom>
+          <a:noFill/>
+        </p:spPr>
+        <p:txBody>
+          <a:bodyPr wrap="square" anchor="ctr" lIns="127000" rIns="76200" tIns="25400" bIns="25400">
+            <a:spAutoFit/>
+          </a:bodyPr>
+          <a:lstStyle/>
+          <a:p>
+            <a:pPr>
+              <a:lnSpc>
+                <a:spcPct val="104000"/>
+              </a:lnSpc>
+            </a:pPr>
+            <a:r>
+              <a:rPr sz="1000" b="1">
+                <a:solidFill>
+                  <a:srgbClr val="F5F1FF"/>
+                </a:solidFill>
+                <a:latin typeface="Microsoft YaHei"/>
+              </a:rPr>
+              <a:t>硬件装修摊销</a:t>
+            </a:r>
+          </a:p>
+        </p:txBody>
+      </p:sp>
+      <p:sp>
+        <p:nvSpPr>
+          <p:cNvPr id="33" name="TextBox 32"/>
+          <p:cNvSpPr txBox="1"/>
+          <p:nvPr/>
+        </p:nvSpPr>
+        <p:spPr>
+          <a:xfrm>
+            <a:off x="4003243" y="4114800"/>
+            <a:ext cx="1876348" cy="402336"/>
+          </a:xfrm>
+          <a:prstGeom prst="rect">
+            <a:avLst/>
+          </a:prstGeom>
+          <a:noFill/>
+        </p:spPr>
+        <p:txBody>
+          <a:bodyPr wrap="square" anchor="ctr" lIns="127000" rIns="76200" tIns="25400" bIns="25400">
+            <a:spAutoFit/>
+          </a:bodyPr>
+          <a:lstStyle/>
+          <a:p>
+            <a:pPr>
+              <a:lnSpc>
+                <a:spcPct val="104000"/>
+              </a:lnSpc>
+            </a:pPr>
+            <a:r>
+              <a:rPr sz="1050" b="0">
+                <a:solidFill>
+                  <a:srgbClr val="C6BAEA"/>
+                </a:solidFill>
+                <a:latin typeface="Microsoft YaHei"/>
+              </a:rPr>
+              <a:t>甲方为主，乙方轻资产</a:t>
+            </a:r>
+          </a:p>
+        </p:txBody>
+      </p:sp>
+      <p:sp>
+        <p:nvSpPr>
+          <p:cNvPr id="34" name="Rectangle 33"/>
+          <p:cNvSpPr/>
+          <p:nvPr/>
+        </p:nvSpPr>
+        <p:spPr>
+          <a:xfrm>
+            <a:off x="941832" y="4507611"/>
+            <a:ext cx="4937760" cy="9525"/>
+          </a:xfrm>
+          <a:prstGeom prst="rect">
+            <a:avLst/>
+          </a:prstGeom>
+          <a:solidFill>
+            <a:srgbClr val="4A3C7C"/>
+          </a:solidFill>
+          <a:ln>
+            <a:noFill/>
+          </a:ln>
+          <a:effectLst/>
+        </p:spPr>
+        <p:style>
+          <a:lnRef idx="1">
+            <a:schemeClr val="accent1"/>
+          </a:lnRef>
+          <a:fillRef idx="3">
+            <a:schemeClr val="accent1"/>
+          </a:fillRef>
+          <a:effectRef idx="2">
+            <a:schemeClr val="accent1"/>
+          </a:effectRef>
+          <a:fontRef idx="minor">
+            <a:schemeClr val="lt1"/>
+          </a:fontRef>
+        </p:style>
+        <p:txBody>
+          <a:bodyPr rtlCol="0" anchor="ctr"/>
+          <a:lstStyle/>
+          <a:p>
+            <a:pPr algn="ctr"/>
+          </a:p>
+        </p:txBody>
+      </p:sp>
+      <p:sp>
+        <p:nvSpPr>
+          <p:cNvPr id="35" name="Rectangle 34"/>
+          <p:cNvSpPr/>
+          <p:nvPr/>
+        </p:nvSpPr>
+        <p:spPr>
+          <a:xfrm>
+            <a:off x="941832" y="4517136"/>
+            <a:ext cx="4937760" cy="402336"/>
+          </a:xfrm>
+          <a:prstGeom prst="rect">
+            <a:avLst/>
+          </a:prstGeom>
+          <a:solidFill>
+            <a:srgbClr val="221844"/>
+          </a:solidFill>
+          <a:ln>
+            <a:noFill/>
+          </a:ln>
+          <a:effectLst/>
+        </p:spPr>
+        <p:style>
+          <a:lnRef idx="1">
+            <a:schemeClr val="accent1"/>
+          </a:lnRef>
+          <a:fillRef idx="3">
+            <a:schemeClr val="accent1"/>
+          </a:fillRef>
+          <a:effectRef idx="2">
+            <a:schemeClr val="accent1"/>
+          </a:effectRef>
+          <a:fontRef idx="minor">
+            <a:schemeClr val="lt1"/>
+          </a:fontRef>
+        </p:style>
+        <p:txBody>
+          <a:bodyPr rtlCol="0" anchor="ctr"/>
+          <a:lstStyle/>
+          <a:p>
+            <a:pPr algn="ctr"/>
+          </a:p>
+        </p:txBody>
+      </p:sp>
+      <p:sp>
+        <p:nvSpPr>
+          <p:cNvPr id="36" name="TextBox 35"/>
+          <p:cNvSpPr txBox="1"/>
+          <p:nvPr/>
+        </p:nvSpPr>
+        <p:spPr>
+          <a:xfrm>
+            <a:off x="941832" y="4517136"/>
+            <a:ext cx="3061411" cy="402336"/>
+          </a:xfrm>
+          <a:prstGeom prst="rect">
+            <a:avLst/>
+          </a:prstGeom>
+          <a:noFill/>
+        </p:spPr>
+        <p:txBody>
+          <a:bodyPr wrap="square" anchor="ctr" lIns="127000" rIns="76200" tIns="25400" bIns="25400">
+            <a:spAutoFit/>
+          </a:bodyPr>
+          <a:lstStyle/>
+          <a:p>
+            <a:pPr>
+              <a:lnSpc>
+                <a:spcPct val="104000"/>
+              </a:lnSpc>
+            </a:pPr>
+            <a:r>
+              <a:rPr sz="1000" b="1">
+                <a:solidFill>
+                  <a:srgbClr val="F5F1FF"/>
+                </a:solidFill>
+                <a:latin typeface="Microsoft YaHei"/>
+              </a:rPr>
+              <a:t>成本合计</a:t>
+            </a:r>
+          </a:p>
+        </p:txBody>
+      </p:sp>
+      <p:sp>
+        <p:nvSpPr>
+          <p:cNvPr id="37" name="TextBox 36"/>
+          <p:cNvSpPr txBox="1"/>
+          <p:nvPr/>
+        </p:nvSpPr>
+        <p:spPr>
+          <a:xfrm>
+            <a:off x="4003243" y="4517136"/>
+            <a:ext cx="1876348" cy="402336"/>
+          </a:xfrm>
+          <a:prstGeom prst="rect">
+            <a:avLst/>
+          </a:prstGeom>
+          <a:noFill/>
+        </p:spPr>
+        <p:txBody>
+          <a:bodyPr wrap="square" anchor="ctr" lIns="127000" rIns="76200" tIns="25400" bIns="25400">
+            <a:spAutoFit/>
+          </a:bodyPr>
+          <a:lstStyle/>
+          <a:p>
+            <a:pPr>
+              <a:lnSpc>
+                <a:spcPct val="104000"/>
+              </a:lnSpc>
+            </a:pPr>
+            <a:r>
+              <a:rPr sz="1050" b="0">
+                <a:solidFill>
+                  <a:srgbClr val="C6BAEA"/>
+                </a:solidFill>
+                <a:latin typeface="Microsoft YaHei"/>
+              </a:rPr>
+              <a:t>约 160–260 万/年</a:t>
+            </a:r>
+          </a:p>
+        </p:txBody>
+      </p:sp>
+      <p:sp>
+        <p:nvSpPr>
+          <p:cNvPr id="38" name="Rectangle 37"/>
+          <p:cNvSpPr/>
+          <p:nvPr/>
+        </p:nvSpPr>
+        <p:spPr>
+          <a:xfrm>
+            <a:off x="941832" y="4909947"/>
+            <a:ext cx="4937760" cy="9525"/>
+          </a:xfrm>
+          <a:prstGeom prst="rect">
+            <a:avLst/>
+          </a:prstGeom>
+          <a:solidFill>
+            <a:srgbClr val="4A3C7C"/>
+          </a:solidFill>
+          <a:ln>
+            <a:noFill/>
+          </a:ln>
+          <a:effectLst/>
+        </p:spPr>
+        <p:style>
+          <a:lnRef idx="1">
+            <a:schemeClr val="accent1"/>
+          </a:lnRef>
+          <a:fillRef idx="3">
+            <a:schemeClr val="accent1"/>
+          </a:fillRef>
+          <a:effectRef idx="2">
+            <a:schemeClr val="accent1"/>
+          </a:effectRef>
+          <a:fontRef idx="minor">
+            <a:schemeClr val="lt1"/>
+          </a:fontRef>
+        </p:style>
+        <p:txBody>
+          <a:bodyPr rtlCol="0" anchor="ctr"/>
+          <a:lstStyle/>
+          <a:p>
+            <a:pPr algn="ctr"/>
+          </a:p>
+        </p:txBody>
+      </p:sp>
+      <p:sp>
+        <p:nvSpPr>
+          <p:cNvPr id="39" name="Rectangle 38"/>
+          <p:cNvSpPr/>
+          <p:nvPr/>
+        </p:nvSpPr>
+        <p:spPr>
+          <a:xfrm>
+            <a:off x="941832" y="2139696"/>
+            <a:ext cx="31750" cy="2779776"/>
+          </a:xfrm>
+          <a:prstGeom prst="rect">
+            <a:avLst/>
+          </a:prstGeom>
+          <a:solidFill>
+            <a:srgbClr val="E9C27C"/>
+          </a:solidFill>
+          <a:ln>
+            <a:noFill/>
+          </a:ln>
+          <a:effectLst/>
+        </p:spPr>
+        <p:style>
+          <a:lnRef idx="1">
+            <a:schemeClr val="accent1"/>
+          </a:lnRef>
+          <a:fillRef idx="3">
+            <a:schemeClr val="accent1"/>
+          </a:fillRef>
+          <a:effectRef idx="2">
+            <a:schemeClr val="accent1"/>
+          </a:effectRef>
+          <a:fontRef idx="minor">
+            <a:schemeClr val="lt1"/>
+          </a:fontRef>
+        </p:style>
+        <p:txBody>
+          <a:bodyPr rtlCol="0" anchor="ctr"/>
+          <a:lstStyle/>
+          <a:p>
+            <a:pPr algn="ctr"/>
+          </a:p>
+        </p:txBody>
+      </p:sp>
+      <p:sp>
+        <p:nvSpPr>
+          <p:cNvPr id="40" name="Rounded Rectangle 39"/>
+          <p:cNvSpPr/>
+          <p:nvPr/>
+        </p:nvSpPr>
+        <p:spPr>
+          <a:xfrm>
+            <a:off x="6181344" y="1554480"/>
+            <a:ext cx="5230368" cy="713232"/>
+          </a:xfrm>
+          <a:prstGeom prst="roundRect">
+            <a:avLst/>
+          </a:prstGeom>
+          <a:ln w="12700">
+            <a:solidFill>
+              <a:srgbClr val="4A3C7C"/>
+            </a:solidFill>
+          </a:ln>
+          <a:effectLst/>
+          <a:gradFill>
+            <a:gsLst>
+              <a:gs pos="0">
+                <a:srgbClr val="2A1E55"/>
+              </a:gs>
+              <a:gs pos="100000">
+                <a:srgbClr val="1E1542"/>
+              </a:gs>
+            </a:gsLst>
+            <a:lin ang="7200000" scaled="1"/>
+          </a:gradFill>
+        </p:spPr>
+        <p:style>
+          <a:lnRef idx="1">
+            <a:schemeClr val="accent1"/>
+          </a:lnRef>
+          <a:fillRef idx="3">
+            <a:schemeClr val="accent1"/>
+          </a:fillRef>
+          <a:effectRef idx="2">
+            <a:schemeClr val="accent1"/>
+          </a:effectRef>
+          <a:fontRef idx="minor">
+            <a:schemeClr val="lt1"/>
+          </a:fontRef>
+        </p:style>
+        <p:txBody>
+          <a:bodyPr rtlCol="0" anchor="ctr"/>
+          <a:lstStyle/>
+          <a:p>
+            <a:pPr algn="ctr"/>
+          </a:p>
+        </p:txBody>
+      </p:sp>
+      <p:sp>
+        <p:nvSpPr>
+          <p:cNvPr id="41" name="Rectangle 40"/>
+          <p:cNvSpPr/>
+          <p:nvPr/>
+        </p:nvSpPr>
+        <p:spPr>
+          <a:xfrm>
+            <a:off x="6181344" y="1554480"/>
+            <a:ext cx="64008" cy="713232"/>
+          </a:xfrm>
+          <a:prstGeom prst="rect">
+            <a:avLst/>
+          </a:prstGeom>
+          <a:solidFill>
+            <a:srgbClr val="8B7BFF"/>
+          </a:solidFill>
+          <a:ln>
+            <a:noFill/>
+          </a:ln>
+          <a:effectLst/>
+        </p:spPr>
+        <p:style>
+          <a:lnRef idx="1">
+            <a:schemeClr val="accent1"/>
+          </a:lnRef>
+          <a:fillRef idx="3">
+            <a:schemeClr val="accent1"/>
+          </a:fillRef>
+          <a:effectRef idx="2">
+            <a:schemeClr val="accent1"/>
+          </a:effectRef>
+          <a:fontRef idx="minor">
+            <a:schemeClr val="lt1"/>
+          </a:fontRef>
+        </p:style>
+        <p:txBody>
+          <a:bodyPr rtlCol="0" anchor="ctr"/>
+          <a:lstStyle/>
+          <a:p>
+            <a:pPr algn="ctr"/>
+          </a:p>
+        </p:txBody>
+      </p:sp>
+      <p:sp>
+        <p:nvSpPr>
+          <p:cNvPr id="42" name="TextBox 41"/>
+          <p:cNvSpPr txBox="1"/>
+          <p:nvPr/>
+        </p:nvSpPr>
+        <p:spPr>
+          <a:xfrm>
+            <a:off x="6419088" y="1554480"/>
+            <a:ext cx="1005840" cy="713232"/>
+          </a:xfrm>
+          <a:prstGeom prst="rect">
+            <a:avLst/>
+          </a:prstGeom>
+          <a:noFill/>
+        </p:spPr>
+        <p:txBody>
+          <a:bodyPr wrap="square" anchor="ctr" lIns="25400" rIns="25400" tIns="12700" bIns="12700">
+            <a:spAutoFit/>
+          </a:bodyPr>
+          <a:lstStyle/>
+          <a:p>
+            <a:pPr algn="l">
+              <a:lnSpc>
+                <a:spcPct val="100000"/>
+              </a:lnSpc>
+            </a:pPr>
+            <a:r>
+              <a:rPr sz="1500" b="1">
+                <a:solidFill>
+                  <a:srgbClr val="8B7BFF"/>
+                </a:solidFill>
+                <a:latin typeface="Microsoft YaHei"/>
+              </a:rPr>
+              <a:t>保守</a:t>
+            </a:r>
+          </a:p>
+        </p:txBody>
+      </p:sp>
+      <p:sp>
+        <p:nvSpPr>
+          <p:cNvPr id="43" name="TextBox 42"/>
+          <p:cNvSpPr txBox="1"/>
+          <p:nvPr/>
+        </p:nvSpPr>
+        <p:spPr>
+          <a:xfrm>
+            <a:off x="7315200" y="1554480"/>
+            <a:ext cx="1828800" cy="713232"/>
+          </a:xfrm>
+          <a:prstGeom prst="rect">
+            <a:avLst/>
+          </a:prstGeom>
+          <a:noFill/>
+        </p:spPr>
+        <p:txBody>
+          <a:bodyPr wrap="square" anchor="ctr" lIns="25400" rIns="25400" tIns="12700" bIns="12700">
+            <a:spAutoFit/>
+          </a:bodyPr>
+          <a:lstStyle/>
+          <a:p>
+            <a:pPr algn="l">
+              <a:lnSpc>
+                <a:spcPct val="100000"/>
+              </a:lnSpc>
+            </a:pPr>
+            <a:r>
+              <a:rPr sz="1150" b="0">
+                <a:solidFill>
+                  <a:srgbClr val="C6BAEA"/>
+                </a:solidFill>
+                <a:latin typeface="Microsoft YaHei"/>
+              </a:rPr>
+              <a:t>收入 ~380 万</a:t>
+            </a:r>
+          </a:p>
+        </p:txBody>
+      </p:sp>
+      <p:sp>
+        <p:nvSpPr>
+          <p:cNvPr id="44" name="TextBox 43"/>
+          <p:cNvSpPr txBox="1"/>
+          <p:nvPr/>
+        </p:nvSpPr>
+        <p:spPr>
+          <a:xfrm>
+            <a:off x="8686800" y="1554480"/>
+            <a:ext cx="1463040" cy="713232"/>
+          </a:xfrm>
+          <a:prstGeom prst="rect">
+            <a:avLst/>
+          </a:prstGeom>
+          <a:noFill/>
+        </p:spPr>
+        <p:txBody>
+          <a:bodyPr wrap="square" anchor="ctr" lIns="25400" rIns="25400" tIns="12700" bIns="12700">
+            <a:spAutoFit/>
+          </a:bodyPr>
+          <a:lstStyle/>
+          <a:p>
+            <a:pPr algn="l">
+              <a:lnSpc>
+                <a:spcPct val="100000"/>
+              </a:lnSpc>
+            </a:pPr>
+            <a:r>
+              <a:rPr sz="1150" b="0">
+                <a:solidFill>
+                  <a:srgbClr val="C6BAEA"/>
+                </a:solidFill>
+                <a:latin typeface="Microsoft YaHei"/>
+              </a:rPr>
+              <a:t>成本 ~185 万</a:t>
+            </a:r>
+          </a:p>
+        </p:txBody>
+      </p:sp>
+      <p:sp>
+        <p:nvSpPr>
+          <p:cNvPr id="45" name="TextBox 44"/>
+          <p:cNvSpPr txBox="1"/>
+          <p:nvPr/>
+        </p:nvSpPr>
+        <p:spPr>
+          <a:xfrm>
+            <a:off x="10058400" y="1554480"/>
+            <a:ext cx="1371600" cy="713232"/>
+          </a:xfrm>
+          <a:prstGeom prst="rect">
+            <a:avLst/>
+          </a:prstGeom>
+          <a:noFill/>
+        </p:spPr>
+        <p:txBody>
+          <a:bodyPr wrap="square" anchor="ctr" lIns="25400" rIns="25400" tIns="12700" bIns="12700">
+            <a:spAutoFit/>
+          </a:bodyPr>
+          <a:lstStyle/>
+          <a:p>
+            <a:pPr algn="l">
+              <a:lnSpc>
+                <a:spcPct val="100000"/>
+              </a:lnSpc>
+            </a:pPr>
+            <a:r>
+              <a:rPr sz="1300" b="1">
+                <a:solidFill>
+                  <a:srgbClr val="8B7BFF"/>
+                </a:solidFill>
+                <a:latin typeface="Microsoft YaHei"/>
+              </a:rPr>
+              <a:t>净 +195 万</a:t>
+            </a:r>
+          </a:p>
+        </p:txBody>
+      </p:sp>
+      <p:sp>
+        <p:nvSpPr>
+          <p:cNvPr id="46" name="Rounded Rectangle 45"/>
+          <p:cNvSpPr/>
+          <p:nvPr/>
+        </p:nvSpPr>
+        <p:spPr>
+          <a:xfrm>
+            <a:off x="6181344" y="2377440"/>
+            <a:ext cx="5230368" cy="713232"/>
+          </a:xfrm>
+          <a:prstGeom prst="roundRect">
+            <a:avLst/>
+          </a:prstGeom>
+          <a:ln w="12700">
+            <a:solidFill>
+              <a:srgbClr val="4A3C7C"/>
+            </a:solidFill>
+          </a:ln>
+          <a:effectLst/>
+          <a:gradFill>
+            <a:gsLst>
+              <a:gs pos="0">
+                <a:srgbClr val="2A1E55"/>
+              </a:gs>
+              <a:gs pos="100000">
+                <a:srgbClr val="1E1542"/>
+              </a:gs>
+            </a:gsLst>
+            <a:lin ang="7200000" scaled="1"/>
+          </a:gradFill>
+        </p:spPr>
+        <p:style>
+          <a:lnRef idx="1">
+            <a:schemeClr val="accent1"/>
+          </a:lnRef>
+          <a:fillRef idx="3">
+            <a:schemeClr val="accent1"/>
+          </a:fillRef>
+          <a:effectRef idx="2">
+            <a:schemeClr val="accent1"/>
+          </a:effectRef>
+          <a:fontRef idx="minor">
+            <a:schemeClr val="lt1"/>
+          </a:fontRef>
+        </p:style>
+        <p:txBody>
+          <a:bodyPr rtlCol="0" anchor="ctr"/>
+          <a:lstStyle/>
+          <a:p>
+            <a:pPr algn="ctr"/>
+          </a:p>
+        </p:txBody>
+      </p:sp>
+      <p:sp>
+        <p:nvSpPr>
+          <p:cNvPr id="47" name="Rectangle 46"/>
+          <p:cNvSpPr/>
+          <p:nvPr/>
+        </p:nvSpPr>
+        <p:spPr>
+          <a:xfrm>
+            <a:off x="6181344" y="2377440"/>
+            <a:ext cx="64008" cy="713232"/>
+          </a:xfrm>
+          <a:prstGeom prst="rect">
+            <a:avLst/>
+          </a:prstGeom>
+          <a:solidFill>
+            <a:srgbClr val="E9C27C"/>
+          </a:solidFill>
+          <a:ln>
+            <a:noFill/>
+          </a:ln>
+          <a:effectLst/>
+        </p:spPr>
+        <p:style>
+          <a:lnRef idx="1">
+            <a:schemeClr val="accent1"/>
+          </a:lnRef>
+          <a:fillRef idx="3">
+            <a:schemeClr val="accent1"/>
+          </a:fillRef>
+          <a:effectRef idx="2">
+            <a:schemeClr val="accent1"/>
+          </a:effectRef>
+          <a:fontRef idx="minor">
+            <a:schemeClr val="lt1"/>
+          </a:fontRef>
+        </p:style>
+        <p:txBody>
+          <a:bodyPr rtlCol="0" anchor="ctr"/>
+          <a:lstStyle/>
+          <a:p>
+            <a:pPr algn="ctr"/>
+          </a:p>
+        </p:txBody>
+      </p:sp>
+      <p:sp>
+        <p:nvSpPr>
+          <p:cNvPr id="48" name="TextBox 47"/>
+          <p:cNvSpPr txBox="1"/>
+          <p:nvPr/>
+        </p:nvSpPr>
+        <p:spPr>
+          <a:xfrm>
+            <a:off x="6419088" y="2377440"/>
+            <a:ext cx="1005840" cy="713232"/>
+          </a:xfrm>
+          <a:prstGeom prst="rect">
+            <a:avLst/>
+          </a:prstGeom>
+          <a:noFill/>
+        </p:spPr>
+        <p:txBody>
+          <a:bodyPr wrap="square" anchor="ctr" lIns="25400" rIns="25400" tIns="12700" bIns="12700">
+            <a:spAutoFit/>
+          </a:bodyPr>
+          <a:lstStyle/>
+          <a:p>
+            <a:pPr algn="l">
+              <a:lnSpc>
+                <a:spcPct val="100000"/>
+              </a:lnSpc>
+            </a:pPr>
+            <a:r>
+              <a:rPr sz="1500" b="1">
+                <a:solidFill>
+                  <a:srgbClr val="E9C27C"/>
+                </a:solidFill>
+                <a:latin typeface="Microsoft YaHei"/>
+              </a:rPr>
+              <a:t>中性</a:t>
+            </a:r>
+          </a:p>
+        </p:txBody>
+      </p:sp>
+      <p:sp>
+        <p:nvSpPr>
+          <p:cNvPr id="49" name="TextBox 48"/>
+          <p:cNvSpPr txBox="1"/>
+          <p:nvPr/>
+        </p:nvSpPr>
+        <p:spPr>
+          <a:xfrm>
+            <a:off x="7315200" y="2377440"/>
+            <a:ext cx="1828800" cy="713232"/>
+          </a:xfrm>
+          <a:prstGeom prst="rect">
+            <a:avLst/>
+          </a:prstGeom>
+          <a:noFill/>
+        </p:spPr>
+        <p:txBody>
+          <a:bodyPr wrap="square" anchor="ctr" lIns="25400" rIns="25400" tIns="12700" bIns="12700">
+            <a:spAutoFit/>
+          </a:bodyPr>
+          <a:lstStyle/>
+          <a:p>
+            <a:pPr algn="l">
+              <a:lnSpc>
+                <a:spcPct val="100000"/>
+              </a:lnSpc>
+            </a:pPr>
+            <a:r>
+              <a:rPr sz="1150" b="0">
+                <a:solidFill>
+                  <a:srgbClr val="C6BAEA"/>
+                </a:solidFill>
+                <a:latin typeface="Microsoft YaHei"/>
+              </a:rPr>
+              <a:t>收入 ~520 万</a:t>
+            </a:r>
+          </a:p>
+        </p:txBody>
+      </p:sp>
+      <p:sp>
+        <p:nvSpPr>
+          <p:cNvPr id="50" name="TextBox 49"/>
+          <p:cNvSpPr txBox="1"/>
+          <p:nvPr/>
+        </p:nvSpPr>
+        <p:spPr>
+          <a:xfrm>
+            <a:off x="8686800" y="2377440"/>
+            <a:ext cx="1463040" cy="713232"/>
+          </a:xfrm>
+          <a:prstGeom prst="rect">
+            <a:avLst/>
+          </a:prstGeom>
+          <a:noFill/>
+        </p:spPr>
+        <p:txBody>
+          <a:bodyPr wrap="square" anchor="ctr" lIns="25400" rIns="25400" tIns="12700" bIns="12700">
+            <a:spAutoFit/>
+          </a:bodyPr>
+          <a:lstStyle/>
+          <a:p>
+            <a:pPr algn="l">
+              <a:lnSpc>
+                <a:spcPct val="100000"/>
+              </a:lnSpc>
+            </a:pPr>
+            <a:r>
+              <a:rPr sz="1150" b="0">
+                <a:solidFill>
+                  <a:srgbClr val="C6BAEA"/>
+                </a:solidFill>
+                <a:latin typeface="Microsoft YaHei"/>
+              </a:rPr>
+              <a:t>成本 ~220 万</a:t>
+            </a:r>
+          </a:p>
+        </p:txBody>
+      </p:sp>
+      <p:sp>
+        <p:nvSpPr>
+          <p:cNvPr id="51" name="TextBox 50"/>
+          <p:cNvSpPr txBox="1"/>
+          <p:nvPr/>
+        </p:nvSpPr>
+        <p:spPr>
+          <a:xfrm>
+            <a:off x="10058400" y="2377440"/>
+            <a:ext cx="1371600" cy="713232"/>
+          </a:xfrm>
+          <a:prstGeom prst="rect">
+            <a:avLst/>
+          </a:prstGeom>
+          <a:noFill/>
+        </p:spPr>
+        <p:txBody>
+          <a:bodyPr wrap="square" anchor="ctr" lIns="25400" rIns="25400" tIns="12700" bIns="12700">
+            <a:spAutoFit/>
+          </a:bodyPr>
+          <a:lstStyle/>
+          <a:p>
+            <a:pPr algn="l">
+              <a:lnSpc>
+                <a:spcPct val="100000"/>
+              </a:lnSpc>
+            </a:pPr>
+            <a:r>
+              <a:rPr sz="1300" b="1">
+                <a:solidFill>
+                  <a:srgbClr val="E9C27C"/>
+                </a:solidFill>
+                <a:latin typeface="Microsoft YaHei"/>
+              </a:rPr>
+              <a:t>净 +300 万</a:t>
+            </a:r>
+          </a:p>
+        </p:txBody>
+      </p:sp>
+      <p:sp>
+        <p:nvSpPr>
+          <p:cNvPr id="52" name="Rounded Rectangle 51"/>
+          <p:cNvSpPr/>
+          <p:nvPr/>
+        </p:nvSpPr>
+        <p:spPr>
+          <a:xfrm>
+            <a:off x="6181344" y="3200400"/>
+            <a:ext cx="5230368" cy="713232"/>
+          </a:xfrm>
+          <a:prstGeom prst="roundRect">
+            <a:avLst/>
+          </a:prstGeom>
+          <a:ln w="12700">
+            <a:solidFill>
+              <a:srgbClr val="4A3C7C"/>
+            </a:solidFill>
+          </a:ln>
+          <a:effectLst/>
+          <a:gradFill>
+            <a:gsLst>
+              <a:gs pos="0">
+                <a:srgbClr val="2A1E55"/>
+              </a:gs>
+              <a:gs pos="100000">
+                <a:srgbClr val="1E1542"/>
+              </a:gs>
+            </a:gsLst>
+            <a:lin ang="7200000" scaled="1"/>
+          </a:gradFill>
+        </p:spPr>
+        <p:style>
+          <a:lnRef idx="1">
+            <a:schemeClr val="accent1"/>
+          </a:lnRef>
+          <a:fillRef idx="3">
+            <a:schemeClr val="accent1"/>
+          </a:fillRef>
+          <a:effectRef idx="2">
+            <a:schemeClr val="accent1"/>
+          </a:effectRef>
+          <a:fontRef idx="minor">
+            <a:schemeClr val="lt1"/>
+          </a:fontRef>
+        </p:style>
+        <p:txBody>
+          <a:bodyPr rtlCol="0" anchor="ctr"/>
+          <a:lstStyle/>
+          <a:p>
+            <a:pPr algn="ctr"/>
+          </a:p>
+        </p:txBody>
+      </p:sp>
+      <p:sp>
+        <p:nvSpPr>
+          <p:cNvPr id="53" name="Rectangle 52"/>
+          <p:cNvSpPr/>
+          <p:nvPr/>
+        </p:nvSpPr>
+        <p:spPr>
+          <a:xfrm>
+            <a:off x="6181344" y="3200400"/>
+            <a:ext cx="64008" cy="713232"/>
+          </a:xfrm>
+          <a:prstGeom prst="rect">
+            <a:avLst/>
+          </a:prstGeom>
+          <a:solidFill>
+            <a:srgbClr val="56D6B6"/>
+          </a:solidFill>
+          <a:ln>
+            <a:noFill/>
+          </a:ln>
+          <a:effectLst/>
+        </p:spPr>
+        <p:style>
+          <a:lnRef idx="1">
+            <a:schemeClr val="accent1"/>
+          </a:lnRef>
+          <a:fillRef idx="3">
+            <a:schemeClr val="accent1"/>
+          </a:fillRef>
+          <a:effectRef idx="2">
+            <a:schemeClr val="accent1"/>
+          </a:effectRef>
+          <a:fontRef idx="minor">
+            <a:schemeClr val="lt1"/>
+          </a:fontRef>
+        </p:style>
+        <p:txBody>
+          <a:bodyPr rtlCol="0" anchor="ctr"/>
+          <a:lstStyle/>
+          <a:p>
+            <a:pPr algn="ctr"/>
+          </a:p>
+        </p:txBody>
+      </p:sp>
+      <p:sp>
+        <p:nvSpPr>
+          <p:cNvPr id="54" name="TextBox 53"/>
+          <p:cNvSpPr txBox="1"/>
+          <p:nvPr/>
+        </p:nvSpPr>
+        <p:spPr>
+          <a:xfrm>
+            <a:off x="6419088" y="3200400"/>
+            <a:ext cx="1005840" cy="713232"/>
+          </a:xfrm>
+          <a:prstGeom prst="rect">
+            <a:avLst/>
+          </a:prstGeom>
+          <a:noFill/>
+        </p:spPr>
+        <p:txBody>
+          <a:bodyPr wrap="square" anchor="ctr" lIns="25400" rIns="25400" tIns="12700" bIns="12700">
+            <a:spAutoFit/>
+          </a:bodyPr>
+          <a:lstStyle/>
+          <a:p>
+            <a:pPr algn="l">
+              <a:lnSpc>
+                <a:spcPct val="100000"/>
+              </a:lnSpc>
+            </a:pPr>
+            <a:r>
+              <a:rPr sz="1500" b="1">
+                <a:solidFill>
+                  <a:srgbClr val="56D6B6"/>
+                </a:solidFill>
+                <a:latin typeface="Microsoft YaHei"/>
+              </a:rPr>
+              <a:t>乐观</a:t>
+            </a:r>
+          </a:p>
+        </p:txBody>
+      </p:sp>
+      <p:sp>
+        <p:nvSpPr>
+          <p:cNvPr id="55" name="TextBox 54"/>
+          <p:cNvSpPr txBox="1"/>
+          <p:nvPr/>
+        </p:nvSpPr>
+        <p:spPr>
+          <a:xfrm>
+            <a:off x="7315200" y="3200400"/>
+            <a:ext cx="1828800" cy="713232"/>
+          </a:xfrm>
+          <a:prstGeom prst="rect">
+            <a:avLst/>
+          </a:prstGeom>
+          <a:noFill/>
+        </p:spPr>
+        <p:txBody>
+          <a:bodyPr wrap="square" anchor="ctr" lIns="25400" rIns="25400" tIns="12700" bIns="12700">
+            <a:spAutoFit/>
+          </a:bodyPr>
+          <a:lstStyle/>
+          <a:p>
+            <a:pPr algn="l">
+              <a:lnSpc>
+                <a:spcPct val="100000"/>
+              </a:lnSpc>
+            </a:pPr>
+            <a:r>
+              <a:rPr sz="1150" b="0">
+                <a:solidFill>
+                  <a:srgbClr val="C6BAEA"/>
+                </a:solidFill>
+                <a:latin typeface="Microsoft YaHei"/>
+              </a:rPr>
+              <a:t>收入 ~740 万</a:t>
+            </a:r>
+          </a:p>
+        </p:txBody>
+      </p:sp>
+      <p:sp>
+        <p:nvSpPr>
+          <p:cNvPr id="56" name="TextBox 55"/>
+          <p:cNvSpPr txBox="1"/>
+          <p:nvPr/>
+        </p:nvSpPr>
+        <p:spPr>
+          <a:xfrm>
+            <a:off x="8686800" y="3200400"/>
+            <a:ext cx="1463040" cy="713232"/>
+          </a:xfrm>
+          <a:prstGeom prst="rect">
+            <a:avLst/>
+          </a:prstGeom>
+          <a:noFill/>
+        </p:spPr>
+        <p:txBody>
+          <a:bodyPr wrap="square" anchor="ctr" lIns="25400" rIns="25400" tIns="12700" bIns="12700">
+            <a:spAutoFit/>
+          </a:bodyPr>
+          <a:lstStyle/>
+          <a:p>
+            <a:pPr algn="l">
+              <a:lnSpc>
+                <a:spcPct val="100000"/>
+              </a:lnSpc>
+            </a:pPr>
+            <a:r>
+              <a:rPr sz="1150" b="0">
+                <a:solidFill>
+                  <a:srgbClr val="C6BAEA"/>
+                </a:solidFill>
+                <a:latin typeface="Microsoft YaHei"/>
+              </a:rPr>
+              <a:t>成本 ~260 万</a:t>
+            </a:r>
+          </a:p>
+        </p:txBody>
+      </p:sp>
+      <p:sp>
+        <p:nvSpPr>
+          <p:cNvPr id="57" name="TextBox 56"/>
+          <p:cNvSpPr txBox="1"/>
+          <p:nvPr/>
+        </p:nvSpPr>
+        <p:spPr>
+          <a:xfrm>
+            <a:off x="10058400" y="3200400"/>
+            <a:ext cx="1371600" cy="713232"/>
+          </a:xfrm>
+          <a:prstGeom prst="rect">
+            <a:avLst/>
+          </a:prstGeom>
+          <a:noFill/>
+        </p:spPr>
+        <p:txBody>
+          <a:bodyPr wrap="square" anchor="ctr" lIns="25400" rIns="25400" tIns="12700" bIns="12700">
+            <a:spAutoFit/>
+          </a:bodyPr>
+          <a:lstStyle/>
+          <a:p>
+            <a:pPr algn="l">
+              <a:lnSpc>
+                <a:spcPct val="100000"/>
+              </a:lnSpc>
+            </a:pPr>
+            <a:r>
+              <a:rPr sz="1300" b="1">
+                <a:solidFill>
+                  <a:srgbClr val="56D6B6"/>
+                </a:solidFill>
+                <a:latin typeface="Microsoft YaHei"/>
+              </a:rPr>
+              <a:t>净 +480 万</a:t>
+            </a:r>
+          </a:p>
+        </p:txBody>
+      </p:sp>
+      <p:sp>
+        <p:nvSpPr>
+          <p:cNvPr id="58" name="Rounded Rectangle 57"/>
+          <p:cNvSpPr/>
+          <p:nvPr/>
+        </p:nvSpPr>
+        <p:spPr>
+          <a:xfrm>
+            <a:off x="777240" y="4983480"/>
+            <a:ext cx="10634472" cy="1005840"/>
+          </a:xfrm>
+          <a:prstGeom prst="roundRect">
+            <a:avLst/>
+          </a:prstGeom>
+          <a:ln w="12700">
+            <a:solidFill>
+              <a:srgbClr val="E9C27C"/>
+            </a:solidFill>
+          </a:ln>
+          <a:effectLst/>
+          <a:gradFill>
+            <a:gsLst>
+              <a:gs pos="0">
+                <a:srgbClr val="322462"/>
+              </a:gs>
+              <a:gs pos="100000">
+                <a:srgbClr val="221848"/>
+              </a:gs>
+            </a:gsLst>
+            <a:lin ang="0" scaled="1"/>
+          </a:gradFill>
+        </p:spPr>
+        <p:style>
+          <a:lnRef idx="1">
+            <a:schemeClr val="accent1"/>
+          </a:lnRef>
+          <a:fillRef idx="3">
+            <a:schemeClr val="accent1"/>
+          </a:fillRef>
+          <a:effectRef idx="2">
+            <a:schemeClr val="accent1"/>
+          </a:effectRef>
+          <a:fontRef idx="minor">
+            <a:schemeClr val="lt1"/>
+          </a:fontRef>
+        </p:style>
+        <p:txBody>
+          <a:bodyPr rtlCol="0" anchor="ctr"/>
+          <a:lstStyle/>
+          <a:p>
+            <a:pPr algn="ctr"/>
+          </a:p>
+        </p:txBody>
+      </p:sp>
+      <p:sp>
+        <p:nvSpPr>
+          <p:cNvPr id="59" name="TextBox 58"/>
+          <p:cNvSpPr txBox="1"/>
+          <p:nvPr/>
+        </p:nvSpPr>
+        <p:spPr>
+          <a:xfrm>
+            <a:off x="1005840" y="5084064"/>
+            <a:ext cx="10241280" cy="365760"/>
+          </a:xfrm>
+          <a:prstGeom prst="rect">
+            <a:avLst/>
+          </a:prstGeom>
+          <a:noFill/>
+        </p:spPr>
+        <p:txBody>
+          <a:bodyPr wrap="square" anchor="t" lIns="25400" rIns="25400" tIns="12700" bIns="12700">
+            <a:spAutoFit/>
+          </a:bodyPr>
+          <a:lstStyle/>
+          <a:p>
+            <a:pPr algn="l">
+              <a:lnSpc>
+                <a:spcPct val="100000"/>
+              </a:lnSpc>
+            </a:pPr>
+            <a:r>
+              <a:rPr sz="1200" b="1">
+                <a:solidFill>
+                  <a:srgbClr val="E9C27C"/>
+                </a:solidFill>
+                <a:latin typeface="Microsoft YaHei"/>
+              </a:rPr>
+              <a:t>盈亏与现金流　</a:t>
+            </a:r>
+            <a:r>
+              <a:rPr sz="1200" b="0">
+                <a:solidFill>
+                  <a:srgbClr val="F5F1FF"/>
+                </a:solidFill>
+                <a:latin typeface="Microsoft YaHei"/>
+              </a:rPr>
+              <a:t>基础运营费 96 万/年为保底，覆盖基本盘；三情景净收益均为正，出海撮合为最大增长弹性。</a:t>
+            </a:r>
+          </a:p>
+        </p:txBody>
+      </p:sp>
+      <p:sp>
+        <p:nvSpPr>
+          <p:cNvPr id="60" name="TextBox 59"/>
+          <p:cNvSpPr txBox="1"/>
+          <p:nvPr/>
+        </p:nvSpPr>
+        <p:spPr>
+          <a:xfrm>
+            <a:off x="1005840" y="5486400"/>
+            <a:ext cx="10058400" cy="457200"/>
+          </a:xfrm>
+          <a:prstGeom prst="rect">
+            <a:avLst/>
+          </a:prstGeom>
+          <a:noFill/>
+        </p:spPr>
+        <p:txBody>
+          <a:bodyPr wrap="square" lIns="25400" tIns="25400">
+            <a:spAutoFit/>
+          </a:bodyPr>
+          <a:lstStyle/>
+          <a:p>
+            <a:pPr>
+              <a:lnSpc>
+                <a:spcPct val="118000"/>
+              </a:lnSpc>
+              <a:spcAft>
+                <a:spcPts val="200"/>
+              </a:spcAft>
+            </a:pPr>
+            <a:r>
+              <a:rPr sz="1100">
+                <a:solidFill>
+                  <a:srgbClr val="E9C27C"/>
+                </a:solidFill>
+                <a:latin typeface="Microsoft YaHei"/>
+              </a:rPr>
+              <a:t>▪  </a:t>
+            </a:r>
+            <a:r>
+              <a:rPr sz="1100">
+                <a:solidFill>
+                  <a:srgbClr val="C6BAEA"/>
+                </a:solidFill>
+                <a:latin typeface="Microsoft YaHei"/>
+              </a:rPr>
+              <a:t>轻资产：装修硬件以甲方投入为主，乙方前期投入低、回正快；补贴与增值/出海形成第二增长曲线</a:t>
+            </a:r>
+          </a:p>
+        </p:txBody>
+      </p:sp>
+      <p:sp>
+        <p:nvSpPr>
+          <p:cNvPr id="61" name="TextBox 60"/>
+          <p:cNvSpPr txBox="1"/>
+          <p:nvPr/>
+        </p:nvSpPr>
+        <p:spPr>
+          <a:xfrm>
+            <a:off x="777240" y="6053328"/>
+            <a:ext cx="10607040" cy="256032"/>
+          </a:xfrm>
+          <a:prstGeom prst="rect">
+            <a:avLst/>
+          </a:prstGeom>
+          <a:noFill/>
+        </p:spPr>
+        <p:txBody>
+          <a:bodyPr wrap="square" anchor="t" lIns="25400" rIns="25400" tIns="12700" bIns="12700">
+            <a:spAutoFit/>
+          </a:bodyPr>
+          <a:lstStyle/>
+          <a:p>
+            <a:pPr algn="l">
+              <a:lnSpc>
+                <a:spcPct val="100000"/>
+              </a:lnSpc>
+            </a:pPr>
+            <a:r>
+              <a:rPr sz="900" b="0">
+                <a:solidFill>
+                  <a:srgbClr val="9486C4"/>
+                </a:solidFill>
+                <a:latin typeface="Microsoft YaHei"/>
+              </a:rPr>
+              <a:t>＊三情景为示意测算区间，实际以签约、去化与出海落地为准。</a:t>
+            </a:r>
+          </a:p>
+        </p:txBody>
+      </p:sp>
+    </p:spTree>
+  </p:cSld>
+  <p:clrMapOvr>
+    <a:masterClrMapping/>
+  </p:clrMapOvr>
+</p:sld>
+</file>
+
+<file path=ppt/slides/slide42.xml><?xml version="1.0" encoding="utf-8"?>
 <p:sld xmlns:a="http://schemas.openxmlformats.org/drawingml/2006/main" xmlns:p="http://schemas.openxmlformats.org/presentationml/2006/main" xmlns:r="http://schemas.openxmlformats.org/officeDocument/2006/relationships">
   <p:cSld>
     <p:spTree>
@@ -57815,7 +62847,7 @@
                 </a:solidFill>
                 <a:latin typeface="Arial"/>
               </a:rPr>
-              <a:t>40</a:t>
+              <a:t>42</a:t>
             </a:r>
             <a:r>
               <a:rPr sz="1050" b="0">
@@ -57824,7 +62856,7 @@
                 </a:solidFill>
                 <a:latin typeface="Arial"/>
               </a:rPr>
-              <a:t> / 44</a:t>
+              <a:t> / 46</a:t>
             </a:r>
           </a:p>
         </p:txBody>
@@ -57837,7 +62869,7 @@
 </p:sld>
 </file>
 
-<file path=ppt/slides/slide41.xml><?xml version="1.0" encoding="utf-8"?>
+<file path=ppt/slides/slide43.xml><?xml version="1.0" encoding="utf-8"?>
 <p:sld xmlns:a="http://schemas.openxmlformats.org/drawingml/2006/main" xmlns:p="http://schemas.openxmlformats.org/presentationml/2006/main" xmlns:r="http://schemas.openxmlformats.org/officeDocument/2006/relationships">
   <p:cSld>
     <p:spTree>
@@ -58242,7 +63274,7 @@
                 </a:solidFill>
                 <a:latin typeface="Arial"/>
               </a:rPr>
-              <a:t>41</a:t>
+              <a:t>43</a:t>
             </a:r>
             <a:r>
               <a:rPr sz="1050" b="0">
@@ -58251,7 +63283,7 @@
                 </a:solidFill>
                 <a:latin typeface="Arial"/>
               </a:rPr>
-              <a:t> / 44</a:t>
+              <a:t> / 46</a:t>
             </a:r>
           </a:p>
         </p:txBody>
@@ -59554,7 +64586,7 @@
 </p:sld>
 </file>
 
-<file path=ppt/slides/slide42.xml><?xml version="1.0" encoding="utf-8"?>
+<file path=ppt/slides/slide44.xml><?xml version="1.0" encoding="utf-8"?>
 <p:sld xmlns:a="http://schemas.openxmlformats.org/drawingml/2006/main" xmlns:p="http://schemas.openxmlformats.org/presentationml/2006/main" xmlns:r="http://schemas.openxmlformats.org/officeDocument/2006/relationships">
   <p:cSld>
     <p:spTree>
@@ -60022,7 +65054,7 @@
                 </a:solidFill>
                 <a:latin typeface="Arial"/>
               </a:rPr>
-              <a:t>42</a:t>
+              <a:t>44</a:t>
             </a:r>
             <a:r>
               <a:rPr sz="1050" b="0">
@@ -60031,7 +65063,7 @@
                 </a:solidFill>
                 <a:latin typeface="Arial"/>
               </a:rPr>
-              <a:t> / 44</a:t>
+              <a:t> / 46</a:t>
             </a:r>
           </a:p>
         </p:txBody>
@@ -60044,7 +65076,7 @@
 </p:sld>
 </file>
 
-<file path=ppt/slides/slide43.xml><?xml version="1.0" encoding="utf-8"?>
+<file path=ppt/slides/slide45.xml><?xml version="1.0" encoding="utf-8"?>
 <p:sld xmlns:a="http://schemas.openxmlformats.org/drawingml/2006/main" xmlns:p="http://schemas.openxmlformats.org/presentationml/2006/main" xmlns:r="http://schemas.openxmlformats.org/officeDocument/2006/relationships">
   <p:cSld>
     <p:spTree>
@@ -60449,7 +65481,7 @@
                 </a:solidFill>
                 <a:latin typeface="Arial"/>
               </a:rPr>
-              <a:t>43</a:t>
+              <a:t>45</a:t>
             </a:r>
             <a:r>
               <a:rPr sz="1050" b="0">
@@ -60458,7 +65490,7 @@
                 </a:solidFill>
                 <a:latin typeface="Arial"/>
               </a:rPr>
-              <a:t> / 44</a:t>
+              <a:t> / 46</a:t>
             </a:r>
           </a:p>
         </p:txBody>
@@ -61683,7 +66715,7 @@
 </p:sld>
 </file>
 
-<file path=ppt/slides/slide44.xml><?xml version="1.0" encoding="utf-8"?>
+<file path=ppt/slides/slide46.xml><?xml version="1.0" encoding="utf-8"?>
 <p:sld xmlns:a="http://schemas.openxmlformats.org/drawingml/2006/main" xmlns:p="http://schemas.openxmlformats.org/presentationml/2006/main" xmlns:r="http://schemas.openxmlformats.org/officeDocument/2006/relationships">
   <p:cSld>
     <p:spTree>
@@ -62606,7 +67638,7 @@
                 </a:solidFill>
                 <a:latin typeface="Arial"/>
               </a:rPr>
-              <a:t> / 44</a:t>
+              <a:t> / 46</a:t>
             </a:r>
           </a:p>
         </p:txBody>
@@ -63918,7 +68950,7 @@
                 </a:solidFill>
                 <a:latin typeface="Arial"/>
               </a:rPr>
-              <a:t> / 44</a:t>
+              <a:t> / 46</a:t>
             </a:r>
           </a:p>
         </p:txBody>
@@ -65384,7 +70416,7 @@
                 </a:solidFill>
                 <a:latin typeface="Arial"/>
               </a:rPr>
-              <a:t> / 44</a:t>
+              <a:t> / 46</a:t>
             </a:r>
           </a:p>
         </p:txBody>
@@ -65811,7 +70843,7 @@
                 </a:solidFill>
                 <a:latin typeface="Arial"/>
               </a:rPr>
-              <a:t> / 44</a:t>
+              <a:t> / 46</a:t>
             </a:r>
           </a:p>
         </p:txBody>
@@ -67598,7 +72630,7 @@
                 </a:solidFill>
                 <a:latin typeface="Arial"/>
               </a:rPr>
-              <a:t> / 44</a:t>
+              <a:t> / 46</a:t>
             </a:r>
           </a:p>
         </p:txBody>
